--- a/src/Mathe.pptx
+++ b/src/Mathe.pptx
@@ -4,22 +4,31 @@
   <p:sldMasterIdLst>
     <p:sldMasterId id="2147483660" r:id="rId1"/>
   </p:sldMasterIdLst>
+  <p:notesMasterIdLst>
+    <p:notesMasterId r:id="rId20"/>
+  </p:notesMasterIdLst>
   <p:handoutMasterIdLst>
-    <p:handoutMasterId r:id="rId14"/>
+    <p:handoutMasterId r:id="rId21"/>
   </p:handoutMasterIdLst>
   <p:sldIdLst>
     <p:sldId id="422" r:id="rId2"/>
     <p:sldId id="440" r:id="rId3"/>
-    <p:sldId id="429" r:id="rId4"/>
-    <p:sldId id="418" r:id="rId5"/>
-    <p:sldId id="435" r:id="rId6"/>
-    <p:sldId id="431" r:id="rId7"/>
-    <p:sldId id="288" r:id="rId8"/>
-    <p:sldId id="289" r:id="rId9"/>
-    <p:sldId id="436" r:id="rId10"/>
-    <p:sldId id="437" r:id="rId11"/>
-    <p:sldId id="438" r:id="rId12"/>
-    <p:sldId id="439" r:id="rId13"/>
+    <p:sldId id="447" r:id="rId4"/>
+    <p:sldId id="429" r:id="rId5"/>
+    <p:sldId id="418" r:id="rId6"/>
+    <p:sldId id="442" r:id="rId7"/>
+    <p:sldId id="445" r:id="rId8"/>
+    <p:sldId id="441" r:id="rId9"/>
+    <p:sldId id="444" r:id="rId10"/>
+    <p:sldId id="443" r:id="rId11"/>
+    <p:sldId id="435" r:id="rId12"/>
+    <p:sldId id="431" r:id="rId13"/>
+    <p:sldId id="288" r:id="rId14"/>
+    <p:sldId id="289" r:id="rId15"/>
+    <p:sldId id="436" r:id="rId16"/>
+    <p:sldId id="437" r:id="rId17"/>
+    <p:sldId id="438" r:id="rId18"/>
+    <p:sldId id="439" r:id="rId19"/>
   </p:sldIdLst>
   <p:sldSz cx="12192000" cy="6858000"/>
   <p:notesSz cx="6858000" cy="9144000"/>
@@ -229,7 +238,7 @@
           <a:p>
             <a:fld id="{7B7CABDD-8B3F-45C4-A152-E69BA35442ED}" type="datetimeFigureOut">
               <a:rPr lang="de-DE" smtClean="0"/>
-              <a:t>26.09.2025</a:t>
+              <a:t>14.11.2025</a:t>
             </a:fld>
             <a:endParaRPr lang="de-DE"/>
           </a:p>
@@ -322,6 +331,440 @@
   </p:cSld>
   <p:clrMap bg1="lt1" tx1="dk1" bg2="lt2" tx2="dk2" accent1="accent1" accent2="accent2" accent3="accent3" accent4="accent4" accent5="accent5" accent6="accent6" hlink="hlink" folHlink="folHlink"/>
 </p:handoutMaster>
+</file>
+
+<file path=ppt/notesMasters/notesMaster1.xml><?xml version="1.0" encoding="utf-8"?>
+<p:notesMaster xmlns:a="http://schemas.openxmlformats.org/drawingml/2006/main" xmlns:r="http://schemas.openxmlformats.org/officeDocument/2006/relationships" xmlns:p="http://schemas.openxmlformats.org/presentationml/2006/main">
+  <p:cSld>
+    <p:bg>
+      <p:bgRef idx="1001">
+        <a:schemeClr val="bg1"/>
+      </p:bgRef>
+    </p:bg>
+    <p:spTree>
+      <p:nvGrpSpPr>
+        <p:cNvPr id="1" name=""/>
+        <p:cNvGrpSpPr/>
+        <p:nvPr/>
+      </p:nvGrpSpPr>
+      <p:grpSpPr>
+        <a:xfrm>
+          <a:off x="0" y="0"/>
+          <a:ext cx="0" cy="0"/>
+          <a:chOff x="0" y="0"/>
+          <a:chExt cx="0" cy="0"/>
+        </a:xfrm>
+      </p:grpSpPr>
+      <p:sp>
+        <p:nvSpPr>
+          <p:cNvPr id="2" name="Header Placeholder 1"/>
+          <p:cNvSpPr>
+            <a:spLocks noGrp="1"/>
+          </p:cNvSpPr>
+          <p:nvPr>
+            <p:ph type="hdr" sz="quarter"/>
+          </p:nvPr>
+        </p:nvSpPr>
+        <p:spPr>
+          <a:xfrm>
+            <a:off x="0" y="0"/>
+            <a:ext cx="2971800" cy="458788"/>
+          </a:xfrm>
+          <a:prstGeom prst="rect">
+            <a:avLst/>
+          </a:prstGeom>
+        </p:spPr>
+        <p:txBody>
+          <a:bodyPr vert="horz" lIns="91440" tIns="45720" rIns="91440" bIns="45720" rtlCol="0"/>
+          <a:lstStyle>
+            <a:lvl1pPr algn="l">
+              <a:defRPr sz="1200"/>
+            </a:lvl1pPr>
+          </a:lstStyle>
+          <a:p>
+            <a:endParaRPr lang="de-DE"/>
+          </a:p>
+        </p:txBody>
+      </p:sp>
+      <p:sp>
+        <p:nvSpPr>
+          <p:cNvPr id="3" name="Date Placeholder 2"/>
+          <p:cNvSpPr>
+            <a:spLocks noGrp="1"/>
+          </p:cNvSpPr>
+          <p:nvPr>
+            <p:ph type="dt" idx="1"/>
+          </p:nvPr>
+        </p:nvSpPr>
+        <p:spPr>
+          <a:xfrm>
+            <a:off x="3884613" y="0"/>
+            <a:ext cx="2971800" cy="458788"/>
+          </a:xfrm>
+          <a:prstGeom prst="rect">
+            <a:avLst/>
+          </a:prstGeom>
+        </p:spPr>
+        <p:txBody>
+          <a:bodyPr vert="horz" lIns="91440" tIns="45720" rIns="91440" bIns="45720" rtlCol="0"/>
+          <a:lstStyle>
+            <a:lvl1pPr algn="r">
+              <a:defRPr sz="1200"/>
+            </a:lvl1pPr>
+          </a:lstStyle>
+          <a:p>
+            <a:fld id="{A6BAE113-F8CC-4FE9-AA7C-5EEC3325EFF1}" type="datetimeFigureOut">
+              <a:rPr lang="de-DE" smtClean="0"/>
+              <a:t>14.11.2025</a:t>
+            </a:fld>
+            <a:endParaRPr lang="de-DE"/>
+          </a:p>
+        </p:txBody>
+      </p:sp>
+      <p:sp>
+        <p:nvSpPr>
+          <p:cNvPr id="4" name="Slide Image Placeholder 3"/>
+          <p:cNvSpPr>
+            <a:spLocks noGrp="1" noRot="1" noChangeAspect="1"/>
+          </p:cNvSpPr>
+          <p:nvPr>
+            <p:ph type="sldImg" idx="2"/>
+          </p:nvPr>
+        </p:nvSpPr>
+        <p:spPr>
+          <a:xfrm>
+            <a:off x="685800" y="1143000"/>
+            <a:ext cx="5486400" cy="3086100"/>
+          </a:xfrm>
+          <a:prstGeom prst="rect">
+            <a:avLst/>
+          </a:prstGeom>
+          <a:noFill/>
+          <a:ln w="12700">
+            <a:solidFill>
+              <a:prstClr val="black"/>
+            </a:solidFill>
+          </a:ln>
+        </p:spPr>
+        <p:txBody>
+          <a:bodyPr vert="horz" lIns="91440" tIns="45720" rIns="91440" bIns="45720" rtlCol="0" anchor="ctr"/>
+          <a:lstStyle/>
+          <a:p>
+            <a:endParaRPr lang="de-DE"/>
+          </a:p>
+        </p:txBody>
+      </p:sp>
+      <p:sp>
+        <p:nvSpPr>
+          <p:cNvPr id="5" name="Notes Placeholder 4"/>
+          <p:cNvSpPr>
+            <a:spLocks noGrp="1"/>
+          </p:cNvSpPr>
+          <p:nvPr>
+            <p:ph type="body" sz="quarter" idx="3"/>
+          </p:nvPr>
+        </p:nvSpPr>
+        <p:spPr>
+          <a:xfrm>
+            <a:off x="685800" y="4400550"/>
+            <a:ext cx="5486400" cy="3600450"/>
+          </a:xfrm>
+          <a:prstGeom prst="rect">
+            <a:avLst/>
+          </a:prstGeom>
+        </p:spPr>
+        <p:txBody>
+          <a:bodyPr vert="horz" lIns="91440" tIns="45720" rIns="91440" bIns="45720" rtlCol="0"/>
+          <a:lstStyle/>
+          <a:p>
+            <a:pPr lvl="0"/>
+            <a:r>
+              <a:rPr lang="en-US"/>
+              <a:t>Click to edit Master text styles</a:t>
+            </a:r>
+          </a:p>
+          <a:p>
+            <a:pPr lvl="1"/>
+            <a:r>
+              <a:rPr lang="en-US"/>
+              <a:t>Second level</a:t>
+            </a:r>
+          </a:p>
+          <a:p>
+            <a:pPr lvl="2"/>
+            <a:r>
+              <a:rPr lang="en-US"/>
+              <a:t>Third level</a:t>
+            </a:r>
+          </a:p>
+          <a:p>
+            <a:pPr lvl="3"/>
+            <a:r>
+              <a:rPr lang="en-US"/>
+              <a:t>Fourth level</a:t>
+            </a:r>
+          </a:p>
+          <a:p>
+            <a:pPr lvl="4"/>
+            <a:r>
+              <a:rPr lang="en-US"/>
+              <a:t>Fifth level</a:t>
+            </a:r>
+            <a:endParaRPr lang="de-DE"/>
+          </a:p>
+        </p:txBody>
+      </p:sp>
+      <p:sp>
+        <p:nvSpPr>
+          <p:cNvPr id="6" name="Footer Placeholder 5"/>
+          <p:cNvSpPr>
+            <a:spLocks noGrp="1"/>
+          </p:cNvSpPr>
+          <p:nvPr>
+            <p:ph type="ftr" sz="quarter" idx="4"/>
+          </p:nvPr>
+        </p:nvSpPr>
+        <p:spPr>
+          <a:xfrm>
+            <a:off x="0" y="8685213"/>
+            <a:ext cx="2971800" cy="458787"/>
+          </a:xfrm>
+          <a:prstGeom prst="rect">
+            <a:avLst/>
+          </a:prstGeom>
+        </p:spPr>
+        <p:txBody>
+          <a:bodyPr vert="horz" lIns="91440" tIns="45720" rIns="91440" bIns="45720" rtlCol="0" anchor="b"/>
+          <a:lstStyle>
+            <a:lvl1pPr algn="l">
+              <a:defRPr sz="1200"/>
+            </a:lvl1pPr>
+          </a:lstStyle>
+          <a:p>
+            <a:endParaRPr lang="de-DE"/>
+          </a:p>
+        </p:txBody>
+      </p:sp>
+      <p:sp>
+        <p:nvSpPr>
+          <p:cNvPr id="7" name="Slide Number Placeholder 6"/>
+          <p:cNvSpPr>
+            <a:spLocks noGrp="1"/>
+          </p:cNvSpPr>
+          <p:nvPr>
+            <p:ph type="sldNum" sz="quarter" idx="5"/>
+          </p:nvPr>
+        </p:nvSpPr>
+        <p:spPr>
+          <a:xfrm>
+            <a:off x="3884613" y="8685213"/>
+            <a:ext cx="2971800" cy="458787"/>
+          </a:xfrm>
+          <a:prstGeom prst="rect">
+            <a:avLst/>
+          </a:prstGeom>
+        </p:spPr>
+        <p:txBody>
+          <a:bodyPr vert="horz" lIns="91440" tIns="45720" rIns="91440" bIns="45720" rtlCol="0" anchor="b"/>
+          <a:lstStyle>
+            <a:lvl1pPr algn="r">
+              <a:defRPr sz="1200"/>
+            </a:lvl1pPr>
+          </a:lstStyle>
+          <a:p>
+            <a:fld id="{0FEC2603-1279-4E54-A1F7-91E91D6C0210}" type="slidenum">
+              <a:rPr lang="de-DE" smtClean="0"/>
+              <a:t>‹#›</a:t>
+            </a:fld>
+            <a:endParaRPr lang="de-DE"/>
+          </a:p>
+        </p:txBody>
+      </p:sp>
+    </p:spTree>
+    <p:extLst>
+      <p:ext uri="{BB962C8B-B14F-4D97-AF65-F5344CB8AC3E}">
+        <p14:creationId xmlns:p14="http://schemas.microsoft.com/office/powerpoint/2010/main" val="357680509"/>
+      </p:ext>
+    </p:extLst>
+  </p:cSld>
+  <p:clrMap bg1="lt1" tx1="dk1" bg2="lt2" tx2="dk2" accent1="accent1" accent2="accent2" accent3="accent3" accent4="accent4" accent5="accent5" accent6="accent6" hlink="hlink" folHlink="folHlink"/>
+  <p:notesStyle>
+    <a:lvl1pPr marL="0" algn="l" defTabSz="914400" rtl="0" eaLnBrk="1" latinLnBrk="0" hangingPunct="1">
+      <a:defRPr sz="1200" kern="1200">
+        <a:solidFill>
+          <a:schemeClr val="tx1"/>
+        </a:solidFill>
+        <a:latin typeface="+mn-lt"/>
+        <a:ea typeface="+mn-ea"/>
+        <a:cs typeface="+mn-cs"/>
+      </a:defRPr>
+    </a:lvl1pPr>
+    <a:lvl2pPr marL="457200" algn="l" defTabSz="914400" rtl="0" eaLnBrk="1" latinLnBrk="0" hangingPunct="1">
+      <a:defRPr sz="1200" kern="1200">
+        <a:solidFill>
+          <a:schemeClr val="tx1"/>
+        </a:solidFill>
+        <a:latin typeface="+mn-lt"/>
+        <a:ea typeface="+mn-ea"/>
+        <a:cs typeface="+mn-cs"/>
+      </a:defRPr>
+    </a:lvl2pPr>
+    <a:lvl3pPr marL="914400" algn="l" defTabSz="914400" rtl="0" eaLnBrk="1" latinLnBrk="0" hangingPunct="1">
+      <a:defRPr sz="1200" kern="1200">
+        <a:solidFill>
+          <a:schemeClr val="tx1"/>
+        </a:solidFill>
+        <a:latin typeface="+mn-lt"/>
+        <a:ea typeface="+mn-ea"/>
+        <a:cs typeface="+mn-cs"/>
+      </a:defRPr>
+    </a:lvl3pPr>
+    <a:lvl4pPr marL="1371600" algn="l" defTabSz="914400" rtl="0" eaLnBrk="1" latinLnBrk="0" hangingPunct="1">
+      <a:defRPr sz="1200" kern="1200">
+        <a:solidFill>
+          <a:schemeClr val="tx1"/>
+        </a:solidFill>
+        <a:latin typeface="+mn-lt"/>
+        <a:ea typeface="+mn-ea"/>
+        <a:cs typeface="+mn-cs"/>
+      </a:defRPr>
+    </a:lvl4pPr>
+    <a:lvl5pPr marL="1828800" algn="l" defTabSz="914400" rtl="0" eaLnBrk="1" latinLnBrk="0" hangingPunct="1">
+      <a:defRPr sz="1200" kern="1200">
+        <a:solidFill>
+          <a:schemeClr val="tx1"/>
+        </a:solidFill>
+        <a:latin typeface="+mn-lt"/>
+        <a:ea typeface="+mn-ea"/>
+        <a:cs typeface="+mn-cs"/>
+      </a:defRPr>
+    </a:lvl5pPr>
+    <a:lvl6pPr marL="2286000" algn="l" defTabSz="914400" rtl="0" eaLnBrk="1" latinLnBrk="0" hangingPunct="1">
+      <a:defRPr sz="1200" kern="1200">
+        <a:solidFill>
+          <a:schemeClr val="tx1"/>
+        </a:solidFill>
+        <a:latin typeface="+mn-lt"/>
+        <a:ea typeface="+mn-ea"/>
+        <a:cs typeface="+mn-cs"/>
+      </a:defRPr>
+    </a:lvl6pPr>
+    <a:lvl7pPr marL="2743200" algn="l" defTabSz="914400" rtl="0" eaLnBrk="1" latinLnBrk="0" hangingPunct="1">
+      <a:defRPr sz="1200" kern="1200">
+        <a:solidFill>
+          <a:schemeClr val="tx1"/>
+        </a:solidFill>
+        <a:latin typeface="+mn-lt"/>
+        <a:ea typeface="+mn-ea"/>
+        <a:cs typeface="+mn-cs"/>
+      </a:defRPr>
+    </a:lvl7pPr>
+    <a:lvl8pPr marL="3200400" algn="l" defTabSz="914400" rtl="0" eaLnBrk="1" latinLnBrk="0" hangingPunct="1">
+      <a:defRPr sz="1200" kern="1200">
+        <a:solidFill>
+          <a:schemeClr val="tx1"/>
+        </a:solidFill>
+        <a:latin typeface="+mn-lt"/>
+        <a:ea typeface="+mn-ea"/>
+        <a:cs typeface="+mn-cs"/>
+      </a:defRPr>
+    </a:lvl8pPr>
+    <a:lvl9pPr marL="3657600" algn="l" defTabSz="914400" rtl="0" eaLnBrk="1" latinLnBrk="0" hangingPunct="1">
+      <a:defRPr sz="1200" kern="1200">
+        <a:solidFill>
+          <a:schemeClr val="tx1"/>
+        </a:solidFill>
+        <a:latin typeface="+mn-lt"/>
+        <a:ea typeface="+mn-ea"/>
+        <a:cs typeface="+mn-cs"/>
+      </a:defRPr>
+    </a:lvl9pPr>
+  </p:notesStyle>
+</p:notesMaster>
+</file>
+
+<file path=ppt/notesSlides/notesSlide1.xml><?xml version="1.0" encoding="utf-8"?>
+<p:notes xmlns:a="http://schemas.openxmlformats.org/drawingml/2006/main" xmlns:r="http://schemas.openxmlformats.org/officeDocument/2006/relationships" xmlns:p="http://schemas.openxmlformats.org/presentationml/2006/main">
+  <p:cSld>
+    <p:spTree>
+      <p:nvGrpSpPr>
+        <p:cNvPr id="1" name=""/>
+        <p:cNvGrpSpPr/>
+        <p:nvPr/>
+      </p:nvGrpSpPr>
+      <p:grpSpPr>
+        <a:xfrm>
+          <a:off x="0" y="0"/>
+          <a:ext cx="0" cy="0"/>
+          <a:chOff x="0" y="0"/>
+          <a:chExt cx="0" cy="0"/>
+        </a:xfrm>
+      </p:grpSpPr>
+      <p:sp>
+        <p:nvSpPr>
+          <p:cNvPr id="2" name="Slide Image Placeholder 1"/>
+          <p:cNvSpPr>
+            <a:spLocks noGrp="1" noRot="1" noChangeAspect="1"/>
+          </p:cNvSpPr>
+          <p:nvPr>
+            <p:ph type="sldImg"/>
+          </p:nvPr>
+        </p:nvSpPr>
+        <p:spPr/>
+      </p:sp>
+      <p:sp>
+        <p:nvSpPr>
+          <p:cNvPr id="3" name="Notes Placeholder 2"/>
+          <p:cNvSpPr>
+            <a:spLocks noGrp="1"/>
+          </p:cNvSpPr>
+          <p:nvPr>
+            <p:ph type="body" idx="1"/>
+          </p:nvPr>
+        </p:nvSpPr>
+        <p:spPr/>
+        <p:txBody>
+          <a:bodyPr/>
+          <a:lstStyle/>
+          <a:p>
+            <a:endParaRPr lang="de-DE" dirty="0"/>
+          </a:p>
+        </p:txBody>
+      </p:sp>
+      <p:sp>
+        <p:nvSpPr>
+          <p:cNvPr id="4" name="Slide Number Placeholder 3"/>
+          <p:cNvSpPr>
+            <a:spLocks noGrp="1"/>
+          </p:cNvSpPr>
+          <p:nvPr>
+            <p:ph type="sldNum" sz="quarter" idx="5"/>
+          </p:nvPr>
+        </p:nvSpPr>
+        <p:spPr/>
+        <p:txBody>
+          <a:bodyPr/>
+          <a:lstStyle/>
+          <a:p>
+            <a:fld id="{0FEC2603-1279-4E54-A1F7-91E91D6C0210}" type="slidenum">
+              <a:rPr lang="de-DE" smtClean="0"/>
+              <a:t>2</a:t>
+            </a:fld>
+            <a:endParaRPr lang="de-DE"/>
+          </a:p>
+        </p:txBody>
+      </p:sp>
+    </p:spTree>
+    <p:extLst>
+      <p:ext uri="{BB962C8B-B14F-4D97-AF65-F5344CB8AC3E}">
+        <p14:creationId xmlns:p14="http://schemas.microsoft.com/office/powerpoint/2010/main" val="3319898302"/>
+      </p:ext>
+    </p:extLst>
+  </p:cSld>
+  <p:clrMapOvr>
+    <a:masterClrMapping/>
+  </p:clrMapOvr>
+</p:notes>
 </file>
 
 <file path=ppt/slideLayouts/slideLayout1.xml><?xml version="1.0" encoding="utf-8"?>
@@ -455,7 +898,7 @@
           <a:p>
             <a:fld id="{7F74B683-5B55-47E9-B45C-EB67E1285507}" type="datetimeFigureOut">
               <a:rPr lang="de-DE" smtClean="0"/>
-              <a:t>26.09.2025</a:t>
+              <a:t>14.11.2025</a:t>
             </a:fld>
             <a:endParaRPr lang="de-DE"/>
           </a:p>
@@ -625,7 +1068,7 @@
           <a:p>
             <a:fld id="{7F74B683-5B55-47E9-B45C-EB67E1285507}" type="datetimeFigureOut">
               <a:rPr lang="de-DE" smtClean="0"/>
-              <a:t>26.09.2025</a:t>
+              <a:t>14.11.2025</a:t>
             </a:fld>
             <a:endParaRPr lang="de-DE"/>
           </a:p>
@@ -805,7 +1248,7 @@
           <a:p>
             <a:fld id="{7F74B683-5B55-47E9-B45C-EB67E1285507}" type="datetimeFigureOut">
               <a:rPr lang="de-DE" smtClean="0"/>
-              <a:t>26.09.2025</a:t>
+              <a:t>14.11.2025</a:t>
             </a:fld>
             <a:endParaRPr lang="de-DE"/>
           </a:p>
@@ -983,7 +1426,7 @@
           <a:p>
             <a:fld id="{7F74B683-5B55-47E9-B45C-EB67E1285507}" type="datetimeFigureOut">
               <a:rPr lang="de-DE" smtClean="0"/>
-              <a:t>26.09.2025</a:t>
+              <a:t>14.11.2025</a:t>
             </a:fld>
             <a:endParaRPr lang="de-DE"/>
           </a:p>
@@ -1229,7 +1672,7 @@
           <a:p>
             <a:fld id="{7F74B683-5B55-47E9-B45C-EB67E1285507}" type="datetimeFigureOut">
               <a:rPr lang="de-DE" smtClean="0"/>
-              <a:t>26.09.2025</a:t>
+              <a:t>14.11.2025</a:t>
             </a:fld>
             <a:endParaRPr lang="de-DE"/>
           </a:p>
@@ -1461,7 +1904,7 @@
           <a:p>
             <a:fld id="{7F74B683-5B55-47E9-B45C-EB67E1285507}" type="datetimeFigureOut">
               <a:rPr lang="de-DE" smtClean="0"/>
-              <a:t>26.09.2025</a:t>
+              <a:t>14.11.2025</a:t>
             </a:fld>
             <a:endParaRPr lang="de-DE"/>
           </a:p>
@@ -1828,7 +2271,7 @@
           <a:p>
             <a:fld id="{7F74B683-5B55-47E9-B45C-EB67E1285507}" type="datetimeFigureOut">
               <a:rPr lang="de-DE" smtClean="0"/>
-              <a:t>26.09.2025</a:t>
+              <a:t>14.11.2025</a:t>
             </a:fld>
             <a:endParaRPr lang="de-DE"/>
           </a:p>
@@ -1946,7 +2389,7 @@
           <a:p>
             <a:fld id="{7F74B683-5B55-47E9-B45C-EB67E1285507}" type="datetimeFigureOut">
               <a:rPr lang="de-DE" smtClean="0"/>
-              <a:t>26.09.2025</a:t>
+              <a:t>14.11.2025</a:t>
             </a:fld>
             <a:endParaRPr lang="de-DE"/>
           </a:p>
@@ -2041,7 +2484,7 @@
           <a:p>
             <a:fld id="{7F74B683-5B55-47E9-B45C-EB67E1285507}" type="datetimeFigureOut">
               <a:rPr lang="de-DE" smtClean="0"/>
-              <a:t>26.09.2025</a:t>
+              <a:t>14.11.2025</a:t>
             </a:fld>
             <a:endParaRPr lang="de-DE"/>
           </a:p>
@@ -2318,7 +2761,7 @@
           <a:p>
             <a:fld id="{7F74B683-5B55-47E9-B45C-EB67E1285507}" type="datetimeFigureOut">
               <a:rPr lang="de-DE" smtClean="0"/>
-              <a:t>26.09.2025</a:t>
+              <a:t>14.11.2025</a:t>
             </a:fld>
             <a:endParaRPr lang="de-DE"/>
           </a:p>
@@ -2575,7 +3018,7 @@
           <a:p>
             <a:fld id="{7F74B683-5B55-47E9-B45C-EB67E1285507}" type="datetimeFigureOut">
               <a:rPr lang="de-DE" smtClean="0"/>
-              <a:t>26.09.2025</a:t>
+              <a:t>14.11.2025</a:t>
             </a:fld>
             <a:endParaRPr lang="de-DE"/>
           </a:p>
@@ -2788,7 +3231,7 @@
           <a:p>
             <a:fld id="{7F74B683-5B55-47E9-B45C-EB67E1285507}" type="datetimeFigureOut">
               <a:rPr lang="de-DE" smtClean="0"/>
-              <a:t>26.09.2025</a:t>
+              <a:t>14.11.2025</a:t>
             </a:fld>
             <a:endParaRPr lang="de-DE"/>
           </a:p>
@@ -5620,7 +6063,7 @@
           <p:cNvPr id="2" name="Title 1">
             <a:extLst>
               <a:ext uri="{FF2B5EF4-FFF2-40B4-BE49-F238E27FC236}">
-                <a16:creationId xmlns:a16="http://schemas.microsoft.com/office/drawing/2014/main" id="{A582F0F0-238D-4BD6-B0A8-74A8400DCACC}"/>
+                <a16:creationId xmlns:a16="http://schemas.microsoft.com/office/drawing/2014/main" id="{ED29E101-26EF-461B-9DF7-0B9B1EB994F5}"/>
               </a:ext>
             </a:extLst>
           </p:cNvPr>
@@ -5638,7 +6081,7 @@
           <a:p>
             <a:r>
               <a:rPr lang="de-DE" dirty="0"/>
-              <a:t>Winkelrechnung</a:t>
+              <a:t>Graphen</a:t>
             </a:r>
           </a:p>
         </p:txBody>
@@ -5648,7 +6091,7 @@
           <p:cNvPr id="3" name="Content Placeholder 2">
             <a:extLst>
               <a:ext uri="{FF2B5EF4-FFF2-40B4-BE49-F238E27FC236}">
-                <a16:creationId xmlns:a16="http://schemas.microsoft.com/office/drawing/2014/main" id="{7134C011-6EFE-499A-A593-A78053BEE598}"/>
+                <a16:creationId xmlns:a16="http://schemas.microsoft.com/office/drawing/2014/main" id="{9CD30F3A-EBEA-42A0-A91E-330355B70A93}"/>
               </a:ext>
             </a:extLst>
           </p:cNvPr>
@@ -5671,7 +6114,7 @@
     </p:spTree>
     <p:extLst>
       <p:ext uri="{BB962C8B-B14F-4D97-AF65-F5344CB8AC3E}">
-        <p14:creationId xmlns:p14="http://schemas.microsoft.com/office/powerpoint/2010/main" val="695739511"/>
+        <p14:creationId xmlns:p14="http://schemas.microsoft.com/office/powerpoint/2010/main" val="940646476"/>
       </p:ext>
     </p:extLst>
   </p:cSld>
@@ -5703,6 +6146,542 @@
           <p:cNvPr id="2" name="Title 1">
             <a:extLst>
               <a:ext uri="{FF2B5EF4-FFF2-40B4-BE49-F238E27FC236}">
+                <a16:creationId xmlns:a16="http://schemas.microsoft.com/office/drawing/2014/main" id="{42DC75CD-4445-4A15-B7F6-B39F21B5C804}"/>
+              </a:ext>
+            </a:extLst>
+          </p:cNvPr>
+          <p:cNvSpPr>
+            <a:spLocks noGrp="1"/>
+          </p:cNvSpPr>
+          <p:nvPr>
+            <p:ph type="title"/>
+          </p:nvPr>
+        </p:nvSpPr>
+        <p:spPr/>
+        <p:txBody>
+          <a:bodyPr/>
+          <a:lstStyle/>
+          <a:p>
+            <a:r>
+              <a:rPr lang="de-DE" dirty="0"/>
+              <a:t>Abbildungen</a:t>
+            </a:r>
+          </a:p>
+        </p:txBody>
+      </p:sp>
+      <p:sp>
+        <p:nvSpPr>
+          <p:cNvPr id="3" name="Content Placeholder 2">
+            <a:extLst>
+              <a:ext uri="{FF2B5EF4-FFF2-40B4-BE49-F238E27FC236}">
+                <a16:creationId xmlns:a16="http://schemas.microsoft.com/office/drawing/2014/main" id="{F5A1C33F-7E13-4458-854B-7C2F4AABE23E}"/>
+              </a:ext>
+            </a:extLst>
+          </p:cNvPr>
+          <p:cNvSpPr>
+            <a:spLocks noGrp="1"/>
+          </p:cNvSpPr>
+          <p:nvPr>
+            <p:ph idx="1"/>
+          </p:nvPr>
+        </p:nvSpPr>
+        <p:spPr/>
+        <p:txBody>
+          <a:bodyPr/>
+          <a:lstStyle/>
+          <a:p>
+            <a:pPr marL="0" indent="0">
+              <a:buNone/>
+            </a:pPr>
+            <a:r>
+              <a:rPr lang="de-DE" dirty="0"/>
+              <a:t>…</a:t>
+            </a:r>
+          </a:p>
+        </p:txBody>
+      </p:sp>
+    </p:spTree>
+    <p:extLst>
+      <p:ext uri="{BB962C8B-B14F-4D97-AF65-F5344CB8AC3E}">
+        <p14:creationId xmlns:p14="http://schemas.microsoft.com/office/powerpoint/2010/main" val="2431755781"/>
+      </p:ext>
+    </p:extLst>
+  </p:cSld>
+  <p:clrMapOvr>
+    <a:masterClrMapping/>
+  </p:clrMapOvr>
+</p:sld>
+</file>
+
+<file path=ppt/slides/slide12.xml><?xml version="1.0" encoding="utf-8"?>
+<p:sld xmlns:a="http://schemas.openxmlformats.org/drawingml/2006/main" xmlns:r="http://schemas.openxmlformats.org/officeDocument/2006/relationships" xmlns:p="http://schemas.openxmlformats.org/presentationml/2006/main">
+  <p:cSld>
+    <p:spTree>
+      <p:nvGrpSpPr>
+        <p:cNvPr id="1" name=""/>
+        <p:cNvGrpSpPr/>
+        <p:nvPr/>
+      </p:nvGrpSpPr>
+      <p:grpSpPr>
+        <a:xfrm>
+          <a:off x="0" y="0"/>
+          <a:ext cx="0" cy="0"/>
+          <a:chOff x="0" y="0"/>
+          <a:chExt cx="0" cy="0"/>
+        </a:xfrm>
+      </p:grpSpPr>
+      <p:sp>
+        <p:nvSpPr>
+          <p:cNvPr id="2" name="Title 1">
+            <a:extLst>
+              <a:ext uri="{FF2B5EF4-FFF2-40B4-BE49-F238E27FC236}">
+                <a16:creationId xmlns:a16="http://schemas.microsoft.com/office/drawing/2014/main" id="{5B4199F9-3DD9-4E02-AEC5-0533753A5FED}"/>
+              </a:ext>
+            </a:extLst>
+          </p:cNvPr>
+          <p:cNvSpPr>
+            <a:spLocks noGrp="1"/>
+          </p:cNvSpPr>
+          <p:nvPr>
+            <p:ph type="title"/>
+          </p:nvPr>
+        </p:nvSpPr>
+        <p:spPr/>
+        <p:txBody>
+          <a:bodyPr/>
+          <a:lstStyle/>
+          <a:p>
+            <a:r>
+              <a:rPr lang="de-DE" dirty="0">
+                <a:solidFill>
+                  <a:srgbClr val="F2F5FA"/>
+                </a:solidFill>
+              </a:rPr>
+              <a:t>Induktion</a:t>
+            </a:r>
+          </a:p>
+        </p:txBody>
+      </p:sp>
+      <p:sp>
+        <p:nvSpPr>
+          <p:cNvPr id="3" name="Content Placeholder 2">
+            <a:extLst>
+              <a:ext uri="{FF2B5EF4-FFF2-40B4-BE49-F238E27FC236}">
+                <a16:creationId xmlns:a16="http://schemas.microsoft.com/office/drawing/2014/main" id="{3CAEE54A-741D-4374-B20B-25EB1C6A68A5}"/>
+              </a:ext>
+            </a:extLst>
+          </p:cNvPr>
+          <p:cNvSpPr>
+            <a:spLocks noGrp="1"/>
+          </p:cNvSpPr>
+          <p:nvPr>
+            <p:ph idx="1"/>
+          </p:nvPr>
+        </p:nvSpPr>
+        <p:spPr/>
+        <p:txBody>
+          <a:bodyPr/>
+          <a:lstStyle/>
+          <a:p>
+            <a:endParaRPr lang="de-DE" dirty="0"/>
+          </a:p>
+        </p:txBody>
+      </p:sp>
+    </p:spTree>
+    <p:extLst>
+      <p:ext uri="{BB962C8B-B14F-4D97-AF65-F5344CB8AC3E}">
+        <p14:creationId xmlns:p14="http://schemas.microsoft.com/office/powerpoint/2010/main" val="1101259169"/>
+      </p:ext>
+    </p:extLst>
+  </p:cSld>
+  <p:clrMapOvr>
+    <a:masterClrMapping/>
+  </p:clrMapOvr>
+</p:sld>
+</file>
+
+<file path=ppt/slides/slide13.xml><?xml version="1.0" encoding="utf-8"?>
+<p:sld xmlns:a="http://schemas.openxmlformats.org/drawingml/2006/main" xmlns:r="http://schemas.openxmlformats.org/officeDocument/2006/relationships" xmlns:p="http://schemas.openxmlformats.org/presentationml/2006/main">
+  <p:cSld>
+    <p:spTree>
+      <p:nvGrpSpPr>
+        <p:cNvPr id="1" name=""/>
+        <p:cNvGrpSpPr/>
+        <p:nvPr/>
+      </p:nvGrpSpPr>
+      <p:grpSpPr>
+        <a:xfrm>
+          <a:off x="0" y="0"/>
+          <a:ext cx="0" cy="0"/>
+          <a:chOff x="0" y="0"/>
+          <a:chExt cx="0" cy="0"/>
+        </a:xfrm>
+      </p:grpSpPr>
+      <p:pic>
+        <p:nvPicPr>
+          <p:cNvPr id="9" name="Grafik 8">
+            <a:extLst>
+              <a:ext uri="{FF2B5EF4-FFF2-40B4-BE49-F238E27FC236}">
+                <a16:creationId xmlns:a16="http://schemas.microsoft.com/office/drawing/2014/main" id="{3C690436-4BA1-4750-BD74-C63646866307}"/>
+              </a:ext>
+            </a:extLst>
+          </p:cNvPr>
+          <p:cNvPicPr>
+            <a:picLocks noChangeAspect="1"/>
+          </p:cNvPicPr>
+          <p:nvPr/>
+        </p:nvPicPr>
+        <p:blipFill rotWithShape="1">
+          <a:blip r:embed="rId2"/>
+          <a:srcRect t="188" r="2036"/>
+          <a:stretch/>
+        </p:blipFill>
+        <p:spPr>
+          <a:xfrm>
+            <a:off x="0" y="0"/>
+            <a:ext cx="12192001" cy="6858000"/>
+          </a:xfrm>
+          <a:prstGeom prst="rect">
+            <a:avLst/>
+          </a:prstGeom>
+        </p:spPr>
+      </p:pic>
+      <p:sp>
+        <p:nvSpPr>
+          <p:cNvPr id="2" name="Titel 1">
+            <a:extLst>
+              <a:ext uri="{FF2B5EF4-FFF2-40B4-BE49-F238E27FC236}">
+                <a16:creationId xmlns:a16="http://schemas.microsoft.com/office/drawing/2014/main" id="{2AB5A28A-27E3-430A-A012-B6EE913EA5D7}"/>
+              </a:ext>
+            </a:extLst>
+          </p:cNvPr>
+          <p:cNvSpPr>
+            <a:spLocks noGrp="1"/>
+          </p:cNvSpPr>
+          <p:nvPr>
+            <p:ph type="title"/>
+          </p:nvPr>
+        </p:nvSpPr>
+        <p:spPr>
+          <a:xfrm>
+            <a:off x="7340600" y="146050"/>
+            <a:ext cx="4762500" cy="1093788"/>
+          </a:xfrm>
+        </p:spPr>
+        <p:txBody>
+          <a:bodyPr/>
+          <a:lstStyle/>
+          <a:p>
+            <a:pPr algn="r"/>
+            <a:r>
+              <a:rPr lang="de-DE" b="1" dirty="0">
+                <a:solidFill>
+                  <a:schemeClr val="bg1"/>
+                </a:solidFill>
+              </a:rPr>
+              <a:t>Koordinatensysteme</a:t>
+            </a:r>
+          </a:p>
+        </p:txBody>
+      </p:sp>
+    </p:spTree>
+    <p:extLst>
+      <p:ext uri="{BB962C8B-B14F-4D97-AF65-F5344CB8AC3E}">
+        <p14:creationId xmlns:p14="http://schemas.microsoft.com/office/powerpoint/2010/main" val="2314456240"/>
+      </p:ext>
+    </p:extLst>
+  </p:cSld>
+  <p:clrMapOvr>
+    <a:masterClrMapping/>
+  </p:clrMapOvr>
+</p:sld>
+</file>
+
+<file path=ppt/slides/slide14.xml><?xml version="1.0" encoding="utf-8"?>
+<p:sld xmlns:a="http://schemas.openxmlformats.org/drawingml/2006/main" xmlns:r="http://schemas.openxmlformats.org/officeDocument/2006/relationships" xmlns:p="http://schemas.openxmlformats.org/presentationml/2006/main">
+  <p:cSld>
+    <p:spTree>
+      <p:nvGrpSpPr>
+        <p:cNvPr id="1" name=""/>
+        <p:cNvGrpSpPr/>
+        <p:nvPr/>
+      </p:nvGrpSpPr>
+      <p:grpSpPr>
+        <a:xfrm>
+          <a:off x="0" y="0"/>
+          <a:ext cx="0" cy="0"/>
+          <a:chOff x="0" y="0"/>
+          <a:chExt cx="0" cy="0"/>
+        </a:xfrm>
+      </p:grpSpPr>
+      <p:pic>
+        <p:nvPicPr>
+          <p:cNvPr id="7" name="Grafik 6">
+            <a:extLst>
+              <a:ext uri="{FF2B5EF4-FFF2-40B4-BE49-F238E27FC236}">
+                <a16:creationId xmlns:a16="http://schemas.microsoft.com/office/drawing/2014/main" id="{B8D266E0-D1B2-4BF4-B792-A0124C1C57C8}"/>
+              </a:ext>
+            </a:extLst>
+          </p:cNvPr>
+          <p:cNvPicPr>
+            <a:picLocks noChangeAspect="1"/>
+          </p:cNvPicPr>
+          <p:nvPr/>
+        </p:nvPicPr>
+        <p:blipFill rotWithShape="1">
+          <a:blip r:embed="rId2"/>
+          <a:srcRect b="5511"/>
+          <a:stretch/>
+        </p:blipFill>
+        <p:spPr>
+          <a:xfrm>
+            <a:off x="-1" y="0"/>
+            <a:ext cx="12195649" cy="6858000"/>
+          </a:xfrm>
+          <a:prstGeom prst="rect">
+            <a:avLst/>
+          </a:prstGeom>
+        </p:spPr>
+      </p:pic>
+      <p:sp>
+        <p:nvSpPr>
+          <p:cNvPr id="10" name="Titel 1">
+            <a:extLst>
+              <a:ext uri="{FF2B5EF4-FFF2-40B4-BE49-F238E27FC236}">
+                <a16:creationId xmlns:a16="http://schemas.microsoft.com/office/drawing/2014/main" id="{4008A494-6719-4027-ABC2-70D8C066BEE3}"/>
+              </a:ext>
+            </a:extLst>
+          </p:cNvPr>
+          <p:cNvSpPr>
+            <a:spLocks noGrp="1"/>
+          </p:cNvSpPr>
+          <p:nvPr>
+            <p:ph type="title"/>
+          </p:nvPr>
+        </p:nvSpPr>
+        <p:spPr>
+          <a:xfrm>
+            <a:off x="7340600" y="146050"/>
+            <a:ext cx="4762500" cy="1093788"/>
+          </a:xfrm>
+        </p:spPr>
+        <p:txBody>
+          <a:bodyPr/>
+          <a:lstStyle/>
+          <a:p>
+            <a:pPr algn="r"/>
+            <a:r>
+              <a:rPr lang="de-DE" b="1" dirty="0">
+                <a:solidFill>
+                  <a:schemeClr val="bg1"/>
+                </a:solidFill>
+              </a:rPr>
+              <a:t>Formen</a:t>
+            </a:r>
+          </a:p>
+        </p:txBody>
+      </p:sp>
+    </p:spTree>
+    <p:extLst>
+      <p:ext uri="{BB962C8B-B14F-4D97-AF65-F5344CB8AC3E}">
+        <p14:creationId xmlns:p14="http://schemas.microsoft.com/office/powerpoint/2010/main" val="1211913805"/>
+      </p:ext>
+    </p:extLst>
+  </p:cSld>
+  <p:clrMapOvr>
+    <a:masterClrMapping/>
+  </p:clrMapOvr>
+</p:sld>
+</file>
+
+<file path=ppt/slides/slide15.xml><?xml version="1.0" encoding="utf-8"?>
+<p:sld xmlns:a="http://schemas.openxmlformats.org/drawingml/2006/main" xmlns:r="http://schemas.openxmlformats.org/officeDocument/2006/relationships" xmlns:p="http://schemas.openxmlformats.org/presentationml/2006/main">
+  <p:cSld>
+    <p:spTree>
+      <p:nvGrpSpPr>
+        <p:cNvPr id="1" name=""/>
+        <p:cNvGrpSpPr/>
+        <p:nvPr/>
+      </p:nvGrpSpPr>
+      <p:grpSpPr>
+        <a:xfrm>
+          <a:off x="0" y="0"/>
+          <a:ext cx="0" cy="0"/>
+          <a:chOff x="0" y="0"/>
+          <a:chExt cx="0" cy="0"/>
+        </a:xfrm>
+      </p:grpSpPr>
+      <p:sp>
+        <p:nvSpPr>
+          <p:cNvPr id="2" name="Title 1">
+            <a:extLst>
+              <a:ext uri="{FF2B5EF4-FFF2-40B4-BE49-F238E27FC236}">
+                <a16:creationId xmlns:a16="http://schemas.microsoft.com/office/drawing/2014/main" id="{89019B67-DFA2-477E-97D8-803825FC89C9}"/>
+              </a:ext>
+            </a:extLst>
+          </p:cNvPr>
+          <p:cNvSpPr>
+            <a:spLocks noGrp="1"/>
+          </p:cNvSpPr>
+          <p:nvPr>
+            <p:ph type="title"/>
+          </p:nvPr>
+        </p:nvSpPr>
+        <p:spPr/>
+        <p:txBody>
+          <a:bodyPr/>
+          <a:lstStyle/>
+          <a:p>
+            <a:r>
+              <a:rPr lang="de-DE" dirty="0"/>
+              <a:t>Satz des Pythagoras</a:t>
+            </a:r>
+          </a:p>
+        </p:txBody>
+      </p:sp>
+      <p:sp>
+        <p:nvSpPr>
+          <p:cNvPr id="3" name="Content Placeholder 2">
+            <a:extLst>
+              <a:ext uri="{FF2B5EF4-FFF2-40B4-BE49-F238E27FC236}">
+                <a16:creationId xmlns:a16="http://schemas.microsoft.com/office/drawing/2014/main" id="{35A6734B-E6D0-402E-9297-5943CCB67049}"/>
+              </a:ext>
+            </a:extLst>
+          </p:cNvPr>
+          <p:cNvSpPr>
+            <a:spLocks noGrp="1"/>
+          </p:cNvSpPr>
+          <p:nvPr>
+            <p:ph idx="1"/>
+          </p:nvPr>
+        </p:nvSpPr>
+        <p:spPr/>
+        <p:txBody>
+          <a:bodyPr/>
+          <a:lstStyle/>
+          <a:p>
+            <a:endParaRPr lang="de-DE"/>
+          </a:p>
+        </p:txBody>
+      </p:sp>
+    </p:spTree>
+    <p:extLst>
+      <p:ext uri="{BB962C8B-B14F-4D97-AF65-F5344CB8AC3E}">
+        <p14:creationId xmlns:p14="http://schemas.microsoft.com/office/powerpoint/2010/main" val="2957768982"/>
+      </p:ext>
+    </p:extLst>
+  </p:cSld>
+  <p:clrMapOvr>
+    <a:masterClrMapping/>
+  </p:clrMapOvr>
+</p:sld>
+</file>
+
+<file path=ppt/slides/slide16.xml><?xml version="1.0" encoding="utf-8"?>
+<p:sld xmlns:a="http://schemas.openxmlformats.org/drawingml/2006/main" xmlns:r="http://schemas.openxmlformats.org/officeDocument/2006/relationships" xmlns:p="http://schemas.openxmlformats.org/presentationml/2006/main">
+  <p:cSld>
+    <p:spTree>
+      <p:nvGrpSpPr>
+        <p:cNvPr id="1" name=""/>
+        <p:cNvGrpSpPr/>
+        <p:nvPr/>
+      </p:nvGrpSpPr>
+      <p:grpSpPr>
+        <a:xfrm>
+          <a:off x="0" y="0"/>
+          <a:ext cx="0" cy="0"/>
+          <a:chOff x="0" y="0"/>
+          <a:chExt cx="0" cy="0"/>
+        </a:xfrm>
+      </p:grpSpPr>
+      <p:sp>
+        <p:nvSpPr>
+          <p:cNvPr id="2" name="Title 1">
+            <a:extLst>
+              <a:ext uri="{FF2B5EF4-FFF2-40B4-BE49-F238E27FC236}">
+                <a16:creationId xmlns:a16="http://schemas.microsoft.com/office/drawing/2014/main" id="{A582F0F0-238D-4BD6-B0A8-74A8400DCACC}"/>
+              </a:ext>
+            </a:extLst>
+          </p:cNvPr>
+          <p:cNvSpPr>
+            <a:spLocks noGrp="1"/>
+          </p:cNvSpPr>
+          <p:nvPr>
+            <p:ph type="title"/>
+          </p:nvPr>
+        </p:nvSpPr>
+        <p:spPr/>
+        <p:txBody>
+          <a:bodyPr/>
+          <a:lstStyle/>
+          <a:p>
+            <a:r>
+              <a:rPr lang="de-DE" dirty="0"/>
+              <a:t>Winkelrechnung</a:t>
+            </a:r>
+          </a:p>
+        </p:txBody>
+      </p:sp>
+      <p:sp>
+        <p:nvSpPr>
+          <p:cNvPr id="3" name="Content Placeholder 2">
+            <a:extLst>
+              <a:ext uri="{FF2B5EF4-FFF2-40B4-BE49-F238E27FC236}">
+                <a16:creationId xmlns:a16="http://schemas.microsoft.com/office/drawing/2014/main" id="{7134C011-6EFE-499A-A593-A78053BEE598}"/>
+              </a:ext>
+            </a:extLst>
+          </p:cNvPr>
+          <p:cNvSpPr>
+            <a:spLocks noGrp="1"/>
+          </p:cNvSpPr>
+          <p:nvPr>
+            <p:ph idx="1"/>
+          </p:nvPr>
+        </p:nvSpPr>
+        <p:spPr/>
+        <p:txBody>
+          <a:bodyPr/>
+          <a:lstStyle/>
+          <a:p>
+            <a:endParaRPr lang="de-DE"/>
+          </a:p>
+        </p:txBody>
+      </p:sp>
+    </p:spTree>
+    <p:extLst>
+      <p:ext uri="{BB962C8B-B14F-4D97-AF65-F5344CB8AC3E}">
+        <p14:creationId xmlns:p14="http://schemas.microsoft.com/office/powerpoint/2010/main" val="695739511"/>
+      </p:ext>
+    </p:extLst>
+  </p:cSld>
+  <p:clrMapOvr>
+    <a:masterClrMapping/>
+  </p:clrMapOvr>
+</p:sld>
+</file>
+
+<file path=ppt/slides/slide17.xml><?xml version="1.0" encoding="utf-8"?>
+<p:sld xmlns:a="http://schemas.openxmlformats.org/drawingml/2006/main" xmlns:r="http://schemas.openxmlformats.org/officeDocument/2006/relationships" xmlns:p="http://schemas.openxmlformats.org/presentationml/2006/main">
+  <p:cSld>
+    <p:spTree>
+      <p:nvGrpSpPr>
+        <p:cNvPr id="1" name=""/>
+        <p:cNvGrpSpPr/>
+        <p:nvPr/>
+      </p:nvGrpSpPr>
+      <p:grpSpPr>
+        <a:xfrm>
+          <a:off x="0" y="0"/>
+          <a:ext cx="0" cy="0"/>
+          <a:chOff x="0" y="0"/>
+          <a:chExt cx="0" cy="0"/>
+        </a:xfrm>
+      </p:grpSpPr>
+      <p:sp>
+        <p:nvSpPr>
+          <p:cNvPr id="2" name="Title 1">
+            <a:extLst>
+              <a:ext uri="{FF2B5EF4-FFF2-40B4-BE49-F238E27FC236}">
                 <a16:creationId xmlns:a16="http://schemas.microsoft.com/office/drawing/2014/main" id="{E8502227-213A-4E3B-8E6D-D6B72DDB954E}"/>
               </a:ext>
             </a:extLst>
@@ -5764,7 +6743,7 @@
 </p:sld>
 </file>
 
-<file path=ppt/slides/slide12.xml><?xml version="1.0" encoding="utf-8"?>
+<file path=ppt/slides/slide18.xml><?xml version="1.0" encoding="utf-8"?>
 <p:sld xmlns:a="http://schemas.openxmlformats.org/drawingml/2006/main" xmlns:r="http://schemas.openxmlformats.org/officeDocument/2006/relationships" xmlns:p="http://schemas.openxmlformats.org/presentationml/2006/main">
   <p:cSld>
     <p:spTree>
@@ -5915,36 +6894,1001 @@
           <a:p>
             <a:r>
               <a:rPr lang="de-DE" dirty="0"/>
-              <a:t>Aussagenlogik</a:t>
+              <a:t>Aufbau aussagenlogischer Formeln</a:t>
             </a:r>
           </a:p>
         </p:txBody>
       </p:sp>
-      <p:sp>
-        <p:nvSpPr>
-          <p:cNvPr id="3" name="Content Placeholder 2">
+      <mc:AlternateContent xmlns:mc="http://schemas.openxmlformats.org/markup-compatibility/2006">
+        <mc:Choice xmlns:a14="http://schemas.microsoft.com/office/drawing/2010/main" Requires="a14">
+          <p:sp>
+            <p:nvSpPr>
+              <p:cNvPr id="3" name="Content Placeholder 2">
+                <a:extLst>
+                  <a:ext uri="{FF2B5EF4-FFF2-40B4-BE49-F238E27FC236}">
+                    <a16:creationId xmlns:a16="http://schemas.microsoft.com/office/drawing/2014/main" id="{3586C794-D4D9-4CCA-B897-3082D1FD45B3}"/>
+                  </a:ext>
+                </a:extLst>
+              </p:cNvPr>
+              <p:cNvSpPr>
+                <a:spLocks noGrp="1"/>
+              </p:cNvSpPr>
+              <p:nvPr>
+                <p:ph idx="1"/>
+              </p:nvPr>
+            </p:nvSpPr>
+            <p:spPr/>
+            <p:txBody>
+              <a:bodyPr>
+                <a:normAutofit fontScale="92500" lnSpcReduction="20000"/>
+              </a:bodyPr>
+              <a:lstStyle/>
+              <a:p>
+                <a:r>
+                  <a:rPr lang="de-DE" dirty="0"/>
+                  <a:t>Aussagen (wahr oder falsch)</a:t>
+                </a:r>
+              </a:p>
+              <a:p>
+                <a:pPr marL="914400" lvl="2" indent="0">
+                  <a:buNone/>
+                </a:pPr>
+                <a14:m>
+                  <m:oMath xmlns:m="http://schemas.openxmlformats.org/officeDocument/2006/math">
+                    <m:r>
+                      <a:rPr lang="de-DE" b="0" i="1" dirty="0" smtClean="0">
+                        <a:latin typeface="Cambria Math" panose="02040503050406030204" pitchFamily="18" charset="0"/>
+                      </a:rPr>
+                      <m:t>𝑅</m:t>
+                    </m:r>
+                    <m:r>
+                      <a:rPr lang="de-DE" b="0" i="1" dirty="0" smtClean="0">
+                        <a:solidFill>
+                          <a:srgbClr val="FFCCFF"/>
+                        </a:solidFill>
+                        <a:latin typeface="Cambria Math" panose="02040503050406030204" pitchFamily="18" charset="0"/>
+                      </a:rPr>
+                      <m:t>≔</m:t>
+                    </m:r>
+                    <m:r>
+                      <a:rPr lang="de-DE" b="0" i="1" dirty="0" smtClean="0">
+                        <a:latin typeface="Cambria Math" panose="02040503050406030204" pitchFamily="18" charset="0"/>
+                      </a:rPr>
+                      <m:t> </m:t>
+                    </m:r>
+                  </m:oMath>
+                </a14:m>
+                <a:r>
+                  <a:rPr lang="de-DE" dirty="0"/>
+                  <a:t>„Es regnet.“</a:t>
+                </a:r>
+              </a:p>
+              <a:p>
+                <a:pPr marL="914400" lvl="2" indent="0">
+                  <a:buNone/>
+                </a:pPr>
+                <a14:m>
+                  <m:oMath xmlns:m="http://schemas.openxmlformats.org/officeDocument/2006/math">
+                    <m:r>
+                      <a:rPr lang="de-DE" b="0" i="1" dirty="0" smtClean="0">
+                        <a:latin typeface="Cambria Math" panose="02040503050406030204" pitchFamily="18" charset="0"/>
+                      </a:rPr>
+                      <m:t>𝑆</m:t>
+                    </m:r>
+                    <m:r>
+                      <a:rPr lang="de-DE" b="0" i="1" dirty="0" smtClean="0">
+                        <a:latin typeface="Cambria Math" panose="02040503050406030204" pitchFamily="18" charset="0"/>
+                      </a:rPr>
+                      <m:t>≔ </m:t>
+                    </m:r>
+                  </m:oMath>
+                </a14:m>
+                <a:r>
+                  <a:rPr lang="de-DE" dirty="0"/>
+                  <a:t>„Die Sonne scheint.“</a:t>
+                </a:r>
+              </a:p>
+              <a:p>
+                <a:pPr marL="914400" lvl="2" indent="0">
+                  <a:buNone/>
+                </a:pPr>
+                <a14:m>
+                  <m:oMath xmlns:m="http://schemas.openxmlformats.org/officeDocument/2006/math">
+                    <m:r>
+                      <a:rPr lang="de-DE" b="0" i="1" dirty="0" smtClean="0">
+                        <a:latin typeface="Cambria Math" panose="02040503050406030204" pitchFamily="18" charset="0"/>
+                      </a:rPr>
+                      <m:t>𝐵</m:t>
+                    </m:r>
+                    <m:r>
+                      <a:rPr lang="de-DE" b="0" i="1" dirty="0" smtClean="0">
+                        <a:latin typeface="Cambria Math" panose="02040503050406030204" pitchFamily="18" charset="0"/>
+                      </a:rPr>
+                      <m:t>≔ </m:t>
+                    </m:r>
+                  </m:oMath>
+                </a14:m>
+                <a:r>
+                  <a:rPr lang="de-DE" dirty="0"/>
+                  <a:t>„Am Himmel ist ein Regenbogen zu sehen.“</a:t>
+                </a:r>
+              </a:p>
+              <a:p>
+                <a:pPr marL="914400" lvl="2" indent="0">
+                  <a:buNone/>
+                </a:pPr>
+                <a14:m>
+                  <m:oMath xmlns:m="http://schemas.openxmlformats.org/officeDocument/2006/math">
+                    <m:r>
+                      <a:rPr lang="de-DE" b="0" i="1" dirty="0" smtClean="0">
+                        <a:latin typeface="Cambria Math" panose="02040503050406030204" pitchFamily="18" charset="0"/>
+                      </a:rPr>
+                      <m:t>𝑃</m:t>
+                    </m:r>
+                    <m:r>
+                      <a:rPr lang="de-DE" b="0" i="1" dirty="0" smtClean="0">
+                        <a:latin typeface="Cambria Math" panose="02040503050406030204" pitchFamily="18" charset="0"/>
+                      </a:rPr>
+                      <m:t>≔ </m:t>
+                    </m:r>
+                  </m:oMath>
+                </a14:m>
+                <a:r>
+                  <a:rPr lang="de-DE" dirty="0"/>
+                  <a:t>„Wir befinden uns an der richtigen Position.“</a:t>
+                </a:r>
+              </a:p>
+              <a:p>
+                <a:pPr marL="914400" lvl="2" indent="0">
+                  <a:buNone/>
+                </a:pPr>
+                <a14:m>
+                  <m:oMath xmlns:m="http://schemas.openxmlformats.org/officeDocument/2006/math">
+                    <m:r>
+                      <m:rPr>
+                        <m:nor/>
+                      </m:rPr>
+                      <a:rPr lang="de-DE" altLang="de-DE" dirty="0">
+                        <a:latin typeface="Arial" panose="020B0604020202020204" pitchFamily="34" charset="0"/>
+                      </a:rPr>
+                      <m:t>⊤</m:t>
+                    </m:r>
+                    <m:r>
+                      <a:rPr lang="de-DE" b="0" i="1" dirty="0" smtClean="0">
+                        <a:latin typeface="Cambria Math" panose="02040503050406030204" pitchFamily="18" charset="0"/>
+                      </a:rPr>
+                      <m:t>≔ </m:t>
+                    </m:r>
+                  </m:oMath>
+                </a14:m>
+                <a:r>
+                  <a:rPr lang="de-DE" dirty="0"/>
+                  <a:t>wahr („Tautologie“)</a:t>
+                </a:r>
+              </a:p>
+              <a:p>
+                <a:pPr marL="914400" lvl="2" indent="0">
+                  <a:buNone/>
+                </a:pPr>
+                <a14:m>
+                  <m:oMath xmlns:m="http://schemas.openxmlformats.org/officeDocument/2006/math">
+                    <m:r>
+                      <m:rPr>
+                        <m:nor/>
+                      </m:rPr>
+                      <a:rPr lang="de-DE" altLang="de-DE" dirty="0">
+                        <a:latin typeface="Arial" panose="020B0604020202020204" pitchFamily="34" charset="0"/>
+                      </a:rPr>
+                      <m:t>⊥</m:t>
+                    </m:r>
+                    <m:r>
+                      <a:rPr lang="de-DE" b="0" i="1" dirty="0" smtClean="0">
+                        <a:latin typeface="Cambria Math" panose="02040503050406030204" pitchFamily="18" charset="0"/>
+                      </a:rPr>
+                      <m:t>≔ </m:t>
+                    </m:r>
+                  </m:oMath>
+                </a14:m>
+                <a:r>
+                  <a:rPr lang="de-DE" dirty="0"/>
+                  <a:t>falsch („Kontradiktion“)</a:t>
+                </a:r>
+              </a:p>
+              <a:p>
+                <a:r>
+                  <a:rPr lang="de-DE" dirty="0"/>
+                  <a:t>Logischen Verknüpfungen</a:t>
+                </a:r>
+              </a:p>
+              <a:p>
+                <a:pPr marL="914400" lvl="2" indent="0">
+                  <a:buNone/>
+                </a:pPr>
+                <a:r>
+                  <a:rPr lang="de-DE" dirty="0"/>
+                  <a:t>Seien </a:t>
+                </a:r>
+                <a14:m>
+                  <m:oMath xmlns:m="http://schemas.openxmlformats.org/officeDocument/2006/math">
+                    <m:r>
+                      <a:rPr lang="de-DE" b="0" i="1" dirty="0" smtClean="0">
+                        <a:latin typeface="Cambria Math" panose="02040503050406030204" pitchFamily="18" charset="0"/>
+                      </a:rPr>
+                      <m:t>𝑎</m:t>
+                    </m:r>
+                  </m:oMath>
+                </a14:m>
+                <a:r>
+                  <a:rPr lang="de-DE" dirty="0"/>
+                  <a:t> und </a:t>
+                </a:r>
+                <a14:m>
+                  <m:oMath xmlns:m="http://schemas.openxmlformats.org/officeDocument/2006/math">
+                    <m:r>
+                      <a:rPr lang="de-DE" b="0" i="1" dirty="0" smtClean="0">
+                        <a:latin typeface="Cambria Math" panose="02040503050406030204" pitchFamily="18" charset="0"/>
+                      </a:rPr>
+                      <m:t>𝑏</m:t>
+                    </m:r>
+                  </m:oMath>
+                </a14:m>
+                <a:r>
+                  <a:rPr lang="de-DE" dirty="0"/>
+                  <a:t> aussagenlogische Formeln.</a:t>
+                </a:r>
+              </a:p>
+              <a:p>
+                <a:pPr marL="914400" lvl="2" indent="0">
+                  <a:buNone/>
+                </a:pPr>
+                <a14:m>
+                  <m:oMath xmlns:m="http://schemas.openxmlformats.org/officeDocument/2006/math">
+                    <m:r>
+                      <a:rPr lang="de-DE" b="0" i="1" dirty="0" smtClean="0">
+                        <a:latin typeface="Cambria Math" panose="02040503050406030204" pitchFamily="18" charset="0"/>
+                      </a:rPr>
+                      <m:t>𝑎</m:t>
+                    </m:r>
+                    <m:r>
+                      <a:rPr lang="de-DE" b="0" i="1" dirty="0" smtClean="0">
+                        <a:latin typeface="Cambria Math" panose="02040503050406030204" pitchFamily="18" charset="0"/>
+                      </a:rPr>
+                      <m:t> ∧ </m:t>
+                    </m:r>
+                    <m:r>
+                      <a:rPr lang="de-DE" b="0" i="1" dirty="0" smtClean="0">
+                        <a:latin typeface="Cambria Math" panose="02040503050406030204" pitchFamily="18" charset="0"/>
+                      </a:rPr>
+                      <m:t>𝑏</m:t>
+                    </m:r>
+                    <m:r>
+                      <m:rPr>
+                        <m:nor/>
+                      </m:rPr>
+                      <a:rPr lang="en-US" b="0" i="0" dirty="0" smtClean="0">
+                        <a:latin typeface="Cambria Math" panose="02040503050406030204" pitchFamily="18" charset="0"/>
+                      </a:rPr>
+                      <m:t> </m:t>
+                    </m:r>
+                    <m:r>
+                      <m:rPr>
+                        <m:nor/>
+                      </m:rPr>
+                      <a:rPr lang="de-DE" smtClean="0">
+                        <a:solidFill>
+                          <a:srgbClr val="FFCCFF"/>
+                        </a:solidFill>
+                      </a:rPr>
+                      <m:t>:⇔</m:t>
+                    </m:r>
+                    <m:r>
+                      <a:rPr lang="en-US" b="0" i="1" smtClean="0">
+                        <a:solidFill>
+                          <a:srgbClr val="FFCCFF"/>
+                        </a:solidFill>
+                        <a:latin typeface="Cambria Math" panose="02040503050406030204" pitchFamily="18" charset="0"/>
+                      </a:rPr>
+                      <m:t> </m:t>
+                    </m:r>
+                    <m:r>
+                      <a:rPr lang="de-DE" b="0" i="1" dirty="0" smtClean="0">
+                        <a:latin typeface="Cambria Math" panose="02040503050406030204" pitchFamily="18" charset="0"/>
+                      </a:rPr>
+                      <m:t>𝑎</m:t>
+                    </m:r>
+                    <m:r>
+                      <a:rPr lang="de-DE" b="0" i="1" dirty="0" smtClean="0">
+                        <a:latin typeface="Cambria Math" panose="02040503050406030204" pitchFamily="18" charset="0"/>
+                      </a:rPr>
+                      <m:t> </m:t>
+                    </m:r>
+                    <m:r>
+                      <a:rPr lang="de-DE" b="0" i="1" dirty="0" smtClean="0">
+                        <a:latin typeface="Cambria Math" panose="02040503050406030204" pitchFamily="18" charset="0"/>
+                      </a:rPr>
+                      <m:t>𝑢𝑛𝑑</m:t>
+                    </m:r>
+                    <m:r>
+                      <a:rPr lang="de-DE" b="0" i="1" dirty="0" smtClean="0">
+                        <a:latin typeface="Cambria Math" panose="02040503050406030204" pitchFamily="18" charset="0"/>
+                      </a:rPr>
+                      <m:t> </m:t>
+                    </m:r>
+                    <m:r>
+                      <a:rPr lang="de-DE" b="0" i="1" dirty="0" smtClean="0">
+                        <a:latin typeface="Cambria Math" panose="02040503050406030204" pitchFamily="18" charset="0"/>
+                      </a:rPr>
+                      <m:t>𝑏</m:t>
+                    </m:r>
+                  </m:oMath>
+                </a14:m>
+                <a:r>
+                  <a:rPr lang="de-DE" dirty="0"/>
+                  <a:t> („Konjunktion“, gilt beides?)</a:t>
+                </a:r>
+              </a:p>
+              <a:p>
+                <a:pPr marL="914400" lvl="2" indent="0">
+                  <a:buNone/>
+                </a:pPr>
+                <a14:m>
+                  <m:oMath xmlns:m="http://schemas.openxmlformats.org/officeDocument/2006/math">
+                    <m:r>
+                      <a:rPr lang="de-DE" b="0" i="1" dirty="0" smtClean="0">
+                        <a:latin typeface="Cambria Math" panose="02040503050406030204" pitchFamily="18" charset="0"/>
+                      </a:rPr>
+                      <m:t>𝑎</m:t>
+                    </m:r>
+                    <m:r>
+                      <a:rPr lang="de-DE" b="0" i="1" dirty="0" smtClean="0">
+                        <a:latin typeface="Cambria Math" panose="02040503050406030204" pitchFamily="18" charset="0"/>
+                      </a:rPr>
+                      <m:t> ∨ </m:t>
+                    </m:r>
+                    <m:r>
+                      <a:rPr lang="de-DE" b="0" i="1" dirty="0" smtClean="0">
+                        <a:latin typeface="Cambria Math" panose="02040503050406030204" pitchFamily="18" charset="0"/>
+                      </a:rPr>
+                      <m:t>𝑏</m:t>
+                    </m:r>
+                    <m:r>
+                      <m:rPr>
+                        <m:nor/>
+                      </m:rPr>
+                      <a:rPr lang="en-US" b="0" i="0" dirty="0" smtClean="0">
+                        <a:latin typeface="Cambria Math" panose="02040503050406030204" pitchFamily="18" charset="0"/>
+                      </a:rPr>
+                      <m:t> </m:t>
+                    </m:r>
+                    <m:r>
+                      <m:rPr>
+                        <m:nor/>
+                      </m:rPr>
+                      <a:rPr lang="de-DE"/>
+                      <m:t>:⇔</m:t>
+                    </m:r>
+                    <m:r>
+                      <a:rPr lang="en-US" b="0" i="1" smtClean="0">
+                        <a:latin typeface="Cambria Math" panose="02040503050406030204" pitchFamily="18" charset="0"/>
+                      </a:rPr>
+                      <m:t> </m:t>
+                    </m:r>
+                    <m:r>
+                      <a:rPr lang="de-DE" b="0" i="1" dirty="0" smtClean="0">
+                        <a:latin typeface="Cambria Math" panose="02040503050406030204" pitchFamily="18" charset="0"/>
+                      </a:rPr>
+                      <m:t>𝑎</m:t>
+                    </m:r>
+                    <m:r>
+                      <a:rPr lang="de-DE" b="0" i="1" dirty="0" smtClean="0">
+                        <a:latin typeface="Cambria Math" panose="02040503050406030204" pitchFamily="18" charset="0"/>
+                      </a:rPr>
+                      <m:t> </m:t>
+                    </m:r>
+                    <m:r>
+                      <a:rPr lang="de-DE" b="0" i="1" dirty="0" smtClean="0">
+                        <a:latin typeface="Cambria Math" panose="02040503050406030204" pitchFamily="18" charset="0"/>
+                      </a:rPr>
+                      <m:t>𝑜𝑑𝑒𝑟</m:t>
+                    </m:r>
+                    <m:r>
+                      <a:rPr lang="de-DE" b="0" i="1" dirty="0" smtClean="0">
+                        <a:latin typeface="Cambria Math" panose="02040503050406030204" pitchFamily="18" charset="0"/>
+                      </a:rPr>
+                      <m:t> </m:t>
+                    </m:r>
+                    <m:r>
+                      <a:rPr lang="de-DE" b="0" i="1" dirty="0" smtClean="0">
+                        <a:latin typeface="Cambria Math" panose="02040503050406030204" pitchFamily="18" charset="0"/>
+                      </a:rPr>
+                      <m:t>𝑏</m:t>
+                    </m:r>
+                  </m:oMath>
+                </a14:m>
+                <a:r>
+                  <a:rPr lang="de-DE" dirty="0"/>
+                  <a:t>  („Disjunktion“, gilt </a:t>
+                </a:r>
+                <a:r>
+                  <a:rPr lang="de-DE" dirty="0">
+                    <a:solidFill>
+                      <a:srgbClr val="FFCCFF"/>
+                    </a:solidFill>
+                  </a:rPr>
+                  <a:t>mindestens eins</a:t>
+                </a:r>
+                <a:r>
+                  <a:rPr lang="de-DE" dirty="0"/>
+                  <a:t> von beidem?)</a:t>
+                </a:r>
+              </a:p>
+              <a:p>
+                <a:pPr marL="914400" lvl="2" indent="0">
+                  <a:buNone/>
+                </a:pPr>
+                <a14:m>
+                  <m:oMathPara xmlns:m="http://schemas.openxmlformats.org/officeDocument/2006/math">
+                    <m:oMathParaPr>
+                      <m:jc m:val="left"/>
+                    </m:oMathParaPr>
+                    <m:oMath xmlns:m="http://schemas.openxmlformats.org/officeDocument/2006/math">
+                      <m:r>
+                        <a:rPr lang="de-DE" i="1" dirty="0">
+                          <a:latin typeface="Cambria Math" panose="02040503050406030204" pitchFamily="18" charset="0"/>
+                        </a:rPr>
+                        <m:t>¬</m:t>
+                      </m:r>
+                      <m:r>
+                        <a:rPr lang="de-DE" i="1" dirty="0">
+                          <a:latin typeface="Cambria Math" panose="02040503050406030204" pitchFamily="18" charset="0"/>
+                        </a:rPr>
+                        <m:t>𝑎</m:t>
+                      </m:r>
+                      <m:r>
+                        <m:rPr>
+                          <m:nor/>
+                        </m:rPr>
+                        <a:rPr lang="en-US" b="0" i="0" dirty="0" smtClean="0">
+                          <a:latin typeface="Cambria Math" panose="02040503050406030204" pitchFamily="18" charset="0"/>
+                        </a:rPr>
+                        <m:t> </m:t>
+                      </m:r>
+                      <m:r>
+                        <m:rPr>
+                          <m:nor/>
+                        </m:rPr>
+                        <a:rPr lang="de-DE"/>
+                        <m:t>:⇔</m:t>
+                      </m:r>
+                      <m:r>
+                        <a:rPr lang="en-US" b="0" i="1" smtClean="0">
+                          <a:latin typeface="Cambria Math" panose="02040503050406030204" pitchFamily="18" charset="0"/>
+                        </a:rPr>
+                        <m:t> </m:t>
+                      </m:r>
+                      <m:r>
+                        <a:rPr lang="en-US" b="0" i="1" dirty="0" smtClean="0">
+                          <a:latin typeface="Cambria Math" panose="02040503050406030204" pitchFamily="18" charset="0"/>
+                        </a:rPr>
+                        <m:t>𝑛𝑖𝑐h𝑡</m:t>
+                      </m:r>
+                      <m:r>
+                        <a:rPr lang="en-US" b="0" i="1" dirty="0" smtClean="0">
+                          <a:latin typeface="Cambria Math" panose="02040503050406030204" pitchFamily="18" charset="0"/>
+                        </a:rPr>
+                        <m:t> </m:t>
+                      </m:r>
+                      <m:r>
+                        <a:rPr lang="en-US" b="0" i="1" dirty="0" smtClean="0">
+                          <a:latin typeface="Cambria Math" panose="02040503050406030204" pitchFamily="18" charset="0"/>
+                        </a:rPr>
+                        <m:t>𝑎</m:t>
+                      </m:r>
+                    </m:oMath>
+                  </m:oMathPara>
+                </a14:m>
+                <a:endParaRPr lang="de-DE" dirty="0"/>
+              </a:p>
+              <a:p>
+                <a:pPr marL="914400" lvl="2" indent="0">
+                  <a:buNone/>
+                </a:pPr>
+                <a14:m>
+                  <m:oMathPara xmlns:m="http://schemas.openxmlformats.org/officeDocument/2006/math">
+                    <m:oMathParaPr>
+                      <m:jc m:val="left"/>
+                    </m:oMathParaPr>
+                    <m:oMath xmlns:m="http://schemas.openxmlformats.org/officeDocument/2006/math">
+                      <m:r>
+                        <a:rPr lang="de-DE" b="0" i="1" dirty="0" smtClean="0">
+                          <a:latin typeface="Cambria Math" panose="02040503050406030204" pitchFamily="18" charset="0"/>
+                        </a:rPr>
+                        <m:t>𝑎</m:t>
+                      </m:r>
+                      <m:r>
+                        <a:rPr lang="de-DE" b="0" i="1" dirty="0" smtClean="0">
+                          <a:latin typeface="Cambria Math" panose="02040503050406030204" pitchFamily="18" charset="0"/>
+                        </a:rPr>
+                        <m:t>→</m:t>
+                      </m:r>
+                      <m:r>
+                        <a:rPr lang="de-DE" b="0" i="1" dirty="0" smtClean="0">
+                          <a:latin typeface="Cambria Math" panose="02040503050406030204" pitchFamily="18" charset="0"/>
+                        </a:rPr>
+                        <m:t>𝑏</m:t>
+                      </m:r>
+                      <m:r>
+                        <m:rPr>
+                          <m:nor/>
+                        </m:rPr>
+                        <a:rPr lang="en-US" b="0" i="0" dirty="0" smtClean="0">
+                          <a:latin typeface="Cambria Math" panose="02040503050406030204" pitchFamily="18" charset="0"/>
+                        </a:rPr>
+                        <m:t> </m:t>
+                      </m:r>
+                      <m:r>
+                        <m:rPr>
+                          <m:nor/>
+                        </m:rPr>
+                        <a:rPr lang="de-DE"/>
+                        <m:t>:⇔</m:t>
+                      </m:r>
+                      <m:r>
+                        <a:rPr lang="en-US" b="0" i="1" smtClean="0">
+                          <a:latin typeface="Cambria Math" panose="02040503050406030204" pitchFamily="18" charset="0"/>
+                        </a:rPr>
+                        <m:t> </m:t>
+                      </m:r>
+                      <m:r>
+                        <a:rPr lang="de-DE" b="0" i="1" dirty="0" smtClean="0">
+                          <a:latin typeface="Cambria Math" panose="02040503050406030204" pitchFamily="18" charset="0"/>
+                        </a:rPr>
+                        <m:t>𝑎</m:t>
+                      </m:r>
+                      <m:r>
+                        <a:rPr lang="de-DE" b="0" i="1" dirty="0" smtClean="0">
+                          <a:latin typeface="Cambria Math" panose="02040503050406030204" pitchFamily="18" charset="0"/>
+                        </a:rPr>
+                        <m:t> </m:t>
+                      </m:r>
+                      <m:r>
+                        <a:rPr lang="en-US" b="0" i="1" dirty="0" smtClean="0">
+                          <a:latin typeface="Cambria Math" panose="02040503050406030204" pitchFamily="18" charset="0"/>
+                        </a:rPr>
+                        <m:t>𝑖𝑚𝑝𝑙𝑖𝑧𝑖𝑒𝑟𝑡</m:t>
+                      </m:r>
+                      <m:r>
+                        <a:rPr lang="de-DE" b="0" i="1" dirty="0" smtClean="0">
+                          <a:latin typeface="Cambria Math" panose="02040503050406030204" pitchFamily="18" charset="0"/>
+                        </a:rPr>
+                        <m:t> </m:t>
+                      </m:r>
+                      <m:r>
+                        <a:rPr lang="de-DE" b="0" i="1" dirty="0" smtClean="0">
+                          <a:latin typeface="Cambria Math" panose="02040503050406030204" pitchFamily="18" charset="0"/>
+                        </a:rPr>
+                        <m:t>𝑏</m:t>
+                      </m:r>
+                      <m:r>
+                        <m:rPr>
+                          <m:nor/>
+                        </m:rPr>
+                        <a:rPr lang="en-US" b="0" i="0" dirty="0" smtClean="0">
+                          <a:latin typeface="Cambria Math" panose="02040503050406030204" pitchFamily="18" charset="0"/>
+                        </a:rPr>
+                        <m:t> </m:t>
+                      </m:r>
+                      <m:r>
+                        <m:rPr>
+                          <m:nor/>
+                        </m:rPr>
+                        <a:rPr lang="de-DE"/>
+                        <m:t>:⇔</m:t>
+                      </m:r>
+                      <m:r>
+                        <a:rPr lang="en-US" b="0" i="1" smtClean="0">
+                          <a:latin typeface="Cambria Math" panose="02040503050406030204" pitchFamily="18" charset="0"/>
+                        </a:rPr>
+                        <m:t> </m:t>
+                      </m:r>
+                      <m:r>
+                        <a:rPr lang="en-US" b="0" i="1" dirty="0" smtClean="0">
+                          <a:solidFill>
+                            <a:srgbClr val="FFCCFF"/>
+                          </a:solidFill>
+                          <a:latin typeface="Cambria Math" panose="02040503050406030204" pitchFamily="18" charset="0"/>
+                        </a:rPr>
+                        <m:t>𝑤𝑒𝑛𝑛</m:t>
+                      </m:r>
+                      <m:r>
+                        <a:rPr lang="en-US" b="0" i="1" dirty="0" smtClean="0">
+                          <a:solidFill>
+                            <a:srgbClr val="FFCCFF"/>
+                          </a:solidFill>
+                          <a:latin typeface="Cambria Math" panose="02040503050406030204" pitchFamily="18" charset="0"/>
+                        </a:rPr>
+                        <m:t> </m:t>
+                      </m:r>
+                      <m:r>
+                        <a:rPr lang="en-US" b="0" i="1" dirty="0" smtClean="0">
+                          <a:solidFill>
+                            <a:srgbClr val="FFCCFF"/>
+                          </a:solidFill>
+                          <a:latin typeface="Cambria Math" panose="02040503050406030204" pitchFamily="18" charset="0"/>
+                        </a:rPr>
+                        <m:t>𝑎</m:t>
+                      </m:r>
+                      <m:r>
+                        <a:rPr lang="en-US" b="0" i="1" dirty="0" smtClean="0">
+                          <a:solidFill>
+                            <a:srgbClr val="FFCCFF"/>
+                          </a:solidFill>
+                          <a:latin typeface="Cambria Math" panose="02040503050406030204" pitchFamily="18" charset="0"/>
+                        </a:rPr>
+                        <m:t>, </m:t>
+                      </m:r>
+                      <m:r>
+                        <a:rPr lang="en-US" b="0" i="1" dirty="0" smtClean="0">
+                          <a:solidFill>
+                            <a:srgbClr val="FFCCFF"/>
+                          </a:solidFill>
+                          <a:latin typeface="Cambria Math" panose="02040503050406030204" pitchFamily="18" charset="0"/>
+                        </a:rPr>
+                        <m:t>𝑑𝑎𝑛𝑛</m:t>
+                      </m:r>
+                      <m:r>
+                        <a:rPr lang="en-US" b="0" i="1" dirty="0" smtClean="0">
+                          <a:solidFill>
+                            <a:srgbClr val="FFCCFF"/>
+                          </a:solidFill>
+                          <a:latin typeface="Cambria Math" panose="02040503050406030204" pitchFamily="18" charset="0"/>
+                        </a:rPr>
+                        <m:t> </m:t>
+                      </m:r>
+                      <m:r>
+                        <a:rPr lang="en-US" b="0" i="1" dirty="0" smtClean="0">
+                          <a:solidFill>
+                            <a:srgbClr val="FFCCFF"/>
+                          </a:solidFill>
+                          <a:latin typeface="Cambria Math" panose="02040503050406030204" pitchFamily="18" charset="0"/>
+                        </a:rPr>
+                        <m:t>𝑏</m:t>
+                      </m:r>
+                      <m:r>
+                        <m:rPr>
+                          <m:nor/>
+                        </m:rPr>
+                        <a:rPr lang="en-US" b="0" i="0" dirty="0" smtClean="0">
+                          <a:latin typeface="Cambria Math" panose="02040503050406030204" pitchFamily="18" charset="0"/>
+                        </a:rPr>
+                        <m:t> </m:t>
+                      </m:r>
+                      <m:r>
+                        <m:rPr>
+                          <m:nor/>
+                        </m:rPr>
+                        <a:rPr lang="de-DE"/>
+                        <m:t>:⇔</m:t>
+                      </m:r>
+                      <m:r>
+                        <m:rPr>
+                          <m:nor/>
+                        </m:rPr>
+                        <a:rPr lang="en-US" b="0" i="0" smtClean="0"/>
+                        <m:t> </m:t>
+                      </m:r>
+                      <m:r>
+                        <a:rPr lang="de-DE" i="1" dirty="0">
+                          <a:latin typeface="Cambria Math" panose="02040503050406030204" pitchFamily="18" charset="0"/>
+                        </a:rPr>
+                        <m:t>¬</m:t>
+                      </m:r>
+                      <m:r>
+                        <a:rPr lang="de-DE" i="1" dirty="0">
+                          <a:latin typeface="Cambria Math" panose="02040503050406030204" pitchFamily="18" charset="0"/>
+                        </a:rPr>
+                        <m:t>𝑎</m:t>
+                      </m:r>
+                      <m:r>
+                        <a:rPr lang="de-DE" i="1" dirty="0">
+                          <a:latin typeface="Cambria Math" panose="02040503050406030204" pitchFamily="18" charset="0"/>
+                        </a:rPr>
+                        <m:t>∨</m:t>
+                      </m:r>
+                      <m:r>
+                        <a:rPr lang="en-US" b="0" i="1" dirty="0" smtClean="0">
+                          <a:latin typeface="Cambria Math" panose="02040503050406030204" pitchFamily="18" charset="0"/>
+                        </a:rPr>
+                        <m:t>𝑏</m:t>
+                      </m:r>
+                    </m:oMath>
+                  </m:oMathPara>
+                </a14:m>
+                <a:endParaRPr lang="en-US" dirty="0"/>
+              </a:p>
+              <a:p>
+                <a:pPr marL="914400" lvl="2" indent="0">
+                  <a:buNone/>
+                </a:pPr>
+                <a:r>
+                  <a:rPr lang="en-US" dirty="0"/>
+                  <a:t>Beispiel: </a:t>
+                </a:r>
+                <a14:m>
+                  <m:oMath xmlns:m="http://schemas.openxmlformats.org/officeDocument/2006/math">
+                    <m:d>
+                      <m:dPr>
+                        <m:ctrlPr>
+                          <a:rPr lang="en-US" b="0" i="1" smtClean="0">
+                            <a:latin typeface="Cambria Math" panose="02040503050406030204" pitchFamily="18" charset="0"/>
+                          </a:rPr>
+                        </m:ctrlPr>
+                      </m:dPr>
+                      <m:e>
+                        <m:r>
+                          <a:rPr lang="en-US" b="0" i="1" smtClean="0">
+                            <a:latin typeface="Cambria Math" panose="02040503050406030204" pitchFamily="18" charset="0"/>
+                          </a:rPr>
+                          <m:t>𝑅</m:t>
+                        </m:r>
+                        <m:r>
+                          <a:rPr lang="de-DE" i="1" dirty="0">
+                            <a:latin typeface="Cambria Math" panose="02040503050406030204" pitchFamily="18" charset="0"/>
+                          </a:rPr>
+                          <m:t>∧</m:t>
+                        </m:r>
+                        <m:r>
+                          <m:rPr>
+                            <m:sty m:val="p"/>
+                          </m:rPr>
+                          <a:rPr lang="en-US" b="0" i="0" dirty="0" smtClean="0">
+                            <a:latin typeface="Cambria Math" panose="02040503050406030204" pitchFamily="18" charset="0"/>
+                          </a:rPr>
+                          <m:t>S</m:t>
+                        </m:r>
+                      </m:e>
+                    </m:d>
+                    <m:r>
+                      <a:rPr lang="en-US" b="0" i="1" dirty="0" smtClean="0">
+                        <a:latin typeface="Cambria Math" panose="02040503050406030204" pitchFamily="18" charset="0"/>
+                      </a:rPr>
+                      <m:t>→(</m:t>
+                    </m:r>
+                    <m:r>
+                      <a:rPr lang="en-US" b="0" i="1" dirty="0" smtClean="0">
+                        <a:latin typeface="Cambria Math" panose="02040503050406030204" pitchFamily="18" charset="0"/>
+                      </a:rPr>
+                      <m:t>𝐵</m:t>
+                    </m:r>
+                    <m:r>
+                      <a:rPr lang="de-DE" i="1" dirty="0">
+                        <a:latin typeface="Cambria Math" panose="02040503050406030204" pitchFamily="18" charset="0"/>
+                      </a:rPr>
+                      <m:t>∨</m:t>
+                    </m:r>
+                  </m:oMath>
+                </a14:m>
+                <a:r>
+                  <a:rPr lang="de-DE" dirty="0"/>
+                  <a:t> </a:t>
+                </a:r>
+                <a14:m>
+                  <m:oMath xmlns:m="http://schemas.openxmlformats.org/officeDocument/2006/math">
+                    <m:r>
+                      <a:rPr lang="de-DE" i="1" dirty="0">
+                        <a:latin typeface="Cambria Math" panose="02040503050406030204" pitchFamily="18" charset="0"/>
+                      </a:rPr>
+                      <m:t>¬</m:t>
+                    </m:r>
+                  </m:oMath>
+                </a14:m>
+                <a:r>
+                  <a:rPr lang="de-DE" dirty="0"/>
+                  <a:t> </a:t>
+                </a:r>
+                <a14:m>
+                  <m:oMath xmlns:m="http://schemas.openxmlformats.org/officeDocument/2006/math">
+                    <m:r>
+                      <a:rPr lang="de-DE" i="1" dirty="0">
+                        <a:latin typeface="Cambria Math" panose="02040503050406030204" pitchFamily="18" charset="0"/>
+                      </a:rPr>
+                      <m:t>𝑃</m:t>
+                    </m:r>
+                  </m:oMath>
+                </a14:m>
+                <a:r>
+                  <a:rPr lang="en-US" dirty="0"/>
+                  <a:t>) </a:t>
+                </a:r>
+                <a:r>
+                  <a:rPr lang="de-DE" dirty="0"/>
+                  <a:t>„Wenn es regnet und die Sonne scheint, ist am Himmel ein Regenbogen zu sehen, oder wir befinden uns nicht an der richtigen Position“</a:t>
+                </a:r>
+              </a:p>
+            </p:txBody>
+          </p:sp>
+        </mc:Choice>
+        <mc:Fallback>
+          <p:sp>
+            <p:nvSpPr>
+              <p:cNvPr id="3" name="Content Placeholder 2">
+                <a:extLst>
+                  <a:ext uri="{FF2B5EF4-FFF2-40B4-BE49-F238E27FC236}">
+                    <a16:creationId xmlns:a16="http://schemas.microsoft.com/office/drawing/2014/main" id="{3586C794-D4D9-4CCA-B897-3082D1FD45B3}"/>
+                  </a:ext>
+                </a:extLst>
+              </p:cNvPr>
+              <p:cNvSpPr>
+                <a:spLocks noGrp="1" noRot="1" noChangeAspect="1" noMove="1" noResize="1" noEditPoints="1" noAdjustHandles="1" noChangeArrowheads="1" noChangeShapeType="1" noTextEdit="1"/>
+              </p:cNvSpPr>
+              <p:nvPr>
+                <p:ph idx="1"/>
+              </p:nvPr>
+            </p:nvSpPr>
+            <p:spPr>
+              <a:blipFill>
+                <a:blip r:embed="rId3"/>
+                <a:stretch>
+                  <a:fillRect l="-928" t="-3501"/>
+                </a:stretch>
+              </a:blipFill>
+            </p:spPr>
+            <p:txBody>
+              <a:bodyPr/>
+              <a:lstStyle/>
+              <a:p>
+                <a:r>
+                  <a:rPr lang="de-DE">
+                    <a:noFill/>
+                  </a:rPr>
+                  <a:t> </a:t>
+                </a:r>
+              </a:p>
+            </p:txBody>
+          </p:sp>
+        </mc:Fallback>
+      </mc:AlternateContent>
+      <p:pic>
+        <p:nvPicPr>
+          <p:cNvPr id="1026" name="Picture 2">
             <a:extLst>
               <a:ext uri="{FF2B5EF4-FFF2-40B4-BE49-F238E27FC236}">
-                <a16:creationId xmlns:a16="http://schemas.microsoft.com/office/drawing/2014/main" id="{3586C794-D4D9-4CCA-B897-3082D1FD45B3}"/>
+                <a16:creationId xmlns:a16="http://schemas.microsoft.com/office/drawing/2014/main" id="{447FE358-0C76-406C-82B9-49B75A574192}"/>
               </a:ext>
             </a:extLst>
           </p:cNvPr>
-          <p:cNvSpPr>
-            <a:spLocks noGrp="1"/>
-          </p:cNvSpPr>
-          <p:nvPr>
-            <p:ph idx="1"/>
-          </p:nvPr>
-        </p:nvSpPr>
-        <p:spPr/>
-        <p:txBody>
-          <a:bodyPr/>
-          <a:lstStyle/>
-          <a:p>
-            <a:endParaRPr lang="de-DE"/>
-          </a:p>
-        </p:txBody>
-      </p:sp>
+          <p:cNvPicPr>
+            <a:picLocks noChangeAspect="1" noChangeArrowheads="1"/>
+          </p:cNvPicPr>
+          <p:nvPr/>
+        </p:nvPicPr>
+        <p:blipFill>
+          <a:blip r:embed="rId4">
+            <a:extLst>
+              <a:ext uri="{28A0092B-C50C-407E-A947-70E740481C1C}">
+                <a14:useLocalDpi xmlns:a14="http://schemas.microsoft.com/office/drawing/2010/main" val="0"/>
+              </a:ext>
+            </a:extLst>
+          </a:blip>
+          <a:srcRect/>
+          <a:stretch>
+            <a:fillRect/>
+          </a:stretch>
+        </p:blipFill>
+        <p:spPr bwMode="auto">
+          <a:xfrm>
+            <a:off x="127000" y="0"/>
+            <a:ext cx="9525" cy="9525"/>
+          </a:xfrm>
+          <a:prstGeom prst="rect">
+            <a:avLst/>
+          </a:prstGeom>
+          <a:noFill/>
+          <a:extLst>
+            <a:ext uri="{909E8E84-426E-40DD-AFC4-6F175D3DCCD1}">
+              <a14:hiddenFill xmlns:a14="http://schemas.microsoft.com/office/drawing/2010/main">
+                <a:solidFill>
+                  <a:srgbClr val="FFFFFF"/>
+                </a:solidFill>
+              </a14:hiddenFill>
+            </a:ext>
+          </a:extLst>
+        </p:spPr>
+      </p:pic>
+      <p:pic>
+        <p:nvPicPr>
+          <p:cNvPr id="1030" name="Picture 6">
+            <a:extLst>
+              <a:ext uri="{FF2B5EF4-FFF2-40B4-BE49-F238E27FC236}">
+                <a16:creationId xmlns:a16="http://schemas.microsoft.com/office/drawing/2014/main" id="{F9A8DADE-F15B-47E3-B94E-AA7A54484599}"/>
+              </a:ext>
+            </a:extLst>
+          </p:cNvPr>
+          <p:cNvPicPr>
+            <a:picLocks noChangeAspect="1" noChangeArrowheads="1"/>
+          </p:cNvPicPr>
+          <p:nvPr/>
+        </p:nvPicPr>
+        <p:blipFill>
+          <a:blip r:embed="rId4">
+            <a:extLst>
+              <a:ext uri="{28A0092B-C50C-407E-A947-70E740481C1C}">
+                <a14:useLocalDpi xmlns:a14="http://schemas.microsoft.com/office/drawing/2010/main" val="0"/>
+              </a:ext>
+            </a:extLst>
+          </a:blip>
+          <a:srcRect/>
+          <a:stretch>
+            <a:fillRect/>
+          </a:stretch>
+        </p:blipFill>
+        <p:spPr bwMode="auto">
+          <a:xfrm>
+            <a:off x="127000" y="-411163"/>
+            <a:ext cx="9525" cy="9525"/>
+          </a:xfrm>
+          <a:prstGeom prst="rect">
+            <a:avLst/>
+          </a:prstGeom>
+          <a:noFill/>
+          <a:extLst>
+            <a:ext uri="{909E8E84-426E-40DD-AFC4-6F175D3DCCD1}">
+              <a14:hiddenFill xmlns:a14="http://schemas.microsoft.com/office/drawing/2010/main">
+                <a:solidFill>
+                  <a:srgbClr val="FFFFFF"/>
+                </a:solidFill>
+              </a14:hiddenFill>
+            </a:ext>
+          </a:extLst>
+        </p:spPr>
+      </p:pic>
+      <p:pic>
+        <p:nvPicPr>
+          <p:cNvPr id="1032" name="Picture 8">
+            <a:extLst>
+              <a:ext uri="{FF2B5EF4-FFF2-40B4-BE49-F238E27FC236}">
+                <a16:creationId xmlns:a16="http://schemas.microsoft.com/office/drawing/2014/main" id="{03BDB648-67F2-4876-B790-380EA82181D3}"/>
+              </a:ext>
+            </a:extLst>
+          </p:cNvPr>
+          <p:cNvPicPr>
+            <a:picLocks noChangeAspect="1" noChangeArrowheads="1"/>
+          </p:cNvPicPr>
+          <p:nvPr/>
+        </p:nvPicPr>
+        <p:blipFill>
+          <a:blip r:embed="rId4">
+            <a:extLst>
+              <a:ext uri="{28A0092B-C50C-407E-A947-70E740481C1C}">
+                <a14:useLocalDpi xmlns:a14="http://schemas.microsoft.com/office/drawing/2010/main" val="0"/>
+              </a:ext>
+            </a:extLst>
+          </a:blip>
+          <a:srcRect/>
+          <a:stretch>
+            <a:fillRect/>
+          </a:stretch>
+        </p:blipFill>
+        <p:spPr bwMode="auto">
+          <a:xfrm>
+            <a:off x="279400" y="-258763"/>
+            <a:ext cx="9525" cy="9525"/>
+          </a:xfrm>
+          <a:prstGeom prst="rect">
+            <a:avLst/>
+          </a:prstGeom>
+          <a:noFill/>
+          <a:extLst>
+            <a:ext uri="{909E8E84-426E-40DD-AFC4-6F175D3DCCD1}">
+              <a14:hiddenFill xmlns:a14="http://schemas.microsoft.com/office/drawing/2010/main">
+                <a:solidFill>
+                  <a:srgbClr val="FFFFFF"/>
+                </a:solidFill>
+              </a14:hiddenFill>
+            </a:ext>
+          </a:extLst>
+        </p:spPr>
+      </p:pic>
     </p:spTree>
     <p:extLst>
       <p:ext uri="{BB962C8B-B14F-4D97-AF65-F5344CB8AC3E}">
@@ -5980,6 +7924,386 @@
           <p:cNvPr id="2" name="Title 1">
             <a:extLst>
               <a:ext uri="{FF2B5EF4-FFF2-40B4-BE49-F238E27FC236}">
+                <a16:creationId xmlns:a16="http://schemas.microsoft.com/office/drawing/2014/main" id="{4251099A-6D8A-47FF-957D-AD073F2BA5BB}"/>
+              </a:ext>
+            </a:extLst>
+          </p:cNvPr>
+          <p:cNvSpPr>
+            <a:spLocks noGrp="1"/>
+          </p:cNvSpPr>
+          <p:nvPr>
+            <p:ph type="title"/>
+          </p:nvPr>
+        </p:nvSpPr>
+        <p:spPr/>
+        <p:txBody>
+          <a:bodyPr/>
+          <a:lstStyle/>
+          <a:p>
+            <a:r>
+              <a:rPr lang="de-DE" dirty="0"/>
+              <a:t>Aussagenlogische Äquivalenz (≡)</a:t>
+            </a:r>
+          </a:p>
+        </p:txBody>
+      </p:sp>
+      <mc:AlternateContent xmlns:mc="http://schemas.openxmlformats.org/markup-compatibility/2006">
+        <mc:Choice xmlns:a14="http://schemas.microsoft.com/office/drawing/2010/main" Requires="a14">
+          <p:sp>
+            <p:nvSpPr>
+              <p:cNvPr id="3" name="Content Placeholder 2">
+                <a:extLst>
+                  <a:ext uri="{FF2B5EF4-FFF2-40B4-BE49-F238E27FC236}">
+                    <a16:creationId xmlns:a16="http://schemas.microsoft.com/office/drawing/2014/main" id="{32E907D7-0231-4067-8A21-F84AF5A56E17}"/>
+                  </a:ext>
+                </a:extLst>
+              </p:cNvPr>
+              <p:cNvSpPr>
+                <a:spLocks noGrp="1"/>
+              </p:cNvSpPr>
+              <p:nvPr>
+                <p:ph idx="1"/>
+              </p:nvPr>
+            </p:nvSpPr>
+            <p:spPr/>
+            <p:txBody>
+              <a:bodyPr/>
+              <a:lstStyle/>
+              <a:p>
+                <a:r>
+                  <a:rPr lang="de-DE" dirty="0"/>
+                  <a:t>Einige aussagenlogische Formeln sind äquivalent, also gleichbedeutend.</a:t>
+                </a:r>
+              </a:p>
+              <a:p>
+                <a:pPr lvl="1"/>
+                <a:r>
+                  <a:rPr lang="de-DE" dirty="0"/>
+                  <a:t>Sie werden für die gleichen aussagenlogischen Variablen wahr.</a:t>
+                </a:r>
+              </a:p>
+              <a:p>
+                <a:r>
+                  <a:rPr lang="de-DE" dirty="0"/>
+                  <a:t>Beispiele:</a:t>
+                </a:r>
+              </a:p>
+              <a:p>
+                <a:pPr marL="457200" lvl="1" indent="0">
+                  <a:buNone/>
+                </a:pPr>
+                <a14:m>
+                  <m:oMathPara xmlns:m="http://schemas.openxmlformats.org/officeDocument/2006/math">
+                    <m:oMathParaPr>
+                      <m:jc m:val="left"/>
+                    </m:oMathParaPr>
+                    <m:oMath xmlns:m="http://schemas.openxmlformats.org/officeDocument/2006/math">
+                      <m:r>
+                        <a:rPr lang="en-US" b="0" i="1" smtClean="0">
+                          <a:latin typeface="Cambria Math" panose="02040503050406030204" pitchFamily="18" charset="0"/>
+                        </a:rPr>
+                        <m:t>𝑟</m:t>
+                      </m:r>
+                      <m:r>
+                        <a:rPr lang="en-US" b="0" i="1" smtClean="0">
+                          <a:latin typeface="Cambria Math" panose="02040503050406030204" pitchFamily="18" charset="0"/>
+                        </a:rPr>
+                        <m:t>→</m:t>
+                      </m:r>
+                      <m:r>
+                        <a:rPr lang="en-US" b="0" i="1" smtClean="0">
+                          <a:latin typeface="Cambria Math" panose="02040503050406030204" pitchFamily="18" charset="0"/>
+                        </a:rPr>
+                        <m:t>𝑠</m:t>
+                      </m:r>
+                      <m:r>
+                        <a:rPr lang="en-US" b="0" i="1" smtClean="0">
+                          <a:latin typeface="Cambria Math" panose="02040503050406030204" pitchFamily="18" charset="0"/>
+                        </a:rPr>
+                        <m:t> </m:t>
+                      </m:r>
+                      <m:r>
+                        <m:rPr>
+                          <m:nor/>
+                        </m:rPr>
+                        <a:rPr lang="en-US">
+                          <a:latin typeface="Cambria Math" panose="02040503050406030204" pitchFamily="18" charset="0"/>
+                          <a:ea typeface="Cambria Math" panose="02040503050406030204" pitchFamily="18" charset="0"/>
+                        </a:rPr>
+                        <m:t>≡</m:t>
+                      </m:r>
+                      <m:r>
+                        <m:rPr>
+                          <m:nor/>
+                        </m:rPr>
+                        <a:rPr lang="en-US" b="0" i="0" smtClean="0">
+                          <a:latin typeface="Cambria Math" panose="02040503050406030204" pitchFamily="18" charset="0"/>
+                          <a:ea typeface="Cambria Math" panose="02040503050406030204" pitchFamily="18" charset="0"/>
+                        </a:rPr>
+                        <m:t> </m:t>
+                      </m:r>
+                      <m:r>
+                        <a:rPr lang="en-US" b="0" i="1" smtClean="0">
+                          <a:latin typeface="Cambria Math" panose="02040503050406030204" pitchFamily="18" charset="0"/>
+                          <a:ea typeface="Cambria Math" panose="02040503050406030204" pitchFamily="18" charset="0"/>
+                        </a:rPr>
+                        <m:t>¬</m:t>
+                      </m:r>
+                      <m:r>
+                        <a:rPr lang="en-US" b="0" i="1" smtClean="0">
+                          <a:latin typeface="Cambria Math" panose="02040503050406030204" pitchFamily="18" charset="0"/>
+                          <a:ea typeface="Cambria Math" panose="02040503050406030204" pitchFamily="18" charset="0"/>
+                        </a:rPr>
+                        <m:t>𝑠</m:t>
+                      </m:r>
+                      <m:r>
+                        <a:rPr lang="en-US" b="0" i="1" smtClean="0">
+                          <a:latin typeface="Cambria Math" panose="02040503050406030204" pitchFamily="18" charset="0"/>
+                          <a:ea typeface="Cambria Math" panose="02040503050406030204" pitchFamily="18" charset="0"/>
+                        </a:rPr>
+                        <m:t>→¬</m:t>
+                      </m:r>
+                      <m:r>
+                        <a:rPr lang="en-US" b="0" i="1" smtClean="0">
+                          <a:latin typeface="Cambria Math" panose="02040503050406030204" pitchFamily="18" charset="0"/>
+                          <a:ea typeface="Cambria Math" panose="02040503050406030204" pitchFamily="18" charset="0"/>
+                        </a:rPr>
+                        <m:t>𝑟</m:t>
+                      </m:r>
+                    </m:oMath>
+                  </m:oMathPara>
+                </a14:m>
+                <a:endParaRPr lang="de-DE" dirty="0"/>
+              </a:p>
+              <a:p>
+                <a:pPr marL="457200" lvl="1" indent="0">
+                  <a:buNone/>
+                </a:pPr>
+                <a14:m>
+                  <m:oMathPara xmlns:m="http://schemas.openxmlformats.org/officeDocument/2006/math">
+                    <m:oMathParaPr>
+                      <m:jc m:val="left"/>
+                    </m:oMathParaPr>
+                    <m:oMath xmlns:m="http://schemas.openxmlformats.org/officeDocument/2006/math">
+                      <m:r>
+                        <a:rPr lang="en-US" b="0" i="1" smtClean="0">
+                          <a:latin typeface="Cambria Math" panose="02040503050406030204" pitchFamily="18" charset="0"/>
+                          <a:ea typeface="Cambria Math" panose="02040503050406030204" pitchFamily="18" charset="0"/>
+                        </a:rPr>
+                        <m:t>¬</m:t>
+                      </m:r>
+                      <m:r>
+                        <m:rPr>
+                          <m:nor/>
+                        </m:rPr>
+                        <a:rPr lang="en-US" b="0" i="0" smtClean="0">
+                          <a:latin typeface="Cambria Math" panose="02040503050406030204" pitchFamily="18" charset="0"/>
+                          <a:ea typeface="Cambria Math" panose="02040503050406030204" pitchFamily="18" charset="0"/>
+                        </a:rPr>
+                        <m:t>(</m:t>
+                      </m:r>
+                      <m:r>
+                        <m:rPr>
+                          <m:nor/>
+                        </m:rPr>
+                        <a:rPr lang="en-US" b="0" i="0" smtClean="0">
+                          <a:latin typeface="Cambria Math" panose="02040503050406030204" pitchFamily="18" charset="0"/>
+                          <a:ea typeface="Cambria Math" panose="02040503050406030204" pitchFamily="18" charset="0"/>
+                        </a:rPr>
+                        <m:t>r</m:t>
+                      </m:r>
+                      <m:r>
+                        <a:rPr lang="en-US" b="0" i="1" smtClean="0">
+                          <a:latin typeface="Cambria Math" panose="02040503050406030204" pitchFamily="18" charset="0"/>
+                          <a:ea typeface="Cambria Math" panose="02040503050406030204" pitchFamily="18" charset="0"/>
+                        </a:rPr>
+                        <m:t>∧</m:t>
+                      </m:r>
+                      <m:r>
+                        <a:rPr lang="en-US" b="0" i="1" smtClean="0">
+                          <a:latin typeface="Cambria Math" panose="02040503050406030204" pitchFamily="18" charset="0"/>
+                          <a:ea typeface="Cambria Math" panose="02040503050406030204" pitchFamily="18" charset="0"/>
+                        </a:rPr>
+                        <m:t>𝑠</m:t>
+                      </m:r>
+                      <m:r>
+                        <a:rPr lang="en-US" b="0" i="1" smtClean="0">
+                          <a:latin typeface="Cambria Math" panose="02040503050406030204" pitchFamily="18" charset="0"/>
+                          <a:ea typeface="Cambria Math" panose="02040503050406030204" pitchFamily="18" charset="0"/>
+                        </a:rPr>
+                        <m:t>) </m:t>
+                      </m:r>
+                      <m:r>
+                        <m:rPr>
+                          <m:nor/>
+                        </m:rPr>
+                        <a:rPr lang="en-US">
+                          <a:latin typeface="Cambria Math" panose="02040503050406030204" pitchFamily="18" charset="0"/>
+                          <a:ea typeface="Cambria Math" panose="02040503050406030204" pitchFamily="18" charset="0"/>
+                        </a:rPr>
+                        <m:t>≡</m:t>
+                      </m:r>
+                      <m:r>
+                        <m:rPr>
+                          <m:nor/>
+                        </m:rPr>
+                        <a:rPr lang="en-US" b="0" i="0" smtClean="0">
+                          <a:latin typeface="Cambria Math" panose="02040503050406030204" pitchFamily="18" charset="0"/>
+                          <a:ea typeface="Cambria Math" panose="02040503050406030204" pitchFamily="18" charset="0"/>
+                        </a:rPr>
+                        <m:t> </m:t>
+                      </m:r>
+                      <m:r>
+                        <a:rPr lang="en-US" b="0" i="1" smtClean="0">
+                          <a:latin typeface="Cambria Math" panose="02040503050406030204" pitchFamily="18" charset="0"/>
+                          <a:ea typeface="Cambria Math" panose="02040503050406030204" pitchFamily="18" charset="0"/>
+                        </a:rPr>
+                        <m:t>¬</m:t>
+                      </m:r>
+                      <m:r>
+                        <a:rPr lang="en-US" b="0" i="1" smtClean="0">
+                          <a:latin typeface="Cambria Math" panose="02040503050406030204" pitchFamily="18" charset="0"/>
+                          <a:ea typeface="Cambria Math" panose="02040503050406030204" pitchFamily="18" charset="0"/>
+                        </a:rPr>
+                        <m:t>𝑟</m:t>
+                      </m:r>
+                      <m:r>
+                        <a:rPr lang="en-US" b="0" i="1" smtClean="0">
+                          <a:latin typeface="Cambria Math" panose="02040503050406030204" pitchFamily="18" charset="0"/>
+                          <a:ea typeface="Cambria Math" panose="02040503050406030204" pitchFamily="18" charset="0"/>
+                        </a:rPr>
+                        <m:t>∨¬</m:t>
+                      </m:r>
+                      <m:r>
+                        <a:rPr lang="en-US" b="0" i="1" smtClean="0">
+                          <a:latin typeface="Cambria Math" panose="02040503050406030204" pitchFamily="18" charset="0"/>
+                          <a:ea typeface="Cambria Math" panose="02040503050406030204" pitchFamily="18" charset="0"/>
+                        </a:rPr>
+                        <m:t>𝑠</m:t>
+                      </m:r>
+                    </m:oMath>
+                  </m:oMathPara>
+                </a14:m>
+                <a:endParaRPr lang="de-DE" dirty="0"/>
+              </a:p>
+            </p:txBody>
+          </p:sp>
+        </mc:Choice>
+        <mc:Fallback>
+          <p:sp>
+            <p:nvSpPr>
+              <p:cNvPr id="3" name="Content Placeholder 2">
+                <a:extLst>
+                  <a:ext uri="{FF2B5EF4-FFF2-40B4-BE49-F238E27FC236}">
+                    <a16:creationId xmlns:a16="http://schemas.microsoft.com/office/drawing/2014/main" id="{32E907D7-0231-4067-8A21-F84AF5A56E17}"/>
+                  </a:ext>
+                </a:extLst>
+              </p:cNvPr>
+              <p:cNvSpPr>
+                <a:spLocks noGrp="1" noRot="1" noChangeAspect="1" noMove="1" noResize="1" noEditPoints="1" noAdjustHandles="1" noChangeArrowheads="1" noChangeShapeType="1" noTextEdit="1"/>
+              </p:cNvSpPr>
+              <p:nvPr>
+                <p:ph idx="1"/>
+              </p:nvPr>
+            </p:nvSpPr>
+            <p:spPr>
+              <a:blipFill>
+                <a:blip r:embed="rId2"/>
+                <a:stretch>
+                  <a:fillRect l="-1043" t="-2241"/>
+                </a:stretch>
+              </a:blipFill>
+            </p:spPr>
+            <p:txBody>
+              <a:bodyPr/>
+              <a:lstStyle/>
+              <a:p>
+                <a:r>
+                  <a:rPr lang="de-DE">
+                    <a:noFill/>
+                  </a:rPr>
+                  <a:t> </a:t>
+                </a:r>
+              </a:p>
+            </p:txBody>
+          </p:sp>
+        </mc:Fallback>
+      </mc:AlternateContent>
+      <p:pic>
+        <p:nvPicPr>
+          <p:cNvPr id="4" name="Content Placeholder 4" descr="Paperclip with solid fill">
+            <a:hlinkClick r:id="rId3"/>
+            <a:extLst>
+              <a:ext uri="{FF2B5EF4-FFF2-40B4-BE49-F238E27FC236}">
+                <a16:creationId xmlns:a16="http://schemas.microsoft.com/office/drawing/2014/main" id="{ED963C25-12CC-49AC-AB4E-D00A5A58808B}"/>
+              </a:ext>
+            </a:extLst>
+          </p:cNvPr>
+          <p:cNvPicPr>
+            <a:picLocks noChangeAspect="1"/>
+          </p:cNvPicPr>
+          <p:nvPr/>
+        </p:nvPicPr>
+        <p:blipFill>
+          <a:blip r:embed="rId4">
+            <a:extLst>
+              <a:ext uri="{28A0092B-C50C-407E-A947-70E740481C1C}">
+                <a14:useLocalDpi xmlns:a14="http://schemas.microsoft.com/office/drawing/2010/main" val="0"/>
+              </a:ext>
+              <a:ext uri="{96DAC541-7B7A-43D3-8B79-37D633B846F1}">
+                <asvg:svgBlip xmlns:asvg="http://schemas.microsoft.com/office/drawing/2016/SVG/main" r:embed="rId5"/>
+              </a:ext>
+            </a:extLst>
+          </a:blip>
+          <a:stretch>
+            <a:fillRect/>
+          </a:stretch>
+        </p:blipFill>
+        <p:spPr>
+          <a:xfrm rot="1800000">
+            <a:off x="11277600" y="5943600"/>
+            <a:ext cx="914400" cy="914400"/>
+          </a:xfrm>
+          <a:prstGeom prst="rect">
+            <a:avLst/>
+          </a:prstGeom>
+        </p:spPr>
+      </p:pic>
+    </p:spTree>
+    <p:extLst>
+      <p:ext uri="{BB962C8B-B14F-4D97-AF65-F5344CB8AC3E}">
+        <p14:creationId xmlns:p14="http://schemas.microsoft.com/office/powerpoint/2010/main" val="3448193409"/>
+      </p:ext>
+    </p:extLst>
+  </p:cSld>
+  <p:clrMapOvr>
+    <a:masterClrMapping/>
+  </p:clrMapOvr>
+</p:sld>
+</file>
+
+<file path=ppt/slides/slide4.xml><?xml version="1.0" encoding="utf-8"?>
+<p:sld xmlns:a="http://schemas.openxmlformats.org/drawingml/2006/main" xmlns:r="http://schemas.openxmlformats.org/officeDocument/2006/relationships" xmlns:p="http://schemas.openxmlformats.org/presentationml/2006/main">
+  <p:cSld>
+    <p:spTree>
+      <p:nvGrpSpPr>
+        <p:cNvPr id="1" name=""/>
+        <p:cNvGrpSpPr/>
+        <p:nvPr/>
+      </p:nvGrpSpPr>
+      <p:grpSpPr>
+        <a:xfrm>
+          <a:off x="0" y="0"/>
+          <a:ext cx="0" cy="0"/>
+          <a:chOff x="0" y="0"/>
+          <a:chExt cx="0" cy="0"/>
+        </a:xfrm>
+      </p:grpSpPr>
+      <p:sp>
+        <p:nvSpPr>
+          <p:cNvPr id="2" name="Title 1">
+            <a:extLst>
+              <a:ext uri="{FF2B5EF4-FFF2-40B4-BE49-F238E27FC236}">
                 <a16:creationId xmlns:a16="http://schemas.microsoft.com/office/drawing/2014/main" id="{A7647CC9-1D60-40D7-8CFC-EFB16059FAB7}"/>
               </a:ext>
             </a:extLst>
@@ -6047,7 +8371,7 @@
 </p:sld>
 </file>
 
-<file path=ppt/slides/slide4.xml><?xml version="1.0" encoding="utf-8"?>
+<file path=ppt/slides/slide5.xml><?xml version="1.0" encoding="utf-8"?>
 <p:sld xmlns:a="http://schemas.openxmlformats.org/drawingml/2006/main" xmlns:r="http://schemas.openxmlformats.org/officeDocument/2006/relationships" xmlns:p="http://schemas.openxmlformats.org/presentationml/2006/main">
   <p:cSld>
     <p:spTree>
@@ -6895,95 +9219,6 @@
 </p:sld>
 </file>
 
-<file path=ppt/slides/slide5.xml><?xml version="1.0" encoding="utf-8"?>
-<p:sld xmlns:a="http://schemas.openxmlformats.org/drawingml/2006/main" xmlns:r="http://schemas.openxmlformats.org/officeDocument/2006/relationships" xmlns:p="http://schemas.openxmlformats.org/presentationml/2006/main">
-  <p:cSld>
-    <p:spTree>
-      <p:nvGrpSpPr>
-        <p:cNvPr id="1" name=""/>
-        <p:cNvGrpSpPr/>
-        <p:nvPr/>
-      </p:nvGrpSpPr>
-      <p:grpSpPr>
-        <a:xfrm>
-          <a:off x="0" y="0"/>
-          <a:ext cx="0" cy="0"/>
-          <a:chOff x="0" y="0"/>
-          <a:chExt cx="0" cy="0"/>
-        </a:xfrm>
-      </p:grpSpPr>
-      <p:sp>
-        <p:nvSpPr>
-          <p:cNvPr id="2" name="Title 1">
-            <a:extLst>
-              <a:ext uri="{FF2B5EF4-FFF2-40B4-BE49-F238E27FC236}">
-                <a16:creationId xmlns:a16="http://schemas.microsoft.com/office/drawing/2014/main" id="{42DC75CD-4445-4A15-B7F6-B39F21B5C804}"/>
-              </a:ext>
-            </a:extLst>
-          </p:cNvPr>
-          <p:cNvSpPr>
-            <a:spLocks noGrp="1"/>
-          </p:cNvSpPr>
-          <p:nvPr>
-            <p:ph type="title"/>
-          </p:nvPr>
-        </p:nvSpPr>
-        <p:spPr/>
-        <p:txBody>
-          <a:bodyPr/>
-          <a:lstStyle/>
-          <a:p>
-            <a:r>
-              <a:rPr lang="de-DE" dirty="0"/>
-              <a:t>Abbildungen</a:t>
-            </a:r>
-          </a:p>
-        </p:txBody>
-      </p:sp>
-      <p:sp>
-        <p:nvSpPr>
-          <p:cNvPr id="3" name="Content Placeholder 2">
-            <a:extLst>
-              <a:ext uri="{FF2B5EF4-FFF2-40B4-BE49-F238E27FC236}">
-                <a16:creationId xmlns:a16="http://schemas.microsoft.com/office/drawing/2014/main" id="{F5A1C33F-7E13-4458-854B-7C2F4AABE23E}"/>
-              </a:ext>
-            </a:extLst>
-          </p:cNvPr>
-          <p:cNvSpPr>
-            <a:spLocks noGrp="1"/>
-          </p:cNvSpPr>
-          <p:nvPr>
-            <p:ph idx="1"/>
-          </p:nvPr>
-        </p:nvSpPr>
-        <p:spPr/>
-        <p:txBody>
-          <a:bodyPr/>
-          <a:lstStyle/>
-          <a:p>
-            <a:pPr marL="0" indent="0">
-              <a:buNone/>
-            </a:pPr>
-            <a:r>
-              <a:rPr lang="de-DE" dirty="0"/>
-              <a:t>…</a:t>
-            </a:r>
-          </a:p>
-        </p:txBody>
-      </p:sp>
-    </p:spTree>
-    <p:extLst>
-      <p:ext uri="{BB962C8B-B14F-4D97-AF65-F5344CB8AC3E}">
-        <p14:creationId xmlns:p14="http://schemas.microsoft.com/office/powerpoint/2010/main" val="2431755781"/>
-      </p:ext>
-    </p:extLst>
-  </p:cSld>
-  <p:clrMapOvr>
-    <a:masterClrMapping/>
-  </p:clrMapOvr>
-</p:sld>
-</file>
-
 <file path=ppt/slides/slide6.xml><?xml version="1.0" encoding="utf-8"?>
 <p:sld xmlns:a="http://schemas.openxmlformats.org/drawingml/2006/main" xmlns:r="http://schemas.openxmlformats.org/officeDocument/2006/relationships" xmlns:p="http://schemas.openxmlformats.org/presentationml/2006/main">
   <p:cSld>
@@ -7006,7 +9241,7 @@
           <p:cNvPr id="2" name="Title 1">
             <a:extLst>
               <a:ext uri="{FF2B5EF4-FFF2-40B4-BE49-F238E27FC236}">
-                <a16:creationId xmlns:a16="http://schemas.microsoft.com/office/drawing/2014/main" id="{5B4199F9-3DD9-4E02-AEC5-0533753A5FED}"/>
+                <a16:creationId xmlns:a16="http://schemas.microsoft.com/office/drawing/2014/main" id="{D2FB0AE9-54DA-43FC-ADBB-5EA72E9A06F1}"/>
               </a:ext>
             </a:extLst>
           </p:cNvPr>
@@ -7023,12 +9258,8 @@
           <a:lstStyle/>
           <a:p>
             <a:r>
-              <a:rPr lang="de-DE" dirty="0">
-                <a:solidFill>
-                  <a:srgbClr val="F2F5FA"/>
-                </a:solidFill>
-              </a:rPr>
-              <a:t>Induktion</a:t>
+              <a:rPr lang="de-DE" dirty="0"/>
+              <a:t>Tupel</a:t>
             </a:r>
           </a:p>
         </p:txBody>
@@ -7038,7 +9269,7 @@
           <p:cNvPr id="3" name="Content Placeholder 2">
             <a:extLst>
               <a:ext uri="{FF2B5EF4-FFF2-40B4-BE49-F238E27FC236}">
-                <a16:creationId xmlns:a16="http://schemas.microsoft.com/office/drawing/2014/main" id="{3CAEE54A-741D-4374-B20B-25EB1C6A68A5}"/>
+                <a16:creationId xmlns:a16="http://schemas.microsoft.com/office/drawing/2014/main" id="{E989C648-C724-427A-84CD-2A66F80364AE}"/>
               </a:ext>
             </a:extLst>
           </p:cNvPr>
@@ -7061,7 +9292,7 @@
     </p:spTree>
     <p:extLst>
       <p:ext uri="{BB962C8B-B14F-4D97-AF65-F5344CB8AC3E}">
-        <p14:creationId xmlns:p14="http://schemas.microsoft.com/office/powerpoint/2010/main" val="1101259169"/>
+        <p14:creationId xmlns:p14="http://schemas.microsoft.com/office/powerpoint/2010/main" val="3055803708"/>
       </p:ext>
     </p:extLst>
   </p:cSld>
@@ -7088,41 +9319,40 @@
           <a:chExt cx="0" cy="0"/>
         </a:xfrm>
       </p:grpSpPr>
-      <p:pic>
-        <p:nvPicPr>
-          <p:cNvPr id="9" name="Grafik 8">
+      <p:sp>
+        <p:nvSpPr>
+          <p:cNvPr id="2" name="Title 1">
             <a:extLst>
               <a:ext uri="{FF2B5EF4-FFF2-40B4-BE49-F238E27FC236}">
-                <a16:creationId xmlns:a16="http://schemas.microsoft.com/office/drawing/2014/main" id="{3C690436-4BA1-4750-BD74-C63646866307}"/>
+                <a16:creationId xmlns:a16="http://schemas.microsoft.com/office/drawing/2014/main" id="{CB1393EF-77B7-462B-A621-A22AF4367710}"/>
               </a:ext>
             </a:extLst>
           </p:cNvPr>
-          <p:cNvPicPr>
-            <a:picLocks noChangeAspect="1"/>
-          </p:cNvPicPr>
-          <p:nvPr/>
-        </p:nvPicPr>
-        <p:blipFill rotWithShape="1">
-          <a:blip r:embed="rId2"/>
-          <a:srcRect t="188" r="2036"/>
-          <a:stretch/>
-        </p:blipFill>
-        <p:spPr>
-          <a:xfrm>
-            <a:off x="0" y="0"/>
-            <a:ext cx="12192001" cy="6858000"/>
-          </a:xfrm>
-          <a:prstGeom prst="rect">
-            <a:avLst/>
-          </a:prstGeom>
-        </p:spPr>
-      </p:pic>
-      <p:sp>
-        <p:nvSpPr>
-          <p:cNvPr id="2" name="Titel 1">
+          <p:cNvSpPr>
+            <a:spLocks noGrp="1"/>
+          </p:cNvSpPr>
+          <p:nvPr>
+            <p:ph type="title"/>
+          </p:nvPr>
+        </p:nvSpPr>
+        <p:spPr/>
+        <p:txBody>
+          <a:bodyPr/>
+          <a:lstStyle/>
+          <a:p>
+            <a:r>
+              <a:rPr lang="de-DE" dirty="0"/>
+              <a:t>Kartesisches Produkt</a:t>
+            </a:r>
+          </a:p>
+        </p:txBody>
+      </p:sp>
+      <p:sp>
+        <p:nvSpPr>
+          <p:cNvPr id="3" name="Content Placeholder 2">
             <a:extLst>
               <a:ext uri="{FF2B5EF4-FFF2-40B4-BE49-F238E27FC236}">
-                <a16:creationId xmlns:a16="http://schemas.microsoft.com/office/drawing/2014/main" id="{2AB5A28A-27E3-430A-A012-B6EE913EA5D7}"/>
+                <a16:creationId xmlns:a16="http://schemas.microsoft.com/office/drawing/2014/main" id="{38DC55E9-849E-4D2F-9649-E51746348BEA}"/>
               </a:ext>
             </a:extLst>
           </p:cNvPr>
@@ -7130,35 +9360,22 @@
             <a:spLocks noGrp="1"/>
           </p:cNvSpPr>
           <p:nvPr>
-            <p:ph type="title"/>
-          </p:nvPr>
-        </p:nvSpPr>
-        <p:spPr>
-          <a:xfrm>
-            <a:off x="7340600" y="146050"/>
-            <a:ext cx="4762500" cy="1093788"/>
-          </a:xfrm>
-        </p:spPr>
+            <p:ph idx="1"/>
+          </p:nvPr>
+        </p:nvSpPr>
+        <p:spPr/>
         <p:txBody>
           <a:bodyPr/>
           <a:lstStyle/>
           <a:p>
-            <a:pPr algn="r"/>
-            <a:r>
-              <a:rPr lang="de-DE" b="1" dirty="0">
-                <a:solidFill>
-                  <a:schemeClr val="bg1"/>
-                </a:solidFill>
-              </a:rPr>
-              <a:t>Koordinatensysteme</a:t>
-            </a:r>
+            <a:endParaRPr lang="de-DE"/>
           </a:p>
         </p:txBody>
       </p:sp>
     </p:spTree>
     <p:extLst>
       <p:ext uri="{BB962C8B-B14F-4D97-AF65-F5344CB8AC3E}">
-        <p14:creationId xmlns:p14="http://schemas.microsoft.com/office/powerpoint/2010/main" val="2314456240"/>
+        <p14:creationId xmlns:p14="http://schemas.microsoft.com/office/powerpoint/2010/main" val="1405364305"/>
       </p:ext>
     </p:extLst>
   </p:cSld>
@@ -7185,41 +9402,40 @@
           <a:chExt cx="0" cy="0"/>
         </a:xfrm>
       </p:grpSpPr>
-      <p:pic>
-        <p:nvPicPr>
-          <p:cNvPr id="7" name="Grafik 6">
+      <p:sp>
+        <p:nvSpPr>
+          <p:cNvPr id="2" name="Title 1">
             <a:extLst>
               <a:ext uri="{FF2B5EF4-FFF2-40B4-BE49-F238E27FC236}">
-                <a16:creationId xmlns:a16="http://schemas.microsoft.com/office/drawing/2014/main" id="{B8D266E0-D1B2-4BF4-B792-A0124C1C57C8}"/>
+                <a16:creationId xmlns:a16="http://schemas.microsoft.com/office/drawing/2014/main" id="{DE324D68-0BE0-4520-A10E-C3C76235E807}"/>
               </a:ext>
             </a:extLst>
           </p:cNvPr>
-          <p:cNvPicPr>
-            <a:picLocks noChangeAspect="1"/>
-          </p:cNvPicPr>
-          <p:nvPr/>
-        </p:nvPicPr>
-        <p:blipFill rotWithShape="1">
-          <a:blip r:embed="rId2"/>
-          <a:srcRect b="5511"/>
-          <a:stretch/>
-        </p:blipFill>
-        <p:spPr>
-          <a:xfrm>
-            <a:off x="-1" y="0"/>
-            <a:ext cx="12195649" cy="6858000"/>
-          </a:xfrm>
-          <a:prstGeom prst="rect">
-            <a:avLst/>
-          </a:prstGeom>
-        </p:spPr>
-      </p:pic>
-      <p:sp>
-        <p:nvSpPr>
-          <p:cNvPr id="10" name="Titel 1">
+          <p:cNvSpPr>
+            <a:spLocks noGrp="1"/>
+          </p:cNvSpPr>
+          <p:nvPr>
+            <p:ph type="title"/>
+          </p:nvPr>
+        </p:nvSpPr>
+        <p:spPr/>
+        <p:txBody>
+          <a:bodyPr/>
+          <a:lstStyle/>
+          <a:p>
+            <a:r>
+              <a:rPr lang="de-DE"/>
+              <a:t>Relationen</a:t>
+            </a:r>
+          </a:p>
+        </p:txBody>
+      </p:sp>
+      <p:sp>
+        <p:nvSpPr>
+          <p:cNvPr id="3" name="Content Placeholder 2">
             <a:extLst>
               <a:ext uri="{FF2B5EF4-FFF2-40B4-BE49-F238E27FC236}">
-                <a16:creationId xmlns:a16="http://schemas.microsoft.com/office/drawing/2014/main" id="{4008A494-6719-4027-ABC2-70D8C066BEE3}"/>
+                <a16:creationId xmlns:a16="http://schemas.microsoft.com/office/drawing/2014/main" id="{543FCF70-56C9-4230-90FB-313E3EEAAAF7}"/>
               </a:ext>
             </a:extLst>
           </p:cNvPr>
@@ -7227,35 +9443,22 @@
             <a:spLocks noGrp="1"/>
           </p:cNvSpPr>
           <p:nvPr>
-            <p:ph type="title"/>
-          </p:nvPr>
-        </p:nvSpPr>
-        <p:spPr>
-          <a:xfrm>
-            <a:off x="7340600" y="146050"/>
-            <a:ext cx="4762500" cy="1093788"/>
-          </a:xfrm>
-        </p:spPr>
+            <p:ph idx="1"/>
+          </p:nvPr>
+        </p:nvSpPr>
+        <p:spPr/>
         <p:txBody>
           <a:bodyPr/>
           <a:lstStyle/>
           <a:p>
-            <a:pPr algn="r"/>
-            <a:r>
-              <a:rPr lang="de-DE" b="1" dirty="0">
-                <a:solidFill>
-                  <a:schemeClr val="bg1"/>
-                </a:solidFill>
-              </a:rPr>
-              <a:t>Formen</a:t>
-            </a:r>
+            <a:endParaRPr lang="de-DE"/>
           </a:p>
         </p:txBody>
       </p:sp>
     </p:spTree>
     <p:extLst>
       <p:ext uri="{BB962C8B-B14F-4D97-AF65-F5344CB8AC3E}">
-        <p14:creationId xmlns:p14="http://schemas.microsoft.com/office/powerpoint/2010/main" val="1211913805"/>
+        <p14:creationId xmlns:p14="http://schemas.microsoft.com/office/powerpoint/2010/main" val="335816177"/>
       </p:ext>
     </p:extLst>
   </p:cSld>
@@ -7287,7 +9490,7 @@
           <p:cNvPr id="2" name="Title 1">
             <a:extLst>
               <a:ext uri="{FF2B5EF4-FFF2-40B4-BE49-F238E27FC236}">
-                <a16:creationId xmlns:a16="http://schemas.microsoft.com/office/drawing/2014/main" id="{89019B67-DFA2-477E-97D8-803825FC89C9}"/>
+                <a16:creationId xmlns:a16="http://schemas.microsoft.com/office/drawing/2014/main" id="{7ABB0E3D-50F4-4362-A5A3-5CD186DBF40B}"/>
               </a:ext>
             </a:extLst>
           </p:cNvPr>
@@ -7305,7 +9508,7 @@
           <a:p>
             <a:r>
               <a:rPr lang="de-DE" dirty="0"/>
-              <a:t>Satz des Pythagoras</a:t>
+              <a:t>Binäre Relationen</a:t>
             </a:r>
           </a:p>
         </p:txBody>
@@ -7315,7 +9518,7 @@
           <p:cNvPr id="3" name="Content Placeholder 2">
             <a:extLst>
               <a:ext uri="{FF2B5EF4-FFF2-40B4-BE49-F238E27FC236}">
-                <a16:creationId xmlns:a16="http://schemas.microsoft.com/office/drawing/2014/main" id="{35A6734B-E6D0-402E-9297-5943CCB67049}"/>
+                <a16:creationId xmlns:a16="http://schemas.microsoft.com/office/drawing/2014/main" id="{EE202AE2-C82F-4EDD-8483-D923DC951EDF}"/>
               </a:ext>
             </a:extLst>
           </p:cNvPr>
@@ -7338,7 +9541,7 @@
     </p:spTree>
     <p:extLst>
       <p:ext uri="{BB962C8B-B14F-4D97-AF65-F5344CB8AC3E}">
-        <p14:creationId xmlns:p14="http://schemas.microsoft.com/office/powerpoint/2010/main" val="2957768982"/>
+        <p14:creationId xmlns:p14="http://schemas.microsoft.com/office/powerpoint/2010/main" val="1227479233"/>
       </p:ext>
     </p:extLst>
   </p:cSld>
@@ -7902,4 +10105,299 @@
     </a:ext>
   </a:extLst>
 </a:theme>
+</file>
+
+<file path=ppt/theme/theme3.xml><?xml version="1.0" encoding="utf-8"?>
+<a:theme xmlns:a="http://schemas.openxmlformats.org/drawingml/2006/main" name="Office Theme">
+  <a:themeElements>
+    <a:clrScheme name="Office">
+      <a:dk1>
+        <a:sysClr val="windowText" lastClr="000000"/>
+      </a:dk1>
+      <a:lt1>
+        <a:sysClr val="window" lastClr="FFFFFF"/>
+      </a:lt1>
+      <a:dk2>
+        <a:srgbClr val="44546A"/>
+      </a:dk2>
+      <a:lt2>
+        <a:srgbClr val="E7E6E6"/>
+      </a:lt2>
+      <a:accent1>
+        <a:srgbClr val="4472C4"/>
+      </a:accent1>
+      <a:accent2>
+        <a:srgbClr val="ED7D31"/>
+      </a:accent2>
+      <a:accent3>
+        <a:srgbClr val="A5A5A5"/>
+      </a:accent3>
+      <a:accent4>
+        <a:srgbClr val="FFC000"/>
+      </a:accent4>
+      <a:accent5>
+        <a:srgbClr val="5B9BD5"/>
+      </a:accent5>
+      <a:accent6>
+        <a:srgbClr val="70AD47"/>
+      </a:accent6>
+      <a:hlink>
+        <a:srgbClr val="0563C1"/>
+      </a:hlink>
+      <a:folHlink>
+        <a:srgbClr val="954F72"/>
+      </a:folHlink>
+    </a:clrScheme>
+    <a:fontScheme name="Office">
+      <a:majorFont>
+        <a:latin typeface="Calibri Light" panose="020F0302020204030204"/>
+        <a:ea typeface=""/>
+        <a:cs typeface=""/>
+        <a:font script="Jpan" typeface="游ゴシック Light"/>
+        <a:font script="Hang" typeface="맑은 고딕"/>
+        <a:font script="Hans" typeface="等线 Light"/>
+        <a:font script="Hant" typeface="新細明體"/>
+        <a:font script="Arab" typeface="Times New Roman"/>
+        <a:font script="Hebr" typeface="Times New Roman"/>
+        <a:font script="Thai" typeface="Angsana New"/>
+        <a:font script="Ethi" typeface="Nyala"/>
+        <a:font script="Beng" typeface="Vrinda"/>
+        <a:font script="Gujr" typeface="Shruti"/>
+        <a:font script="Khmr" typeface="MoolBoran"/>
+        <a:font script="Knda" typeface="Tunga"/>
+        <a:font script="Guru" typeface="Raavi"/>
+        <a:font script="Cans" typeface="Euphemia"/>
+        <a:font script="Cher" typeface="Plantagenet Cherokee"/>
+        <a:font script="Yiii" typeface="Microsoft Yi Baiti"/>
+        <a:font script="Tibt" typeface="Microsoft Himalaya"/>
+        <a:font script="Thaa" typeface="MV Boli"/>
+        <a:font script="Deva" typeface="Mangal"/>
+        <a:font script="Telu" typeface="Gautami"/>
+        <a:font script="Taml" typeface="Latha"/>
+        <a:font script="Syrc" typeface="Estrangelo Edessa"/>
+        <a:font script="Orya" typeface="Kalinga"/>
+        <a:font script="Mlym" typeface="Kartika"/>
+        <a:font script="Laoo" typeface="DokChampa"/>
+        <a:font script="Sinh" typeface="Iskoola Pota"/>
+        <a:font script="Mong" typeface="Mongolian Baiti"/>
+        <a:font script="Viet" typeface="Times New Roman"/>
+        <a:font script="Uigh" typeface="Microsoft Uighur"/>
+        <a:font script="Geor" typeface="Sylfaen"/>
+        <a:font script="Armn" typeface="Arial"/>
+        <a:font script="Bugi" typeface="Leelawadee UI"/>
+        <a:font script="Bopo" typeface="Microsoft JhengHei"/>
+        <a:font script="Java" typeface="Javanese Text"/>
+        <a:font script="Lisu" typeface="Segoe UI"/>
+        <a:font script="Mymr" typeface="Myanmar Text"/>
+        <a:font script="Nkoo" typeface="Ebrima"/>
+        <a:font script="Olck" typeface="Nirmala UI"/>
+        <a:font script="Osma" typeface="Ebrima"/>
+        <a:font script="Phag" typeface="Phagspa"/>
+        <a:font script="Syrn" typeface="Estrangelo Edessa"/>
+        <a:font script="Syrj" typeface="Estrangelo Edessa"/>
+        <a:font script="Syre" typeface="Estrangelo Edessa"/>
+        <a:font script="Sora" typeface="Nirmala UI"/>
+        <a:font script="Tale" typeface="Microsoft Tai Le"/>
+        <a:font script="Talu" typeface="Microsoft New Tai Lue"/>
+        <a:font script="Tfng" typeface="Ebrima"/>
+      </a:majorFont>
+      <a:minorFont>
+        <a:latin typeface="Calibri" panose="020F0502020204030204"/>
+        <a:ea typeface=""/>
+        <a:cs typeface=""/>
+        <a:font script="Jpan" typeface="游ゴシック"/>
+        <a:font script="Hang" typeface="맑은 고딕"/>
+        <a:font script="Hans" typeface="等线"/>
+        <a:font script="Hant" typeface="新細明體"/>
+        <a:font script="Arab" typeface="Arial"/>
+        <a:font script="Hebr" typeface="Arial"/>
+        <a:font script="Thai" typeface="Cordia New"/>
+        <a:font script="Ethi" typeface="Nyala"/>
+        <a:font script="Beng" typeface="Vrinda"/>
+        <a:font script="Gujr" typeface="Shruti"/>
+        <a:font script="Khmr" typeface="DaunPenh"/>
+        <a:font script="Knda" typeface="Tunga"/>
+        <a:font script="Guru" typeface="Raavi"/>
+        <a:font script="Cans" typeface="Euphemia"/>
+        <a:font script="Cher" typeface="Plantagenet Cherokee"/>
+        <a:font script="Yiii" typeface="Microsoft Yi Baiti"/>
+        <a:font script="Tibt" typeface="Microsoft Himalaya"/>
+        <a:font script="Thaa" typeface="MV Boli"/>
+        <a:font script="Deva" typeface="Mangal"/>
+        <a:font script="Telu" typeface="Gautami"/>
+        <a:font script="Taml" typeface="Latha"/>
+        <a:font script="Syrc" typeface="Estrangelo Edessa"/>
+        <a:font script="Orya" typeface="Kalinga"/>
+        <a:font script="Mlym" typeface="Kartika"/>
+        <a:font script="Laoo" typeface="DokChampa"/>
+        <a:font script="Sinh" typeface="Iskoola Pota"/>
+        <a:font script="Mong" typeface="Mongolian Baiti"/>
+        <a:font script="Viet" typeface="Arial"/>
+        <a:font script="Uigh" typeface="Microsoft Uighur"/>
+        <a:font script="Geor" typeface="Sylfaen"/>
+        <a:font script="Armn" typeface="Arial"/>
+        <a:font script="Bugi" typeface="Leelawadee UI"/>
+        <a:font script="Bopo" typeface="Microsoft JhengHei"/>
+        <a:font script="Java" typeface="Javanese Text"/>
+        <a:font script="Lisu" typeface="Segoe UI"/>
+        <a:font script="Mymr" typeface="Myanmar Text"/>
+        <a:font script="Nkoo" typeface="Ebrima"/>
+        <a:font script="Olck" typeface="Nirmala UI"/>
+        <a:font script="Osma" typeface="Ebrima"/>
+        <a:font script="Phag" typeface="Phagspa"/>
+        <a:font script="Syrn" typeface="Estrangelo Edessa"/>
+        <a:font script="Syrj" typeface="Estrangelo Edessa"/>
+        <a:font script="Syre" typeface="Estrangelo Edessa"/>
+        <a:font script="Sora" typeface="Nirmala UI"/>
+        <a:font script="Tale" typeface="Microsoft Tai Le"/>
+        <a:font script="Talu" typeface="Microsoft New Tai Lue"/>
+        <a:font script="Tfng" typeface="Ebrima"/>
+      </a:minorFont>
+    </a:fontScheme>
+    <a:fmtScheme name="Office">
+      <a:fillStyleLst>
+        <a:solidFill>
+          <a:schemeClr val="phClr"/>
+        </a:solidFill>
+        <a:gradFill rotWithShape="1">
+          <a:gsLst>
+            <a:gs pos="0">
+              <a:schemeClr val="phClr">
+                <a:lumMod val="110000"/>
+                <a:satMod val="105000"/>
+                <a:tint val="67000"/>
+              </a:schemeClr>
+            </a:gs>
+            <a:gs pos="50000">
+              <a:schemeClr val="phClr">
+                <a:lumMod val="105000"/>
+                <a:satMod val="103000"/>
+                <a:tint val="73000"/>
+              </a:schemeClr>
+            </a:gs>
+            <a:gs pos="100000">
+              <a:schemeClr val="phClr">
+                <a:lumMod val="105000"/>
+                <a:satMod val="109000"/>
+                <a:tint val="81000"/>
+              </a:schemeClr>
+            </a:gs>
+          </a:gsLst>
+          <a:lin ang="5400000" scaled="0"/>
+        </a:gradFill>
+        <a:gradFill rotWithShape="1">
+          <a:gsLst>
+            <a:gs pos="0">
+              <a:schemeClr val="phClr">
+                <a:satMod val="103000"/>
+                <a:lumMod val="102000"/>
+                <a:tint val="94000"/>
+              </a:schemeClr>
+            </a:gs>
+            <a:gs pos="50000">
+              <a:schemeClr val="phClr">
+                <a:satMod val="110000"/>
+                <a:lumMod val="100000"/>
+                <a:shade val="100000"/>
+              </a:schemeClr>
+            </a:gs>
+            <a:gs pos="100000">
+              <a:schemeClr val="phClr">
+                <a:lumMod val="99000"/>
+                <a:satMod val="120000"/>
+                <a:shade val="78000"/>
+              </a:schemeClr>
+            </a:gs>
+          </a:gsLst>
+          <a:lin ang="5400000" scaled="0"/>
+        </a:gradFill>
+      </a:fillStyleLst>
+      <a:lnStyleLst>
+        <a:ln w="6350" cap="flat" cmpd="sng" algn="ctr">
+          <a:solidFill>
+            <a:schemeClr val="phClr"/>
+          </a:solidFill>
+          <a:prstDash val="solid"/>
+          <a:miter lim="800000"/>
+        </a:ln>
+        <a:ln w="12700" cap="flat" cmpd="sng" algn="ctr">
+          <a:solidFill>
+            <a:schemeClr val="phClr"/>
+          </a:solidFill>
+          <a:prstDash val="solid"/>
+          <a:miter lim="800000"/>
+        </a:ln>
+        <a:ln w="19050" cap="flat" cmpd="sng" algn="ctr">
+          <a:solidFill>
+            <a:schemeClr val="phClr"/>
+          </a:solidFill>
+          <a:prstDash val="solid"/>
+          <a:miter lim="800000"/>
+        </a:ln>
+      </a:lnStyleLst>
+      <a:effectStyleLst>
+        <a:effectStyle>
+          <a:effectLst/>
+        </a:effectStyle>
+        <a:effectStyle>
+          <a:effectLst/>
+        </a:effectStyle>
+        <a:effectStyle>
+          <a:effectLst>
+            <a:outerShdw blurRad="57150" dist="19050" dir="5400000" algn="ctr" rotWithShape="0">
+              <a:srgbClr val="000000">
+                <a:alpha val="63000"/>
+              </a:srgbClr>
+            </a:outerShdw>
+          </a:effectLst>
+        </a:effectStyle>
+      </a:effectStyleLst>
+      <a:bgFillStyleLst>
+        <a:solidFill>
+          <a:schemeClr val="phClr"/>
+        </a:solidFill>
+        <a:solidFill>
+          <a:schemeClr val="phClr">
+            <a:tint val="95000"/>
+            <a:satMod val="170000"/>
+          </a:schemeClr>
+        </a:solidFill>
+        <a:gradFill rotWithShape="1">
+          <a:gsLst>
+            <a:gs pos="0">
+              <a:schemeClr val="phClr">
+                <a:tint val="93000"/>
+                <a:satMod val="150000"/>
+                <a:shade val="98000"/>
+                <a:lumMod val="102000"/>
+              </a:schemeClr>
+            </a:gs>
+            <a:gs pos="50000">
+              <a:schemeClr val="phClr">
+                <a:tint val="98000"/>
+                <a:satMod val="130000"/>
+                <a:shade val="90000"/>
+                <a:lumMod val="103000"/>
+              </a:schemeClr>
+            </a:gs>
+            <a:gs pos="100000">
+              <a:schemeClr val="phClr">
+                <a:shade val="63000"/>
+                <a:satMod val="120000"/>
+              </a:schemeClr>
+            </a:gs>
+          </a:gsLst>
+          <a:lin ang="5400000" scaled="0"/>
+        </a:gradFill>
+      </a:bgFillStyleLst>
+    </a:fmtScheme>
+  </a:themeElements>
+  <a:objectDefaults/>
+  <a:extraClrSchemeLst/>
+  <a:extLst>
+    <a:ext uri="{05A4C25C-085E-4340-85A3-A5531E510DB2}">
+      <thm15:themeFamily xmlns:thm15="http://schemas.microsoft.com/office/thememl/2012/main" name="Office Theme" id="{62F939B6-93AF-4DB8-9C6B-D6C7DFDC589F}" vid="{4A3C46E8-61CC-4603-A589-7422A47A8E4A}"/>
+    </a:ext>
+  </a:extLst>
+</a:theme>
 </file>
--- a/src/Mathe.pptx
+++ b/src/Mathe.pptx
@@ -199,7 +199,9 @@
             </a:lvl1pPr>
           </a:lstStyle>
           <a:p>
-            <a:endParaRPr lang="de-DE"/>
+            <a:endParaRPr lang="de-DE" dirty="0">
+              <a:latin typeface="IBM Plex Sans" panose="020B0503050203000203" pitchFamily="34" charset="0"/>
+            </a:endParaRPr>
           </a:p>
         </p:txBody>
       </p:sp>
@@ -237,10 +239,14 @@
           </a:lstStyle>
           <a:p>
             <a:fld id="{7B7CABDD-8B3F-45C4-A152-E69BA35442ED}" type="datetimeFigureOut">
-              <a:rPr lang="de-DE" smtClean="0"/>
-              <a:t>14.11.2025</a:t>
+              <a:rPr lang="de-DE" smtClean="0">
+                <a:latin typeface="IBM Plex Sans" panose="020B0503050203000203" pitchFamily="34" charset="0"/>
+              </a:rPr>
+              <a:t>20.02.2026</a:t>
             </a:fld>
-            <a:endParaRPr lang="de-DE"/>
+            <a:endParaRPr lang="de-DE" dirty="0">
+              <a:latin typeface="IBM Plex Sans" panose="020B0503050203000203" pitchFamily="34" charset="0"/>
+            </a:endParaRPr>
           </a:p>
         </p:txBody>
       </p:sp>
@@ -277,7 +283,9 @@
             </a:lvl1pPr>
           </a:lstStyle>
           <a:p>
-            <a:endParaRPr lang="de-DE"/>
+            <a:endParaRPr lang="de-DE" dirty="0">
+              <a:latin typeface="IBM Plex Sans" panose="020B0503050203000203" pitchFamily="34" charset="0"/>
+            </a:endParaRPr>
           </a:p>
         </p:txBody>
       </p:sp>
@@ -315,10 +323,14 @@
           </a:lstStyle>
           <a:p>
             <a:fld id="{6FA0FEFA-C16C-4FE6-96DC-FBD2E26EB878}" type="slidenum">
-              <a:rPr lang="de-DE" smtClean="0"/>
+              <a:rPr lang="de-DE" smtClean="0">
+                <a:latin typeface="IBM Plex Sans" panose="020B0503050203000203" pitchFamily="34" charset="0"/>
+              </a:rPr>
               <a:t>‹#›</a:t>
             </a:fld>
-            <a:endParaRPr lang="de-DE"/>
+            <a:endParaRPr lang="de-DE" dirty="0">
+              <a:latin typeface="IBM Plex Sans" panose="020B0503050203000203" pitchFamily="34" charset="0"/>
+            </a:endParaRPr>
           </a:p>
         </p:txBody>
       </p:sp>
@@ -378,11 +390,13 @@
           <a:bodyPr vert="horz" lIns="91440" tIns="45720" rIns="91440" bIns="45720" rtlCol="0"/>
           <a:lstStyle>
             <a:lvl1pPr algn="l">
-              <a:defRPr sz="1200"/>
+              <a:defRPr sz="1200">
+                <a:latin typeface="IBM Plex Sans" panose="020B0503050203000203" pitchFamily="34" charset="0"/>
+              </a:defRPr>
             </a:lvl1pPr>
           </a:lstStyle>
           <a:p>
-            <a:endParaRPr lang="de-DE"/>
+            <a:endParaRPr lang="de-DE" dirty="0"/>
           </a:p>
         </p:txBody>
       </p:sp>
@@ -409,15 +423,18 @@
           <a:bodyPr vert="horz" lIns="91440" tIns="45720" rIns="91440" bIns="45720" rtlCol="0"/>
           <a:lstStyle>
             <a:lvl1pPr algn="r">
-              <a:defRPr sz="1200"/>
+              <a:defRPr sz="1200">
+                <a:latin typeface="IBM Plex Sans" panose="020B0503050203000203" pitchFamily="34" charset="0"/>
+              </a:defRPr>
             </a:lvl1pPr>
           </a:lstStyle>
           <a:p>
             <a:fld id="{A6BAE113-F8CC-4FE9-AA7C-5EEC3325EFF1}" type="datetimeFigureOut">
               <a:rPr lang="de-DE" smtClean="0"/>
-              <a:t>14.11.2025</a:t>
+              <a:pPr/>
+              <a:t>20.02.2026</a:t>
             </a:fld>
-            <a:endParaRPr lang="de-DE"/>
+            <a:endParaRPr lang="de-DE" dirty="0"/>
           </a:p>
         </p:txBody>
       </p:sp>
@@ -450,7 +467,7 @@
           <a:bodyPr vert="horz" lIns="91440" tIns="45720" rIns="91440" bIns="45720" rtlCol="0" anchor="ctr"/>
           <a:lstStyle/>
           <a:p>
-            <a:endParaRPr lang="de-DE"/>
+            <a:endParaRPr lang="de-DE" dirty="0"/>
           </a:p>
         </p:txBody>
       </p:sp>
@@ -479,38 +496,38 @@
           <a:p>
             <a:pPr lvl="0"/>
             <a:r>
-              <a:rPr lang="en-US"/>
+              <a:rPr lang="en-US" dirty="0"/>
               <a:t>Click to edit Master text styles</a:t>
             </a:r>
           </a:p>
           <a:p>
             <a:pPr lvl="1"/>
             <a:r>
-              <a:rPr lang="en-US"/>
+              <a:rPr lang="en-US" dirty="0"/>
               <a:t>Second level</a:t>
             </a:r>
           </a:p>
           <a:p>
             <a:pPr lvl="2"/>
             <a:r>
-              <a:rPr lang="en-US"/>
+              <a:rPr lang="en-US" dirty="0"/>
               <a:t>Third level</a:t>
             </a:r>
           </a:p>
           <a:p>
             <a:pPr lvl="3"/>
             <a:r>
-              <a:rPr lang="en-US"/>
+              <a:rPr lang="en-US" dirty="0"/>
               <a:t>Fourth level</a:t>
             </a:r>
           </a:p>
           <a:p>
             <a:pPr lvl="4"/>
             <a:r>
-              <a:rPr lang="en-US"/>
+              <a:rPr lang="en-US" dirty="0"/>
               <a:t>Fifth level</a:t>
             </a:r>
-            <a:endParaRPr lang="de-DE"/>
+            <a:endParaRPr lang="de-DE" dirty="0"/>
           </a:p>
         </p:txBody>
       </p:sp>
@@ -537,11 +554,13 @@
           <a:bodyPr vert="horz" lIns="91440" tIns="45720" rIns="91440" bIns="45720" rtlCol="0" anchor="b"/>
           <a:lstStyle>
             <a:lvl1pPr algn="l">
-              <a:defRPr sz="1200"/>
+              <a:defRPr sz="1200">
+                <a:latin typeface="IBM Plex Sans" panose="020B0503050203000203" pitchFamily="34" charset="0"/>
+              </a:defRPr>
             </a:lvl1pPr>
           </a:lstStyle>
           <a:p>
-            <a:endParaRPr lang="de-DE"/>
+            <a:endParaRPr lang="de-DE" dirty="0"/>
           </a:p>
         </p:txBody>
       </p:sp>
@@ -568,15 +587,18 @@
           <a:bodyPr vert="horz" lIns="91440" tIns="45720" rIns="91440" bIns="45720" rtlCol="0" anchor="b"/>
           <a:lstStyle>
             <a:lvl1pPr algn="r">
-              <a:defRPr sz="1200"/>
+              <a:defRPr sz="1200">
+                <a:latin typeface="IBM Plex Sans" panose="020B0503050203000203" pitchFamily="34" charset="0"/>
+              </a:defRPr>
             </a:lvl1pPr>
           </a:lstStyle>
           <a:p>
             <a:fld id="{0FEC2603-1279-4E54-A1F7-91E91D6C0210}" type="slidenum">
               <a:rPr lang="de-DE" smtClean="0"/>
+              <a:pPr/>
               <a:t>‹#›</a:t>
             </a:fld>
-            <a:endParaRPr lang="de-DE"/>
+            <a:endParaRPr lang="de-DE" dirty="0"/>
           </a:p>
         </p:txBody>
       </p:sp>
@@ -594,7 +616,7 @@
         <a:solidFill>
           <a:schemeClr val="tx1"/>
         </a:solidFill>
-        <a:latin typeface="+mn-lt"/>
+        <a:latin typeface="IBM Plex Sans" panose="020B0503050203000203" pitchFamily="34" charset="0"/>
         <a:ea typeface="+mn-ea"/>
         <a:cs typeface="+mn-cs"/>
       </a:defRPr>
@@ -604,7 +626,7 @@
         <a:solidFill>
           <a:schemeClr val="tx1"/>
         </a:solidFill>
-        <a:latin typeface="+mn-lt"/>
+        <a:latin typeface="IBM Plex Sans" panose="020B0503050203000203" pitchFamily="34" charset="0"/>
         <a:ea typeface="+mn-ea"/>
         <a:cs typeface="+mn-cs"/>
       </a:defRPr>
@@ -614,7 +636,7 @@
         <a:solidFill>
           <a:schemeClr val="tx1"/>
         </a:solidFill>
-        <a:latin typeface="+mn-lt"/>
+        <a:latin typeface="IBM Plex Sans" panose="020B0503050203000203" pitchFamily="34" charset="0"/>
         <a:ea typeface="+mn-ea"/>
         <a:cs typeface="+mn-cs"/>
       </a:defRPr>
@@ -624,7 +646,7 @@
         <a:solidFill>
           <a:schemeClr val="tx1"/>
         </a:solidFill>
-        <a:latin typeface="+mn-lt"/>
+        <a:latin typeface="IBM Plex Sans" panose="020B0503050203000203" pitchFamily="34" charset="0"/>
         <a:ea typeface="+mn-ea"/>
         <a:cs typeface="+mn-cs"/>
       </a:defRPr>
@@ -634,7 +656,7 @@
         <a:solidFill>
           <a:schemeClr val="tx1"/>
         </a:solidFill>
-        <a:latin typeface="+mn-lt"/>
+        <a:latin typeface="IBM Plex Sans" panose="020B0503050203000203" pitchFamily="34" charset="0"/>
         <a:ea typeface="+mn-ea"/>
         <a:cs typeface="+mn-cs"/>
       </a:defRPr>
@@ -809,7 +831,7 @@
           </a:lstStyle>
           <a:p>
             <a:r>
-              <a:rPr lang="de-DE"/>
+              <a:rPr lang="de-DE" dirty="0"/>
               <a:t>Mastertitelformat bearbeiten</a:t>
             </a:r>
             <a:endParaRPr lang="en-US" dirty="0"/>
@@ -874,7 +896,7 @@
           </a:lstStyle>
           <a:p>
             <a:r>
-              <a:rPr lang="de-DE"/>
+              <a:rPr lang="de-DE" dirty="0"/>
               <a:t>Master-Untertitelformat bearbeiten</a:t>
             </a:r>
             <a:endParaRPr lang="en-US" dirty="0"/>
@@ -898,7 +920,7 @@
           <a:p>
             <a:fld id="{7F74B683-5B55-47E9-B45C-EB67E1285507}" type="datetimeFigureOut">
               <a:rPr lang="de-DE" smtClean="0"/>
-              <a:t>14.11.2025</a:t>
+              <a:t>20.02.2026</a:t>
             </a:fld>
             <a:endParaRPr lang="de-DE"/>
           </a:p>
@@ -1068,7 +1090,7 @@
           <a:p>
             <a:fld id="{7F74B683-5B55-47E9-B45C-EB67E1285507}" type="datetimeFigureOut">
               <a:rPr lang="de-DE" smtClean="0"/>
-              <a:t>14.11.2025</a:t>
+              <a:t>20.02.2026</a:t>
             </a:fld>
             <a:endParaRPr lang="de-DE"/>
           </a:p>
@@ -1248,7 +1270,7 @@
           <a:p>
             <a:fld id="{7F74B683-5B55-47E9-B45C-EB67E1285507}" type="datetimeFigureOut">
               <a:rPr lang="de-DE" smtClean="0"/>
-              <a:t>14.11.2025</a:t>
+              <a:t>20.02.2026</a:t>
             </a:fld>
             <a:endParaRPr lang="de-DE"/>
           </a:p>
@@ -1426,7 +1448,7 @@
           <a:p>
             <a:fld id="{7F74B683-5B55-47E9-B45C-EB67E1285507}" type="datetimeFigureOut">
               <a:rPr lang="de-DE" smtClean="0"/>
-              <a:t>14.11.2025</a:t>
+              <a:t>20.02.2026</a:t>
             </a:fld>
             <a:endParaRPr lang="de-DE"/>
           </a:p>
@@ -1529,7 +1551,7 @@
           </a:lstStyle>
           <a:p>
             <a:r>
-              <a:rPr lang="de-DE"/>
+              <a:rPr lang="de-DE" dirty="0"/>
               <a:t>Mastertitelformat bearbeiten</a:t>
             </a:r>
             <a:endParaRPr lang="en-US" dirty="0"/>
@@ -1649,7 +1671,7 @@
           <a:p>
             <a:pPr lvl="0"/>
             <a:r>
-              <a:rPr lang="de-DE"/>
+              <a:rPr lang="de-DE" dirty="0"/>
               <a:t>Mastertextformat bearbeiten</a:t>
             </a:r>
           </a:p>
@@ -1672,7 +1694,7 @@
           <a:p>
             <a:fld id="{7F74B683-5B55-47E9-B45C-EB67E1285507}" type="datetimeFigureOut">
               <a:rPr lang="de-DE" smtClean="0"/>
-              <a:t>14.11.2025</a:t>
+              <a:t>20.02.2026</a:t>
             </a:fld>
             <a:endParaRPr lang="de-DE"/>
           </a:p>
@@ -1904,7 +1926,7 @@
           <a:p>
             <a:fld id="{7F74B683-5B55-47E9-B45C-EB67E1285507}" type="datetimeFigureOut">
               <a:rPr lang="de-DE" smtClean="0"/>
-              <a:t>14.11.2025</a:t>
+              <a:t>20.02.2026</a:t>
             </a:fld>
             <a:endParaRPr lang="de-DE"/>
           </a:p>
@@ -2003,7 +2025,7 @@
           <a:lstStyle/>
           <a:p>
             <a:r>
-              <a:rPr lang="de-DE"/>
+              <a:rPr lang="de-DE" dirty="0"/>
               <a:t>Mastertitelformat bearbeiten</a:t>
             </a:r>
             <a:endParaRPr lang="en-US" dirty="0"/>
@@ -2069,7 +2091,7 @@
           <a:p>
             <a:pPr lvl="0"/>
             <a:r>
-              <a:rPr lang="de-DE"/>
+              <a:rPr lang="de-DE" dirty="0"/>
               <a:t>Mastertextformat bearbeiten</a:t>
             </a:r>
           </a:p>
@@ -2097,35 +2119,35 @@
           <a:p>
             <a:pPr lvl="0"/>
             <a:r>
-              <a:rPr lang="de-DE"/>
+              <a:rPr lang="de-DE" dirty="0"/>
               <a:t>Mastertextformat bearbeiten</a:t>
             </a:r>
           </a:p>
           <a:p>
             <a:pPr lvl="1"/>
             <a:r>
-              <a:rPr lang="de-DE"/>
+              <a:rPr lang="de-DE" dirty="0"/>
               <a:t>Zweite Ebene</a:t>
             </a:r>
           </a:p>
           <a:p>
             <a:pPr lvl="2"/>
             <a:r>
-              <a:rPr lang="de-DE"/>
+              <a:rPr lang="de-DE" dirty="0"/>
               <a:t>Dritte Ebene</a:t>
             </a:r>
           </a:p>
           <a:p>
             <a:pPr lvl="3"/>
             <a:r>
-              <a:rPr lang="de-DE"/>
+              <a:rPr lang="de-DE" dirty="0"/>
               <a:t>Vierte Ebene</a:t>
             </a:r>
           </a:p>
           <a:p>
             <a:pPr lvl="4"/>
             <a:r>
-              <a:rPr lang="de-DE"/>
+              <a:rPr lang="de-DE" dirty="0"/>
               <a:t>Fünfte Ebene</a:t>
             </a:r>
             <a:endParaRPr lang="en-US" dirty="0"/>
@@ -2271,7 +2293,7 @@
           <a:p>
             <a:fld id="{7F74B683-5B55-47E9-B45C-EB67E1285507}" type="datetimeFigureOut">
               <a:rPr lang="de-DE" smtClean="0"/>
-              <a:t>14.11.2025</a:t>
+              <a:t>20.02.2026</a:t>
             </a:fld>
             <a:endParaRPr lang="de-DE"/>
           </a:p>
@@ -2389,7 +2411,7 @@
           <a:p>
             <a:fld id="{7F74B683-5B55-47E9-B45C-EB67E1285507}" type="datetimeFigureOut">
               <a:rPr lang="de-DE" smtClean="0"/>
-              <a:t>14.11.2025</a:t>
+              <a:t>20.02.2026</a:t>
             </a:fld>
             <a:endParaRPr lang="de-DE"/>
           </a:p>
@@ -2484,7 +2506,7 @@
           <a:p>
             <a:fld id="{7F74B683-5B55-47E9-B45C-EB67E1285507}" type="datetimeFigureOut">
               <a:rPr lang="de-DE" smtClean="0"/>
-              <a:t>14.11.2025</a:t>
+              <a:t>20.02.2026</a:t>
             </a:fld>
             <a:endParaRPr lang="de-DE"/>
           </a:p>
@@ -2761,7 +2783,7 @@
           <a:p>
             <a:fld id="{7F74B683-5B55-47E9-B45C-EB67E1285507}" type="datetimeFigureOut">
               <a:rPr lang="de-DE" smtClean="0"/>
-              <a:t>14.11.2025</a:t>
+              <a:t>20.02.2026</a:t>
             </a:fld>
             <a:endParaRPr lang="de-DE"/>
           </a:p>
@@ -3018,7 +3040,7 @@
           <a:p>
             <a:fld id="{7F74B683-5B55-47E9-B45C-EB67E1285507}" type="datetimeFigureOut">
               <a:rPr lang="de-DE" smtClean="0"/>
-              <a:t>14.11.2025</a:t>
+              <a:t>20.02.2026</a:t>
             </a:fld>
             <a:endParaRPr lang="de-DE"/>
           </a:p>
@@ -3231,7 +3253,7 @@
           <a:p>
             <a:fld id="{7F74B683-5B55-47E9-B45C-EB67E1285507}" type="datetimeFigureOut">
               <a:rPr lang="de-DE" smtClean="0"/>
-              <a:t>14.11.2025</a:t>
+              <a:t>20.02.2026</a:t>
             </a:fld>
             <a:endParaRPr lang="de-DE"/>
           </a:p>
@@ -3636,8 +3658,8 @@
           <a:chExt cx="0" cy="0"/>
         </a:xfrm>
       </p:grpSpPr>
-      <mc:AlternateContent xmlns:mc="http://schemas.openxmlformats.org/markup-compatibility/2006" xmlns:a14="http://schemas.microsoft.com/office/drawing/2010/main">
-        <mc:Choice Requires="a14">
+      <mc:AlternateContent xmlns:mc="http://schemas.openxmlformats.org/markup-compatibility/2006">
+        <mc:Choice xmlns:a14="http://schemas.microsoft.com/office/drawing/2010/main" Requires="a14">
           <p:sp>
             <p:nvSpPr>
               <p:cNvPr id="14" name="TextBox 13">
@@ -4376,13 +4398,13 @@
                     <a:schemeClr val="tx1"/>
                   </a:solidFill>
                   <a:effectLst/>
-                  <a:latin typeface="Consolas" panose="020B0609020204030204" pitchFamily="49" charset="0"/>
+                  <a:latin typeface="Roboto Mono" panose="00000009000000000000" pitchFamily="50" charset="0"/>
                 </a:endParaRPr>
               </a:p>
             </p:txBody>
           </p:sp>
         </mc:Choice>
-        <mc:Fallback xmlns="">
+        <mc:Fallback>
           <p:sp>
             <p:nvSpPr>
               <p:cNvPr id="14" name="TextBox 13">
@@ -4427,8 +4449,8 @@
           </p:sp>
         </mc:Fallback>
       </mc:AlternateContent>
-      <mc:AlternateContent xmlns:mc="http://schemas.openxmlformats.org/markup-compatibility/2006" xmlns:a14="http://schemas.microsoft.com/office/drawing/2010/main">
-        <mc:Choice Requires="a14">
+      <mc:AlternateContent xmlns:mc="http://schemas.openxmlformats.org/markup-compatibility/2006">
+        <mc:Choice xmlns:a14="http://schemas.microsoft.com/office/drawing/2010/main" Requires="a14">
           <p:sp>
             <p:nvSpPr>
               <p:cNvPr id="11" name="TextBox 10">
@@ -5033,13 +5055,13 @@
                     <a:schemeClr val="tx1"/>
                   </a:solidFill>
                   <a:effectLst/>
-                  <a:latin typeface="Consolas" panose="020B0609020204030204" pitchFamily="49" charset="0"/>
+                  <a:latin typeface="Roboto Mono" panose="00000009000000000000" pitchFamily="50" charset="0"/>
                 </a:endParaRPr>
               </a:p>
             </p:txBody>
           </p:sp>
         </mc:Choice>
-        <mc:Fallback xmlns="">
+        <mc:Fallback>
           <p:sp>
             <p:nvSpPr>
               <p:cNvPr id="11" name="TextBox 10">
@@ -5084,8 +5106,8 @@
           </p:sp>
         </mc:Fallback>
       </mc:AlternateContent>
-      <mc:AlternateContent xmlns:mc="http://schemas.openxmlformats.org/markup-compatibility/2006" xmlns:a14="http://schemas.microsoft.com/office/drawing/2010/main">
-        <mc:Choice Requires="a14">
+      <mc:AlternateContent xmlns:mc="http://schemas.openxmlformats.org/markup-compatibility/2006">
+        <mc:Choice xmlns:a14="http://schemas.microsoft.com/office/drawing/2010/main" Requires="a14">
           <p:sp>
             <p:nvSpPr>
               <p:cNvPr id="8" name="TextBox 7">
@@ -5824,13 +5846,13 @@
                     <a:schemeClr val="tx1"/>
                   </a:solidFill>
                   <a:effectLst/>
-                  <a:latin typeface="Consolas" panose="020B0609020204030204" pitchFamily="49" charset="0"/>
+                  <a:latin typeface="Roboto Mono" panose="00000009000000000000" pitchFamily="50" charset="0"/>
                 </a:endParaRPr>
               </a:p>
             </p:txBody>
           </p:sp>
         </mc:Choice>
-        <mc:Fallback xmlns="">
+        <mc:Fallback>
           <p:sp>
             <p:nvSpPr>
               <p:cNvPr id="8" name="TextBox 7">
@@ -6369,7 +6391,9 @@
           </a:xfrm>
         </p:spPr>
         <p:txBody>
-          <a:bodyPr/>
+          <a:bodyPr>
+            <a:normAutofit fontScale="90000"/>
+          </a:bodyPr>
           <a:lstStyle/>
           <a:p>
             <a:pPr algn="r"/>
@@ -7049,7 +7073,7 @@
                         <m:nor/>
                       </m:rPr>
                       <a:rPr lang="de-DE" altLang="de-DE" dirty="0">
-                        <a:latin typeface="Arial" panose="020B0604020202020204" pitchFamily="34" charset="0"/>
+                        <a:latin typeface="IBM Plex Sans" panose="020B0503050203000203" pitchFamily="34" charset="0"/>
                       </a:rPr>
                       <m:t>⊤</m:t>
                     </m:r>
@@ -7077,7 +7101,7 @@
                         <m:nor/>
                       </m:rPr>
                       <a:rPr lang="de-DE" altLang="de-DE" dirty="0">
-                        <a:latin typeface="Arial" panose="020B0604020202020204" pitchFamily="34" charset="0"/>
+                        <a:latin typeface="IBM Plex Sans" panose="020B0503050203000203" pitchFamily="34" charset="0"/>
                       </a:rPr>
                       <m:t>⊥</m:t>
                     </m:r>
@@ -7729,7 +7753,7 @@
               <a:blipFill>
                 <a:blip r:embed="rId3"/>
                 <a:stretch>
-                  <a:fillRect l="-928" t="-3501"/>
+                  <a:fillRect l="-928" t="-3641"/>
                 </a:stretch>
               </a:blipFill>
             </p:spPr>
@@ -7947,8 +7971,8 @@
           </a:p>
         </p:txBody>
       </p:sp>
-      <mc:AlternateContent xmlns:mc="http://schemas.openxmlformats.org/markup-compatibility/2006">
-        <mc:Choice xmlns:a14="http://schemas.microsoft.com/office/drawing/2010/main" Requires="a14">
+      <mc:AlternateContent xmlns:mc="http://schemas.openxmlformats.org/markup-compatibility/2006" xmlns:a14="http://schemas.microsoft.com/office/drawing/2010/main">
+        <mc:Choice Requires="a14">
           <p:sp>
             <p:nvSpPr>
               <p:cNvPr id="3" name="Content Placeholder 2">
@@ -8189,7 +8213,7 @@
             </p:txBody>
           </p:sp>
         </mc:Choice>
-        <mc:Fallback>
+        <mc:Fallback xmlns="">
           <p:sp>
             <p:nvSpPr>
               <p:cNvPr id="3" name="Content Placeholder 2">
@@ -8416,8 +8440,8 @@
           </a:p>
         </p:txBody>
       </p:sp>
-      <mc:AlternateContent xmlns:mc="http://schemas.openxmlformats.org/markup-compatibility/2006" xmlns:a14="http://schemas.microsoft.com/office/drawing/2010/main">
-        <mc:Choice Requires="a14">
+      <mc:AlternateContent xmlns:mc="http://schemas.openxmlformats.org/markup-compatibility/2006">
+        <mc:Choice xmlns:a14="http://schemas.microsoft.com/office/drawing/2010/main" Requires="a14">
           <p:sp>
             <p:nvSpPr>
               <p:cNvPr id="3" name="Content Placeholder 2">
@@ -8449,7 +8473,7 @@
                     <a:solidFill>
                       <a:srgbClr val="FFFFFF"/>
                     </a:solidFill>
-                    <a:latin typeface="Calibri" panose="020F0502020204030204" pitchFamily="34" charset="0"/>
+                    <a:latin typeface="IBM Plex Sans" panose="020B0503050203000203" pitchFamily="34" charset="0"/>
                     <a:ea typeface="Calibri" panose="020F0502020204030204" pitchFamily="34" charset="0"/>
                     <a:cs typeface="Calibri" panose="020F0502020204030204" pitchFamily="34" charset="0"/>
                   </a:rPr>
@@ -8525,7 +8549,7 @@
                     <a:solidFill>
                       <a:srgbClr val="FFFFFF"/>
                     </a:solidFill>
-                    <a:latin typeface="Calibri" panose="020F0502020204030204" pitchFamily="34" charset="0"/>
+                    <a:latin typeface="IBM Plex Sans" panose="020B0503050203000203" pitchFamily="34" charset="0"/>
                     <a:ea typeface="Calibri" panose="020F0502020204030204" pitchFamily="34" charset="0"/>
                     <a:cs typeface="Calibri" panose="020F0502020204030204" pitchFamily="34" charset="0"/>
                   </a:rPr>
@@ -8773,7 +8797,7 @@
                   <a:solidFill>
                     <a:srgbClr val="FFFFFF"/>
                   </a:solidFill>
-                  <a:latin typeface="Calibri" panose="020F0502020204030204" pitchFamily="34" charset="0"/>
+                  <a:latin typeface="IBM Plex Sans" panose="020B0503050203000203" pitchFamily="34" charset="0"/>
                   <a:ea typeface="Calibri" panose="020F0502020204030204" pitchFamily="34" charset="0"/>
                   <a:cs typeface="Calibri" panose="020F0502020204030204" pitchFamily="34" charset="0"/>
                 </a:endParaRPr>
@@ -8785,7 +8809,7 @@
                     <a:solidFill>
                       <a:srgbClr val="FFFFFF"/>
                     </a:solidFill>
-                    <a:latin typeface="Calibri" panose="020F0502020204030204" pitchFamily="34" charset="0"/>
+                    <a:latin typeface="IBM Plex Sans" panose="020B0503050203000203" pitchFamily="34" charset="0"/>
                     <a:ea typeface="Calibri" panose="020F0502020204030204" pitchFamily="34" charset="0"/>
                     <a:cs typeface="Calibri" panose="020F0502020204030204" pitchFamily="34" charset="0"/>
                   </a:rPr>
@@ -9032,7 +9056,7 @@
                   <a:solidFill>
                     <a:srgbClr val="FFFFFF"/>
                   </a:solidFill>
-                  <a:latin typeface="Calibri" panose="020F0502020204030204" pitchFamily="34" charset="0"/>
+                  <a:latin typeface="IBM Plex Sans" panose="020B0503050203000203" pitchFamily="34" charset="0"/>
                   <a:ea typeface="Calibri" panose="020F0502020204030204" pitchFamily="34" charset="0"/>
                   <a:cs typeface="Calibri" panose="020F0502020204030204" pitchFamily="34" charset="0"/>
                 </a:endParaRPr>
@@ -9044,7 +9068,7 @@
                     <a:solidFill>
                       <a:srgbClr val="FFFFFF"/>
                     </a:solidFill>
-                    <a:latin typeface="Calibri" panose="020F0502020204030204" pitchFamily="34" charset="0"/>
+                    <a:latin typeface="IBM Plex Sans" panose="020B0503050203000203" pitchFamily="34" charset="0"/>
                     <a:ea typeface="Calibri" panose="020F0502020204030204" pitchFamily="34" charset="0"/>
                     <a:cs typeface="Calibri" panose="020F0502020204030204" pitchFamily="34" charset="0"/>
                   </a:rPr>
@@ -9059,7 +9083,7 @@
                   <a:solidFill>
                     <a:srgbClr val="FFFFFF"/>
                   </a:solidFill>
-                  <a:latin typeface="Calibri" panose="020F0502020204030204" pitchFamily="34" charset="0"/>
+                  <a:latin typeface="IBM Plex Sans" panose="020B0503050203000203" pitchFamily="34" charset="0"/>
                   <a:ea typeface="Calibri" panose="020F0502020204030204" pitchFamily="34" charset="0"/>
                   <a:cs typeface="Calibri" panose="020F0502020204030204" pitchFamily="34" charset="0"/>
                 </a:endParaRPr>
@@ -9073,7 +9097,7 @@
                     <a:solidFill>
                       <a:srgbClr val="FFFFFF"/>
                     </a:solidFill>
-                    <a:latin typeface="Calibri" panose="020F0502020204030204" pitchFamily="34" charset="0"/>
+                    <a:latin typeface="IBM Plex Sans" panose="020B0503050203000203" pitchFamily="34" charset="0"/>
                     <a:ea typeface="Calibri" panose="020F0502020204030204" pitchFamily="34" charset="0"/>
                     <a:cs typeface="Calibri" panose="020F0502020204030204" pitchFamily="34" charset="0"/>
                   </a:rPr>
@@ -9097,7 +9121,7 @@
                     <a:solidFill>
                       <a:srgbClr val="FFFFFF"/>
                     </a:solidFill>
-                    <a:latin typeface="Calibri" panose="020F0502020204030204" pitchFamily="34" charset="0"/>
+                    <a:latin typeface="IBM Plex Sans" panose="020B0503050203000203" pitchFamily="34" charset="0"/>
                     <a:ea typeface="Calibri" panose="020F0502020204030204" pitchFamily="34" charset="0"/>
                     <a:cs typeface="Calibri" panose="020F0502020204030204" pitchFamily="34" charset="0"/>
                   </a:rPr>
@@ -9121,7 +9145,7 @@
                     <a:solidFill>
                       <a:srgbClr val="FFFFFF"/>
                     </a:solidFill>
-                    <a:latin typeface="Calibri" panose="020F0502020204030204" pitchFamily="34" charset="0"/>
+                    <a:latin typeface="IBM Plex Sans" panose="020B0503050203000203" pitchFamily="34" charset="0"/>
                     <a:ea typeface="Calibri" panose="020F0502020204030204" pitchFamily="34" charset="0"/>
                     <a:cs typeface="Calibri" panose="020F0502020204030204" pitchFamily="34" charset="0"/>
                   </a:rPr>
@@ -9145,7 +9169,7 @@
                     <a:solidFill>
                       <a:srgbClr val="FFFFFF"/>
                     </a:solidFill>
-                    <a:latin typeface="Calibri" panose="020F0502020204030204" pitchFamily="34" charset="0"/>
+                    <a:latin typeface="IBM Plex Sans" panose="020B0503050203000203" pitchFamily="34" charset="0"/>
                     <a:ea typeface="Calibri" panose="020F0502020204030204" pitchFamily="34" charset="0"/>
                     <a:cs typeface="Calibri" panose="020F0502020204030204" pitchFamily="34" charset="0"/>
                   </a:rPr>
@@ -9156,7 +9180,7 @@
                     <a:solidFill>
                       <a:srgbClr val="FFFFFF"/>
                     </a:solidFill>
-                    <a:latin typeface="Calibri" panose="020F0502020204030204" pitchFamily="34" charset="0"/>
+                    <a:latin typeface="IBM Plex Sans" panose="020B0503050203000203" pitchFamily="34" charset="0"/>
                     <a:ea typeface="Calibri" panose="020F0502020204030204" pitchFamily="34" charset="0"/>
                     <a:cs typeface="Calibri" panose="020F0502020204030204" pitchFamily="34" charset="0"/>
                   </a:rPr>
@@ -9166,7 +9190,7 @@
             </p:txBody>
           </p:sp>
         </mc:Choice>
-        <mc:Fallback xmlns="">
+        <mc:Fallback>
           <p:sp>
             <p:nvSpPr>
               <p:cNvPr id="3" name="Content Placeholder 2">
@@ -9187,7 +9211,7 @@
               <a:blipFill>
                 <a:blip r:embed="rId2"/>
                 <a:stretch>
-                  <a:fillRect l="-1043" t="-2801" b="-1821"/>
+                  <a:fillRect l="-1043" t="-2941" b="-1681"/>
                 </a:stretch>
               </a:blipFill>
             </p:spPr>
@@ -9592,76 +9616,16 @@
         <a:srgbClr val="954F72"/>
       </a:folHlink>
     </a:clrScheme>
-    <a:fontScheme name="Office">
+    <a:fontScheme name="Theme Font">
       <a:majorFont>
-        <a:latin typeface="Calibri Light" panose="020F0302020204030204"/>
+        <a:latin typeface="Nunito"/>
         <a:ea typeface=""/>
         <a:cs typeface=""/>
-        <a:font script="Jpan" typeface="游ゴシック Light"/>
-        <a:font script="Hang" typeface="맑은 고딕"/>
-        <a:font script="Hans" typeface="等线 Light"/>
-        <a:font script="Hant" typeface="新細明體"/>
-        <a:font script="Arab" typeface="Times New Roman"/>
-        <a:font script="Hebr" typeface="Times New Roman"/>
-        <a:font script="Thai" typeface="Angsana New"/>
-        <a:font script="Ethi" typeface="Nyala"/>
-        <a:font script="Beng" typeface="Vrinda"/>
-        <a:font script="Gujr" typeface="Shruti"/>
-        <a:font script="Khmr" typeface="MoolBoran"/>
-        <a:font script="Knda" typeface="Tunga"/>
-        <a:font script="Guru" typeface="Raavi"/>
-        <a:font script="Cans" typeface="Euphemia"/>
-        <a:font script="Cher" typeface="Plantagenet Cherokee"/>
-        <a:font script="Yiii" typeface="Microsoft Yi Baiti"/>
-        <a:font script="Tibt" typeface="Microsoft Himalaya"/>
-        <a:font script="Thaa" typeface="MV Boli"/>
-        <a:font script="Deva" typeface="Mangal"/>
-        <a:font script="Telu" typeface="Gautami"/>
-        <a:font script="Taml" typeface="Latha"/>
-        <a:font script="Syrc" typeface="Estrangelo Edessa"/>
-        <a:font script="Orya" typeface="Kalinga"/>
-        <a:font script="Mlym" typeface="Kartika"/>
-        <a:font script="Laoo" typeface="DokChampa"/>
-        <a:font script="Sinh" typeface="Iskoola Pota"/>
-        <a:font script="Mong" typeface="Mongolian Baiti"/>
-        <a:font script="Viet" typeface="Times New Roman"/>
-        <a:font script="Uigh" typeface="Microsoft Uighur"/>
-        <a:font script="Geor" typeface="Sylfaen"/>
       </a:majorFont>
       <a:minorFont>
-        <a:latin typeface="Calibri" panose="020F0502020204030204"/>
+        <a:latin typeface="IBM Plex Sans"/>
         <a:ea typeface=""/>
         <a:cs typeface=""/>
-        <a:font script="Jpan" typeface="游ゴシック"/>
-        <a:font script="Hang" typeface="맑은 고딕"/>
-        <a:font script="Hans" typeface="等线"/>
-        <a:font script="Hant" typeface="新細明體"/>
-        <a:font script="Arab" typeface="Arial"/>
-        <a:font script="Hebr" typeface="Arial"/>
-        <a:font script="Thai" typeface="Cordia New"/>
-        <a:font script="Ethi" typeface="Nyala"/>
-        <a:font script="Beng" typeface="Vrinda"/>
-        <a:font script="Gujr" typeface="Shruti"/>
-        <a:font script="Khmr" typeface="DaunPenh"/>
-        <a:font script="Knda" typeface="Tunga"/>
-        <a:font script="Guru" typeface="Raavi"/>
-        <a:font script="Cans" typeface="Euphemia"/>
-        <a:font script="Cher" typeface="Plantagenet Cherokee"/>
-        <a:font script="Yiii" typeface="Microsoft Yi Baiti"/>
-        <a:font script="Tibt" typeface="Microsoft Himalaya"/>
-        <a:font script="Thaa" typeface="MV Boli"/>
-        <a:font script="Deva" typeface="Mangal"/>
-        <a:font script="Telu" typeface="Gautami"/>
-        <a:font script="Taml" typeface="Latha"/>
-        <a:font script="Syrc" typeface="Estrangelo Edessa"/>
-        <a:font script="Orya" typeface="Kalinga"/>
-        <a:font script="Mlym" typeface="Kartika"/>
-        <a:font script="Laoo" typeface="DokChampa"/>
-        <a:font script="Sinh" typeface="Iskoola Pota"/>
-        <a:font script="Mong" typeface="Mongolian Baiti"/>
-        <a:font script="Viet" typeface="Arial"/>
-        <a:font script="Uigh" typeface="Microsoft Uighur"/>
-        <a:font script="Geor" typeface="Sylfaen"/>
       </a:minorFont>
     </a:fontScheme>
     <a:fmtScheme name="Office">

--- a/src/Mathe.pptx
+++ b/src/Mathe.pptx
@@ -22,13 +22,13 @@
     <p:sldId id="444" r:id="rId10"/>
     <p:sldId id="443" r:id="rId11"/>
     <p:sldId id="435" r:id="rId12"/>
-    <p:sldId id="431" r:id="rId13"/>
-    <p:sldId id="288" r:id="rId14"/>
-    <p:sldId id="289" r:id="rId15"/>
-    <p:sldId id="436" r:id="rId16"/>
-    <p:sldId id="437" r:id="rId17"/>
-    <p:sldId id="438" r:id="rId18"/>
-    <p:sldId id="439" r:id="rId19"/>
+    <p:sldId id="288" r:id="rId13"/>
+    <p:sldId id="289" r:id="rId14"/>
+    <p:sldId id="436" r:id="rId15"/>
+    <p:sldId id="437" r:id="rId16"/>
+    <p:sldId id="438" r:id="rId17"/>
+    <p:sldId id="439" r:id="rId18"/>
+    <p:sldId id="431" r:id="rId19"/>
   </p:sldIdLst>
   <p:sldSz cx="12192000" cy="6858000"/>
   <p:notesSz cx="6858000" cy="9144000"/>
@@ -128,6 +128,36 @@
     </a:lvl9pPr>
   </p:defaultTextStyle>
   <p:extLst>
+    <p:ext uri="{521415D9-36F7-43E2-AB2F-B90AF26B5E84}">
+      <p14:sectionLst xmlns:p14="http://schemas.microsoft.com/office/powerpoint/2010/main">
+        <p14:section name="Teil 1" id="{F6596000-CBEC-4038-834D-C466D8565B55}">
+          <p14:sldIdLst>
+            <p14:sldId id="422"/>
+            <p14:sldId id="440"/>
+            <p14:sldId id="447"/>
+            <p14:sldId id="429"/>
+            <p14:sldId id="418"/>
+            <p14:sldId id="442"/>
+            <p14:sldId id="445"/>
+            <p14:sldId id="441"/>
+            <p14:sldId id="444"/>
+            <p14:sldId id="443"/>
+          </p14:sldIdLst>
+        </p14:section>
+        <p14:section name="Teil 2" id="{7794C2A7-EDD8-4A9F-BA0E-10DEF0C0D9F5}">
+          <p14:sldIdLst>
+            <p14:sldId id="435"/>
+            <p14:sldId id="288"/>
+            <p14:sldId id="289"/>
+            <p14:sldId id="436"/>
+            <p14:sldId id="437"/>
+            <p14:sldId id="438"/>
+            <p14:sldId id="439"/>
+            <p14:sldId id="431"/>
+          </p14:sldIdLst>
+        </p14:section>
+      </p14:sectionLst>
+    </p:ext>
     <p:ext uri="{EFAFB233-063F-42B5-8137-9DF3F51BA10A}">
       <p15:sldGuideLst xmlns:p15="http://schemas.microsoft.com/office/powerpoint/2012/main"/>
     </p:ext>
@@ -242,7 +272,7 @@
               <a:rPr lang="de-DE" smtClean="0">
                 <a:latin typeface="IBM Plex Sans" panose="020B0503050203000203" pitchFamily="34" charset="0"/>
               </a:rPr>
-              <a:t>20.02.2026</a:t>
+              <a:t>21.02.2026</a:t>
             </a:fld>
             <a:endParaRPr lang="de-DE" dirty="0">
               <a:latin typeface="IBM Plex Sans" panose="020B0503050203000203" pitchFamily="34" charset="0"/>
@@ -432,7 +462,7 @@
             <a:fld id="{A6BAE113-F8CC-4FE9-AA7C-5EEC3325EFF1}" type="datetimeFigureOut">
               <a:rPr lang="de-DE" smtClean="0"/>
               <a:pPr/>
-              <a:t>20.02.2026</a:t>
+              <a:t>21.02.2026</a:t>
             </a:fld>
             <a:endParaRPr lang="de-DE" dirty="0"/>
           </a:p>
@@ -920,7 +950,7 @@
           <a:p>
             <a:fld id="{7F74B683-5B55-47E9-B45C-EB67E1285507}" type="datetimeFigureOut">
               <a:rPr lang="de-DE" smtClean="0"/>
-              <a:t>20.02.2026</a:t>
+              <a:t>21.02.2026</a:t>
             </a:fld>
             <a:endParaRPr lang="de-DE"/>
           </a:p>
@@ -1090,7 +1120,7 @@
           <a:p>
             <a:fld id="{7F74B683-5B55-47E9-B45C-EB67E1285507}" type="datetimeFigureOut">
               <a:rPr lang="de-DE" smtClean="0"/>
-              <a:t>20.02.2026</a:t>
+              <a:t>21.02.2026</a:t>
             </a:fld>
             <a:endParaRPr lang="de-DE"/>
           </a:p>
@@ -1270,7 +1300,7 @@
           <a:p>
             <a:fld id="{7F74B683-5B55-47E9-B45C-EB67E1285507}" type="datetimeFigureOut">
               <a:rPr lang="de-DE" smtClean="0"/>
-              <a:t>20.02.2026</a:t>
+              <a:t>21.02.2026</a:t>
             </a:fld>
             <a:endParaRPr lang="de-DE"/>
           </a:p>
@@ -1448,7 +1478,7 @@
           <a:p>
             <a:fld id="{7F74B683-5B55-47E9-B45C-EB67E1285507}" type="datetimeFigureOut">
               <a:rPr lang="de-DE" smtClean="0"/>
-              <a:t>20.02.2026</a:t>
+              <a:t>21.02.2026</a:t>
             </a:fld>
             <a:endParaRPr lang="de-DE"/>
           </a:p>
@@ -1694,7 +1724,7 @@
           <a:p>
             <a:fld id="{7F74B683-5B55-47E9-B45C-EB67E1285507}" type="datetimeFigureOut">
               <a:rPr lang="de-DE" smtClean="0"/>
-              <a:t>20.02.2026</a:t>
+              <a:t>21.02.2026</a:t>
             </a:fld>
             <a:endParaRPr lang="de-DE"/>
           </a:p>
@@ -1926,7 +1956,7 @@
           <a:p>
             <a:fld id="{7F74B683-5B55-47E9-B45C-EB67E1285507}" type="datetimeFigureOut">
               <a:rPr lang="de-DE" smtClean="0"/>
-              <a:t>20.02.2026</a:t>
+              <a:t>21.02.2026</a:t>
             </a:fld>
             <a:endParaRPr lang="de-DE"/>
           </a:p>
@@ -2293,7 +2323,7 @@
           <a:p>
             <a:fld id="{7F74B683-5B55-47E9-B45C-EB67E1285507}" type="datetimeFigureOut">
               <a:rPr lang="de-DE" smtClean="0"/>
-              <a:t>20.02.2026</a:t>
+              <a:t>21.02.2026</a:t>
             </a:fld>
             <a:endParaRPr lang="de-DE"/>
           </a:p>
@@ -2411,7 +2441,7 @@
           <a:p>
             <a:fld id="{7F74B683-5B55-47E9-B45C-EB67E1285507}" type="datetimeFigureOut">
               <a:rPr lang="de-DE" smtClean="0"/>
-              <a:t>20.02.2026</a:t>
+              <a:t>21.02.2026</a:t>
             </a:fld>
             <a:endParaRPr lang="de-DE"/>
           </a:p>
@@ -2506,7 +2536,7 @@
           <a:p>
             <a:fld id="{7F74B683-5B55-47E9-B45C-EB67E1285507}" type="datetimeFigureOut">
               <a:rPr lang="de-DE" smtClean="0"/>
-              <a:t>20.02.2026</a:t>
+              <a:t>21.02.2026</a:t>
             </a:fld>
             <a:endParaRPr lang="de-DE"/>
           </a:p>
@@ -2783,7 +2813,7 @@
           <a:p>
             <a:fld id="{7F74B683-5B55-47E9-B45C-EB67E1285507}" type="datetimeFigureOut">
               <a:rPr lang="de-DE" smtClean="0"/>
-              <a:t>20.02.2026</a:t>
+              <a:t>21.02.2026</a:t>
             </a:fld>
             <a:endParaRPr lang="de-DE"/>
           </a:p>
@@ -3040,7 +3070,7 @@
           <a:p>
             <a:fld id="{7F74B683-5B55-47E9-B45C-EB67E1285507}" type="datetimeFigureOut">
               <a:rPr lang="de-DE" smtClean="0"/>
-              <a:t>20.02.2026</a:t>
+              <a:t>21.02.2026</a:t>
             </a:fld>
             <a:endParaRPr lang="de-DE"/>
           </a:p>
@@ -3253,7 +3283,7 @@
           <a:p>
             <a:fld id="{7F74B683-5B55-47E9-B45C-EB67E1285507}" type="datetimeFigureOut">
               <a:rPr lang="de-DE" smtClean="0"/>
-              <a:t>20.02.2026</a:t>
+              <a:t>21.02.2026</a:t>
             </a:fld>
             <a:endParaRPr lang="de-DE"/>
           </a:p>
@@ -3673,9 +3703,9 @@
               <p:nvPr/>
             </p:nvSpPr>
             <p:spPr>
-              <a:xfrm rot="1272087">
-                <a:off x="4762978" y="2928603"/>
-                <a:ext cx="7248178" cy="1630190"/>
+              <a:xfrm rot="1083706">
+                <a:off x="8044361" y="3816951"/>
+                <a:ext cx="3787852" cy="584775"/>
               </a:xfrm>
               <a:prstGeom prst="rect">
                 <a:avLst/>
@@ -3713,7 +3743,7 @@
                           <a:effectLst/>
                           <a:latin typeface="Cambria Math" panose="02040503050406030204" pitchFamily="18" charset="0"/>
                         </a:rPr>
-                        <m:t>𝐷</m:t>
+                        <m:t>𝐴</m:t>
                       </m:r>
                       <m:r>
                         <a:rPr kumimoji="0" lang="en-US" altLang="de-DE" sz="1600" b="0" i="1" u="none" strike="noStrike" cap="none" normalizeH="0" baseline="0" smtClean="0">
@@ -3726,190 +3756,7 @@
                           <a:effectLst/>
                           <a:latin typeface="Cambria Math" panose="02040503050406030204" pitchFamily="18" charset="0"/>
                         </a:rPr>
-                        <m:t>≔</m:t>
-                      </m:r>
-                      <m:sSup>
-                        <m:sSupPr>
-                          <m:ctrlPr>
-                            <a:rPr kumimoji="0" lang="en-US" altLang="de-DE" sz="1600" b="0" i="1" u="none" strike="noStrike" cap="none" normalizeH="0" baseline="0" smtClean="0">
-                              <a:ln>
-                                <a:noFill/>
-                              </a:ln>
-                              <a:solidFill>
-                                <a:schemeClr val="tx1"/>
-                              </a:solidFill>
-                              <a:effectLst/>
-                              <a:latin typeface="Cambria Math" panose="02040503050406030204" pitchFamily="18" charset="0"/>
-                            </a:rPr>
-                          </m:ctrlPr>
-                        </m:sSupPr>
-                        <m:e>
-                          <m:r>
-                            <a:rPr lang="en-US" altLang="de-DE" sz="1600" i="1">
-                              <a:latin typeface="Cambria Math" panose="02040503050406030204" pitchFamily="18" charset="0"/>
-                            </a:rPr>
-                            <m:t>ℝ</m:t>
-                          </m:r>
-                        </m:e>
-                        <m:sup>
-                          <m:r>
-                            <a:rPr kumimoji="0" lang="en-US" altLang="de-DE" sz="1600" b="0" i="1" u="none" strike="noStrike" cap="none" normalizeH="0" baseline="0" smtClean="0">
-                              <a:ln>
-                                <a:noFill/>
-                              </a:ln>
-                              <a:solidFill>
-                                <a:schemeClr val="tx1"/>
-                              </a:solidFill>
-                              <a:effectLst/>
-                              <a:latin typeface="Cambria Math" panose="02040503050406030204" pitchFamily="18" charset="0"/>
-                            </a:rPr>
-                            <m:t>2</m:t>
-                          </m:r>
-                        </m:sup>
-                      </m:sSup>
-                      <m:r>
-                        <a:rPr kumimoji="0" lang="en-US" altLang="de-DE" sz="1600" b="0" i="1" u="none" strike="noStrike" cap="none" normalizeH="0" baseline="0" smtClean="0">
-                          <a:ln>
-                            <a:noFill/>
-                          </a:ln>
-                          <a:solidFill>
-                            <a:schemeClr val="tx1"/>
-                          </a:solidFill>
-                          <a:effectLst/>
-                          <a:latin typeface="Cambria Math" panose="02040503050406030204" pitchFamily="18" charset="0"/>
-                        </a:rPr>
-                        <m:t>, </m:t>
-                      </m:r>
-                      <m:r>
-                        <a:rPr kumimoji="0" lang="en-US" altLang="de-DE" sz="1600" b="0" i="1" u="none" strike="noStrike" cap="none" normalizeH="0" baseline="0" smtClean="0">
-                          <a:ln>
-                            <a:noFill/>
-                          </a:ln>
-                          <a:solidFill>
-                            <a:schemeClr val="tx1"/>
-                          </a:solidFill>
-                          <a:effectLst/>
-                          <a:latin typeface="Cambria Math" panose="02040503050406030204" pitchFamily="18" charset="0"/>
-                        </a:rPr>
-                        <m:t>𝑍</m:t>
-                      </m:r>
-                      <m:r>
-                        <a:rPr kumimoji="0" lang="en-US" altLang="de-DE" sz="1600" b="0" i="1" u="none" strike="noStrike" cap="none" normalizeH="0" baseline="0" smtClean="0">
-                          <a:ln>
-                            <a:noFill/>
-                          </a:ln>
-                          <a:solidFill>
-                            <a:schemeClr val="tx1"/>
-                          </a:solidFill>
-                          <a:effectLst/>
-                          <a:latin typeface="Cambria Math" panose="02040503050406030204" pitchFamily="18" charset="0"/>
-                        </a:rPr>
-                        <m:t>≔</m:t>
-                      </m:r>
-                      <m:sSup>
-                        <m:sSupPr>
-                          <m:ctrlPr>
-                            <a:rPr lang="en-US" altLang="de-DE" sz="1600" i="1" smtClean="0">
-                              <a:latin typeface="Cambria Math" panose="02040503050406030204" pitchFamily="18" charset="0"/>
-                            </a:rPr>
-                          </m:ctrlPr>
-                        </m:sSupPr>
-                        <m:e>
-                          <m:r>
-                            <a:rPr lang="en-US" altLang="de-DE" sz="1600" i="1">
-                              <a:latin typeface="Cambria Math" panose="02040503050406030204" pitchFamily="18" charset="0"/>
-                            </a:rPr>
-                            <m:t>ℝ</m:t>
-                          </m:r>
-                        </m:e>
-                        <m:sup>
-                          <m:r>
-                            <a:rPr lang="en-US" altLang="de-DE" sz="1600" b="0" i="1" smtClean="0">
-                              <a:latin typeface="Cambria Math" panose="02040503050406030204" pitchFamily="18" charset="0"/>
-                            </a:rPr>
-                            <m:t>3</m:t>
-                          </m:r>
-                        </m:sup>
-                      </m:sSup>
-                    </m:oMath>
-                    <m:oMath xmlns:m="http://schemas.openxmlformats.org/officeDocument/2006/math">
-                      <m:r>
-                        <a:rPr kumimoji="0" lang="en-US" altLang="de-DE" sz="1600" b="0" i="1" u="none" strike="noStrike" cap="none" normalizeH="0" baseline="0" smtClean="0">
-                          <a:ln>
-                            <a:noFill/>
-                          </a:ln>
-                          <a:solidFill>
-                            <a:schemeClr val="tx1"/>
-                          </a:solidFill>
-                          <a:effectLst/>
-                          <a:latin typeface="Cambria Math" panose="02040503050406030204" pitchFamily="18" charset="0"/>
-                        </a:rPr>
-                        <m:t>𝑓</m:t>
-                      </m:r>
-                      <m:r>
-                        <a:rPr kumimoji="0" lang="en-US" altLang="de-DE" sz="1600" b="0" i="1" u="none" strike="noStrike" cap="none" normalizeH="0" baseline="0" smtClean="0">
-                          <a:ln>
-                            <a:noFill/>
-                          </a:ln>
-                          <a:solidFill>
-                            <a:schemeClr val="tx1"/>
-                          </a:solidFill>
-                          <a:effectLst/>
-                          <a:latin typeface="Cambria Math" panose="02040503050406030204" pitchFamily="18" charset="0"/>
-                        </a:rPr>
-                        <m:t> :</m:t>
-                      </m:r>
-                      <m:r>
-                        <a:rPr kumimoji="0" lang="en-US" altLang="de-DE" sz="1600" b="0" i="1" u="none" strike="noStrike" cap="none" normalizeH="0" baseline="0" smtClean="0">
-                          <a:ln>
-                            <a:noFill/>
-                          </a:ln>
-                          <a:solidFill>
-                            <a:schemeClr val="tx1"/>
-                          </a:solidFill>
-                          <a:effectLst/>
-                          <a:latin typeface="Cambria Math" panose="02040503050406030204" pitchFamily="18" charset="0"/>
-                        </a:rPr>
-                        <m:t>𝐷</m:t>
-                      </m:r>
-                      <m:r>
-                        <a:rPr kumimoji="0" lang="en-US" altLang="de-DE" sz="1600" b="0" i="1" u="none" strike="noStrike" cap="none" normalizeH="0" baseline="0" smtClean="0">
-                          <a:ln>
-                            <a:noFill/>
-                          </a:ln>
-                          <a:solidFill>
-                            <a:schemeClr val="tx1"/>
-                          </a:solidFill>
-                          <a:effectLst/>
-                          <a:latin typeface="Cambria Math" panose="02040503050406030204" pitchFamily="18" charset="0"/>
-                        </a:rPr>
-                        <m:t>→</m:t>
-                      </m:r>
-                      <m:r>
-                        <a:rPr kumimoji="0" lang="en-US" altLang="de-DE" sz="1600" b="0" i="1" u="none" strike="noStrike" cap="none" normalizeH="0" baseline="0" smtClean="0">
-                          <a:ln>
-                            <a:noFill/>
-                          </a:ln>
-                          <a:solidFill>
-                            <a:schemeClr val="tx1"/>
-                          </a:solidFill>
-                          <a:effectLst/>
-                          <a:latin typeface="Cambria Math" panose="02040503050406030204" pitchFamily="18" charset="0"/>
-                        </a:rPr>
-                        <m:t>𝑍</m:t>
-                      </m:r>
-                      <m:r>
-                        <a:rPr kumimoji="0" lang="en-US" altLang="de-DE" sz="1600" b="0" i="1" u="none" strike="noStrike" cap="none" normalizeH="0" baseline="0" smtClean="0">
-                          <a:ln>
-                            <a:noFill/>
-                          </a:ln>
-                          <a:solidFill>
-                            <a:schemeClr val="tx1"/>
-                          </a:solidFill>
-                          <a:effectLst/>
-                          <a:latin typeface="Cambria Math" panose="02040503050406030204" pitchFamily="18" charset="0"/>
-                        </a:rPr>
-                        <m:t> : </m:t>
+                        <m:t>∨</m:t>
                       </m:r>
                       <m:d>
                         <m:dPr>
@@ -3927,118 +3774,47 @@
                           </m:ctrlPr>
                         </m:dPr>
                         <m:e>
-                          <m:eqArr>
-                            <m:eqArrPr>
-                              <m:ctrlPr>
-                                <a:rPr kumimoji="0" lang="en-US" altLang="de-DE" sz="1600" b="0" i="1" u="none" strike="noStrike" cap="none" normalizeH="0" baseline="0" smtClean="0">
-                                  <a:ln>
-                                    <a:noFill/>
-                                  </a:ln>
-                                  <a:solidFill>
-                                    <a:schemeClr val="tx1"/>
-                                  </a:solidFill>
-                                  <a:effectLst/>
-                                  <a:latin typeface="Cambria Math" panose="02040503050406030204" pitchFamily="18" charset="0"/>
-                                </a:rPr>
-                              </m:ctrlPr>
-                            </m:eqArrPr>
-                            <m:e>
-                              <m:r>
-                                <a:rPr kumimoji="0" lang="en-US" altLang="de-DE" sz="1600" b="0" i="1" u="none" strike="noStrike" cap="none" normalizeH="0" baseline="0" smtClean="0">
-                                  <a:ln>
-                                    <a:noFill/>
-                                  </a:ln>
-                                  <a:solidFill>
-                                    <a:schemeClr val="tx1"/>
-                                  </a:solidFill>
-                                  <a:effectLst/>
-                                  <a:latin typeface="Cambria Math" panose="02040503050406030204" pitchFamily="18" charset="0"/>
-                                </a:rPr>
-                                <m:t>𝑥</m:t>
-                              </m:r>
-                            </m:e>
-                            <m:e>
-                              <m:r>
-                                <a:rPr kumimoji="0" lang="en-US" altLang="de-DE" sz="1600" b="0" i="1" u="none" strike="noStrike" cap="none" normalizeH="0" baseline="0" smtClean="0">
-                                  <a:ln>
-                                    <a:noFill/>
-                                  </a:ln>
-                                  <a:solidFill>
-                                    <a:schemeClr val="tx1"/>
-                                  </a:solidFill>
-                                  <a:effectLst/>
-                                  <a:latin typeface="Cambria Math" panose="02040503050406030204" pitchFamily="18" charset="0"/>
-                                </a:rPr>
-                                <m:t>𝑦</m:t>
-                              </m:r>
-                            </m:e>
-                          </m:eqArr>
+                          <m:r>
+                            <a:rPr kumimoji="0" lang="en-US" altLang="de-DE" sz="1600" b="0" i="1" u="none" strike="noStrike" cap="none" normalizeH="0" baseline="0" smtClean="0">
+                              <a:ln>
+                                <a:noFill/>
+                              </a:ln>
+                              <a:solidFill>
+                                <a:schemeClr val="tx1"/>
+                              </a:solidFill>
+                              <a:effectLst/>
+                              <a:latin typeface="Cambria Math" panose="02040503050406030204" pitchFamily="18" charset="0"/>
+                            </a:rPr>
+                            <m:t>𝐵</m:t>
+                          </m:r>
+                          <m:r>
+                            <a:rPr kumimoji="0" lang="en-US" altLang="de-DE" sz="1600" b="0" i="1" u="none" strike="noStrike" cap="none" normalizeH="0" baseline="0" smtClean="0">
+                              <a:ln>
+                                <a:noFill/>
+                              </a:ln>
+                              <a:solidFill>
+                                <a:schemeClr val="tx1"/>
+                              </a:solidFill>
+                              <a:effectLst/>
+                              <a:latin typeface="Cambria Math" panose="02040503050406030204" pitchFamily="18" charset="0"/>
+                            </a:rPr>
+                            <m:t>∧</m:t>
+                          </m:r>
+                          <m:r>
+                            <a:rPr kumimoji="0" lang="en-US" altLang="de-DE" sz="1600" b="0" i="1" u="none" strike="noStrike" cap="none" normalizeH="0" baseline="0" smtClean="0">
+                              <a:ln>
+                                <a:noFill/>
+                              </a:ln>
+                              <a:solidFill>
+                                <a:schemeClr val="tx1"/>
+                              </a:solidFill>
+                              <a:effectLst/>
+                              <a:latin typeface="Cambria Math" panose="02040503050406030204" pitchFamily="18" charset="0"/>
+                            </a:rPr>
+                            <m:t>𝐶</m:t>
+                          </m:r>
                         </m:e>
                       </m:d>
-                      <m:r>
-                        <a:rPr lang="en-US" altLang="de-DE" sz="1600" i="1">
-                          <a:latin typeface="Cambria Math" panose="02040503050406030204" pitchFamily="18" charset="0"/>
-                          <a:ea typeface="Cambria Math" panose="02040503050406030204" pitchFamily="18" charset="0"/>
-                        </a:rPr>
-                        <m:t>↦</m:t>
-                      </m:r>
-                      <m:d>
-                        <m:dPr>
-                          <m:ctrlPr>
-                            <a:rPr lang="en-US" altLang="de-DE" sz="1600" i="1">
-                              <a:latin typeface="Cambria Math" panose="02040503050406030204" pitchFamily="18" charset="0"/>
-                            </a:rPr>
-                          </m:ctrlPr>
-                        </m:dPr>
-                        <m:e>
-                          <m:eqArr>
-                            <m:eqArrPr>
-                              <m:ctrlPr>
-                                <a:rPr lang="en-US" altLang="de-DE" sz="1600" i="1">
-                                  <a:latin typeface="Cambria Math" panose="02040503050406030204" pitchFamily="18" charset="0"/>
-                                </a:rPr>
-                              </m:ctrlPr>
-                            </m:eqArrPr>
-                            <m:e>
-                              <m:eqArr>
-                                <m:eqArrPr>
-                                  <m:ctrlPr>
-                                    <a:rPr lang="en-US" altLang="de-DE" sz="1600" i="1">
-                                      <a:latin typeface="Cambria Math" panose="02040503050406030204" pitchFamily="18" charset="0"/>
-                                    </a:rPr>
-                                  </m:ctrlPr>
-                                </m:eqArrPr>
-                                <m:e>
-                                  <m:r>
-                                    <a:rPr lang="en-US" altLang="de-DE" sz="1600" i="1">
-                                      <a:latin typeface="Cambria Math" panose="02040503050406030204" pitchFamily="18" charset="0"/>
-                                    </a:rPr>
-                                    <m:t>𝑥</m:t>
-                                  </m:r>
-                                </m:e>
-                                <m:e>
-                                  <m:r>
-                                    <a:rPr lang="en-US" altLang="de-DE" sz="1600" i="1">
-                                      <a:latin typeface="Cambria Math" panose="02040503050406030204" pitchFamily="18" charset="0"/>
-                                    </a:rPr>
-                                    <m:t>𝑦</m:t>
-                                  </m:r>
-                                </m:e>
-                              </m:eqArr>
-                            </m:e>
-                            <m:e>
-                              <m:r>
-                                <a:rPr lang="en-US" altLang="de-DE" sz="1600" b="0" i="1" smtClean="0">
-                                  <a:latin typeface="Cambria Math" panose="02040503050406030204" pitchFamily="18" charset="0"/>
-                                </a:rPr>
-                                <m:t>0</m:t>
-                              </m:r>
-                            </m:e>
-                          </m:eqArr>
-                        </m:e>
-                      </m:d>
-                    </m:oMath>
-                    <m:oMath xmlns:m="http://schemas.openxmlformats.org/officeDocument/2006/math">
                       <m:r>
                         <a:rPr kumimoji="0" lang="en-US" altLang="de-DE" sz="1600" b="0" i="1" u="none" strike="noStrike" cap="none" normalizeH="0" baseline="0" smtClean="0">
                           <a:ln>
@@ -4050,295 +3826,7 @@
                           <a:effectLst/>
                           <a:latin typeface="Cambria Math" panose="02040503050406030204" pitchFamily="18" charset="0"/>
                         </a:rPr>
-                        <m:t>𝑔</m:t>
-                      </m:r>
-                      <m:r>
-                        <a:rPr kumimoji="0" lang="en-US" altLang="de-DE" sz="1600" b="0" i="1" u="none" strike="noStrike" cap="none" normalizeH="0" baseline="0" smtClean="0">
-                          <a:ln>
-                            <a:noFill/>
-                          </a:ln>
-                          <a:solidFill>
-                            <a:schemeClr val="tx1"/>
-                          </a:solidFill>
-                          <a:effectLst/>
-                          <a:latin typeface="Cambria Math" panose="02040503050406030204" pitchFamily="18" charset="0"/>
-                        </a:rPr>
-                        <m:t> :</m:t>
-                      </m:r>
-                      <m:r>
-                        <a:rPr kumimoji="0" lang="en-US" altLang="de-DE" sz="1600" b="0" i="1" u="none" strike="noStrike" cap="none" normalizeH="0" baseline="0" smtClean="0">
-                          <a:ln>
-                            <a:noFill/>
-                          </a:ln>
-                          <a:solidFill>
-                            <a:schemeClr val="tx1"/>
-                          </a:solidFill>
-                          <a:effectLst/>
-                          <a:latin typeface="Cambria Math" panose="02040503050406030204" pitchFamily="18" charset="0"/>
-                        </a:rPr>
-                        <m:t>𝐷</m:t>
-                      </m:r>
-                      <m:r>
-                        <a:rPr kumimoji="0" lang="en-US" altLang="de-DE" sz="1600" b="0" i="1" u="none" strike="noStrike" cap="none" normalizeH="0" baseline="0" smtClean="0">
-                          <a:ln>
-                            <a:noFill/>
-                          </a:ln>
-                          <a:solidFill>
-                            <a:schemeClr val="tx1"/>
-                          </a:solidFill>
-                          <a:effectLst/>
-                          <a:latin typeface="Cambria Math" panose="02040503050406030204" pitchFamily="18" charset="0"/>
-                        </a:rPr>
-                        <m:t>→</m:t>
-                      </m:r>
-                      <m:r>
-                        <a:rPr kumimoji="0" lang="en-US" altLang="de-DE" sz="1600" b="0" i="1" u="none" strike="noStrike" cap="none" normalizeH="0" baseline="0" smtClean="0">
-                          <a:ln>
-                            <a:noFill/>
-                          </a:ln>
-                          <a:solidFill>
-                            <a:schemeClr val="tx1"/>
-                          </a:solidFill>
-                          <a:effectLst/>
-                          <a:latin typeface="Cambria Math" panose="02040503050406030204" pitchFamily="18" charset="0"/>
-                        </a:rPr>
-                        <m:t>𝐷</m:t>
-                      </m:r>
-                      <m:r>
-                        <a:rPr kumimoji="0" lang="en-US" altLang="de-DE" sz="1600" b="0" i="1" u="none" strike="noStrike" cap="none" normalizeH="0" baseline="0" smtClean="0">
-                          <a:ln>
-                            <a:noFill/>
-                          </a:ln>
-                          <a:solidFill>
-                            <a:schemeClr val="tx1"/>
-                          </a:solidFill>
-                          <a:effectLst/>
-                          <a:latin typeface="Cambria Math" panose="02040503050406030204" pitchFamily="18" charset="0"/>
-                        </a:rPr>
-                        <m:t>: </m:t>
-                      </m:r>
-                      <m:r>
-                        <a:rPr kumimoji="0" lang="en-US" altLang="de-DE" sz="1600" b="0" i="1" u="none" strike="noStrike" cap="none" normalizeH="0" baseline="0" smtClean="0">
-                          <a:ln>
-                            <a:noFill/>
-                          </a:ln>
-                          <a:solidFill>
-                            <a:schemeClr val="tx1"/>
-                          </a:solidFill>
-                          <a:effectLst/>
-                          <a:latin typeface="Cambria Math" panose="02040503050406030204" pitchFamily="18" charset="0"/>
-                        </a:rPr>
-                        <m:t>𝑥</m:t>
-                      </m:r>
-                      <m:r>
-                        <a:rPr lang="en-US" altLang="de-DE" sz="1600" i="1">
-                          <a:latin typeface="Cambria Math" panose="02040503050406030204" pitchFamily="18" charset="0"/>
-                          <a:ea typeface="Cambria Math" panose="02040503050406030204" pitchFamily="18" charset="0"/>
-                        </a:rPr>
-                        <m:t>↦</m:t>
-                      </m:r>
-                      <m:d>
-                        <m:dPr>
-                          <m:ctrlPr>
-                            <a:rPr lang="en-US" altLang="de-DE" sz="1600" i="1" smtClean="0">
-                              <a:latin typeface="Cambria Math" panose="02040503050406030204" pitchFamily="18" charset="0"/>
-                              <a:ea typeface="Cambria Math" panose="02040503050406030204" pitchFamily="18" charset="0"/>
-                            </a:rPr>
-                          </m:ctrlPr>
-                        </m:dPr>
-                        <m:e>
-                          <m:eqArr>
-                            <m:eqArrPr>
-                              <m:ctrlPr>
-                                <a:rPr lang="en-US" altLang="de-DE" sz="1600" b="0" i="1" smtClean="0">
-                                  <a:latin typeface="Cambria Math" panose="02040503050406030204" pitchFamily="18" charset="0"/>
-                                  <a:ea typeface="Cambria Math" panose="02040503050406030204" pitchFamily="18" charset="0"/>
-                                </a:rPr>
-                              </m:ctrlPr>
-                            </m:eqArrPr>
-                            <m:e>
-                              <m:r>
-                                <a:rPr lang="en-US" altLang="de-DE" sz="1600" b="0" i="1" smtClean="0">
-                                  <a:latin typeface="Cambria Math" panose="02040503050406030204" pitchFamily="18" charset="0"/>
-                                  <a:ea typeface="Cambria Math" panose="02040503050406030204" pitchFamily="18" charset="0"/>
-                                </a:rPr>
-                                <m:t>1</m:t>
-                              </m:r>
-                            </m:e>
-                            <m:e>
-                              <m:r>
-                                <a:rPr lang="en-US" altLang="de-DE" sz="1600" b="0" i="1" smtClean="0">
-                                  <a:latin typeface="Cambria Math" panose="02040503050406030204" pitchFamily="18" charset="0"/>
-                                  <a:ea typeface="Cambria Math" panose="02040503050406030204" pitchFamily="18" charset="0"/>
-                                </a:rPr>
-                                <m:t>2</m:t>
-                              </m:r>
-                            </m:e>
-                          </m:eqArr>
-                        </m:e>
-                      </m:d>
-                      <m:r>
-                        <a:rPr lang="en-US" altLang="de-DE" sz="1600" b="0" i="1" smtClean="0">
-                          <a:latin typeface="Cambria Math" panose="02040503050406030204" pitchFamily="18" charset="0"/>
-                          <a:ea typeface="Cambria Math" panose="02040503050406030204" pitchFamily="18" charset="0"/>
-                        </a:rPr>
-                        <m:t>−2</m:t>
-                      </m:r>
-                      <m:r>
-                        <a:rPr lang="en-US" altLang="de-DE" sz="1600" b="0" i="1" smtClean="0">
-                          <a:latin typeface="Cambria Math" panose="02040503050406030204" pitchFamily="18" charset="0"/>
-                          <a:ea typeface="Cambria Math" panose="02040503050406030204" pitchFamily="18" charset="0"/>
-                        </a:rPr>
-                        <m:t>𝑥</m:t>
-                      </m:r>
-                    </m:oMath>
-                    <m:oMath xmlns:m="http://schemas.openxmlformats.org/officeDocument/2006/math">
-                      <m:r>
-                        <a:rPr kumimoji="0" lang="en-US" altLang="de-DE" sz="1600" b="0" i="1" u="none" strike="noStrike" cap="none" normalizeH="0" baseline="0" smtClean="0">
-                          <a:ln>
-                            <a:noFill/>
-                          </a:ln>
-                          <a:solidFill>
-                            <a:schemeClr val="tx1"/>
-                          </a:solidFill>
-                          <a:effectLst/>
-                          <a:latin typeface="Cambria Math" panose="02040503050406030204" pitchFamily="18" charset="0"/>
-                        </a:rPr>
-                        <m:t>h</m:t>
-                      </m:r>
-                      <m:r>
-                        <a:rPr kumimoji="0" lang="en-US" altLang="de-DE" sz="1600" b="0" i="1" u="none" strike="noStrike" cap="none" normalizeH="0" baseline="0" smtClean="0">
-                          <a:ln>
-                            <a:noFill/>
-                          </a:ln>
-                          <a:solidFill>
-                            <a:schemeClr val="tx1"/>
-                          </a:solidFill>
-                          <a:effectLst/>
-                          <a:latin typeface="Cambria Math" panose="02040503050406030204" pitchFamily="18" charset="0"/>
-                        </a:rPr>
-                        <m:t> :</m:t>
-                      </m:r>
-                      <m:r>
-                        <a:rPr kumimoji="0" lang="en-US" altLang="de-DE" sz="1600" b="0" i="1" u="none" strike="noStrike" cap="none" normalizeH="0" baseline="0" smtClean="0">
-                          <a:ln>
-                            <a:noFill/>
-                          </a:ln>
-                          <a:solidFill>
-                            <a:schemeClr val="tx1"/>
-                          </a:solidFill>
-                          <a:effectLst/>
-                          <a:latin typeface="Cambria Math" panose="02040503050406030204" pitchFamily="18" charset="0"/>
-                        </a:rPr>
-                        <m:t>𝐷</m:t>
-                      </m:r>
-                      <m:r>
-                        <a:rPr kumimoji="0" lang="en-US" altLang="de-DE" sz="1600" b="0" i="1" u="none" strike="noStrike" cap="none" normalizeH="0" baseline="0" smtClean="0">
-                          <a:ln>
-                            <a:noFill/>
-                          </a:ln>
-                          <a:solidFill>
-                            <a:schemeClr val="tx1"/>
-                          </a:solidFill>
-                          <a:effectLst/>
-                          <a:latin typeface="Cambria Math" panose="02040503050406030204" pitchFamily="18" charset="0"/>
-                        </a:rPr>
-                        <m:t>→</m:t>
-                      </m:r>
-                      <m:r>
-                        <a:rPr kumimoji="0" lang="en-US" altLang="de-DE" sz="1600" b="0" i="1" u="none" strike="noStrike" cap="none" normalizeH="0" baseline="0" smtClean="0">
-                          <a:ln>
-                            <a:noFill/>
-                          </a:ln>
-                          <a:solidFill>
-                            <a:schemeClr val="tx1"/>
-                          </a:solidFill>
-                          <a:effectLst/>
-                          <a:latin typeface="Cambria Math" panose="02040503050406030204" pitchFamily="18" charset="0"/>
-                        </a:rPr>
-                        <m:t>𝑍</m:t>
-                      </m:r>
-                      <m:r>
-                        <a:rPr kumimoji="0" lang="en-US" altLang="de-DE" sz="1600" b="0" i="1" u="none" strike="noStrike" cap="none" normalizeH="0" baseline="0" smtClean="0">
-                          <a:ln>
-                            <a:noFill/>
-                          </a:ln>
-                          <a:solidFill>
-                            <a:schemeClr val="tx1"/>
-                          </a:solidFill>
-                          <a:effectLst/>
-                          <a:latin typeface="Cambria Math" panose="02040503050406030204" pitchFamily="18" charset="0"/>
-                        </a:rPr>
-                        <m:t> :</m:t>
-                      </m:r>
-                      <m:r>
-                        <a:rPr kumimoji="0" lang="en-US" altLang="de-DE" sz="1600" b="0" i="1" u="none" strike="noStrike" cap="none" normalizeH="0" baseline="0" smtClean="0">
-                          <a:ln>
-                            <a:noFill/>
-                          </a:ln>
-                          <a:solidFill>
-                            <a:schemeClr val="tx1"/>
-                          </a:solidFill>
-                          <a:effectLst/>
-                          <a:latin typeface="Cambria Math" panose="02040503050406030204" pitchFamily="18" charset="0"/>
-                        </a:rPr>
-                        <m:t>𝑥</m:t>
-                      </m:r>
-                      <m:r>
-                        <a:rPr kumimoji="0" lang="en-US" altLang="de-DE" sz="1600" b="0" i="1" u="none" strike="noStrike" cap="none" normalizeH="0" baseline="0" smtClean="0">
-                          <a:ln>
-                            <a:noFill/>
-                          </a:ln>
-                          <a:solidFill>
-                            <a:schemeClr val="tx1"/>
-                          </a:solidFill>
-                          <a:effectLst/>
-                          <a:latin typeface="Cambria Math" panose="02040503050406030204" pitchFamily="18" charset="0"/>
-                          <a:ea typeface="Cambria Math" panose="02040503050406030204" pitchFamily="18" charset="0"/>
-                        </a:rPr>
-                        <m:t>↦</m:t>
-                      </m:r>
-                      <m:r>
-                        <a:rPr kumimoji="0" lang="en-US" altLang="de-DE" sz="1600" b="0" i="1" u="none" strike="noStrike" cap="none" normalizeH="0" baseline="0" smtClean="0">
-                          <a:ln>
-                            <a:noFill/>
-                          </a:ln>
-                          <a:solidFill>
-                            <a:schemeClr val="tx1"/>
-                          </a:solidFill>
-                          <a:effectLst/>
-                          <a:latin typeface="Cambria Math" panose="02040503050406030204" pitchFamily="18" charset="0"/>
-                          <a:ea typeface="Cambria Math" panose="02040503050406030204" pitchFamily="18" charset="0"/>
-                        </a:rPr>
-                        <m:t>𝑓</m:t>
-                      </m:r>
-                      <m:r>
-                        <a:rPr kumimoji="0" lang="en-US" altLang="de-DE" sz="1600" b="0" i="1" u="none" strike="noStrike" cap="none" normalizeH="0" baseline="0" smtClean="0">
-                          <a:ln>
-                            <a:noFill/>
-                          </a:ln>
-                          <a:solidFill>
-                            <a:schemeClr val="tx1"/>
-                          </a:solidFill>
-                          <a:effectLst/>
-                          <a:latin typeface="Cambria Math" panose="02040503050406030204" pitchFamily="18" charset="0"/>
-                          <a:ea typeface="Cambria Math" panose="02040503050406030204" pitchFamily="18" charset="0"/>
-                        </a:rPr>
-                        <m:t>(</m:t>
-                      </m:r>
-                      <m:r>
-                        <a:rPr kumimoji="0" lang="en-US" altLang="de-DE" sz="1600" b="0" i="1" u="none" strike="noStrike" cap="none" normalizeH="0" baseline="0" smtClean="0">
-                          <a:ln>
-                            <a:noFill/>
-                          </a:ln>
-                          <a:solidFill>
-                            <a:schemeClr val="tx1"/>
-                          </a:solidFill>
-                          <a:effectLst/>
-                          <a:latin typeface="Cambria Math" panose="02040503050406030204" pitchFamily="18" charset="0"/>
-                          <a:ea typeface="Cambria Math" panose="02040503050406030204" pitchFamily="18" charset="0"/>
-                        </a:rPr>
-                        <m:t>𝑔</m:t>
+                        <m:t>≡</m:t>
                       </m:r>
                       <m:d>
                         <m:dPr>
@@ -4352,7 +3840,6 @@
                               </a:solidFill>
                               <a:effectLst/>
                               <a:latin typeface="Cambria Math" panose="02040503050406030204" pitchFamily="18" charset="0"/>
-                              <a:ea typeface="Cambria Math" panose="02040503050406030204" pitchFamily="18" charset="0"/>
                             </a:rPr>
                           </m:ctrlPr>
                         </m:dPr>
@@ -4367,9 +3854,34 @@
                               </a:solidFill>
                               <a:effectLst/>
                               <a:latin typeface="Cambria Math" panose="02040503050406030204" pitchFamily="18" charset="0"/>
-                              <a:ea typeface="Cambria Math" panose="02040503050406030204" pitchFamily="18" charset="0"/>
                             </a:rPr>
-                            <m:t>𝑥</m:t>
+                            <m:t>𝐴</m:t>
+                          </m:r>
+                          <m:r>
+                            <a:rPr kumimoji="0" lang="en-US" altLang="de-DE" sz="1600" b="0" i="1" u="none" strike="noStrike" cap="none" normalizeH="0" baseline="0" smtClean="0">
+                              <a:ln>
+                                <a:noFill/>
+                              </a:ln>
+                              <a:solidFill>
+                                <a:schemeClr val="tx1"/>
+                              </a:solidFill>
+                              <a:effectLst/>
+                              <a:latin typeface="Cambria Math" panose="02040503050406030204" pitchFamily="18" charset="0"/>
+                            </a:rPr>
+                            <m:t>∨</m:t>
+                          </m:r>
+                          <m:r>
+                            <a:rPr kumimoji="0" lang="en-US" altLang="de-DE" sz="1600" b="0" i="1" u="none" strike="noStrike" cap="none" normalizeH="0" baseline="0" smtClean="0">
+                              <a:ln>
+                                <a:noFill/>
+                              </a:ln>
+                              <a:solidFill>
+                                <a:schemeClr val="tx1"/>
+                              </a:solidFill>
+                              <a:effectLst/>
+                              <a:latin typeface="Cambria Math" panose="02040503050406030204" pitchFamily="18" charset="0"/>
+                            </a:rPr>
+                            <m:t>𝐵</m:t>
                           </m:r>
                         </m:e>
                       </m:d>
@@ -4383,13 +3895,84 @@
                           </a:solidFill>
                           <a:effectLst/>
                           <a:latin typeface="Cambria Math" panose="02040503050406030204" pitchFamily="18" charset="0"/>
-                          <a:ea typeface="Cambria Math" panose="02040503050406030204" pitchFamily="18" charset="0"/>
                         </a:rPr>
-                        <m:t>) </m:t>
+                        <m:t>∧(</m:t>
+                      </m:r>
+                      <m:r>
+                        <a:rPr kumimoji="0" lang="en-US" altLang="de-DE" sz="1600" b="0" i="1" u="none" strike="noStrike" cap="none" normalizeH="0" baseline="0" smtClean="0">
+                          <a:ln>
+                            <a:noFill/>
+                          </a:ln>
+                          <a:solidFill>
+                            <a:schemeClr val="tx1"/>
+                          </a:solidFill>
+                          <a:effectLst/>
+                          <a:latin typeface="Cambria Math" panose="02040503050406030204" pitchFamily="18" charset="0"/>
+                        </a:rPr>
+                        <m:t>𝐴</m:t>
+                      </m:r>
+                      <m:r>
+                        <a:rPr kumimoji="0" lang="en-US" altLang="de-DE" sz="1600" b="0" i="1" u="none" strike="noStrike" cap="none" normalizeH="0" baseline="0" smtClean="0">
+                          <a:ln>
+                            <a:noFill/>
+                          </a:ln>
+                          <a:solidFill>
+                            <a:schemeClr val="tx1"/>
+                          </a:solidFill>
+                          <a:effectLst/>
+                          <a:latin typeface="Cambria Math" panose="02040503050406030204" pitchFamily="18" charset="0"/>
+                        </a:rPr>
+                        <m:t>∨</m:t>
+                      </m:r>
+                      <m:r>
+                        <a:rPr kumimoji="0" lang="en-US" altLang="de-DE" sz="1600" b="0" i="1" u="none" strike="noStrike" cap="none" normalizeH="0" baseline="0" smtClean="0">
+                          <a:ln>
+                            <a:noFill/>
+                          </a:ln>
+                          <a:solidFill>
+                            <a:schemeClr val="tx1"/>
+                          </a:solidFill>
+                          <a:effectLst/>
+                          <a:latin typeface="Cambria Math" panose="02040503050406030204" pitchFamily="18" charset="0"/>
+                        </a:rPr>
+                        <m:t>𝐶</m:t>
+                      </m:r>
+                      <m:r>
+                        <a:rPr kumimoji="0" lang="en-US" altLang="de-DE" sz="1600" b="0" i="1" u="none" strike="noStrike" cap="none" normalizeH="0" baseline="0" smtClean="0">
+                          <a:ln>
+                            <a:noFill/>
+                          </a:ln>
+                          <a:solidFill>
+                            <a:schemeClr val="tx1"/>
+                          </a:solidFill>
+                          <a:effectLst/>
+                          <a:latin typeface="Cambria Math" panose="02040503050406030204" pitchFamily="18" charset="0"/>
+                        </a:rPr>
+                        <m:t>)</m:t>
                       </m:r>
                     </m:oMath>
                   </m:oMathPara>
                 </a14:m>
+                <a:endParaRPr kumimoji="0" lang="en-US" altLang="de-DE" sz="1600" b="0" i="0" u="none" strike="noStrike" cap="none" normalizeH="0" baseline="0" dirty="0">
+                  <a:ln>
+                    <a:noFill/>
+                  </a:ln>
+                  <a:solidFill>
+                    <a:schemeClr val="tx1"/>
+                  </a:solidFill>
+                  <a:effectLst/>
+                  <a:latin typeface="Roboto Mono" panose="00000009000000000000" pitchFamily="50" charset="0"/>
+                </a:endParaRPr>
+              </a:p>
+              <a:p>
+                <a:pPr lvl="0" defTabSz="914400" eaLnBrk="0" fontAlgn="base" hangingPunct="0">
+                  <a:spcBef>
+                    <a:spcPct val="0"/>
+                  </a:spcBef>
+                  <a:spcAft>
+                    <a:spcPct val="0"/>
+                  </a:spcAft>
+                </a:pPr>
                 <a:endParaRPr kumimoji="0" lang="de-DE" altLang="de-DE" sz="1600" b="0" i="0" u="none" strike="noStrike" cap="none" normalizeH="0" baseline="0" dirty="0">
                   <a:ln>
                     <a:noFill/>
@@ -4420,9 +4003,9 @@
               <p:nvPr/>
             </p:nvSpPr>
             <p:spPr>
-              <a:xfrm rot="1272087">
-                <a:off x="4762978" y="2928603"/>
-                <a:ext cx="7248178" cy="1630190"/>
+              <a:xfrm rot="1083706">
+                <a:off x="8044361" y="3816951"/>
+                <a:ext cx="3787852" cy="584775"/>
               </a:xfrm>
               <a:prstGeom prst="rect">
                 <a:avLst/>
@@ -4465,8 +4048,8 @@
             </p:nvSpPr>
             <p:spPr>
               <a:xfrm rot="684757">
-                <a:off x="764481" y="4945922"/>
-                <a:ext cx="7646685" cy="1432828"/>
+                <a:off x="136509" y="5287377"/>
+                <a:ext cx="4170116" cy="531428"/>
               </a:xfrm>
               <a:prstGeom prst="rect">
                 <a:avLst/>
@@ -4681,372 +4264,13 @@
                         </m:e>
                       </m:d>
                     </m:oMath>
-                    <m:oMath xmlns:m="http://schemas.openxmlformats.org/officeDocument/2006/math">
-                      <m:r>
-                        <a:rPr lang="en-US" altLang="de-DE" sz="1600" b="0" i="1" smtClean="0">
-                          <a:latin typeface="Cambria Math" panose="02040503050406030204" pitchFamily="18" charset="0"/>
-                        </a:rPr>
-                        <m:t>𝑓</m:t>
-                      </m:r>
-                      <m:r>
-                        <a:rPr lang="en-US" altLang="de-DE" sz="1600" b="0" i="1" smtClean="0">
-                          <a:latin typeface="Cambria Math" panose="02040503050406030204" pitchFamily="18" charset="0"/>
-                        </a:rPr>
-                        <m:t>:</m:t>
-                      </m:r>
-                    </m:oMath>
-                    <m:oMath xmlns:m="http://schemas.openxmlformats.org/officeDocument/2006/math">
-                      <m:r>
-                        <a:rPr kumimoji="0" lang="en-US" altLang="de-DE" sz="1600" b="0" i="1" u="none" strike="noStrike" cap="none" normalizeH="0" baseline="0" smtClean="0">
-                          <a:ln>
-                            <a:noFill/>
-                          </a:ln>
-                          <a:solidFill>
-                            <a:schemeClr val="tx1"/>
-                          </a:solidFill>
-                          <a:effectLst/>
-                          <a:latin typeface="Cambria Math" panose="02040503050406030204" pitchFamily="18" charset="0"/>
-                        </a:rPr>
-                        <m:t>𝑔</m:t>
-                      </m:r>
-                      <m:r>
-                        <a:rPr kumimoji="0" lang="en-US" altLang="de-DE" sz="1600" b="0" i="1" u="none" strike="noStrike" cap="none" normalizeH="0" baseline="0" smtClean="0">
-                          <a:ln>
-                            <a:noFill/>
-                          </a:ln>
-                          <a:solidFill>
-                            <a:schemeClr val="tx1"/>
-                          </a:solidFill>
-                          <a:effectLst/>
-                          <a:latin typeface="Cambria Math" panose="02040503050406030204" pitchFamily="18" charset="0"/>
-                        </a:rPr>
-                        <m:t> :</m:t>
-                      </m:r>
-                      <m:r>
-                        <a:rPr kumimoji="0" lang="en-US" altLang="de-DE" sz="1600" b="0" i="1" u="none" strike="noStrike" cap="none" normalizeH="0" baseline="0" smtClean="0">
-                          <a:ln>
-                            <a:noFill/>
-                          </a:ln>
-                          <a:solidFill>
-                            <a:schemeClr val="tx1"/>
-                          </a:solidFill>
-                          <a:effectLst/>
-                          <a:latin typeface="Cambria Math" panose="02040503050406030204" pitchFamily="18" charset="0"/>
-                        </a:rPr>
-                        <m:t>𝐷</m:t>
-                      </m:r>
-                      <m:r>
-                        <a:rPr kumimoji="0" lang="en-US" altLang="de-DE" sz="1600" b="0" i="1" u="none" strike="noStrike" cap="none" normalizeH="0" baseline="0" smtClean="0">
-                          <a:ln>
-                            <a:noFill/>
-                          </a:ln>
-                          <a:solidFill>
-                            <a:schemeClr val="tx1"/>
-                          </a:solidFill>
-                          <a:effectLst/>
-                          <a:latin typeface="Cambria Math" panose="02040503050406030204" pitchFamily="18" charset="0"/>
-                        </a:rPr>
-                        <m:t>→</m:t>
-                      </m:r>
-                      <m:r>
-                        <a:rPr kumimoji="0" lang="en-US" altLang="de-DE" sz="1600" b="0" i="1" u="none" strike="noStrike" cap="none" normalizeH="0" baseline="0" smtClean="0">
-                          <a:ln>
-                            <a:noFill/>
-                          </a:ln>
-                          <a:solidFill>
-                            <a:schemeClr val="tx1"/>
-                          </a:solidFill>
-                          <a:effectLst/>
-                          <a:latin typeface="Cambria Math" panose="02040503050406030204" pitchFamily="18" charset="0"/>
-                        </a:rPr>
-                        <m:t>𝐷</m:t>
-                      </m:r>
-                      <m:r>
-                        <a:rPr kumimoji="0" lang="en-US" altLang="de-DE" sz="1600" b="0" i="1" u="none" strike="noStrike" cap="none" normalizeH="0" baseline="0" smtClean="0">
-                          <a:ln>
-                            <a:noFill/>
-                          </a:ln>
-                          <a:solidFill>
-                            <a:schemeClr val="tx1"/>
-                          </a:solidFill>
-                          <a:effectLst/>
-                          <a:latin typeface="Cambria Math" panose="02040503050406030204" pitchFamily="18" charset="0"/>
-                        </a:rPr>
-                        <m:t>: </m:t>
-                      </m:r>
-                      <m:r>
-                        <a:rPr kumimoji="0" lang="en-US" altLang="de-DE" sz="1600" b="0" i="1" u="none" strike="noStrike" cap="none" normalizeH="0" baseline="0" smtClean="0">
-                          <a:ln>
-                            <a:noFill/>
-                          </a:ln>
-                          <a:solidFill>
-                            <a:schemeClr val="tx1"/>
-                          </a:solidFill>
-                          <a:effectLst/>
-                          <a:latin typeface="Cambria Math" panose="02040503050406030204" pitchFamily="18" charset="0"/>
-                        </a:rPr>
-                        <m:t>𝑥</m:t>
-                      </m:r>
-                      <m:r>
-                        <a:rPr lang="en-US" altLang="de-DE" sz="1600" i="1">
-                          <a:latin typeface="Cambria Math" panose="02040503050406030204" pitchFamily="18" charset="0"/>
-                          <a:ea typeface="Cambria Math" panose="02040503050406030204" pitchFamily="18" charset="0"/>
-                        </a:rPr>
-                        <m:t>↦</m:t>
-                      </m:r>
-                      <m:d>
-                        <m:dPr>
-                          <m:ctrlPr>
-                            <a:rPr lang="en-US" altLang="de-DE" sz="1600" i="1" smtClean="0">
-                              <a:latin typeface="Cambria Math" panose="02040503050406030204" pitchFamily="18" charset="0"/>
-                              <a:ea typeface="Cambria Math" panose="02040503050406030204" pitchFamily="18" charset="0"/>
-                            </a:rPr>
-                          </m:ctrlPr>
-                        </m:dPr>
-                        <m:e>
-                          <m:eqArr>
-                            <m:eqArrPr>
-                              <m:ctrlPr>
-                                <a:rPr lang="en-US" altLang="de-DE" sz="1600" b="0" i="1" smtClean="0">
-                                  <a:latin typeface="Cambria Math" panose="02040503050406030204" pitchFamily="18" charset="0"/>
-                                  <a:ea typeface="Cambria Math" panose="02040503050406030204" pitchFamily="18" charset="0"/>
-                                </a:rPr>
-                              </m:ctrlPr>
-                            </m:eqArrPr>
-                            <m:e>
-                              <m:r>
-                                <a:rPr lang="en-US" altLang="de-DE" sz="1600" b="0" i="1" smtClean="0">
-                                  <a:latin typeface="Cambria Math" panose="02040503050406030204" pitchFamily="18" charset="0"/>
-                                  <a:ea typeface="Cambria Math" panose="02040503050406030204" pitchFamily="18" charset="0"/>
-                                </a:rPr>
-                                <m:t>1</m:t>
-                              </m:r>
-                            </m:e>
-                            <m:e>
-                              <m:r>
-                                <a:rPr lang="en-US" altLang="de-DE" sz="1600" b="0" i="1" smtClean="0">
-                                  <a:latin typeface="Cambria Math" panose="02040503050406030204" pitchFamily="18" charset="0"/>
-                                  <a:ea typeface="Cambria Math" panose="02040503050406030204" pitchFamily="18" charset="0"/>
-                                </a:rPr>
-                                <m:t>2</m:t>
-                              </m:r>
-                            </m:e>
-                          </m:eqArr>
-                        </m:e>
-                      </m:d>
-                      <m:r>
-                        <a:rPr lang="en-US" altLang="de-DE" sz="1600" b="0" i="1" smtClean="0">
-                          <a:latin typeface="Cambria Math" panose="02040503050406030204" pitchFamily="18" charset="0"/>
-                          <a:ea typeface="Cambria Math" panose="02040503050406030204" pitchFamily="18" charset="0"/>
-                        </a:rPr>
-                        <m:t>−2</m:t>
-                      </m:r>
-                      <m:r>
-                        <a:rPr lang="en-US" altLang="de-DE" sz="1600" b="0" i="1" smtClean="0">
-                          <a:latin typeface="Cambria Math" panose="02040503050406030204" pitchFamily="18" charset="0"/>
-                          <a:ea typeface="Cambria Math" panose="02040503050406030204" pitchFamily="18" charset="0"/>
-                        </a:rPr>
-                        <m:t>𝑥</m:t>
-                      </m:r>
-                    </m:oMath>
-                    <m:oMath xmlns:m="http://schemas.openxmlformats.org/officeDocument/2006/math">
-                      <m:r>
-                        <a:rPr kumimoji="0" lang="en-US" altLang="de-DE" sz="1600" b="0" i="1" u="none" strike="noStrike" cap="none" normalizeH="0" baseline="0" smtClean="0">
-                          <a:ln>
-                            <a:noFill/>
-                          </a:ln>
-                          <a:solidFill>
-                            <a:schemeClr val="tx1"/>
-                          </a:solidFill>
-                          <a:effectLst/>
-                          <a:latin typeface="Cambria Math" panose="02040503050406030204" pitchFamily="18" charset="0"/>
-                        </a:rPr>
-                        <m:t>h</m:t>
-                      </m:r>
-                      <m:r>
-                        <a:rPr kumimoji="0" lang="en-US" altLang="de-DE" sz="1600" b="0" i="1" u="none" strike="noStrike" cap="none" normalizeH="0" baseline="0" smtClean="0">
-                          <a:ln>
-                            <a:noFill/>
-                          </a:ln>
-                          <a:solidFill>
-                            <a:schemeClr val="tx1"/>
-                          </a:solidFill>
-                          <a:effectLst/>
-                          <a:latin typeface="Cambria Math" panose="02040503050406030204" pitchFamily="18" charset="0"/>
-                        </a:rPr>
-                        <m:t> :</m:t>
-                      </m:r>
-                      <m:r>
-                        <a:rPr kumimoji="0" lang="en-US" altLang="de-DE" sz="1600" b="0" i="1" u="none" strike="noStrike" cap="none" normalizeH="0" baseline="0" smtClean="0">
-                          <a:ln>
-                            <a:noFill/>
-                          </a:ln>
-                          <a:solidFill>
-                            <a:schemeClr val="tx1"/>
-                          </a:solidFill>
-                          <a:effectLst/>
-                          <a:latin typeface="Cambria Math" panose="02040503050406030204" pitchFamily="18" charset="0"/>
-                        </a:rPr>
-                        <m:t>𝐷</m:t>
-                      </m:r>
-                      <m:r>
-                        <a:rPr kumimoji="0" lang="en-US" altLang="de-DE" sz="1600" b="0" i="1" u="none" strike="noStrike" cap="none" normalizeH="0" baseline="0" smtClean="0">
-                          <a:ln>
-                            <a:noFill/>
-                          </a:ln>
-                          <a:solidFill>
-                            <a:schemeClr val="tx1"/>
-                          </a:solidFill>
-                          <a:effectLst/>
-                          <a:latin typeface="Cambria Math" panose="02040503050406030204" pitchFamily="18" charset="0"/>
-                        </a:rPr>
-                        <m:t>→</m:t>
-                      </m:r>
-                      <m:r>
-                        <a:rPr kumimoji="0" lang="en-US" altLang="de-DE" sz="1600" b="0" i="1" u="none" strike="noStrike" cap="none" normalizeH="0" baseline="0" smtClean="0">
-                          <a:ln>
-                            <a:noFill/>
-                          </a:ln>
-                          <a:solidFill>
-                            <a:schemeClr val="tx1"/>
-                          </a:solidFill>
-                          <a:effectLst/>
-                          <a:latin typeface="Cambria Math" panose="02040503050406030204" pitchFamily="18" charset="0"/>
-                        </a:rPr>
-                        <m:t>𝑍</m:t>
-                      </m:r>
-                      <m:r>
-                        <a:rPr kumimoji="0" lang="en-US" altLang="de-DE" sz="1600" b="0" i="1" u="none" strike="noStrike" cap="none" normalizeH="0" baseline="0" smtClean="0">
-                          <a:ln>
-                            <a:noFill/>
-                          </a:ln>
-                          <a:solidFill>
-                            <a:schemeClr val="tx1"/>
-                          </a:solidFill>
-                          <a:effectLst/>
-                          <a:latin typeface="Cambria Math" panose="02040503050406030204" pitchFamily="18" charset="0"/>
-                        </a:rPr>
-                        <m:t> :</m:t>
-                      </m:r>
-                      <m:r>
-                        <a:rPr kumimoji="0" lang="en-US" altLang="de-DE" sz="1600" b="0" i="1" u="none" strike="noStrike" cap="none" normalizeH="0" baseline="0" smtClean="0">
-                          <a:ln>
-                            <a:noFill/>
-                          </a:ln>
-                          <a:solidFill>
-                            <a:schemeClr val="tx1"/>
-                          </a:solidFill>
-                          <a:effectLst/>
-                          <a:latin typeface="Cambria Math" panose="02040503050406030204" pitchFamily="18" charset="0"/>
-                        </a:rPr>
-                        <m:t>𝑥</m:t>
-                      </m:r>
-                      <m:r>
-                        <a:rPr kumimoji="0" lang="en-US" altLang="de-DE" sz="1600" b="0" i="1" u="none" strike="noStrike" cap="none" normalizeH="0" baseline="0" smtClean="0">
-                          <a:ln>
-                            <a:noFill/>
-                          </a:ln>
-                          <a:solidFill>
-                            <a:schemeClr val="tx1"/>
-                          </a:solidFill>
-                          <a:effectLst/>
-                          <a:latin typeface="Cambria Math" panose="02040503050406030204" pitchFamily="18" charset="0"/>
-                          <a:ea typeface="Cambria Math" panose="02040503050406030204" pitchFamily="18" charset="0"/>
-                        </a:rPr>
-                        <m:t>↦</m:t>
-                      </m:r>
-                      <m:r>
-                        <a:rPr kumimoji="0" lang="en-US" altLang="de-DE" sz="1600" b="0" i="1" u="none" strike="noStrike" cap="none" normalizeH="0" baseline="0" smtClean="0">
-                          <a:ln>
-                            <a:noFill/>
-                          </a:ln>
-                          <a:solidFill>
-                            <a:schemeClr val="tx1"/>
-                          </a:solidFill>
-                          <a:effectLst/>
-                          <a:latin typeface="Cambria Math" panose="02040503050406030204" pitchFamily="18" charset="0"/>
-                          <a:ea typeface="Cambria Math" panose="02040503050406030204" pitchFamily="18" charset="0"/>
-                        </a:rPr>
-                        <m:t>𝑓</m:t>
-                      </m:r>
-                      <m:r>
-                        <a:rPr kumimoji="0" lang="en-US" altLang="de-DE" sz="1600" b="0" i="1" u="none" strike="noStrike" cap="none" normalizeH="0" baseline="0" smtClean="0">
-                          <a:ln>
-                            <a:noFill/>
-                          </a:ln>
-                          <a:solidFill>
-                            <a:schemeClr val="tx1"/>
-                          </a:solidFill>
-                          <a:effectLst/>
-                          <a:latin typeface="Cambria Math" panose="02040503050406030204" pitchFamily="18" charset="0"/>
-                          <a:ea typeface="Cambria Math" panose="02040503050406030204" pitchFamily="18" charset="0"/>
-                        </a:rPr>
-                        <m:t>(</m:t>
-                      </m:r>
-                      <m:r>
-                        <a:rPr kumimoji="0" lang="en-US" altLang="de-DE" sz="1600" b="0" i="1" u="none" strike="noStrike" cap="none" normalizeH="0" baseline="0" smtClean="0">
-                          <a:ln>
-                            <a:noFill/>
-                          </a:ln>
-                          <a:solidFill>
-                            <a:schemeClr val="tx1"/>
-                          </a:solidFill>
-                          <a:effectLst/>
-                          <a:latin typeface="Cambria Math" panose="02040503050406030204" pitchFamily="18" charset="0"/>
-                          <a:ea typeface="Cambria Math" panose="02040503050406030204" pitchFamily="18" charset="0"/>
-                        </a:rPr>
-                        <m:t>𝑔</m:t>
-                      </m:r>
-                      <m:d>
-                        <m:dPr>
-                          <m:ctrlPr>
-                            <a:rPr kumimoji="0" lang="en-US" altLang="de-DE" sz="1600" b="0" i="1" u="none" strike="noStrike" cap="none" normalizeH="0" baseline="0" smtClean="0">
-                              <a:ln>
-                                <a:noFill/>
-                              </a:ln>
-                              <a:solidFill>
-                                <a:schemeClr val="tx1"/>
-                              </a:solidFill>
-                              <a:effectLst/>
-                              <a:latin typeface="Cambria Math" panose="02040503050406030204" pitchFamily="18" charset="0"/>
-                              <a:ea typeface="Cambria Math" panose="02040503050406030204" pitchFamily="18" charset="0"/>
-                            </a:rPr>
-                          </m:ctrlPr>
-                        </m:dPr>
-                        <m:e>
-                          <m:r>
-                            <a:rPr kumimoji="0" lang="en-US" altLang="de-DE" sz="1600" b="0" i="1" u="none" strike="noStrike" cap="none" normalizeH="0" baseline="0" smtClean="0">
-                              <a:ln>
-                                <a:noFill/>
-                              </a:ln>
-                              <a:solidFill>
-                                <a:schemeClr val="tx1"/>
-                              </a:solidFill>
-                              <a:effectLst/>
-                              <a:latin typeface="Cambria Math" panose="02040503050406030204" pitchFamily="18" charset="0"/>
-                              <a:ea typeface="Cambria Math" panose="02040503050406030204" pitchFamily="18" charset="0"/>
-                            </a:rPr>
-                            <m:t>𝑥</m:t>
-                          </m:r>
-                        </m:e>
-                      </m:d>
-                      <m:r>
-                        <a:rPr kumimoji="0" lang="en-US" altLang="de-DE" sz="1600" b="0" i="1" u="none" strike="noStrike" cap="none" normalizeH="0" baseline="0" smtClean="0">
-                          <a:ln>
-                            <a:noFill/>
-                          </a:ln>
-                          <a:solidFill>
-                            <a:schemeClr val="tx1"/>
-                          </a:solidFill>
-                          <a:effectLst/>
-                          <a:latin typeface="Cambria Math" panose="02040503050406030204" pitchFamily="18" charset="0"/>
-                          <a:ea typeface="Cambria Math" panose="02040503050406030204" pitchFamily="18" charset="0"/>
-                        </a:rPr>
-                        <m:t>) </m:t>
-                      </m:r>
-                    </m:oMath>
                   </m:oMathPara>
                 </a14:m>
+                <a:br>
+                  <a:rPr lang="en-US" altLang="de-DE" sz="1600" b="0" i="1" dirty="0">
+                    <a:latin typeface="Cambria Math" panose="02040503050406030204" pitchFamily="18" charset="0"/>
+                  </a:rPr>
+                </a:br>
                 <a:endParaRPr kumimoji="0" lang="de-DE" altLang="de-DE" sz="1600" b="0" i="0" u="none" strike="noStrike" cap="none" normalizeH="0" baseline="0" dirty="0">
                   <a:ln>
                     <a:noFill/>
@@ -5078,8 +4302,8 @@
             </p:nvSpPr>
             <p:spPr>
               <a:xfrm rot="684757">
-                <a:off x="764481" y="4945922"/>
-                <a:ext cx="7646685" cy="1432828"/>
+                <a:off x="136509" y="5287377"/>
+                <a:ext cx="4170116" cy="531428"/>
               </a:xfrm>
               <a:prstGeom prst="rect">
                 <a:avLst/>
@@ -5122,8 +4346,8 @@
             </p:nvSpPr>
             <p:spPr>
               <a:xfrm rot="20631408">
-                <a:off x="564987" y="401324"/>
-                <a:ext cx="7091364" cy="1630190"/>
+                <a:off x="1356297" y="802551"/>
+                <a:ext cx="3610254" cy="1630190"/>
               </a:xfrm>
               <a:prstGeom prst="rect">
                 <a:avLst/>
@@ -5869,8 +5093,8 @@
             </p:nvSpPr>
             <p:spPr>
               <a:xfrm rot="20631408">
-                <a:off x="564987" y="401324"/>
-                <a:ext cx="7091364" cy="1630190"/>
+                <a:off x="1356297" y="802551"/>
+                <a:ext cx="3610254" cy="1630190"/>
               </a:xfrm>
               <a:prstGeom prst="rect">
                 <a:avLst/>
@@ -6050,6 +5274,3418 @@
           </a:prstGeom>
         </p:spPr>
       </p:pic>
+      <p:sp>
+        <p:nvSpPr>
+          <p:cNvPr id="3" name="Rectangle 2">
+            <a:extLst>
+              <a:ext uri="{FF2B5EF4-FFF2-40B4-BE49-F238E27FC236}">
+                <a16:creationId xmlns:a16="http://schemas.microsoft.com/office/drawing/2014/main" id="{4DF96D01-E366-4288-9737-FFCED5CBEFBF}"/>
+              </a:ext>
+            </a:extLst>
+          </p:cNvPr>
+          <p:cNvSpPr/>
+          <p:nvPr/>
+        </p:nvSpPr>
+        <p:spPr>
+          <a:xfrm>
+            <a:off x="3395474" y="3525914"/>
+            <a:ext cx="400985" cy="400985"/>
+          </a:xfrm>
+          <a:prstGeom prst="rect">
+            <a:avLst/>
+          </a:prstGeom>
+          <a:noFill/>
+        </p:spPr>
+        <p:style>
+          <a:lnRef idx="2">
+            <a:schemeClr val="accent1">
+              <a:shade val="50000"/>
+            </a:schemeClr>
+          </a:lnRef>
+          <a:fillRef idx="1">
+            <a:schemeClr val="accent1"/>
+          </a:fillRef>
+          <a:effectRef idx="0">
+            <a:schemeClr val="accent1"/>
+          </a:effectRef>
+          <a:fontRef idx="minor">
+            <a:schemeClr val="lt1"/>
+          </a:fontRef>
+        </p:style>
+        <p:txBody>
+          <a:bodyPr rtlCol="0" anchor="ctr"/>
+          <a:lstStyle/>
+          <a:p>
+            <a:pPr algn="ctr"/>
+            <a:r>
+              <a:rPr lang="de-DE" dirty="0"/>
+              <a:t>A</a:t>
+            </a:r>
+          </a:p>
+        </p:txBody>
+      </p:sp>
+      <p:sp>
+        <p:nvSpPr>
+          <p:cNvPr id="12" name="Rectangle 11">
+            <a:extLst>
+              <a:ext uri="{FF2B5EF4-FFF2-40B4-BE49-F238E27FC236}">
+                <a16:creationId xmlns:a16="http://schemas.microsoft.com/office/drawing/2014/main" id="{771AEF77-09C2-4E0B-A2B6-C3668C80AC5A}"/>
+              </a:ext>
+            </a:extLst>
+          </p:cNvPr>
+          <p:cNvSpPr/>
+          <p:nvPr/>
+        </p:nvSpPr>
+        <p:spPr>
+          <a:xfrm>
+            <a:off x="5026154" y="3470792"/>
+            <a:ext cx="400985" cy="400985"/>
+          </a:xfrm>
+          <a:prstGeom prst="rect">
+            <a:avLst/>
+          </a:prstGeom>
+          <a:noFill/>
+        </p:spPr>
+        <p:style>
+          <a:lnRef idx="2">
+            <a:schemeClr val="accent1">
+              <a:shade val="50000"/>
+            </a:schemeClr>
+          </a:lnRef>
+          <a:fillRef idx="1">
+            <a:schemeClr val="accent1"/>
+          </a:fillRef>
+          <a:effectRef idx="0">
+            <a:schemeClr val="accent1"/>
+          </a:effectRef>
+          <a:fontRef idx="minor">
+            <a:schemeClr val="lt1"/>
+          </a:fontRef>
+        </p:style>
+        <p:txBody>
+          <a:bodyPr rtlCol="0" anchor="ctr"/>
+          <a:lstStyle/>
+          <a:p>
+            <a:pPr algn="ctr"/>
+            <a:r>
+              <a:rPr lang="de-DE" dirty="0"/>
+              <a:t>B</a:t>
+            </a:r>
+          </a:p>
+        </p:txBody>
+      </p:sp>
+      <p:sp>
+        <p:nvSpPr>
+          <p:cNvPr id="13" name="Rectangle 12">
+            <a:extLst>
+              <a:ext uri="{FF2B5EF4-FFF2-40B4-BE49-F238E27FC236}">
+                <a16:creationId xmlns:a16="http://schemas.microsoft.com/office/drawing/2014/main" id="{F844FC90-392A-4268-9196-EE179BDC3ED7}"/>
+              </a:ext>
+            </a:extLst>
+          </p:cNvPr>
+          <p:cNvSpPr/>
+          <p:nvPr/>
+        </p:nvSpPr>
+        <p:spPr>
+          <a:xfrm>
+            <a:off x="4721018" y="4445801"/>
+            <a:ext cx="400985" cy="400985"/>
+          </a:xfrm>
+          <a:prstGeom prst="rect">
+            <a:avLst/>
+          </a:prstGeom>
+          <a:noFill/>
+        </p:spPr>
+        <p:style>
+          <a:lnRef idx="2">
+            <a:schemeClr val="accent1">
+              <a:shade val="50000"/>
+            </a:schemeClr>
+          </a:lnRef>
+          <a:fillRef idx="1">
+            <a:schemeClr val="accent1"/>
+          </a:fillRef>
+          <a:effectRef idx="0">
+            <a:schemeClr val="accent1"/>
+          </a:effectRef>
+          <a:fontRef idx="minor">
+            <a:schemeClr val="lt1"/>
+          </a:fontRef>
+        </p:style>
+        <p:txBody>
+          <a:bodyPr rtlCol="0" anchor="ctr"/>
+          <a:lstStyle/>
+          <a:p>
+            <a:pPr algn="ctr"/>
+            <a:r>
+              <a:rPr lang="de-DE" dirty="0"/>
+              <a:t>C</a:t>
+            </a:r>
+          </a:p>
+        </p:txBody>
+      </p:sp>
+      <p:cxnSp>
+        <p:nvCxnSpPr>
+          <p:cNvPr id="5" name="Straight Arrow Connector 4">
+            <a:extLst>
+              <a:ext uri="{FF2B5EF4-FFF2-40B4-BE49-F238E27FC236}">
+                <a16:creationId xmlns:a16="http://schemas.microsoft.com/office/drawing/2014/main" id="{4FD61D4C-41C8-45B0-97A0-7FB0F8A24B75}"/>
+              </a:ext>
+            </a:extLst>
+          </p:cNvPr>
+          <p:cNvCxnSpPr>
+            <a:stCxn id="3" idx="3"/>
+          </p:cNvCxnSpPr>
+          <p:nvPr/>
+        </p:nvCxnSpPr>
+        <p:spPr>
+          <a:xfrm>
+            <a:off x="3796459" y="3726406"/>
+            <a:ext cx="914400" cy="914400"/>
+          </a:xfrm>
+          <a:prstGeom prst="straightConnector1">
+            <a:avLst/>
+          </a:prstGeom>
+          <a:ln>
+            <a:tailEnd type="triangle"/>
+          </a:ln>
+        </p:spPr>
+        <p:style>
+          <a:lnRef idx="1">
+            <a:schemeClr val="accent1"/>
+          </a:lnRef>
+          <a:fillRef idx="0">
+            <a:schemeClr val="accent1"/>
+          </a:fillRef>
+          <a:effectRef idx="0">
+            <a:schemeClr val="accent1"/>
+          </a:effectRef>
+          <a:fontRef idx="minor">
+            <a:schemeClr val="tx1"/>
+          </a:fontRef>
+        </p:style>
+      </p:cxnSp>
+      <p:cxnSp>
+        <p:nvCxnSpPr>
+          <p:cNvPr id="18" name="Straight Arrow Connector 17">
+            <a:extLst>
+              <a:ext uri="{FF2B5EF4-FFF2-40B4-BE49-F238E27FC236}">
+                <a16:creationId xmlns:a16="http://schemas.microsoft.com/office/drawing/2014/main" id="{60BA0624-F41D-4D5B-9DD4-F600C5E591C1}"/>
+              </a:ext>
+            </a:extLst>
+          </p:cNvPr>
+          <p:cNvCxnSpPr>
+            <a:cxnSpLocks/>
+            <a:stCxn id="12" idx="2"/>
+            <a:endCxn id="13" idx="0"/>
+          </p:cNvCxnSpPr>
+          <p:nvPr/>
+        </p:nvCxnSpPr>
+        <p:spPr>
+          <a:xfrm flipH="1">
+            <a:off x="4921511" y="3871777"/>
+            <a:ext cx="305136" cy="574024"/>
+          </a:xfrm>
+          <a:prstGeom prst="straightConnector1">
+            <a:avLst/>
+          </a:prstGeom>
+          <a:ln>
+            <a:headEnd type="triangle"/>
+            <a:tailEnd type="triangle"/>
+          </a:ln>
+        </p:spPr>
+        <p:style>
+          <a:lnRef idx="1">
+            <a:schemeClr val="accent1"/>
+          </a:lnRef>
+          <a:fillRef idx="0">
+            <a:schemeClr val="accent1"/>
+          </a:fillRef>
+          <a:effectRef idx="0">
+            <a:schemeClr val="accent1"/>
+          </a:effectRef>
+          <a:fontRef idx="minor">
+            <a:schemeClr val="tx1"/>
+          </a:fontRef>
+        </p:style>
+      </p:cxnSp>
+      <p:cxnSp>
+        <p:nvCxnSpPr>
+          <p:cNvPr id="21" name="Connector: Curved 20">
+            <a:extLst>
+              <a:ext uri="{FF2B5EF4-FFF2-40B4-BE49-F238E27FC236}">
+                <a16:creationId xmlns:a16="http://schemas.microsoft.com/office/drawing/2014/main" id="{E3267C40-92A6-44C9-8771-36485175EE5F}"/>
+              </a:ext>
+            </a:extLst>
+          </p:cNvPr>
+          <p:cNvCxnSpPr>
+            <a:cxnSpLocks/>
+            <a:stCxn id="13" idx="3"/>
+            <a:endCxn id="13" idx="2"/>
+          </p:cNvCxnSpPr>
+          <p:nvPr/>
+        </p:nvCxnSpPr>
+        <p:spPr>
+          <a:xfrm flipH="1">
+            <a:off x="4921511" y="4646294"/>
+            <a:ext cx="200492" cy="200492"/>
+          </a:xfrm>
+          <a:prstGeom prst="curvedConnector4">
+            <a:avLst>
+              <a:gd name="adj1" fmla="val -114020"/>
+              <a:gd name="adj2" fmla="val 214020"/>
+            </a:avLst>
+          </a:prstGeom>
+          <a:ln>
+            <a:tailEnd type="triangle"/>
+          </a:ln>
+        </p:spPr>
+        <p:style>
+          <a:lnRef idx="1">
+            <a:schemeClr val="accent1"/>
+          </a:lnRef>
+          <a:fillRef idx="0">
+            <a:schemeClr val="accent1"/>
+          </a:fillRef>
+          <a:effectRef idx="0">
+            <a:schemeClr val="accent1"/>
+          </a:effectRef>
+          <a:fontRef idx="minor">
+            <a:schemeClr val="tx1"/>
+          </a:fontRef>
+        </p:style>
+      </p:cxnSp>
+      <mc:AlternateContent xmlns:mc="http://schemas.openxmlformats.org/markup-compatibility/2006">
+        <mc:Choice xmlns:a14="http://schemas.microsoft.com/office/drawing/2010/main" Requires="a14">
+          <p:graphicFrame>
+            <p:nvGraphicFramePr>
+              <p:cNvPr id="23" name="Table 23">
+                <a:extLst>
+                  <a:ext uri="{FF2B5EF4-FFF2-40B4-BE49-F238E27FC236}">
+                    <a16:creationId xmlns:a16="http://schemas.microsoft.com/office/drawing/2014/main" id="{5D330A15-C110-41A6-B256-C7FA416A2C44}"/>
+                  </a:ext>
+                </a:extLst>
+              </p:cNvPr>
+              <p:cNvGraphicFramePr>
+                <a:graphicFrameLocks noGrp="1"/>
+              </p:cNvGraphicFramePr>
+              <p:nvPr>
+                <p:extLst>
+                  <p:ext uri="{D42A27DB-BD31-4B8C-83A1-F6EECF244321}">
+                    <p14:modId xmlns:p14="http://schemas.microsoft.com/office/powerpoint/2010/main" val="2755602879"/>
+                  </p:ext>
+                </p:extLst>
+              </p:nvPr>
+            </p:nvGraphicFramePr>
+            <p:xfrm>
+              <a:off x="6013963" y="705707"/>
+              <a:ext cx="3967865" cy="1616190"/>
+            </p:xfrm>
+            <a:graphic>
+              <a:graphicData uri="http://schemas.openxmlformats.org/drawingml/2006/table">
+                <a:tbl>
+                  <a:tblPr firstRow="1" bandRow="1">
+                    <a:tableStyleId>{5C22544A-7EE6-4342-B048-85BDC9FD1C3A}</a:tableStyleId>
+                  </a:tblPr>
+                  <a:tblGrid>
+                    <a:gridCol w="793573">
+                      <a:extLst>
+                        <a:ext uri="{9D8B030D-6E8A-4147-A177-3AD203B41FA5}">
+                          <a16:colId xmlns:a16="http://schemas.microsoft.com/office/drawing/2014/main" val="2619550694"/>
+                        </a:ext>
+                      </a:extLst>
+                    </a:gridCol>
+                    <a:gridCol w="793573">
+                      <a:extLst>
+                        <a:ext uri="{9D8B030D-6E8A-4147-A177-3AD203B41FA5}">
+                          <a16:colId xmlns:a16="http://schemas.microsoft.com/office/drawing/2014/main" val="1240274847"/>
+                        </a:ext>
+                      </a:extLst>
+                    </a:gridCol>
+                    <a:gridCol w="793573">
+                      <a:extLst>
+                        <a:ext uri="{9D8B030D-6E8A-4147-A177-3AD203B41FA5}">
+                          <a16:colId xmlns:a16="http://schemas.microsoft.com/office/drawing/2014/main" val="2903927876"/>
+                        </a:ext>
+                      </a:extLst>
+                    </a:gridCol>
+                    <a:gridCol w="793573">
+                      <a:extLst>
+                        <a:ext uri="{9D8B030D-6E8A-4147-A177-3AD203B41FA5}">
+                          <a16:colId xmlns:a16="http://schemas.microsoft.com/office/drawing/2014/main" val="2451541305"/>
+                        </a:ext>
+                      </a:extLst>
+                    </a:gridCol>
+                    <a:gridCol w="793573">
+                      <a:extLst>
+                        <a:ext uri="{9D8B030D-6E8A-4147-A177-3AD203B41FA5}">
+                          <a16:colId xmlns:a16="http://schemas.microsoft.com/office/drawing/2014/main" val="4050889190"/>
+                        </a:ext>
+                      </a:extLst>
+                    </a:gridCol>
+                  </a:tblGrid>
+                  <a:tr h="317594">
+                    <a:tc>
+                      <a:txBody>
+                        <a:bodyPr/>
+                        <a:lstStyle/>
+                        <a:p>
+                          <a:pPr algn="ctr"/>
+                          <a14:m>
+                            <m:oMathPara xmlns:m="http://schemas.openxmlformats.org/officeDocument/2006/math">
+                              <m:oMathParaPr>
+                                <m:jc m:val="centerGroup"/>
+                              </m:oMathParaPr>
+                              <m:oMath xmlns:m="http://schemas.openxmlformats.org/officeDocument/2006/math">
+                                <m:r>
+                                  <a:rPr lang="en-US" sz="1600" b="0" i="1" smtClean="0">
+                                    <a:solidFill>
+                                      <a:srgbClr val="F2F5FA"/>
+                                    </a:solidFill>
+                                    <a:latin typeface="Cambria Math" panose="02040503050406030204" pitchFamily="18" charset="0"/>
+                                  </a:rPr>
+                                  <m:t>𝐴</m:t>
+                                </m:r>
+                                <m:r>
+                                  <a:rPr lang="en-US" sz="1600" b="0" i="1" smtClean="0">
+                                    <a:solidFill>
+                                      <a:srgbClr val="F2F5FA"/>
+                                    </a:solidFill>
+                                    <a:latin typeface="Cambria Math" panose="02040503050406030204" pitchFamily="18" charset="0"/>
+                                    <a:ea typeface="Cambria Math" panose="02040503050406030204" pitchFamily="18" charset="0"/>
+                                  </a:rPr>
+                                  <m:t>×</m:t>
+                                </m:r>
+                                <m:r>
+                                  <a:rPr lang="en-US" sz="1600" b="0" i="1" smtClean="0">
+                                    <a:solidFill>
+                                      <a:srgbClr val="F2F5FA"/>
+                                    </a:solidFill>
+                                    <a:latin typeface="Cambria Math" panose="02040503050406030204" pitchFamily="18" charset="0"/>
+                                    <a:ea typeface="Cambria Math" panose="02040503050406030204" pitchFamily="18" charset="0"/>
+                                  </a:rPr>
+                                  <m:t>𝐵</m:t>
+                                </m:r>
+                              </m:oMath>
+                            </m:oMathPara>
+                          </a14:m>
+                          <a:endParaRPr lang="de-DE" sz="1600" b="0" dirty="0">
+                            <a:solidFill>
+                              <a:srgbClr val="F2F5FA"/>
+                            </a:solidFill>
+                          </a:endParaRPr>
+                        </a:p>
+                      </a:txBody>
+                      <a:tcPr marL="79398" marR="79398" marT="39699" marB="39699">
+                        <a:lnL w="12700" cmpd="sng">
+                          <a:noFill/>
+                        </a:lnL>
+                        <a:lnR w="12700" cmpd="sng">
+                          <a:noFill/>
+                        </a:lnR>
+                        <a:lnT w="12700" cmpd="sng">
+                          <a:noFill/>
+                        </a:lnT>
+                        <a:lnB w="38100" cmpd="sng">
+                          <a:noFill/>
+                        </a:lnB>
+                        <a:lnTlToBr w="12700" cmpd="sng">
+                          <a:noFill/>
+                          <a:prstDash val="solid"/>
+                        </a:lnTlToBr>
+                        <a:lnBlToTr w="12700" cmpd="sng">
+                          <a:noFill/>
+                          <a:prstDash val="solid"/>
+                        </a:lnBlToTr>
+                        <a:noFill/>
+                      </a:tcPr>
+                    </a:tc>
+                    <a:tc gridSpan="4">
+                      <a:txBody>
+                        <a:bodyPr/>
+                        <a:lstStyle/>
+                        <a:p>
+                          <a:pPr algn="ctr"/>
+                          <a:r>
+                            <a:rPr lang="de-DE" sz="1600" b="0" dirty="0">
+                              <a:solidFill>
+                                <a:srgbClr val="F2F5FA"/>
+                              </a:solidFill>
+                            </a:rPr>
+                            <a:t>Menge B</a:t>
+                          </a:r>
+                        </a:p>
+                      </a:txBody>
+                      <a:tcPr marL="79398" marR="79398" marT="39699" marB="39699">
+                        <a:lnL w="12700" cmpd="sng">
+                          <a:noFill/>
+                        </a:lnL>
+                        <a:lnR w="12700" cmpd="sng">
+                          <a:noFill/>
+                        </a:lnR>
+                        <a:lnT w="12700" cmpd="sng">
+                          <a:noFill/>
+                        </a:lnT>
+                        <a:lnB w="38100" cmpd="sng">
+                          <a:noFill/>
+                        </a:lnB>
+                        <a:lnTlToBr w="12700" cmpd="sng">
+                          <a:noFill/>
+                          <a:prstDash val="solid"/>
+                        </a:lnTlToBr>
+                        <a:lnBlToTr w="12700" cmpd="sng">
+                          <a:noFill/>
+                          <a:prstDash val="solid"/>
+                        </a:lnBlToTr>
+                        <a:noFill/>
+                      </a:tcPr>
+                    </a:tc>
+                    <a:tc hMerge="1">
+                      <a:txBody>
+                        <a:bodyPr/>
+                        <a:lstStyle/>
+                        <a:p>
+                          <a:endParaRPr lang="de-DE" sz="1600" dirty="0"/>
+                        </a:p>
+                      </a:txBody>
+                      <a:tcPr marL="79398" marR="79398" marT="39699" marB="39699">
+                        <a:lnL w="12700" cmpd="sng">
+                          <a:noFill/>
+                        </a:lnL>
+                        <a:lnR w="12700" cmpd="sng">
+                          <a:noFill/>
+                        </a:lnR>
+                        <a:lnT w="12700" cmpd="sng">
+                          <a:noFill/>
+                        </a:lnT>
+                        <a:lnB w="38100" cmpd="sng">
+                          <a:noFill/>
+                        </a:lnB>
+                        <a:lnTlToBr w="12700" cmpd="sng">
+                          <a:noFill/>
+                          <a:prstDash val="solid"/>
+                        </a:lnTlToBr>
+                        <a:lnBlToTr w="12700" cmpd="sng">
+                          <a:noFill/>
+                          <a:prstDash val="solid"/>
+                        </a:lnBlToTr>
+                        <a:noFill/>
+                      </a:tcPr>
+                    </a:tc>
+                    <a:tc hMerge="1">
+                      <a:txBody>
+                        <a:bodyPr/>
+                        <a:lstStyle/>
+                        <a:p>
+                          <a:endParaRPr lang="de-DE" sz="1600" dirty="0"/>
+                        </a:p>
+                      </a:txBody>
+                      <a:tcPr marL="79398" marR="79398" marT="39699" marB="39699">
+                        <a:lnL w="12700" cmpd="sng">
+                          <a:noFill/>
+                        </a:lnL>
+                        <a:lnR w="12700" cmpd="sng">
+                          <a:noFill/>
+                        </a:lnR>
+                        <a:lnT w="12700" cmpd="sng">
+                          <a:noFill/>
+                        </a:lnT>
+                        <a:lnB w="38100" cmpd="sng">
+                          <a:noFill/>
+                        </a:lnB>
+                        <a:lnTlToBr w="12700" cmpd="sng">
+                          <a:noFill/>
+                          <a:prstDash val="solid"/>
+                        </a:lnTlToBr>
+                        <a:lnBlToTr w="12700" cmpd="sng">
+                          <a:noFill/>
+                          <a:prstDash val="solid"/>
+                        </a:lnBlToTr>
+                        <a:noFill/>
+                      </a:tcPr>
+                    </a:tc>
+                    <a:tc hMerge="1">
+                      <a:txBody>
+                        <a:bodyPr/>
+                        <a:lstStyle/>
+                        <a:p>
+                          <a:endParaRPr lang="de-DE" sz="1600" dirty="0"/>
+                        </a:p>
+                      </a:txBody>
+                      <a:tcPr marL="79398" marR="79398" marT="39699" marB="39699">
+                        <a:lnL w="12700" cmpd="sng">
+                          <a:noFill/>
+                        </a:lnL>
+                        <a:lnR w="12700" cmpd="sng">
+                          <a:noFill/>
+                        </a:lnR>
+                        <a:lnT w="12700" cmpd="sng">
+                          <a:noFill/>
+                        </a:lnT>
+                        <a:lnB w="38100" cmpd="sng">
+                          <a:noFill/>
+                        </a:lnB>
+                        <a:lnTlToBr w="12700" cmpd="sng">
+                          <a:noFill/>
+                          <a:prstDash val="solid"/>
+                        </a:lnTlToBr>
+                        <a:lnBlToTr w="12700" cmpd="sng">
+                          <a:noFill/>
+                          <a:prstDash val="solid"/>
+                        </a:lnBlToTr>
+                        <a:noFill/>
+                      </a:tcPr>
+                    </a:tc>
+                    <a:extLst>
+                      <a:ext uri="{0D108BD9-81ED-4DB2-BD59-A6C34878D82A}">
+                        <a16:rowId xmlns:a16="http://schemas.microsoft.com/office/drawing/2014/main" val="3676973222"/>
+                      </a:ext>
+                    </a:extLst>
+                  </a:tr>
+                  <a:tr h="317594">
+                    <a:tc rowSpan="4">
+                      <a:txBody>
+                        <a:bodyPr/>
+                        <a:lstStyle/>
+                        <a:p>
+                          <a:pPr algn="ctr"/>
+                          <a:r>
+                            <a:rPr lang="de-DE" sz="1600" b="0" dirty="0">
+                              <a:solidFill>
+                                <a:srgbClr val="F2F5FA"/>
+                              </a:solidFill>
+                            </a:rPr>
+                            <a:t>Menge A</a:t>
+                          </a:r>
+                        </a:p>
+                      </a:txBody>
+                      <a:tcPr marL="79398" marR="79398" marT="39699" marB="39699" vert="vert270" anchor="b">
+                        <a:lnL w="12700" cmpd="sng">
+                          <a:noFill/>
+                        </a:lnL>
+                        <a:lnR w="12700" cmpd="sng">
+                          <a:noFill/>
+                        </a:lnR>
+                        <a:lnT w="38100" cmpd="sng">
+                          <a:noFill/>
+                        </a:lnT>
+                        <a:lnB w="12700" cmpd="sng">
+                          <a:noFill/>
+                        </a:lnB>
+                        <a:lnTlToBr w="12700" cmpd="sng">
+                          <a:noFill/>
+                          <a:prstDash val="solid"/>
+                        </a:lnTlToBr>
+                        <a:lnBlToTr w="12700" cmpd="sng">
+                          <a:noFill/>
+                          <a:prstDash val="solid"/>
+                        </a:lnBlToTr>
+                        <a:noFill/>
+                      </a:tcPr>
+                    </a:tc>
+                    <a:tc>
+                      <a:txBody>
+                        <a:bodyPr/>
+                        <a:lstStyle/>
+                        <a:p>
+                          <a:pPr algn="ctr"/>
+                          <a:r>
+                            <a:rPr lang="de-DE" sz="1600" b="0" dirty="0">
+                              <a:solidFill>
+                                <a:srgbClr val="F2F5FA"/>
+                              </a:solidFill>
+                            </a:rPr>
+                            <a:t>(a, b)</a:t>
+                          </a:r>
+                        </a:p>
+                      </a:txBody>
+                      <a:tcPr marL="79398" marR="79398" marT="39699" marB="39699">
+                        <a:lnL w="12700" cmpd="sng">
+                          <a:noFill/>
+                        </a:lnL>
+                        <a:lnR w="12700" cmpd="sng">
+                          <a:noFill/>
+                        </a:lnR>
+                        <a:lnT w="38100" cmpd="sng">
+                          <a:noFill/>
+                        </a:lnT>
+                        <a:lnB w="12700" cmpd="sng">
+                          <a:noFill/>
+                        </a:lnB>
+                        <a:lnTlToBr w="12700" cmpd="sng">
+                          <a:noFill/>
+                          <a:prstDash val="solid"/>
+                        </a:lnTlToBr>
+                        <a:lnBlToTr w="12700" cmpd="sng">
+                          <a:noFill/>
+                          <a:prstDash val="solid"/>
+                        </a:lnBlToTr>
+                        <a:noFill/>
+                      </a:tcPr>
+                    </a:tc>
+                    <a:tc>
+                      <a:txBody>
+                        <a:bodyPr/>
+                        <a:lstStyle/>
+                        <a:p>
+                          <a:pPr algn="ctr"/>
+                          <a:r>
+                            <a:rPr lang="de-DE" sz="1600" b="0" dirty="0">
+                              <a:solidFill>
+                                <a:srgbClr val="F2F5FA"/>
+                              </a:solidFill>
+                            </a:rPr>
+                            <a:t>4</a:t>
+                          </a:r>
+                        </a:p>
+                      </a:txBody>
+                      <a:tcPr marL="79398" marR="79398" marT="39699" marB="39699">
+                        <a:lnL w="12700" cmpd="sng">
+                          <a:noFill/>
+                        </a:lnL>
+                        <a:lnR w="12700" cmpd="sng">
+                          <a:noFill/>
+                        </a:lnR>
+                        <a:lnT w="38100" cmpd="sng">
+                          <a:noFill/>
+                        </a:lnT>
+                        <a:lnB w="12700" cmpd="sng">
+                          <a:noFill/>
+                        </a:lnB>
+                        <a:lnTlToBr w="12700" cmpd="sng">
+                          <a:noFill/>
+                          <a:prstDash val="solid"/>
+                        </a:lnTlToBr>
+                        <a:lnBlToTr w="12700" cmpd="sng">
+                          <a:noFill/>
+                          <a:prstDash val="solid"/>
+                        </a:lnBlToTr>
+                        <a:noFill/>
+                      </a:tcPr>
+                    </a:tc>
+                    <a:tc>
+                      <a:txBody>
+                        <a:bodyPr/>
+                        <a:lstStyle/>
+                        <a:p>
+                          <a:pPr algn="ctr"/>
+                          <a:r>
+                            <a:rPr lang="de-DE" sz="1600" b="0" dirty="0">
+                              <a:solidFill>
+                                <a:srgbClr val="F2F5FA"/>
+                              </a:solidFill>
+                            </a:rPr>
+                            <a:t>5</a:t>
+                          </a:r>
+                        </a:p>
+                      </a:txBody>
+                      <a:tcPr marL="79398" marR="79398" marT="39699" marB="39699">
+                        <a:lnL w="12700" cmpd="sng">
+                          <a:noFill/>
+                        </a:lnL>
+                        <a:lnR w="12700" cmpd="sng">
+                          <a:noFill/>
+                        </a:lnR>
+                        <a:lnT w="38100" cmpd="sng">
+                          <a:noFill/>
+                        </a:lnT>
+                        <a:lnB w="12700" cmpd="sng">
+                          <a:noFill/>
+                        </a:lnB>
+                        <a:lnTlToBr w="12700" cmpd="sng">
+                          <a:noFill/>
+                          <a:prstDash val="solid"/>
+                        </a:lnTlToBr>
+                        <a:lnBlToTr w="12700" cmpd="sng">
+                          <a:noFill/>
+                          <a:prstDash val="solid"/>
+                        </a:lnBlToTr>
+                        <a:noFill/>
+                      </a:tcPr>
+                    </a:tc>
+                    <a:tc>
+                      <a:txBody>
+                        <a:bodyPr/>
+                        <a:lstStyle/>
+                        <a:p>
+                          <a:pPr algn="ctr"/>
+                          <a:r>
+                            <a:rPr lang="de-DE" sz="1600" b="0" dirty="0">
+                              <a:solidFill>
+                                <a:srgbClr val="F2F5FA"/>
+                              </a:solidFill>
+                            </a:rPr>
+                            <a:t>6</a:t>
+                          </a:r>
+                        </a:p>
+                      </a:txBody>
+                      <a:tcPr marL="79398" marR="79398" marT="39699" marB="39699">
+                        <a:lnL w="12700" cmpd="sng">
+                          <a:noFill/>
+                        </a:lnL>
+                        <a:lnR w="12700" cmpd="sng">
+                          <a:noFill/>
+                        </a:lnR>
+                        <a:lnT w="38100" cmpd="sng">
+                          <a:noFill/>
+                        </a:lnT>
+                        <a:lnB w="12700" cmpd="sng">
+                          <a:noFill/>
+                        </a:lnB>
+                        <a:lnTlToBr w="12700" cmpd="sng">
+                          <a:noFill/>
+                          <a:prstDash val="solid"/>
+                        </a:lnTlToBr>
+                        <a:lnBlToTr w="12700" cmpd="sng">
+                          <a:noFill/>
+                          <a:prstDash val="solid"/>
+                        </a:lnBlToTr>
+                        <a:noFill/>
+                      </a:tcPr>
+                    </a:tc>
+                    <a:extLst>
+                      <a:ext uri="{0D108BD9-81ED-4DB2-BD59-A6C34878D82A}">
+                        <a16:rowId xmlns:a16="http://schemas.microsoft.com/office/drawing/2014/main" val="36725046"/>
+                      </a:ext>
+                    </a:extLst>
+                  </a:tr>
+                  <a:tr h="317594">
+                    <a:tc vMerge="1">
+                      <a:txBody>
+                        <a:bodyPr/>
+                        <a:lstStyle/>
+                        <a:p>
+                          <a:endParaRPr lang="de-DE" sz="1600" dirty="0"/>
+                        </a:p>
+                      </a:txBody>
+                      <a:tcPr marL="79398" marR="79398" marT="39699" marB="39699">
+                        <a:lnL w="12700" cmpd="sng">
+                          <a:noFill/>
+                        </a:lnL>
+                        <a:lnR w="12700" cmpd="sng">
+                          <a:noFill/>
+                        </a:lnR>
+                        <a:lnT w="12700" cmpd="sng">
+                          <a:noFill/>
+                        </a:lnT>
+                        <a:lnB w="12700" cmpd="sng">
+                          <a:noFill/>
+                        </a:lnB>
+                        <a:lnTlToBr w="12700" cmpd="sng">
+                          <a:noFill/>
+                          <a:prstDash val="solid"/>
+                        </a:lnTlToBr>
+                        <a:lnBlToTr w="12700" cmpd="sng">
+                          <a:noFill/>
+                          <a:prstDash val="solid"/>
+                        </a:lnBlToTr>
+                        <a:noFill/>
+                      </a:tcPr>
+                    </a:tc>
+                    <a:tc>
+                      <a:txBody>
+                        <a:bodyPr/>
+                        <a:lstStyle/>
+                        <a:p>
+                          <a:pPr algn="ctr"/>
+                          <a:r>
+                            <a:rPr lang="de-DE" sz="1600" b="0" dirty="0">
+                              <a:solidFill>
+                                <a:srgbClr val="F2F5FA"/>
+                              </a:solidFill>
+                            </a:rPr>
+                            <a:t>1</a:t>
+                          </a:r>
+                        </a:p>
+                      </a:txBody>
+                      <a:tcPr marL="79398" marR="79398" marT="39699" marB="39699">
+                        <a:lnL w="12700" cmpd="sng">
+                          <a:noFill/>
+                        </a:lnL>
+                        <a:lnR w="12700" cmpd="sng">
+                          <a:noFill/>
+                        </a:lnR>
+                        <a:lnT w="12700" cmpd="sng">
+                          <a:noFill/>
+                        </a:lnT>
+                        <a:lnB w="12700" cmpd="sng">
+                          <a:noFill/>
+                        </a:lnB>
+                        <a:lnTlToBr w="12700" cmpd="sng">
+                          <a:noFill/>
+                          <a:prstDash val="solid"/>
+                        </a:lnTlToBr>
+                        <a:lnBlToTr w="12700" cmpd="sng">
+                          <a:noFill/>
+                          <a:prstDash val="solid"/>
+                        </a:lnBlToTr>
+                        <a:noFill/>
+                      </a:tcPr>
+                    </a:tc>
+                    <a:tc>
+                      <a:txBody>
+                        <a:bodyPr/>
+                        <a:lstStyle/>
+                        <a:p>
+                          <a:pPr algn="ctr"/>
+                          <a:r>
+                            <a:rPr lang="de-DE" sz="1600" b="0" dirty="0">
+                              <a:solidFill>
+                                <a:srgbClr val="F2F5FA"/>
+                              </a:solidFill>
+                            </a:rPr>
+                            <a:t>(1, 4)</a:t>
+                          </a:r>
+                        </a:p>
+                      </a:txBody>
+                      <a:tcPr marL="79398" marR="79398" marT="39699" marB="39699">
+                        <a:lnL w="12700" cmpd="sng">
+                          <a:noFill/>
+                        </a:lnL>
+                        <a:lnR w="12700" cmpd="sng">
+                          <a:noFill/>
+                        </a:lnR>
+                        <a:lnT w="12700" cmpd="sng">
+                          <a:noFill/>
+                        </a:lnT>
+                        <a:lnB w="12700" cmpd="sng">
+                          <a:noFill/>
+                        </a:lnB>
+                        <a:lnTlToBr w="12700" cmpd="sng">
+                          <a:noFill/>
+                          <a:prstDash val="solid"/>
+                        </a:lnTlToBr>
+                        <a:lnBlToTr w="12700" cmpd="sng">
+                          <a:noFill/>
+                          <a:prstDash val="solid"/>
+                        </a:lnBlToTr>
+                        <a:noFill/>
+                      </a:tcPr>
+                    </a:tc>
+                    <a:tc>
+                      <a:txBody>
+                        <a:bodyPr/>
+                        <a:lstStyle/>
+                        <a:p>
+                          <a:pPr algn="ctr"/>
+                          <a:r>
+                            <a:rPr lang="de-DE" sz="1600" b="0" dirty="0">
+                              <a:solidFill>
+                                <a:srgbClr val="F2F5FA"/>
+                              </a:solidFill>
+                            </a:rPr>
+                            <a:t>(1, 5)</a:t>
+                          </a:r>
+                        </a:p>
+                      </a:txBody>
+                      <a:tcPr marL="79398" marR="79398" marT="39699" marB="39699">
+                        <a:lnL w="12700" cmpd="sng">
+                          <a:noFill/>
+                        </a:lnL>
+                        <a:lnR w="12700" cmpd="sng">
+                          <a:noFill/>
+                        </a:lnR>
+                        <a:lnT w="12700" cmpd="sng">
+                          <a:noFill/>
+                        </a:lnT>
+                        <a:lnB w="12700" cmpd="sng">
+                          <a:noFill/>
+                        </a:lnB>
+                        <a:lnTlToBr w="12700" cmpd="sng">
+                          <a:noFill/>
+                          <a:prstDash val="solid"/>
+                        </a:lnTlToBr>
+                        <a:lnBlToTr w="12700" cmpd="sng">
+                          <a:noFill/>
+                          <a:prstDash val="solid"/>
+                        </a:lnBlToTr>
+                        <a:noFill/>
+                      </a:tcPr>
+                    </a:tc>
+                    <a:tc>
+                      <a:txBody>
+                        <a:bodyPr/>
+                        <a:lstStyle/>
+                        <a:p>
+                          <a:pPr algn="ctr"/>
+                          <a:r>
+                            <a:rPr lang="de-DE" sz="1600" b="0" dirty="0">
+                              <a:solidFill>
+                                <a:srgbClr val="F2F5FA"/>
+                              </a:solidFill>
+                            </a:rPr>
+                            <a:t>(1, 6)</a:t>
+                          </a:r>
+                        </a:p>
+                      </a:txBody>
+                      <a:tcPr marL="79398" marR="79398" marT="39699" marB="39699">
+                        <a:lnL w="12700" cmpd="sng">
+                          <a:noFill/>
+                        </a:lnL>
+                        <a:lnR w="12700" cmpd="sng">
+                          <a:noFill/>
+                        </a:lnR>
+                        <a:lnT w="12700" cmpd="sng">
+                          <a:noFill/>
+                        </a:lnT>
+                        <a:lnB w="12700" cmpd="sng">
+                          <a:noFill/>
+                        </a:lnB>
+                        <a:lnTlToBr w="12700" cmpd="sng">
+                          <a:noFill/>
+                          <a:prstDash val="solid"/>
+                        </a:lnTlToBr>
+                        <a:lnBlToTr w="12700" cmpd="sng">
+                          <a:noFill/>
+                          <a:prstDash val="solid"/>
+                        </a:lnBlToTr>
+                        <a:noFill/>
+                      </a:tcPr>
+                    </a:tc>
+                    <a:extLst>
+                      <a:ext uri="{0D108BD9-81ED-4DB2-BD59-A6C34878D82A}">
+                        <a16:rowId xmlns:a16="http://schemas.microsoft.com/office/drawing/2014/main" val="1905864975"/>
+                      </a:ext>
+                    </a:extLst>
+                  </a:tr>
+                  <a:tr h="317594">
+                    <a:tc vMerge="1">
+                      <a:txBody>
+                        <a:bodyPr/>
+                        <a:lstStyle/>
+                        <a:p>
+                          <a:endParaRPr lang="de-DE" sz="1600" dirty="0"/>
+                        </a:p>
+                      </a:txBody>
+                      <a:tcPr marL="79398" marR="79398" marT="39699" marB="39699">
+                        <a:lnL w="12700" cmpd="sng">
+                          <a:noFill/>
+                        </a:lnL>
+                        <a:lnR w="12700" cmpd="sng">
+                          <a:noFill/>
+                        </a:lnR>
+                        <a:lnT w="12700" cmpd="sng">
+                          <a:noFill/>
+                        </a:lnT>
+                        <a:lnB w="12700" cmpd="sng">
+                          <a:noFill/>
+                        </a:lnB>
+                        <a:lnTlToBr w="12700" cmpd="sng">
+                          <a:noFill/>
+                          <a:prstDash val="solid"/>
+                        </a:lnTlToBr>
+                        <a:lnBlToTr w="12700" cmpd="sng">
+                          <a:noFill/>
+                          <a:prstDash val="solid"/>
+                        </a:lnBlToTr>
+                        <a:noFill/>
+                      </a:tcPr>
+                    </a:tc>
+                    <a:tc>
+                      <a:txBody>
+                        <a:bodyPr/>
+                        <a:lstStyle/>
+                        <a:p>
+                          <a:pPr algn="ctr"/>
+                          <a:r>
+                            <a:rPr lang="de-DE" sz="1600" b="0" dirty="0">
+                              <a:solidFill>
+                                <a:srgbClr val="F2F5FA"/>
+                              </a:solidFill>
+                            </a:rPr>
+                            <a:t>2</a:t>
+                          </a:r>
+                        </a:p>
+                      </a:txBody>
+                      <a:tcPr marL="79398" marR="79398" marT="39699" marB="39699">
+                        <a:lnL w="12700" cmpd="sng">
+                          <a:noFill/>
+                        </a:lnL>
+                        <a:lnR w="12700" cmpd="sng">
+                          <a:noFill/>
+                        </a:lnR>
+                        <a:lnT w="12700" cmpd="sng">
+                          <a:noFill/>
+                        </a:lnT>
+                        <a:lnB w="12700" cmpd="sng">
+                          <a:noFill/>
+                        </a:lnB>
+                        <a:lnTlToBr w="12700" cmpd="sng">
+                          <a:noFill/>
+                          <a:prstDash val="solid"/>
+                        </a:lnTlToBr>
+                        <a:lnBlToTr w="12700" cmpd="sng">
+                          <a:noFill/>
+                          <a:prstDash val="solid"/>
+                        </a:lnBlToTr>
+                        <a:noFill/>
+                      </a:tcPr>
+                    </a:tc>
+                    <a:tc>
+                      <a:txBody>
+                        <a:bodyPr/>
+                        <a:lstStyle/>
+                        <a:p>
+                          <a:pPr algn="ctr"/>
+                          <a:r>
+                            <a:rPr lang="de-DE" sz="1600" b="0" dirty="0">
+                              <a:solidFill>
+                                <a:srgbClr val="F2F5FA"/>
+                              </a:solidFill>
+                            </a:rPr>
+                            <a:t>(2, 4)</a:t>
+                          </a:r>
+                        </a:p>
+                      </a:txBody>
+                      <a:tcPr marL="79398" marR="79398" marT="39699" marB="39699">
+                        <a:lnL w="12700" cmpd="sng">
+                          <a:noFill/>
+                        </a:lnL>
+                        <a:lnR w="12700" cmpd="sng">
+                          <a:noFill/>
+                        </a:lnR>
+                        <a:lnT w="12700" cmpd="sng">
+                          <a:noFill/>
+                        </a:lnT>
+                        <a:lnB w="12700" cmpd="sng">
+                          <a:noFill/>
+                        </a:lnB>
+                        <a:lnTlToBr w="12700" cmpd="sng">
+                          <a:noFill/>
+                          <a:prstDash val="solid"/>
+                        </a:lnTlToBr>
+                        <a:lnBlToTr w="12700" cmpd="sng">
+                          <a:noFill/>
+                          <a:prstDash val="solid"/>
+                        </a:lnBlToTr>
+                        <a:noFill/>
+                      </a:tcPr>
+                    </a:tc>
+                    <a:tc>
+                      <a:txBody>
+                        <a:bodyPr/>
+                        <a:lstStyle/>
+                        <a:p>
+                          <a:pPr algn="ctr"/>
+                          <a:r>
+                            <a:rPr lang="de-DE" sz="1600" b="0" dirty="0">
+                              <a:solidFill>
+                                <a:srgbClr val="F2F5FA"/>
+                              </a:solidFill>
+                            </a:rPr>
+                            <a:t>(2, 5)</a:t>
+                          </a:r>
+                        </a:p>
+                      </a:txBody>
+                      <a:tcPr marL="79398" marR="79398" marT="39699" marB="39699">
+                        <a:lnL w="12700" cmpd="sng">
+                          <a:noFill/>
+                        </a:lnL>
+                        <a:lnR w="12700" cmpd="sng">
+                          <a:noFill/>
+                        </a:lnR>
+                        <a:lnT w="12700" cmpd="sng">
+                          <a:noFill/>
+                        </a:lnT>
+                        <a:lnB w="12700" cmpd="sng">
+                          <a:noFill/>
+                        </a:lnB>
+                        <a:lnTlToBr w="12700" cmpd="sng">
+                          <a:noFill/>
+                          <a:prstDash val="solid"/>
+                        </a:lnTlToBr>
+                        <a:lnBlToTr w="12700" cmpd="sng">
+                          <a:noFill/>
+                          <a:prstDash val="solid"/>
+                        </a:lnBlToTr>
+                        <a:noFill/>
+                      </a:tcPr>
+                    </a:tc>
+                    <a:tc>
+                      <a:txBody>
+                        <a:bodyPr/>
+                        <a:lstStyle/>
+                        <a:p>
+                          <a:pPr algn="ctr"/>
+                          <a:r>
+                            <a:rPr lang="de-DE" sz="1600" b="0" dirty="0">
+                              <a:solidFill>
+                                <a:srgbClr val="F2F5FA"/>
+                              </a:solidFill>
+                            </a:rPr>
+                            <a:t>(2, 6)</a:t>
+                          </a:r>
+                        </a:p>
+                      </a:txBody>
+                      <a:tcPr marL="79398" marR="79398" marT="39699" marB="39699">
+                        <a:lnL w="12700" cmpd="sng">
+                          <a:noFill/>
+                        </a:lnL>
+                        <a:lnR w="12700" cmpd="sng">
+                          <a:noFill/>
+                        </a:lnR>
+                        <a:lnT w="12700" cmpd="sng">
+                          <a:noFill/>
+                        </a:lnT>
+                        <a:lnB w="12700" cmpd="sng">
+                          <a:noFill/>
+                        </a:lnB>
+                        <a:lnTlToBr w="12700" cmpd="sng">
+                          <a:noFill/>
+                          <a:prstDash val="solid"/>
+                        </a:lnTlToBr>
+                        <a:lnBlToTr w="12700" cmpd="sng">
+                          <a:noFill/>
+                          <a:prstDash val="solid"/>
+                        </a:lnBlToTr>
+                        <a:noFill/>
+                      </a:tcPr>
+                    </a:tc>
+                    <a:extLst>
+                      <a:ext uri="{0D108BD9-81ED-4DB2-BD59-A6C34878D82A}">
+                        <a16:rowId xmlns:a16="http://schemas.microsoft.com/office/drawing/2014/main" val="1440037789"/>
+                      </a:ext>
+                    </a:extLst>
+                  </a:tr>
+                  <a:tr h="317594">
+                    <a:tc vMerge="1">
+                      <a:txBody>
+                        <a:bodyPr/>
+                        <a:lstStyle/>
+                        <a:p>
+                          <a:endParaRPr lang="de-DE" sz="1600" dirty="0"/>
+                        </a:p>
+                      </a:txBody>
+                      <a:tcPr marL="79398" marR="79398" marT="39699" marB="39699">
+                        <a:lnL w="12700" cmpd="sng">
+                          <a:noFill/>
+                        </a:lnL>
+                        <a:lnR w="12700" cmpd="sng">
+                          <a:noFill/>
+                        </a:lnR>
+                        <a:lnT w="12700" cmpd="sng">
+                          <a:noFill/>
+                        </a:lnT>
+                        <a:lnB w="12700" cmpd="sng">
+                          <a:noFill/>
+                        </a:lnB>
+                        <a:lnTlToBr w="12700" cmpd="sng">
+                          <a:noFill/>
+                          <a:prstDash val="solid"/>
+                        </a:lnTlToBr>
+                        <a:lnBlToTr w="12700" cmpd="sng">
+                          <a:noFill/>
+                          <a:prstDash val="solid"/>
+                        </a:lnBlToTr>
+                        <a:noFill/>
+                      </a:tcPr>
+                    </a:tc>
+                    <a:tc>
+                      <a:txBody>
+                        <a:bodyPr/>
+                        <a:lstStyle/>
+                        <a:p>
+                          <a:pPr algn="ctr"/>
+                          <a:r>
+                            <a:rPr lang="de-DE" sz="1600" b="0" dirty="0">
+                              <a:solidFill>
+                                <a:srgbClr val="F2F5FA"/>
+                              </a:solidFill>
+                            </a:rPr>
+                            <a:t>3</a:t>
+                          </a:r>
+                        </a:p>
+                      </a:txBody>
+                      <a:tcPr marL="79398" marR="79398" marT="39699" marB="39699">
+                        <a:lnL w="12700" cmpd="sng">
+                          <a:noFill/>
+                        </a:lnL>
+                        <a:lnR w="12700" cmpd="sng">
+                          <a:noFill/>
+                        </a:lnR>
+                        <a:lnT w="12700" cmpd="sng">
+                          <a:noFill/>
+                        </a:lnT>
+                        <a:lnB w="12700" cmpd="sng">
+                          <a:noFill/>
+                        </a:lnB>
+                        <a:lnTlToBr w="12700" cmpd="sng">
+                          <a:noFill/>
+                          <a:prstDash val="solid"/>
+                        </a:lnTlToBr>
+                        <a:lnBlToTr w="12700" cmpd="sng">
+                          <a:noFill/>
+                          <a:prstDash val="solid"/>
+                        </a:lnBlToTr>
+                        <a:noFill/>
+                      </a:tcPr>
+                    </a:tc>
+                    <a:tc>
+                      <a:txBody>
+                        <a:bodyPr/>
+                        <a:lstStyle/>
+                        <a:p>
+                          <a:pPr algn="ctr"/>
+                          <a:r>
+                            <a:rPr lang="de-DE" sz="1600" b="0" dirty="0">
+                              <a:solidFill>
+                                <a:srgbClr val="F2F5FA"/>
+                              </a:solidFill>
+                            </a:rPr>
+                            <a:t>(3, 4)</a:t>
+                          </a:r>
+                        </a:p>
+                      </a:txBody>
+                      <a:tcPr marL="79398" marR="79398" marT="39699" marB="39699">
+                        <a:lnL w="12700" cmpd="sng">
+                          <a:noFill/>
+                        </a:lnL>
+                        <a:lnR w="12700" cmpd="sng">
+                          <a:noFill/>
+                        </a:lnR>
+                        <a:lnT w="12700" cmpd="sng">
+                          <a:noFill/>
+                        </a:lnT>
+                        <a:lnB w="12700" cmpd="sng">
+                          <a:noFill/>
+                        </a:lnB>
+                        <a:lnTlToBr w="12700" cmpd="sng">
+                          <a:noFill/>
+                          <a:prstDash val="solid"/>
+                        </a:lnTlToBr>
+                        <a:lnBlToTr w="12700" cmpd="sng">
+                          <a:noFill/>
+                          <a:prstDash val="solid"/>
+                        </a:lnBlToTr>
+                        <a:noFill/>
+                      </a:tcPr>
+                    </a:tc>
+                    <a:tc>
+                      <a:txBody>
+                        <a:bodyPr/>
+                        <a:lstStyle/>
+                        <a:p>
+                          <a:pPr algn="ctr"/>
+                          <a:r>
+                            <a:rPr lang="de-DE" sz="1600" b="0" dirty="0">
+                              <a:solidFill>
+                                <a:srgbClr val="F2F5FA"/>
+                              </a:solidFill>
+                            </a:rPr>
+                            <a:t>(3, 5)</a:t>
+                          </a:r>
+                        </a:p>
+                      </a:txBody>
+                      <a:tcPr marL="79398" marR="79398" marT="39699" marB="39699">
+                        <a:lnL w="12700" cmpd="sng">
+                          <a:noFill/>
+                        </a:lnL>
+                        <a:lnR w="12700" cmpd="sng">
+                          <a:noFill/>
+                        </a:lnR>
+                        <a:lnT w="12700" cmpd="sng">
+                          <a:noFill/>
+                        </a:lnT>
+                        <a:lnB w="12700" cmpd="sng">
+                          <a:noFill/>
+                        </a:lnB>
+                        <a:lnTlToBr w="12700" cmpd="sng">
+                          <a:noFill/>
+                          <a:prstDash val="solid"/>
+                        </a:lnTlToBr>
+                        <a:lnBlToTr w="12700" cmpd="sng">
+                          <a:noFill/>
+                          <a:prstDash val="solid"/>
+                        </a:lnBlToTr>
+                        <a:noFill/>
+                      </a:tcPr>
+                    </a:tc>
+                    <a:tc>
+                      <a:txBody>
+                        <a:bodyPr/>
+                        <a:lstStyle/>
+                        <a:p>
+                          <a:pPr algn="ctr"/>
+                          <a:r>
+                            <a:rPr lang="de-DE" sz="1600" b="0" dirty="0">
+                              <a:solidFill>
+                                <a:srgbClr val="F2F5FA"/>
+                              </a:solidFill>
+                            </a:rPr>
+                            <a:t>(3, 6)</a:t>
+                          </a:r>
+                        </a:p>
+                      </a:txBody>
+                      <a:tcPr marL="79398" marR="79398" marT="39699" marB="39699">
+                        <a:lnL w="12700" cmpd="sng">
+                          <a:noFill/>
+                        </a:lnL>
+                        <a:lnR w="12700" cmpd="sng">
+                          <a:noFill/>
+                        </a:lnR>
+                        <a:lnT w="12700" cmpd="sng">
+                          <a:noFill/>
+                        </a:lnT>
+                        <a:lnB w="12700" cmpd="sng">
+                          <a:noFill/>
+                        </a:lnB>
+                        <a:lnTlToBr w="12700" cmpd="sng">
+                          <a:noFill/>
+                          <a:prstDash val="solid"/>
+                        </a:lnTlToBr>
+                        <a:lnBlToTr w="12700" cmpd="sng">
+                          <a:noFill/>
+                          <a:prstDash val="solid"/>
+                        </a:lnBlToTr>
+                        <a:noFill/>
+                      </a:tcPr>
+                    </a:tc>
+                    <a:extLst>
+                      <a:ext uri="{0D108BD9-81ED-4DB2-BD59-A6C34878D82A}">
+                        <a16:rowId xmlns:a16="http://schemas.microsoft.com/office/drawing/2014/main" val="980465750"/>
+                      </a:ext>
+                    </a:extLst>
+                  </a:tr>
+                </a:tbl>
+              </a:graphicData>
+            </a:graphic>
+          </p:graphicFrame>
+        </mc:Choice>
+        <mc:Fallback>
+          <p:graphicFrame>
+            <p:nvGraphicFramePr>
+              <p:cNvPr id="23" name="Table 23">
+                <a:extLst>
+                  <a:ext uri="{FF2B5EF4-FFF2-40B4-BE49-F238E27FC236}">
+                    <a16:creationId xmlns:a16="http://schemas.microsoft.com/office/drawing/2014/main" id="{5D330A15-C110-41A6-B256-C7FA416A2C44}"/>
+                  </a:ext>
+                </a:extLst>
+              </p:cNvPr>
+              <p:cNvGraphicFramePr>
+                <a:graphicFrameLocks noGrp="1"/>
+              </p:cNvGraphicFramePr>
+              <p:nvPr>
+                <p:extLst>
+                  <p:ext uri="{D42A27DB-BD31-4B8C-83A1-F6EECF244321}">
+                    <p14:modId xmlns:p14="http://schemas.microsoft.com/office/powerpoint/2010/main" val="2755602879"/>
+                  </p:ext>
+                </p:extLst>
+              </p:nvPr>
+            </p:nvGraphicFramePr>
+            <p:xfrm>
+              <a:off x="6013963" y="705707"/>
+              <a:ext cx="3967865" cy="1616190"/>
+            </p:xfrm>
+            <a:graphic>
+              <a:graphicData uri="http://schemas.openxmlformats.org/drawingml/2006/table">
+                <a:tbl>
+                  <a:tblPr firstRow="1" bandRow="1">
+                    <a:tableStyleId>{5C22544A-7EE6-4342-B048-85BDC9FD1C3A}</a:tableStyleId>
+                  </a:tblPr>
+                  <a:tblGrid>
+                    <a:gridCol w="793573">
+                      <a:extLst>
+                        <a:ext uri="{9D8B030D-6E8A-4147-A177-3AD203B41FA5}">
+                          <a16:colId xmlns:a16="http://schemas.microsoft.com/office/drawing/2014/main" val="2619550694"/>
+                        </a:ext>
+                      </a:extLst>
+                    </a:gridCol>
+                    <a:gridCol w="793573">
+                      <a:extLst>
+                        <a:ext uri="{9D8B030D-6E8A-4147-A177-3AD203B41FA5}">
+                          <a16:colId xmlns:a16="http://schemas.microsoft.com/office/drawing/2014/main" val="1240274847"/>
+                        </a:ext>
+                      </a:extLst>
+                    </a:gridCol>
+                    <a:gridCol w="793573">
+                      <a:extLst>
+                        <a:ext uri="{9D8B030D-6E8A-4147-A177-3AD203B41FA5}">
+                          <a16:colId xmlns:a16="http://schemas.microsoft.com/office/drawing/2014/main" val="2903927876"/>
+                        </a:ext>
+                      </a:extLst>
+                    </a:gridCol>
+                    <a:gridCol w="793573">
+                      <a:extLst>
+                        <a:ext uri="{9D8B030D-6E8A-4147-A177-3AD203B41FA5}">
+                          <a16:colId xmlns:a16="http://schemas.microsoft.com/office/drawing/2014/main" val="2451541305"/>
+                        </a:ext>
+                      </a:extLst>
+                    </a:gridCol>
+                    <a:gridCol w="793573">
+                      <a:extLst>
+                        <a:ext uri="{9D8B030D-6E8A-4147-A177-3AD203B41FA5}">
+                          <a16:colId xmlns:a16="http://schemas.microsoft.com/office/drawing/2014/main" val="4050889190"/>
+                        </a:ext>
+                      </a:extLst>
+                    </a:gridCol>
+                  </a:tblGrid>
+                  <a:tr h="323238">
+                    <a:tc>
+                      <a:txBody>
+                        <a:bodyPr/>
+                        <a:lstStyle/>
+                        <a:p>
+                          <a:endParaRPr lang="de-DE"/>
+                        </a:p>
+                      </a:txBody>
+                      <a:tcPr marL="79398" marR="79398" marT="39699" marB="39699">
+                        <a:lnL w="12700" cmpd="sng">
+                          <a:noFill/>
+                        </a:lnL>
+                        <a:lnR w="12700" cmpd="sng">
+                          <a:noFill/>
+                        </a:lnR>
+                        <a:lnT w="12700" cmpd="sng">
+                          <a:noFill/>
+                        </a:lnT>
+                        <a:lnB w="38100" cmpd="sng">
+                          <a:noFill/>
+                        </a:lnB>
+                        <a:lnTlToBr w="12700" cmpd="sng">
+                          <a:noFill/>
+                          <a:prstDash val="solid"/>
+                        </a:lnTlToBr>
+                        <a:lnBlToTr w="12700" cmpd="sng">
+                          <a:noFill/>
+                          <a:prstDash val="solid"/>
+                        </a:lnBlToTr>
+                        <a:blipFill>
+                          <a:blip r:embed="rId10"/>
+                          <a:stretch>
+                            <a:fillRect t="-5660" r="-401538" b="-428302"/>
+                          </a:stretch>
+                        </a:blipFill>
+                      </a:tcPr>
+                    </a:tc>
+                    <a:tc gridSpan="4">
+                      <a:txBody>
+                        <a:bodyPr/>
+                        <a:lstStyle/>
+                        <a:p>
+                          <a:pPr algn="ctr"/>
+                          <a:r>
+                            <a:rPr lang="de-DE" sz="1600" b="0" dirty="0">
+                              <a:solidFill>
+                                <a:srgbClr val="F2F5FA"/>
+                              </a:solidFill>
+                            </a:rPr>
+                            <a:t>Menge B</a:t>
+                          </a:r>
+                        </a:p>
+                      </a:txBody>
+                      <a:tcPr marL="79398" marR="79398" marT="39699" marB="39699">
+                        <a:lnL w="12700" cmpd="sng">
+                          <a:noFill/>
+                        </a:lnL>
+                        <a:lnR w="12700" cmpd="sng">
+                          <a:noFill/>
+                        </a:lnR>
+                        <a:lnT w="12700" cmpd="sng">
+                          <a:noFill/>
+                        </a:lnT>
+                        <a:lnB w="38100" cmpd="sng">
+                          <a:noFill/>
+                        </a:lnB>
+                        <a:lnTlToBr w="12700" cmpd="sng">
+                          <a:noFill/>
+                          <a:prstDash val="solid"/>
+                        </a:lnTlToBr>
+                        <a:lnBlToTr w="12700" cmpd="sng">
+                          <a:noFill/>
+                          <a:prstDash val="solid"/>
+                        </a:lnBlToTr>
+                        <a:noFill/>
+                      </a:tcPr>
+                    </a:tc>
+                    <a:tc hMerge="1">
+                      <a:txBody>
+                        <a:bodyPr/>
+                        <a:lstStyle/>
+                        <a:p>
+                          <a:endParaRPr lang="de-DE" sz="1600" dirty="0"/>
+                        </a:p>
+                      </a:txBody>
+                      <a:tcPr marL="79398" marR="79398" marT="39699" marB="39699">
+                        <a:lnL w="12700" cmpd="sng">
+                          <a:noFill/>
+                        </a:lnL>
+                        <a:lnR w="12700" cmpd="sng">
+                          <a:noFill/>
+                        </a:lnR>
+                        <a:lnT w="12700" cmpd="sng">
+                          <a:noFill/>
+                        </a:lnT>
+                        <a:lnB w="38100" cmpd="sng">
+                          <a:noFill/>
+                        </a:lnB>
+                        <a:lnTlToBr w="12700" cmpd="sng">
+                          <a:noFill/>
+                          <a:prstDash val="solid"/>
+                        </a:lnTlToBr>
+                        <a:lnBlToTr w="12700" cmpd="sng">
+                          <a:noFill/>
+                          <a:prstDash val="solid"/>
+                        </a:lnBlToTr>
+                        <a:noFill/>
+                      </a:tcPr>
+                    </a:tc>
+                    <a:tc hMerge="1">
+                      <a:txBody>
+                        <a:bodyPr/>
+                        <a:lstStyle/>
+                        <a:p>
+                          <a:endParaRPr lang="de-DE" sz="1600" dirty="0"/>
+                        </a:p>
+                      </a:txBody>
+                      <a:tcPr marL="79398" marR="79398" marT="39699" marB="39699">
+                        <a:lnL w="12700" cmpd="sng">
+                          <a:noFill/>
+                        </a:lnL>
+                        <a:lnR w="12700" cmpd="sng">
+                          <a:noFill/>
+                        </a:lnR>
+                        <a:lnT w="12700" cmpd="sng">
+                          <a:noFill/>
+                        </a:lnT>
+                        <a:lnB w="38100" cmpd="sng">
+                          <a:noFill/>
+                        </a:lnB>
+                        <a:lnTlToBr w="12700" cmpd="sng">
+                          <a:noFill/>
+                          <a:prstDash val="solid"/>
+                        </a:lnTlToBr>
+                        <a:lnBlToTr w="12700" cmpd="sng">
+                          <a:noFill/>
+                          <a:prstDash val="solid"/>
+                        </a:lnBlToTr>
+                        <a:noFill/>
+                      </a:tcPr>
+                    </a:tc>
+                    <a:tc hMerge="1">
+                      <a:txBody>
+                        <a:bodyPr/>
+                        <a:lstStyle/>
+                        <a:p>
+                          <a:endParaRPr lang="de-DE" sz="1600" dirty="0"/>
+                        </a:p>
+                      </a:txBody>
+                      <a:tcPr marL="79398" marR="79398" marT="39699" marB="39699">
+                        <a:lnL w="12700" cmpd="sng">
+                          <a:noFill/>
+                        </a:lnL>
+                        <a:lnR w="12700" cmpd="sng">
+                          <a:noFill/>
+                        </a:lnR>
+                        <a:lnT w="12700" cmpd="sng">
+                          <a:noFill/>
+                        </a:lnT>
+                        <a:lnB w="38100" cmpd="sng">
+                          <a:noFill/>
+                        </a:lnB>
+                        <a:lnTlToBr w="12700" cmpd="sng">
+                          <a:noFill/>
+                          <a:prstDash val="solid"/>
+                        </a:lnTlToBr>
+                        <a:lnBlToTr w="12700" cmpd="sng">
+                          <a:noFill/>
+                          <a:prstDash val="solid"/>
+                        </a:lnBlToTr>
+                        <a:noFill/>
+                      </a:tcPr>
+                    </a:tc>
+                    <a:extLst>
+                      <a:ext uri="{0D108BD9-81ED-4DB2-BD59-A6C34878D82A}">
+                        <a16:rowId xmlns:a16="http://schemas.microsoft.com/office/drawing/2014/main" val="3676973222"/>
+                      </a:ext>
+                    </a:extLst>
+                  </a:tr>
+                  <a:tr h="323238">
+                    <a:tc rowSpan="4">
+                      <a:txBody>
+                        <a:bodyPr/>
+                        <a:lstStyle/>
+                        <a:p>
+                          <a:pPr algn="ctr"/>
+                          <a:r>
+                            <a:rPr lang="de-DE" sz="1600" b="0" dirty="0">
+                              <a:solidFill>
+                                <a:srgbClr val="F2F5FA"/>
+                              </a:solidFill>
+                            </a:rPr>
+                            <a:t>Menge A</a:t>
+                          </a:r>
+                        </a:p>
+                      </a:txBody>
+                      <a:tcPr marL="79398" marR="79398" marT="39699" marB="39699" vert="vert270" anchor="b">
+                        <a:lnL w="12700" cmpd="sng">
+                          <a:noFill/>
+                        </a:lnL>
+                        <a:lnR w="12700" cmpd="sng">
+                          <a:noFill/>
+                        </a:lnR>
+                        <a:lnT w="38100" cmpd="sng">
+                          <a:noFill/>
+                        </a:lnT>
+                        <a:lnB w="12700" cmpd="sng">
+                          <a:noFill/>
+                        </a:lnB>
+                        <a:lnTlToBr w="12700" cmpd="sng">
+                          <a:noFill/>
+                          <a:prstDash val="solid"/>
+                        </a:lnTlToBr>
+                        <a:lnBlToTr w="12700" cmpd="sng">
+                          <a:noFill/>
+                          <a:prstDash val="solid"/>
+                        </a:lnBlToTr>
+                        <a:noFill/>
+                      </a:tcPr>
+                    </a:tc>
+                    <a:tc>
+                      <a:txBody>
+                        <a:bodyPr/>
+                        <a:lstStyle/>
+                        <a:p>
+                          <a:pPr algn="ctr"/>
+                          <a:r>
+                            <a:rPr lang="de-DE" sz="1600" b="0" dirty="0">
+                              <a:solidFill>
+                                <a:srgbClr val="F2F5FA"/>
+                              </a:solidFill>
+                            </a:rPr>
+                            <a:t>(a, b)</a:t>
+                          </a:r>
+                        </a:p>
+                      </a:txBody>
+                      <a:tcPr marL="79398" marR="79398" marT="39699" marB="39699">
+                        <a:lnL w="12700" cmpd="sng">
+                          <a:noFill/>
+                        </a:lnL>
+                        <a:lnR w="12700" cmpd="sng">
+                          <a:noFill/>
+                        </a:lnR>
+                        <a:lnT w="38100" cmpd="sng">
+                          <a:noFill/>
+                        </a:lnT>
+                        <a:lnB w="12700" cmpd="sng">
+                          <a:noFill/>
+                        </a:lnB>
+                        <a:lnTlToBr w="12700" cmpd="sng">
+                          <a:noFill/>
+                          <a:prstDash val="solid"/>
+                        </a:lnTlToBr>
+                        <a:lnBlToTr w="12700" cmpd="sng">
+                          <a:noFill/>
+                          <a:prstDash val="solid"/>
+                        </a:lnBlToTr>
+                        <a:noFill/>
+                      </a:tcPr>
+                    </a:tc>
+                    <a:tc>
+                      <a:txBody>
+                        <a:bodyPr/>
+                        <a:lstStyle/>
+                        <a:p>
+                          <a:pPr algn="ctr"/>
+                          <a:r>
+                            <a:rPr lang="de-DE" sz="1600" b="0" dirty="0">
+                              <a:solidFill>
+                                <a:srgbClr val="F2F5FA"/>
+                              </a:solidFill>
+                            </a:rPr>
+                            <a:t>4</a:t>
+                          </a:r>
+                        </a:p>
+                      </a:txBody>
+                      <a:tcPr marL="79398" marR="79398" marT="39699" marB="39699">
+                        <a:lnL w="12700" cmpd="sng">
+                          <a:noFill/>
+                        </a:lnL>
+                        <a:lnR w="12700" cmpd="sng">
+                          <a:noFill/>
+                        </a:lnR>
+                        <a:lnT w="38100" cmpd="sng">
+                          <a:noFill/>
+                        </a:lnT>
+                        <a:lnB w="12700" cmpd="sng">
+                          <a:noFill/>
+                        </a:lnB>
+                        <a:lnTlToBr w="12700" cmpd="sng">
+                          <a:noFill/>
+                          <a:prstDash val="solid"/>
+                        </a:lnTlToBr>
+                        <a:lnBlToTr w="12700" cmpd="sng">
+                          <a:noFill/>
+                          <a:prstDash val="solid"/>
+                        </a:lnBlToTr>
+                        <a:noFill/>
+                      </a:tcPr>
+                    </a:tc>
+                    <a:tc>
+                      <a:txBody>
+                        <a:bodyPr/>
+                        <a:lstStyle/>
+                        <a:p>
+                          <a:pPr algn="ctr"/>
+                          <a:r>
+                            <a:rPr lang="de-DE" sz="1600" b="0" dirty="0">
+                              <a:solidFill>
+                                <a:srgbClr val="F2F5FA"/>
+                              </a:solidFill>
+                            </a:rPr>
+                            <a:t>5</a:t>
+                          </a:r>
+                        </a:p>
+                      </a:txBody>
+                      <a:tcPr marL="79398" marR="79398" marT="39699" marB="39699">
+                        <a:lnL w="12700" cmpd="sng">
+                          <a:noFill/>
+                        </a:lnL>
+                        <a:lnR w="12700" cmpd="sng">
+                          <a:noFill/>
+                        </a:lnR>
+                        <a:lnT w="38100" cmpd="sng">
+                          <a:noFill/>
+                        </a:lnT>
+                        <a:lnB w="12700" cmpd="sng">
+                          <a:noFill/>
+                        </a:lnB>
+                        <a:lnTlToBr w="12700" cmpd="sng">
+                          <a:noFill/>
+                          <a:prstDash val="solid"/>
+                        </a:lnTlToBr>
+                        <a:lnBlToTr w="12700" cmpd="sng">
+                          <a:noFill/>
+                          <a:prstDash val="solid"/>
+                        </a:lnBlToTr>
+                        <a:noFill/>
+                      </a:tcPr>
+                    </a:tc>
+                    <a:tc>
+                      <a:txBody>
+                        <a:bodyPr/>
+                        <a:lstStyle/>
+                        <a:p>
+                          <a:pPr algn="ctr"/>
+                          <a:r>
+                            <a:rPr lang="de-DE" sz="1600" b="0" dirty="0">
+                              <a:solidFill>
+                                <a:srgbClr val="F2F5FA"/>
+                              </a:solidFill>
+                            </a:rPr>
+                            <a:t>6</a:t>
+                          </a:r>
+                        </a:p>
+                      </a:txBody>
+                      <a:tcPr marL="79398" marR="79398" marT="39699" marB="39699">
+                        <a:lnL w="12700" cmpd="sng">
+                          <a:noFill/>
+                        </a:lnL>
+                        <a:lnR w="12700" cmpd="sng">
+                          <a:noFill/>
+                        </a:lnR>
+                        <a:lnT w="38100" cmpd="sng">
+                          <a:noFill/>
+                        </a:lnT>
+                        <a:lnB w="12700" cmpd="sng">
+                          <a:noFill/>
+                        </a:lnB>
+                        <a:lnTlToBr w="12700" cmpd="sng">
+                          <a:noFill/>
+                          <a:prstDash val="solid"/>
+                        </a:lnTlToBr>
+                        <a:lnBlToTr w="12700" cmpd="sng">
+                          <a:noFill/>
+                          <a:prstDash val="solid"/>
+                        </a:lnBlToTr>
+                        <a:noFill/>
+                      </a:tcPr>
+                    </a:tc>
+                    <a:extLst>
+                      <a:ext uri="{0D108BD9-81ED-4DB2-BD59-A6C34878D82A}">
+                        <a16:rowId xmlns:a16="http://schemas.microsoft.com/office/drawing/2014/main" val="36725046"/>
+                      </a:ext>
+                    </a:extLst>
+                  </a:tr>
+                  <a:tr h="323238">
+                    <a:tc vMerge="1">
+                      <a:txBody>
+                        <a:bodyPr/>
+                        <a:lstStyle/>
+                        <a:p>
+                          <a:endParaRPr lang="de-DE" sz="1600" dirty="0"/>
+                        </a:p>
+                      </a:txBody>
+                      <a:tcPr marL="79398" marR="79398" marT="39699" marB="39699">
+                        <a:lnL w="12700" cmpd="sng">
+                          <a:noFill/>
+                        </a:lnL>
+                        <a:lnR w="12700" cmpd="sng">
+                          <a:noFill/>
+                        </a:lnR>
+                        <a:lnT w="12700" cmpd="sng">
+                          <a:noFill/>
+                        </a:lnT>
+                        <a:lnB w="12700" cmpd="sng">
+                          <a:noFill/>
+                        </a:lnB>
+                        <a:lnTlToBr w="12700" cmpd="sng">
+                          <a:noFill/>
+                          <a:prstDash val="solid"/>
+                        </a:lnTlToBr>
+                        <a:lnBlToTr w="12700" cmpd="sng">
+                          <a:noFill/>
+                          <a:prstDash val="solid"/>
+                        </a:lnBlToTr>
+                        <a:noFill/>
+                      </a:tcPr>
+                    </a:tc>
+                    <a:tc>
+                      <a:txBody>
+                        <a:bodyPr/>
+                        <a:lstStyle/>
+                        <a:p>
+                          <a:pPr algn="ctr"/>
+                          <a:r>
+                            <a:rPr lang="de-DE" sz="1600" b="0" dirty="0">
+                              <a:solidFill>
+                                <a:srgbClr val="F2F5FA"/>
+                              </a:solidFill>
+                            </a:rPr>
+                            <a:t>1</a:t>
+                          </a:r>
+                        </a:p>
+                      </a:txBody>
+                      <a:tcPr marL="79398" marR="79398" marT="39699" marB="39699">
+                        <a:lnL w="12700" cmpd="sng">
+                          <a:noFill/>
+                        </a:lnL>
+                        <a:lnR w="12700" cmpd="sng">
+                          <a:noFill/>
+                        </a:lnR>
+                        <a:lnT w="12700" cmpd="sng">
+                          <a:noFill/>
+                        </a:lnT>
+                        <a:lnB w="12700" cmpd="sng">
+                          <a:noFill/>
+                        </a:lnB>
+                        <a:lnTlToBr w="12700" cmpd="sng">
+                          <a:noFill/>
+                          <a:prstDash val="solid"/>
+                        </a:lnTlToBr>
+                        <a:lnBlToTr w="12700" cmpd="sng">
+                          <a:noFill/>
+                          <a:prstDash val="solid"/>
+                        </a:lnBlToTr>
+                        <a:noFill/>
+                      </a:tcPr>
+                    </a:tc>
+                    <a:tc>
+                      <a:txBody>
+                        <a:bodyPr/>
+                        <a:lstStyle/>
+                        <a:p>
+                          <a:pPr algn="ctr"/>
+                          <a:r>
+                            <a:rPr lang="de-DE" sz="1600" b="0" dirty="0">
+                              <a:solidFill>
+                                <a:srgbClr val="F2F5FA"/>
+                              </a:solidFill>
+                            </a:rPr>
+                            <a:t>(1, 4)</a:t>
+                          </a:r>
+                        </a:p>
+                      </a:txBody>
+                      <a:tcPr marL="79398" marR="79398" marT="39699" marB="39699">
+                        <a:lnL w="12700" cmpd="sng">
+                          <a:noFill/>
+                        </a:lnL>
+                        <a:lnR w="12700" cmpd="sng">
+                          <a:noFill/>
+                        </a:lnR>
+                        <a:lnT w="12700" cmpd="sng">
+                          <a:noFill/>
+                        </a:lnT>
+                        <a:lnB w="12700" cmpd="sng">
+                          <a:noFill/>
+                        </a:lnB>
+                        <a:lnTlToBr w="12700" cmpd="sng">
+                          <a:noFill/>
+                          <a:prstDash val="solid"/>
+                        </a:lnTlToBr>
+                        <a:lnBlToTr w="12700" cmpd="sng">
+                          <a:noFill/>
+                          <a:prstDash val="solid"/>
+                        </a:lnBlToTr>
+                        <a:noFill/>
+                      </a:tcPr>
+                    </a:tc>
+                    <a:tc>
+                      <a:txBody>
+                        <a:bodyPr/>
+                        <a:lstStyle/>
+                        <a:p>
+                          <a:pPr algn="ctr"/>
+                          <a:r>
+                            <a:rPr lang="de-DE" sz="1600" b="0" dirty="0">
+                              <a:solidFill>
+                                <a:srgbClr val="F2F5FA"/>
+                              </a:solidFill>
+                            </a:rPr>
+                            <a:t>(1, 5)</a:t>
+                          </a:r>
+                        </a:p>
+                      </a:txBody>
+                      <a:tcPr marL="79398" marR="79398" marT="39699" marB="39699">
+                        <a:lnL w="12700" cmpd="sng">
+                          <a:noFill/>
+                        </a:lnL>
+                        <a:lnR w="12700" cmpd="sng">
+                          <a:noFill/>
+                        </a:lnR>
+                        <a:lnT w="12700" cmpd="sng">
+                          <a:noFill/>
+                        </a:lnT>
+                        <a:lnB w="12700" cmpd="sng">
+                          <a:noFill/>
+                        </a:lnB>
+                        <a:lnTlToBr w="12700" cmpd="sng">
+                          <a:noFill/>
+                          <a:prstDash val="solid"/>
+                        </a:lnTlToBr>
+                        <a:lnBlToTr w="12700" cmpd="sng">
+                          <a:noFill/>
+                          <a:prstDash val="solid"/>
+                        </a:lnBlToTr>
+                        <a:noFill/>
+                      </a:tcPr>
+                    </a:tc>
+                    <a:tc>
+                      <a:txBody>
+                        <a:bodyPr/>
+                        <a:lstStyle/>
+                        <a:p>
+                          <a:pPr algn="ctr"/>
+                          <a:r>
+                            <a:rPr lang="de-DE" sz="1600" b="0" dirty="0">
+                              <a:solidFill>
+                                <a:srgbClr val="F2F5FA"/>
+                              </a:solidFill>
+                            </a:rPr>
+                            <a:t>(1, 6)</a:t>
+                          </a:r>
+                        </a:p>
+                      </a:txBody>
+                      <a:tcPr marL="79398" marR="79398" marT="39699" marB="39699">
+                        <a:lnL w="12700" cmpd="sng">
+                          <a:noFill/>
+                        </a:lnL>
+                        <a:lnR w="12700" cmpd="sng">
+                          <a:noFill/>
+                        </a:lnR>
+                        <a:lnT w="12700" cmpd="sng">
+                          <a:noFill/>
+                        </a:lnT>
+                        <a:lnB w="12700" cmpd="sng">
+                          <a:noFill/>
+                        </a:lnB>
+                        <a:lnTlToBr w="12700" cmpd="sng">
+                          <a:noFill/>
+                          <a:prstDash val="solid"/>
+                        </a:lnTlToBr>
+                        <a:lnBlToTr w="12700" cmpd="sng">
+                          <a:noFill/>
+                          <a:prstDash val="solid"/>
+                        </a:lnBlToTr>
+                        <a:noFill/>
+                      </a:tcPr>
+                    </a:tc>
+                    <a:extLst>
+                      <a:ext uri="{0D108BD9-81ED-4DB2-BD59-A6C34878D82A}">
+                        <a16:rowId xmlns:a16="http://schemas.microsoft.com/office/drawing/2014/main" val="1905864975"/>
+                      </a:ext>
+                    </a:extLst>
+                  </a:tr>
+                  <a:tr h="323238">
+                    <a:tc vMerge="1">
+                      <a:txBody>
+                        <a:bodyPr/>
+                        <a:lstStyle/>
+                        <a:p>
+                          <a:endParaRPr lang="de-DE" sz="1600" dirty="0"/>
+                        </a:p>
+                      </a:txBody>
+                      <a:tcPr marL="79398" marR="79398" marT="39699" marB="39699">
+                        <a:lnL w="12700" cmpd="sng">
+                          <a:noFill/>
+                        </a:lnL>
+                        <a:lnR w="12700" cmpd="sng">
+                          <a:noFill/>
+                        </a:lnR>
+                        <a:lnT w="12700" cmpd="sng">
+                          <a:noFill/>
+                        </a:lnT>
+                        <a:lnB w="12700" cmpd="sng">
+                          <a:noFill/>
+                        </a:lnB>
+                        <a:lnTlToBr w="12700" cmpd="sng">
+                          <a:noFill/>
+                          <a:prstDash val="solid"/>
+                        </a:lnTlToBr>
+                        <a:lnBlToTr w="12700" cmpd="sng">
+                          <a:noFill/>
+                          <a:prstDash val="solid"/>
+                        </a:lnBlToTr>
+                        <a:noFill/>
+                      </a:tcPr>
+                    </a:tc>
+                    <a:tc>
+                      <a:txBody>
+                        <a:bodyPr/>
+                        <a:lstStyle/>
+                        <a:p>
+                          <a:pPr algn="ctr"/>
+                          <a:r>
+                            <a:rPr lang="de-DE" sz="1600" b="0" dirty="0">
+                              <a:solidFill>
+                                <a:srgbClr val="F2F5FA"/>
+                              </a:solidFill>
+                            </a:rPr>
+                            <a:t>2</a:t>
+                          </a:r>
+                        </a:p>
+                      </a:txBody>
+                      <a:tcPr marL="79398" marR="79398" marT="39699" marB="39699">
+                        <a:lnL w="12700" cmpd="sng">
+                          <a:noFill/>
+                        </a:lnL>
+                        <a:lnR w="12700" cmpd="sng">
+                          <a:noFill/>
+                        </a:lnR>
+                        <a:lnT w="12700" cmpd="sng">
+                          <a:noFill/>
+                        </a:lnT>
+                        <a:lnB w="12700" cmpd="sng">
+                          <a:noFill/>
+                        </a:lnB>
+                        <a:lnTlToBr w="12700" cmpd="sng">
+                          <a:noFill/>
+                          <a:prstDash val="solid"/>
+                        </a:lnTlToBr>
+                        <a:lnBlToTr w="12700" cmpd="sng">
+                          <a:noFill/>
+                          <a:prstDash val="solid"/>
+                        </a:lnBlToTr>
+                        <a:noFill/>
+                      </a:tcPr>
+                    </a:tc>
+                    <a:tc>
+                      <a:txBody>
+                        <a:bodyPr/>
+                        <a:lstStyle/>
+                        <a:p>
+                          <a:pPr algn="ctr"/>
+                          <a:r>
+                            <a:rPr lang="de-DE" sz="1600" b="0" dirty="0">
+                              <a:solidFill>
+                                <a:srgbClr val="F2F5FA"/>
+                              </a:solidFill>
+                            </a:rPr>
+                            <a:t>(2, 4)</a:t>
+                          </a:r>
+                        </a:p>
+                      </a:txBody>
+                      <a:tcPr marL="79398" marR="79398" marT="39699" marB="39699">
+                        <a:lnL w="12700" cmpd="sng">
+                          <a:noFill/>
+                        </a:lnL>
+                        <a:lnR w="12700" cmpd="sng">
+                          <a:noFill/>
+                        </a:lnR>
+                        <a:lnT w="12700" cmpd="sng">
+                          <a:noFill/>
+                        </a:lnT>
+                        <a:lnB w="12700" cmpd="sng">
+                          <a:noFill/>
+                        </a:lnB>
+                        <a:lnTlToBr w="12700" cmpd="sng">
+                          <a:noFill/>
+                          <a:prstDash val="solid"/>
+                        </a:lnTlToBr>
+                        <a:lnBlToTr w="12700" cmpd="sng">
+                          <a:noFill/>
+                          <a:prstDash val="solid"/>
+                        </a:lnBlToTr>
+                        <a:noFill/>
+                      </a:tcPr>
+                    </a:tc>
+                    <a:tc>
+                      <a:txBody>
+                        <a:bodyPr/>
+                        <a:lstStyle/>
+                        <a:p>
+                          <a:pPr algn="ctr"/>
+                          <a:r>
+                            <a:rPr lang="de-DE" sz="1600" b="0" dirty="0">
+                              <a:solidFill>
+                                <a:srgbClr val="F2F5FA"/>
+                              </a:solidFill>
+                            </a:rPr>
+                            <a:t>(2, 5)</a:t>
+                          </a:r>
+                        </a:p>
+                      </a:txBody>
+                      <a:tcPr marL="79398" marR="79398" marT="39699" marB="39699">
+                        <a:lnL w="12700" cmpd="sng">
+                          <a:noFill/>
+                        </a:lnL>
+                        <a:lnR w="12700" cmpd="sng">
+                          <a:noFill/>
+                        </a:lnR>
+                        <a:lnT w="12700" cmpd="sng">
+                          <a:noFill/>
+                        </a:lnT>
+                        <a:lnB w="12700" cmpd="sng">
+                          <a:noFill/>
+                        </a:lnB>
+                        <a:lnTlToBr w="12700" cmpd="sng">
+                          <a:noFill/>
+                          <a:prstDash val="solid"/>
+                        </a:lnTlToBr>
+                        <a:lnBlToTr w="12700" cmpd="sng">
+                          <a:noFill/>
+                          <a:prstDash val="solid"/>
+                        </a:lnBlToTr>
+                        <a:noFill/>
+                      </a:tcPr>
+                    </a:tc>
+                    <a:tc>
+                      <a:txBody>
+                        <a:bodyPr/>
+                        <a:lstStyle/>
+                        <a:p>
+                          <a:pPr algn="ctr"/>
+                          <a:r>
+                            <a:rPr lang="de-DE" sz="1600" b="0" dirty="0">
+                              <a:solidFill>
+                                <a:srgbClr val="F2F5FA"/>
+                              </a:solidFill>
+                            </a:rPr>
+                            <a:t>(2, 6)</a:t>
+                          </a:r>
+                        </a:p>
+                      </a:txBody>
+                      <a:tcPr marL="79398" marR="79398" marT="39699" marB="39699">
+                        <a:lnL w="12700" cmpd="sng">
+                          <a:noFill/>
+                        </a:lnL>
+                        <a:lnR w="12700" cmpd="sng">
+                          <a:noFill/>
+                        </a:lnR>
+                        <a:lnT w="12700" cmpd="sng">
+                          <a:noFill/>
+                        </a:lnT>
+                        <a:lnB w="12700" cmpd="sng">
+                          <a:noFill/>
+                        </a:lnB>
+                        <a:lnTlToBr w="12700" cmpd="sng">
+                          <a:noFill/>
+                          <a:prstDash val="solid"/>
+                        </a:lnTlToBr>
+                        <a:lnBlToTr w="12700" cmpd="sng">
+                          <a:noFill/>
+                          <a:prstDash val="solid"/>
+                        </a:lnBlToTr>
+                        <a:noFill/>
+                      </a:tcPr>
+                    </a:tc>
+                    <a:extLst>
+                      <a:ext uri="{0D108BD9-81ED-4DB2-BD59-A6C34878D82A}">
+                        <a16:rowId xmlns:a16="http://schemas.microsoft.com/office/drawing/2014/main" val="1440037789"/>
+                      </a:ext>
+                    </a:extLst>
+                  </a:tr>
+                  <a:tr h="323238">
+                    <a:tc vMerge="1">
+                      <a:txBody>
+                        <a:bodyPr/>
+                        <a:lstStyle/>
+                        <a:p>
+                          <a:endParaRPr lang="de-DE" sz="1600" dirty="0"/>
+                        </a:p>
+                      </a:txBody>
+                      <a:tcPr marL="79398" marR="79398" marT="39699" marB="39699">
+                        <a:lnL w="12700" cmpd="sng">
+                          <a:noFill/>
+                        </a:lnL>
+                        <a:lnR w="12700" cmpd="sng">
+                          <a:noFill/>
+                        </a:lnR>
+                        <a:lnT w="12700" cmpd="sng">
+                          <a:noFill/>
+                        </a:lnT>
+                        <a:lnB w="12700" cmpd="sng">
+                          <a:noFill/>
+                        </a:lnB>
+                        <a:lnTlToBr w="12700" cmpd="sng">
+                          <a:noFill/>
+                          <a:prstDash val="solid"/>
+                        </a:lnTlToBr>
+                        <a:lnBlToTr w="12700" cmpd="sng">
+                          <a:noFill/>
+                          <a:prstDash val="solid"/>
+                        </a:lnBlToTr>
+                        <a:noFill/>
+                      </a:tcPr>
+                    </a:tc>
+                    <a:tc>
+                      <a:txBody>
+                        <a:bodyPr/>
+                        <a:lstStyle/>
+                        <a:p>
+                          <a:pPr algn="ctr"/>
+                          <a:r>
+                            <a:rPr lang="de-DE" sz="1600" b="0" dirty="0">
+                              <a:solidFill>
+                                <a:srgbClr val="F2F5FA"/>
+                              </a:solidFill>
+                            </a:rPr>
+                            <a:t>3</a:t>
+                          </a:r>
+                        </a:p>
+                      </a:txBody>
+                      <a:tcPr marL="79398" marR="79398" marT="39699" marB="39699">
+                        <a:lnL w="12700" cmpd="sng">
+                          <a:noFill/>
+                        </a:lnL>
+                        <a:lnR w="12700" cmpd="sng">
+                          <a:noFill/>
+                        </a:lnR>
+                        <a:lnT w="12700" cmpd="sng">
+                          <a:noFill/>
+                        </a:lnT>
+                        <a:lnB w="12700" cmpd="sng">
+                          <a:noFill/>
+                        </a:lnB>
+                        <a:lnTlToBr w="12700" cmpd="sng">
+                          <a:noFill/>
+                          <a:prstDash val="solid"/>
+                        </a:lnTlToBr>
+                        <a:lnBlToTr w="12700" cmpd="sng">
+                          <a:noFill/>
+                          <a:prstDash val="solid"/>
+                        </a:lnBlToTr>
+                        <a:noFill/>
+                      </a:tcPr>
+                    </a:tc>
+                    <a:tc>
+                      <a:txBody>
+                        <a:bodyPr/>
+                        <a:lstStyle/>
+                        <a:p>
+                          <a:pPr algn="ctr"/>
+                          <a:r>
+                            <a:rPr lang="de-DE" sz="1600" b="0" dirty="0">
+                              <a:solidFill>
+                                <a:srgbClr val="F2F5FA"/>
+                              </a:solidFill>
+                            </a:rPr>
+                            <a:t>(3, 4)</a:t>
+                          </a:r>
+                        </a:p>
+                      </a:txBody>
+                      <a:tcPr marL="79398" marR="79398" marT="39699" marB="39699">
+                        <a:lnL w="12700" cmpd="sng">
+                          <a:noFill/>
+                        </a:lnL>
+                        <a:lnR w="12700" cmpd="sng">
+                          <a:noFill/>
+                        </a:lnR>
+                        <a:lnT w="12700" cmpd="sng">
+                          <a:noFill/>
+                        </a:lnT>
+                        <a:lnB w="12700" cmpd="sng">
+                          <a:noFill/>
+                        </a:lnB>
+                        <a:lnTlToBr w="12700" cmpd="sng">
+                          <a:noFill/>
+                          <a:prstDash val="solid"/>
+                        </a:lnTlToBr>
+                        <a:lnBlToTr w="12700" cmpd="sng">
+                          <a:noFill/>
+                          <a:prstDash val="solid"/>
+                        </a:lnBlToTr>
+                        <a:noFill/>
+                      </a:tcPr>
+                    </a:tc>
+                    <a:tc>
+                      <a:txBody>
+                        <a:bodyPr/>
+                        <a:lstStyle/>
+                        <a:p>
+                          <a:pPr algn="ctr"/>
+                          <a:r>
+                            <a:rPr lang="de-DE" sz="1600" b="0" dirty="0">
+                              <a:solidFill>
+                                <a:srgbClr val="F2F5FA"/>
+                              </a:solidFill>
+                            </a:rPr>
+                            <a:t>(3, 5)</a:t>
+                          </a:r>
+                        </a:p>
+                      </a:txBody>
+                      <a:tcPr marL="79398" marR="79398" marT="39699" marB="39699">
+                        <a:lnL w="12700" cmpd="sng">
+                          <a:noFill/>
+                        </a:lnL>
+                        <a:lnR w="12700" cmpd="sng">
+                          <a:noFill/>
+                        </a:lnR>
+                        <a:lnT w="12700" cmpd="sng">
+                          <a:noFill/>
+                        </a:lnT>
+                        <a:lnB w="12700" cmpd="sng">
+                          <a:noFill/>
+                        </a:lnB>
+                        <a:lnTlToBr w="12700" cmpd="sng">
+                          <a:noFill/>
+                          <a:prstDash val="solid"/>
+                        </a:lnTlToBr>
+                        <a:lnBlToTr w="12700" cmpd="sng">
+                          <a:noFill/>
+                          <a:prstDash val="solid"/>
+                        </a:lnBlToTr>
+                        <a:noFill/>
+                      </a:tcPr>
+                    </a:tc>
+                    <a:tc>
+                      <a:txBody>
+                        <a:bodyPr/>
+                        <a:lstStyle/>
+                        <a:p>
+                          <a:pPr algn="ctr"/>
+                          <a:r>
+                            <a:rPr lang="de-DE" sz="1600" b="0" dirty="0">
+                              <a:solidFill>
+                                <a:srgbClr val="F2F5FA"/>
+                              </a:solidFill>
+                            </a:rPr>
+                            <a:t>(3, 6)</a:t>
+                          </a:r>
+                        </a:p>
+                      </a:txBody>
+                      <a:tcPr marL="79398" marR="79398" marT="39699" marB="39699">
+                        <a:lnL w="12700" cmpd="sng">
+                          <a:noFill/>
+                        </a:lnL>
+                        <a:lnR w="12700" cmpd="sng">
+                          <a:noFill/>
+                        </a:lnR>
+                        <a:lnT w="12700" cmpd="sng">
+                          <a:noFill/>
+                        </a:lnT>
+                        <a:lnB w="12700" cmpd="sng">
+                          <a:noFill/>
+                        </a:lnB>
+                        <a:lnTlToBr w="12700" cmpd="sng">
+                          <a:noFill/>
+                          <a:prstDash val="solid"/>
+                        </a:lnTlToBr>
+                        <a:lnBlToTr w="12700" cmpd="sng">
+                          <a:noFill/>
+                          <a:prstDash val="solid"/>
+                        </a:lnBlToTr>
+                        <a:noFill/>
+                      </a:tcPr>
+                    </a:tc>
+                    <a:extLst>
+                      <a:ext uri="{0D108BD9-81ED-4DB2-BD59-A6C34878D82A}">
+                        <a16:rowId xmlns:a16="http://schemas.microsoft.com/office/drawing/2014/main" val="980465750"/>
+                      </a:ext>
+                    </a:extLst>
+                  </a:tr>
+                </a:tbl>
+              </a:graphicData>
+            </a:graphic>
+          </p:graphicFrame>
+        </mc:Fallback>
+      </mc:AlternateContent>
+      <mc:AlternateContent xmlns:mc="http://schemas.openxmlformats.org/markup-compatibility/2006">
+        <mc:Choice xmlns:a14="http://schemas.microsoft.com/office/drawing/2010/main" Requires="a14">
+          <p:sp>
+            <p:nvSpPr>
+              <p:cNvPr id="24" name="TextBox 23">
+                <a:extLst>
+                  <a:ext uri="{FF2B5EF4-FFF2-40B4-BE49-F238E27FC236}">
+                    <a16:creationId xmlns:a16="http://schemas.microsoft.com/office/drawing/2014/main" id="{129BD675-4A43-4B2A-932A-AF8260F34C00}"/>
+                  </a:ext>
+                </a:extLst>
+              </p:cNvPr>
+              <p:cNvSpPr txBox="1"/>
+              <p:nvPr/>
+            </p:nvSpPr>
+            <p:spPr>
+              <a:xfrm rot="21215520">
+                <a:off x="5760721" y="4397947"/>
+                <a:ext cx="4973662" cy="2022220"/>
+              </a:xfrm>
+              <a:prstGeom prst="rect">
+                <a:avLst/>
+              </a:prstGeom>
+              <a:noFill/>
+            </p:spPr>
+            <p:txBody>
+              <a:bodyPr wrap="square" rtlCol="0" anchor="t">
+                <a:spAutoFit/>
+              </a:bodyPr>
+              <a:lstStyle/>
+              <a:p>
+                <a14:m>
+                  <m:oMath xmlns:m="http://schemas.openxmlformats.org/officeDocument/2006/math">
+                    <m:d>
+                      <m:dPr>
+                        <m:ctrlPr>
+                          <a:rPr lang="en-US" b="0" i="1" smtClean="0">
+                            <a:latin typeface="Cambria Math" panose="02040503050406030204" pitchFamily="18" charset="0"/>
+                          </a:rPr>
+                        </m:ctrlPr>
+                      </m:dPr>
+                      <m:e>
+                        <m:r>
+                          <a:rPr lang="en-US" b="0" i="1" smtClean="0">
+                            <a:latin typeface="Cambria Math" panose="02040503050406030204" pitchFamily="18" charset="0"/>
+                          </a:rPr>
+                          <m:t>𝐼𝐴</m:t>
+                        </m:r>
+                      </m:e>
+                    </m:d>
+                    <m:r>
+                      <a:rPr lang="en-US" b="0" i="1" smtClean="0">
+                        <a:latin typeface="Cambria Math" panose="02040503050406030204" pitchFamily="18" charset="0"/>
+                      </a:rPr>
+                      <m:t> </m:t>
+                    </m:r>
+                    <m:r>
+                      <a:rPr lang="en-US" b="0" i="1" smtClean="0">
+                        <a:latin typeface="Cambria Math" panose="02040503050406030204" pitchFamily="18" charset="0"/>
+                      </a:rPr>
+                      <m:t>𝐹</m:t>
+                    </m:r>
+                    <m:r>
+                      <a:rPr lang="en-US" b="0" i="1" smtClean="0">
+                        <a:latin typeface="Cambria Math" panose="02040503050406030204" pitchFamily="18" charset="0"/>
+                      </a:rPr>
+                      <m:t>ü</m:t>
+                    </m:r>
+                    <m:r>
+                      <a:rPr lang="en-US" b="0" i="1" smtClean="0">
+                        <a:latin typeface="Cambria Math" panose="02040503050406030204" pitchFamily="18" charset="0"/>
+                      </a:rPr>
+                      <m:t>𝑟</m:t>
+                    </m:r>
+                    <m:r>
+                      <a:rPr lang="en-US" b="0" i="1" smtClean="0">
+                        <a:latin typeface="Cambria Math" panose="02040503050406030204" pitchFamily="18" charset="0"/>
+                      </a:rPr>
+                      <m:t> </m:t>
+                    </m:r>
+                    <m:r>
+                      <a:rPr lang="en-US" b="0" i="1" smtClean="0">
+                        <a:latin typeface="Cambria Math" panose="02040503050406030204" pitchFamily="18" charset="0"/>
+                      </a:rPr>
+                      <m:t>𝑛</m:t>
+                    </m:r>
+                    <m:r>
+                      <a:rPr lang="en-US" b="0" i="1" smtClean="0">
+                        <a:latin typeface="Cambria Math" panose="02040503050406030204" pitchFamily="18" charset="0"/>
+                      </a:rPr>
+                      <m:t>=1 </m:t>
+                    </m:r>
+                  </m:oMath>
+                </a14:m>
+                <a:r>
+                  <a:rPr lang="en-US" b="0" dirty="0"/>
+                  <a:t>gilt </a:t>
+                </a:r>
+                <a14:m>
+                  <m:oMath xmlns:m="http://schemas.openxmlformats.org/officeDocument/2006/math">
+                    <m:r>
+                      <a:rPr lang="en-US" b="0" i="1" smtClean="0">
+                        <a:latin typeface="Cambria Math" panose="02040503050406030204" pitchFamily="18" charset="0"/>
+                      </a:rPr>
+                      <m:t>1=</m:t>
+                    </m:r>
+                    <m:f>
+                      <m:fPr>
+                        <m:ctrlPr>
+                          <a:rPr lang="en-US" b="0" i="1" smtClean="0">
+                            <a:latin typeface="Cambria Math" panose="02040503050406030204" pitchFamily="18" charset="0"/>
+                          </a:rPr>
+                        </m:ctrlPr>
+                      </m:fPr>
+                      <m:num>
+                        <m:r>
+                          <a:rPr lang="en-US" b="0" i="1" smtClean="0">
+                            <a:latin typeface="Cambria Math" panose="02040503050406030204" pitchFamily="18" charset="0"/>
+                          </a:rPr>
+                          <m:t>1(1+1)</m:t>
+                        </m:r>
+                      </m:num>
+                      <m:den>
+                        <m:r>
+                          <a:rPr lang="en-US" b="0" i="1" smtClean="0">
+                            <a:latin typeface="Cambria Math" panose="02040503050406030204" pitchFamily="18" charset="0"/>
+                          </a:rPr>
+                          <m:t>2</m:t>
+                        </m:r>
+                      </m:den>
+                    </m:f>
+                  </m:oMath>
+                </a14:m>
+                <a:r>
+                  <a:rPr lang="en-US" b="0" i="1" dirty="0">
+                    <a:latin typeface="Cambria Math" panose="02040503050406030204" pitchFamily="18" charset="0"/>
+                  </a:rPr>
+                  <a:t>.</a:t>
+                </a:r>
+              </a:p>
+              <a:p>
+                <a14:m>
+                  <m:oMath xmlns:m="http://schemas.openxmlformats.org/officeDocument/2006/math">
+                    <m:d>
+                      <m:dPr>
+                        <m:ctrlPr>
+                          <a:rPr lang="en-US" i="1">
+                            <a:latin typeface="Cambria Math" panose="02040503050406030204" pitchFamily="18" charset="0"/>
+                          </a:rPr>
+                        </m:ctrlPr>
+                      </m:dPr>
+                      <m:e>
+                        <m:r>
+                          <a:rPr lang="en-US" i="1">
+                            <a:latin typeface="Cambria Math" panose="02040503050406030204" pitchFamily="18" charset="0"/>
+                          </a:rPr>
+                          <m:t>𝐼𝑉</m:t>
+                        </m:r>
+                      </m:e>
+                    </m:d>
+                    <m:r>
+                      <a:rPr lang="en-US" b="0" i="1" smtClean="0">
+                        <a:latin typeface="Cambria Math" panose="02040503050406030204" pitchFamily="18" charset="0"/>
+                      </a:rPr>
+                      <m:t> </m:t>
+                    </m:r>
+                  </m:oMath>
+                </a14:m>
+                <a:r>
+                  <a:rPr lang="en-US" dirty="0"/>
+                  <a:t>Ang., </a:t>
+                </a:r>
+                <a14:m>
+                  <m:oMath xmlns:m="http://schemas.openxmlformats.org/officeDocument/2006/math">
+                    <m:r>
+                      <a:rPr lang="en-US" i="1">
+                        <a:latin typeface="Cambria Math" panose="02040503050406030204" pitchFamily="18" charset="0"/>
+                      </a:rPr>
+                      <m:t>1+…+</m:t>
+                    </m:r>
+                    <m:r>
+                      <a:rPr lang="en-US" i="1">
+                        <a:latin typeface="Cambria Math" panose="02040503050406030204" pitchFamily="18" charset="0"/>
+                      </a:rPr>
+                      <m:t>𝑛</m:t>
+                    </m:r>
+                    <m:r>
+                      <a:rPr lang="en-US" i="1">
+                        <a:latin typeface="Cambria Math" panose="02040503050406030204" pitchFamily="18" charset="0"/>
+                      </a:rPr>
+                      <m:t>=</m:t>
+                    </m:r>
+                    <m:f>
+                      <m:fPr>
+                        <m:ctrlPr>
+                          <a:rPr lang="en-US" i="1">
+                            <a:latin typeface="Cambria Math" panose="02040503050406030204" pitchFamily="18" charset="0"/>
+                          </a:rPr>
+                        </m:ctrlPr>
+                      </m:fPr>
+                      <m:num>
+                        <m:r>
+                          <a:rPr lang="en-US" i="1">
+                            <a:latin typeface="Cambria Math" panose="02040503050406030204" pitchFamily="18" charset="0"/>
+                          </a:rPr>
+                          <m:t>𝑛</m:t>
+                        </m:r>
+                        <m:d>
+                          <m:dPr>
+                            <m:ctrlPr>
+                              <a:rPr lang="en-US" i="1">
+                                <a:latin typeface="Cambria Math" panose="02040503050406030204" pitchFamily="18" charset="0"/>
+                              </a:rPr>
+                            </m:ctrlPr>
+                          </m:dPr>
+                          <m:e>
+                            <m:r>
+                              <a:rPr lang="en-US" i="1">
+                                <a:latin typeface="Cambria Math" panose="02040503050406030204" pitchFamily="18" charset="0"/>
+                              </a:rPr>
+                              <m:t>𝑛</m:t>
+                            </m:r>
+                            <m:r>
+                              <a:rPr lang="en-US" i="1">
+                                <a:latin typeface="Cambria Math" panose="02040503050406030204" pitchFamily="18" charset="0"/>
+                              </a:rPr>
+                              <m:t>+1</m:t>
+                            </m:r>
+                          </m:e>
+                        </m:d>
+                      </m:num>
+                      <m:den>
+                        <m:r>
+                          <a:rPr lang="en-US" i="1">
+                            <a:latin typeface="Cambria Math" panose="02040503050406030204" pitchFamily="18" charset="0"/>
+                          </a:rPr>
+                          <m:t>2</m:t>
+                        </m:r>
+                      </m:den>
+                    </m:f>
+                  </m:oMath>
+                </a14:m>
+                <a:r>
+                  <a:rPr lang="en-US" dirty="0"/>
+                  <a:t> </a:t>
+                </a:r>
+                <a:r>
+                  <a:rPr lang="en-US" dirty="0" err="1"/>
+                  <a:t>für</a:t>
+                </a:r>
+                <a:r>
+                  <a:rPr lang="en-US" dirty="0"/>
+                  <a:t> </a:t>
+                </a:r>
+                <a:r>
+                  <a:rPr lang="en-US" dirty="0" err="1"/>
+                  <a:t>ein</a:t>
+                </a:r>
+                <a:r>
+                  <a:rPr lang="en-US" dirty="0"/>
+                  <a:t> </a:t>
+                </a:r>
+                <a14:m>
+                  <m:oMath xmlns:m="http://schemas.openxmlformats.org/officeDocument/2006/math">
+                    <m:r>
+                      <a:rPr lang="en-US" b="0" i="1" smtClean="0">
+                        <a:latin typeface="Cambria Math" panose="02040503050406030204" pitchFamily="18" charset="0"/>
+                      </a:rPr>
+                      <m:t>𝑛</m:t>
+                    </m:r>
+                    <m:r>
+                      <a:rPr lang="en-US" b="0" i="1" smtClean="0">
+                        <a:latin typeface="Cambria Math" panose="02040503050406030204" pitchFamily="18" charset="0"/>
+                      </a:rPr>
+                      <m:t>∈</m:t>
+                    </m:r>
+                    <m:r>
+                      <a:rPr lang="en-US" b="0" i="1" smtClean="0">
+                        <a:latin typeface="Cambria Math" panose="02040503050406030204" pitchFamily="18" charset="0"/>
+                        <a:ea typeface="Cambria Math" panose="02040503050406030204" pitchFamily="18" charset="0"/>
+                      </a:rPr>
+                      <m:t>ℕ</m:t>
+                    </m:r>
+                  </m:oMath>
+                </a14:m>
+                <a:br>
+                  <a:rPr lang="en-US" dirty="0"/>
+                </a:br>
+                <a14:m>
+                  <m:oMath xmlns:m="http://schemas.openxmlformats.org/officeDocument/2006/math">
+                    <m:d>
+                      <m:dPr>
+                        <m:ctrlPr>
+                          <a:rPr lang="en-US" b="0" i="1" smtClean="0">
+                            <a:latin typeface="Cambria Math" panose="02040503050406030204" pitchFamily="18" charset="0"/>
+                          </a:rPr>
+                        </m:ctrlPr>
+                      </m:dPr>
+                      <m:e>
+                        <m:r>
+                          <a:rPr lang="en-US" b="0" i="1" smtClean="0">
+                            <a:latin typeface="Cambria Math" panose="02040503050406030204" pitchFamily="18" charset="0"/>
+                          </a:rPr>
+                          <m:t>𝐼𝑆</m:t>
+                        </m:r>
+                      </m:e>
+                    </m:d>
+                    <m:r>
+                      <a:rPr lang="en-US" b="0" i="1" smtClean="0">
+                        <a:latin typeface="Cambria Math" panose="02040503050406030204" pitchFamily="18" charset="0"/>
+                      </a:rPr>
+                      <m:t> 1+⋯+</m:t>
+                    </m:r>
+                    <m:d>
+                      <m:dPr>
+                        <m:ctrlPr>
+                          <a:rPr lang="en-US" b="0" i="1" smtClean="0">
+                            <a:latin typeface="Cambria Math" panose="02040503050406030204" pitchFamily="18" charset="0"/>
+                          </a:rPr>
+                        </m:ctrlPr>
+                      </m:dPr>
+                      <m:e>
+                        <m:r>
+                          <a:rPr lang="en-US" b="0" i="1" smtClean="0">
+                            <a:latin typeface="Cambria Math" panose="02040503050406030204" pitchFamily="18" charset="0"/>
+                          </a:rPr>
+                          <m:t>𝑛</m:t>
+                        </m:r>
+                        <m:r>
+                          <a:rPr lang="en-US" b="0" i="1" smtClean="0">
+                            <a:latin typeface="Cambria Math" panose="02040503050406030204" pitchFamily="18" charset="0"/>
+                          </a:rPr>
+                          <m:t>+1</m:t>
+                        </m:r>
+                      </m:e>
+                    </m:d>
+                    <m:limLow>
+                      <m:limLowPr>
+                        <m:ctrlPr>
+                          <a:rPr lang="en-US" b="0" i="1" smtClean="0">
+                            <a:latin typeface="Cambria Math" panose="02040503050406030204" pitchFamily="18" charset="0"/>
+                          </a:rPr>
+                        </m:ctrlPr>
+                      </m:limLowPr>
+                      <m:e>
+                        <m:groupChr>
+                          <m:groupChrPr>
+                            <m:chr m:val="⏟"/>
+                            <m:ctrlPr>
+                              <a:rPr lang="en-US" b="0" i="1" smtClean="0">
+                                <a:latin typeface="Cambria Math" panose="02040503050406030204" pitchFamily="18" charset="0"/>
+                              </a:rPr>
+                            </m:ctrlPr>
+                          </m:groupChrPr>
+                          <m:e>
+                            <m:r>
+                              <a:rPr lang="en-US" b="0" i="1" smtClean="0">
+                                <a:latin typeface="Cambria Math" panose="02040503050406030204" pitchFamily="18" charset="0"/>
+                              </a:rPr>
+                              <m:t>=</m:t>
+                            </m:r>
+                          </m:e>
+                        </m:groupChr>
+                      </m:e>
+                      <m:lim>
+                        <m:d>
+                          <m:dPr>
+                            <m:ctrlPr>
+                              <a:rPr lang="en-US" b="0" i="1" smtClean="0">
+                                <a:latin typeface="Cambria Math" panose="02040503050406030204" pitchFamily="18" charset="0"/>
+                              </a:rPr>
+                            </m:ctrlPr>
+                          </m:dPr>
+                          <m:e>
+                            <m:r>
+                              <a:rPr lang="en-US" b="0" i="1" smtClean="0">
+                                <a:latin typeface="Cambria Math" panose="02040503050406030204" pitchFamily="18" charset="0"/>
+                              </a:rPr>
+                              <m:t>𝐼𝑉</m:t>
+                            </m:r>
+                          </m:e>
+                        </m:d>
+                      </m:lim>
+                    </m:limLow>
+                    <m:f>
+                      <m:fPr>
+                        <m:ctrlPr>
+                          <a:rPr lang="en-US" b="0" i="1" smtClean="0">
+                            <a:latin typeface="Cambria Math" panose="02040503050406030204" pitchFamily="18" charset="0"/>
+                          </a:rPr>
+                        </m:ctrlPr>
+                      </m:fPr>
+                      <m:num>
+                        <m:r>
+                          <a:rPr lang="en-US" b="0" i="1" smtClean="0">
+                            <a:latin typeface="Cambria Math" panose="02040503050406030204" pitchFamily="18" charset="0"/>
+                          </a:rPr>
+                          <m:t>𝑛</m:t>
+                        </m:r>
+                        <m:d>
+                          <m:dPr>
+                            <m:ctrlPr>
+                              <a:rPr lang="en-US" b="0" i="1" smtClean="0">
+                                <a:latin typeface="Cambria Math" panose="02040503050406030204" pitchFamily="18" charset="0"/>
+                              </a:rPr>
+                            </m:ctrlPr>
+                          </m:dPr>
+                          <m:e>
+                            <m:r>
+                              <a:rPr lang="en-US" b="0" i="1" smtClean="0">
+                                <a:latin typeface="Cambria Math" panose="02040503050406030204" pitchFamily="18" charset="0"/>
+                              </a:rPr>
+                              <m:t>𝑛</m:t>
+                            </m:r>
+                            <m:r>
+                              <a:rPr lang="en-US" b="0" i="1" smtClean="0">
+                                <a:latin typeface="Cambria Math" panose="02040503050406030204" pitchFamily="18" charset="0"/>
+                              </a:rPr>
+                              <m:t>+1</m:t>
+                            </m:r>
+                          </m:e>
+                        </m:d>
+                      </m:num>
+                      <m:den>
+                        <m:r>
+                          <a:rPr lang="en-US" b="0" i="1" smtClean="0">
+                            <a:latin typeface="Cambria Math" panose="02040503050406030204" pitchFamily="18" charset="0"/>
+                          </a:rPr>
+                          <m:t>2</m:t>
+                        </m:r>
+                      </m:den>
+                    </m:f>
+                    <m:r>
+                      <a:rPr lang="en-US" b="0" i="1" smtClean="0">
+                        <a:latin typeface="Cambria Math" panose="02040503050406030204" pitchFamily="18" charset="0"/>
+                      </a:rPr>
+                      <m:t>+</m:t>
+                    </m:r>
+                    <m:d>
+                      <m:dPr>
+                        <m:ctrlPr>
+                          <a:rPr lang="en-US" b="0" i="1" smtClean="0">
+                            <a:latin typeface="Cambria Math" panose="02040503050406030204" pitchFamily="18" charset="0"/>
+                          </a:rPr>
+                        </m:ctrlPr>
+                      </m:dPr>
+                      <m:e>
+                        <m:r>
+                          <a:rPr lang="en-US" b="0" i="1" smtClean="0">
+                            <a:latin typeface="Cambria Math" panose="02040503050406030204" pitchFamily="18" charset="0"/>
+                          </a:rPr>
+                          <m:t>𝑛</m:t>
+                        </m:r>
+                        <m:r>
+                          <a:rPr lang="en-US" b="0" i="1" smtClean="0">
+                            <a:latin typeface="Cambria Math" panose="02040503050406030204" pitchFamily="18" charset="0"/>
+                          </a:rPr>
+                          <m:t>+1</m:t>
+                        </m:r>
+                      </m:e>
+                    </m:d>
+                  </m:oMath>
+                </a14:m>
+                <a:r>
+                  <a:rPr lang="en-US" b="0" dirty="0"/>
+                  <a:t> </a:t>
+                </a:r>
+                <a:br>
+                  <a:rPr lang="en-US" b="0" dirty="0"/>
+                </a:br>
+                <a14:m>
+                  <m:oMathPara xmlns:m="http://schemas.openxmlformats.org/officeDocument/2006/math">
+                    <m:oMathParaPr>
+                      <m:jc m:val="centerGroup"/>
+                    </m:oMathParaPr>
+                    <m:oMath xmlns:m="http://schemas.openxmlformats.org/officeDocument/2006/math">
+                      <m:r>
+                        <a:rPr lang="en-US" b="0" i="1" smtClean="0">
+                          <a:latin typeface="Cambria Math" panose="02040503050406030204" pitchFamily="18" charset="0"/>
+                        </a:rPr>
+                        <m:t>=</m:t>
+                      </m:r>
+                      <m:f>
+                        <m:fPr>
+                          <m:ctrlPr>
+                            <a:rPr lang="en-US" b="0" i="1" smtClean="0">
+                              <a:latin typeface="Cambria Math" panose="02040503050406030204" pitchFamily="18" charset="0"/>
+                            </a:rPr>
+                          </m:ctrlPr>
+                        </m:fPr>
+                        <m:num>
+                          <m:r>
+                            <a:rPr lang="en-US" b="0" i="1" smtClean="0">
+                              <a:latin typeface="Cambria Math" panose="02040503050406030204" pitchFamily="18" charset="0"/>
+                            </a:rPr>
+                            <m:t>𝑛</m:t>
+                          </m:r>
+                          <m:r>
+                            <a:rPr lang="en-US" b="0" i="1" smtClean="0">
+                              <a:latin typeface="Cambria Math" panose="02040503050406030204" pitchFamily="18" charset="0"/>
+                            </a:rPr>
+                            <m:t>(</m:t>
+                          </m:r>
+                          <m:r>
+                            <a:rPr lang="en-US" b="0" i="1" smtClean="0">
+                              <a:latin typeface="Cambria Math" panose="02040503050406030204" pitchFamily="18" charset="0"/>
+                            </a:rPr>
+                            <m:t>𝑛</m:t>
+                          </m:r>
+                          <m:r>
+                            <a:rPr lang="en-US" b="0" i="1" smtClean="0">
+                              <a:latin typeface="Cambria Math" panose="02040503050406030204" pitchFamily="18" charset="0"/>
+                            </a:rPr>
+                            <m:t>+1)</m:t>
+                          </m:r>
+                        </m:num>
+                        <m:den>
+                          <m:r>
+                            <a:rPr lang="en-US" b="0" i="1" smtClean="0">
+                              <a:latin typeface="Cambria Math" panose="02040503050406030204" pitchFamily="18" charset="0"/>
+                            </a:rPr>
+                            <m:t>2</m:t>
+                          </m:r>
+                        </m:den>
+                      </m:f>
+                      <m:r>
+                        <a:rPr lang="en-US" b="0" i="1" smtClean="0">
+                          <a:latin typeface="Cambria Math" panose="02040503050406030204" pitchFamily="18" charset="0"/>
+                        </a:rPr>
+                        <m:t>+</m:t>
+                      </m:r>
+                      <m:f>
+                        <m:fPr>
+                          <m:ctrlPr>
+                            <a:rPr lang="en-US" b="0" i="1" smtClean="0">
+                              <a:latin typeface="Cambria Math" panose="02040503050406030204" pitchFamily="18" charset="0"/>
+                            </a:rPr>
+                          </m:ctrlPr>
+                        </m:fPr>
+                        <m:num>
+                          <m:r>
+                            <a:rPr lang="en-US" b="0" i="1" smtClean="0">
+                              <a:latin typeface="Cambria Math" panose="02040503050406030204" pitchFamily="18" charset="0"/>
+                            </a:rPr>
+                            <m:t>2</m:t>
+                          </m:r>
+                          <m:d>
+                            <m:dPr>
+                              <m:ctrlPr>
+                                <a:rPr lang="en-US" b="0" i="1" smtClean="0">
+                                  <a:latin typeface="Cambria Math" panose="02040503050406030204" pitchFamily="18" charset="0"/>
+                                </a:rPr>
+                              </m:ctrlPr>
+                            </m:dPr>
+                            <m:e>
+                              <m:r>
+                                <a:rPr lang="en-US" b="0" i="1" smtClean="0">
+                                  <a:latin typeface="Cambria Math" panose="02040503050406030204" pitchFamily="18" charset="0"/>
+                                </a:rPr>
+                                <m:t>𝑛</m:t>
+                              </m:r>
+                              <m:r>
+                                <a:rPr lang="en-US" b="0" i="1" smtClean="0">
+                                  <a:latin typeface="Cambria Math" panose="02040503050406030204" pitchFamily="18" charset="0"/>
+                                </a:rPr>
+                                <m:t>+1</m:t>
+                              </m:r>
+                            </m:e>
+                          </m:d>
+                        </m:num>
+                        <m:den>
+                          <m:r>
+                            <a:rPr lang="en-US" b="0" i="1" smtClean="0">
+                              <a:latin typeface="Cambria Math" panose="02040503050406030204" pitchFamily="18" charset="0"/>
+                            </a:rPr>
+                            <m:t>2</m:t>
+                          </m:r>
+                        </m:den>
+                      </m:f>
+                      <m:r>
+                        <a:rPr lang="en-US" b="0" i="1" smtClean="0">
+                          <a:latin typeface="Cambria Math" panose="02040503050406030204" pitchFamily="18" charset="0"/>
+                        </a:rPr>
+                        <m:t>=</m:t>
+                      </m:r>
+                      <m:f>
+                        <m:fPr>
+                          <m:ctrlPr>
+                            <a:rPr lang="en-US" b="0" i="1" smtClean="0">
+                              <a:latin typeface="Cambria Math" panose="02040503050406030204" pitchFamily="18" charset="0"/>
+                            </a:rPr>
+                          </m:ctrlPr>
+                        </m:fPr>
+                        <m:num>
+                          <m:r>
+                            <a:rPr lang="en-US" b="0" i="1" smtClean="0">
+                              <a:latin typeface="Cambria Math" panose="02040503050406030204" pitchFamily="18" charset="0"/>
+                            </a:rPr>
+                            <m:t>(</m:t>
+                          </m:r>
+                          <m:r>
+                            <a:rPr lang="en-US" b="0" i="1" smtClean="0">
+                              <a:latin typeface="Cambria Math" panose="02040503050406030204" pitchFamily="18" charset="0"/>
+                            </a:rPr>
+                            <m:t>𝑛</m:t>
+                          </m:r>
+                          <m:r>
+                            <a:rPr lang="en-US" b="0" i="1" smtClean="0">
+                              <a:latin typeface="Cambria Math" panose="02040503050406030204" pitchFamily="18" charset="0"/>
+                            </a:rPr>
+                            <m:t>+1)(</m:t>
+                          </m:r>
+                          <m:r>
+                            <a:rPr lang="en-US" b="0" i="1" smtClean="0">
+                              <a:latin typeface="Cambria Math" panose="02040503050406030204" pitchFamily="18" charset="0"/>
+                            </a:rPr>
+                            <m:t>𝑛</m:t>
+                          </m:r>
+                          <m:r>
+                            <a:rPr lang="en-US" b="0" i="1" smtClean="0">
+                              <a:latin typeface="Cambria Math" panose="02040503050406030204" pitchFamily="18" charset="0"/>
+                            </a:rPr>
+                            <m:t>+2)</m:t>
+                          </m:r>
+                        </m:num>
+                        <m:den>
+                          <m:r>
+                            <a:rPr lang="en-US" b="0" i="1" smtClean="0">
+                              <a:latin typeface="Cambria Math" panose="02040503050406030204" pitchFamily="18" charset="0"/>
+                            </a:rPr>
+                            <m:t>2</m:t>
+                          </m:r>
+                        </m:den>
+                      </m:f>
+                      <m:r>
+                        <a:rPr lang="en-US" b="0" i="1" smtClean="0">
+                          <a:latin typeface="Cambria Math" panose="02040503050406030204" pitchFamily="18" charset="0"/>
+                        </a:rPr>
+                        <m:t> </m:t>
+                      </m:r>
+                      <m:r>
+                        <a:rPr lang="en-US" b="0" i="1" smtClean="0">
+                          <a:latin typeface="Cambria Math" panose="02040503050406030204" pitchFamily="18" charset="0"/>
+                          <a:ea typeface="Cambria Math" panose="02040503050406030204" pitchFamily="18" charset="0"/>
+                        </a:rPr>
+                        <m:t>∎</m:t>
+                      </m:r>
+                    </m:oMath>
+                  </m:oMathPara>
+                </a14:m>
+                <a:endParaRPr lang="en-US" b="0" dirty="0"/>
+              </a:p>
+            </p:txBody>
+          </p:sp>
+        </mc:Choice>
+        <mc:Fallback>
+          <p:sp>
+            <p:nvSpPr>
+              <p:cNvPr id="24" name="TextBox 23">
+                <a:extLst>
+                  <a:ext uri="{FF2B5EF4-FFF2-40B4-BE49-F238E27FC236}">
+                    <a16:creationId xmlns:a16="http://schemas.microsoft.com/office/drawing/2014/main" id="{129BD675-4A43-4B2A-932A-AF8260F34C00}"/>
+                  </a:ext>
+                </a:extLst>
+              </p:cNvPr>
+              <p:cNvSpPr txBox="1">
+                <a:spLocks noRot="1" noChangeAspect="1" noMove="1" noResize="1" noEditPoints="1" noAdjustHandles="1" noChangeArrowheads="1" noChangeShapeType="1" noTextEdit="1"/>
+              </p:cNvSpPr>
+              <p:nvPr/>
+            </p:nvSpPr>
+            <p:spPr>
+              <a:xfrm rot="21215520">
+                <a:off x="5760721" y="4397947"/>
+                <a:ext cx="4973662" cy="2022220"/>
+              </a:xfrm>
+              <a:prstGeom prst="rect">
+                <a:avLst/>
+              </a:prstGeom>
+              <a:blipFill>
+                <a:blip r:embed="rId11"/>
+                <a:stretch>
+                  <a:fillRect/>
+                </a:stretch>
+              </a:blipFill>
+            </p:spPr>
+            <p:txBody>
+              <a:bodyPr/>
+              <a:lstStyle/>
+              <a:p>
+                <a:r>
+                  <a:rPr lang="de-DE">
+                    <a:noFill/>
+                  </a:rPr>
+                  <a:t> </a:t>
+                </a:r>
+              </a:p>
+            </p:txBody>
+          </p:sp>
+        </mc:Fallback>
+      </mc:AlternateContent>
+      <p:sp>
+        <p:nvSpPr>
+          <p:cNvPr id="25" name="Right Triangle 24">
+            <a:extLst>
+              <a:ext uri="{FF2B5EF4-FFF2-40B4-BE49-F238E27FC236}">
+                <a16:creationId xmlns:a16="http://schemas.microsoft.com/office/drawing/2014/main" id="{44D92F93-DD74-486A-A5CB-CB34BC38A269}"/>
+              </a:ext>
+            </a:extLst>
+          </p:cNvPr>
+          <p:cNvSpPr/>
+          <p:nvPr/>
+        </p:nvSpPr>
+        <p:spPr>
+          <a:xfrm>
+            <a:off x="786468" y="3293515"/>
+            <a:ext cx="1503680" cy="914400"/>
+          </a:xfrm>
+          <a:prstGeom prst="rtTriangle">
+            <a:avLst/>
+          </a:prstGeom>
+          <a:noFill/>
+          <a:ln w="28575"/>
+        </p:spPr>
+        <p:style>
+          <a:lnRef idx="2">
+            <a:schemeClr val="accent1">
+              <a:shade val="50000"/>
+            </a:schemeClr>
+          </a:lnRef>
+          <a:fillRef idx="1">
+            <a:schemeClr val="accent1"/>
+          </a:fillRef>
+          <a:effectRef idx="0">
+            <a:schemeClr val="accent1"/>
+          </a:effectRef>
+          <a:fontRef idx="minor">
+            <a:schemeClr val="lt1"/>
+          </a:fontRef>
+        </p:style>
+        <p:txBody>
+          <a:bodyPr rtlCol="0" anchor="ctr"/>
+          <a:lstStyle/>
+          <a:p>
+            <a:pPr algn="ctr"/>
+            <a:endParaRPr lang="de-DE" dirty="0"/>
+          </a:p>
+        </p:txBody>
+      </p:sp>
+      <p:sp>
+        <p:nvSpPr>
+          <p:cNvPr id="26" name="TextBox 25">
+            <a:extLst>
+              <a:ext uri="{FF2B5EF4-FFF2-40B4-BE49-F238E27FC236}">
+                <a16:creationId xmlns:a16="http://schemas.microsoft.com/office/drawing/2014/main" id="{1ECB5171-DA7D-4D84-B6F1-F75919A982B2}"/>
+              </a:ext>
+            </a:extLst>
+          </p:cNvPr>
+          <p:cNvSpPr txBox="1"/>
+          <p:nvPr/>
+        </p:nvSpPr>
+        <p:spPr>
+          <a:xfrm>
+            <a:off x="1223231" y="4206384"/>
+            <a:ext cx="630154" cy="369332"/>
+          </a:xfrm>
+          <a:prstGeom prst="rect">
+            <a:avLst/>
+          </a:prstGeom>
+          <a:noFill/>
+        </p:spPr>
+        <p:txBody>
+          <a:bodyPr wrap="square" rtlCol="0">
+            <a:spAutoFit/>
+          </a:bodyPr>
+          <a:lstStyle/>
+          <a:p>
+            <a:pPr algn="ctr"/>
+            <a:r>
+              <a:rPr lang="de-DE" dirty="0"/>
+              <a:t>a</a:t>
+            </a:r>
+          </a:p>
+        </p:txBody>
+      </p:sp>
+      <p:sp>
+        <p:nvSpPr>
+          <p:cNvPr id="27" name="TextBox 26">
+            <a:extLst>
+              <a:ext uri="{FF2B5EF4-FFF2-40B4-BE49-F238E27FC236}">
+                <a16:creationId xmlns:a16="http://schemas.microsoft.com/office/drawing/2014/main" id="{BBB57B72-8273-4383-8F98-7B54FAB40F80}"/>
+              </a:ext>
+            </a:extLst>
+          </p:cNvPr>
+          <p:cNvSpPr txBox="1"/>
+          <p:nvPr/>
+        </p:nvSpPr>
+        <p:spPr>
+          <a:xfrm>
+            <a:off x="314644" y="3621001"/>
+            <a:ext cx="461665" cy="369332"/>
+          </a:xfrm>
+          <a:prstGeom prst="rect">
+            <a:avLst/>
+          </a:prstGeom>
+          <a:noFill/>
+        </p:spPr>
+        <p:txBody>
+          <a:bodyPr vert="vert270" wrap="square" rtlCol="0">
+            <a:spAutoFit/>
+          </a:bodyPr>
+          <a:lstStyle/>
+          <a:p>
+            <a:pPr algn="ctr"/>
+            <a:r>
+              <a:rPr lang="de-DE" dirty="0"/>
+              <a:t>b</a:t>
+            </a:r>
+          </a:p>
+        </p:txBody>
+      </p:sp>
+      <mc:AlternateContent xmlns:mc="http://schemas.openxmlformats.org/markup-compatibility/2006">
+        <mc:Choice xmlns:a14="http://schemas.microsoft.com/office/drawing/2010/main" Requires="a14">
+          <p:sp>
+            <p:nvSpPr>
+              <p:cNvPr id="28" name="TextBox 27">
+                <a:extLst>
+                  <a:ext uri="{FF2B5EF4-FFF2-40B4-BE49-F238E27FC236}">
+                    <a16:creationId xmlns:a16="http://schemas.microsoft.com/office/drawing/2014/main" id="{136E209F-B4C8-4E9E-9AF1-4EDB2AC51B3F}"/>
+                  </a:ext>
+                </a:extLst>
+              </p:cNvPr>
+              <p:cNvSpPr txBox="1"/>
+              <p:nvPr/>
+            </p:nvSpPr>
+            <p:spPr>
+              <a:xfrm rot="1860000">
+                <a:off x="1099211" y="3372482"/>
+                <a:ext cx="1167243" cy="435440"/>
+              </a:xfrm>
+              <a:prstGeom prst="rect">
+                <a:avLst/>
+              </a:prstGeom>
+              <a:noFill/>
+            </p:spPr>
+            <p:txBody>
+              <a:bodyPr wrap="none" rtlCol="0">
+                <a:spAutoFit/>
+              </a:bodyPr>
+              <a:lstStyle/>
+              <a:p>
+                <a14:m>
+                  <m:oMathPara xmlns:m="http://schemas.openxmlformats.org/officeDocument/2006/math">
+                    <m:oMathParaPr>
+                      <m:jc m:val="centerGroup"/>
+                    </m:oMathParaPr>
+                    <m:oMath xmlns:m="http://schemas.openxmlformats.org/officeDocument/2006/math">
+                      <m:rad>
+                        <m:radPr>
+                          <m:degHide m:val="on"/>
+                          <m:ctrlPr>
+                            <a:rPr lang="de-DE" i="1" smtClean="0">
+                              <a:latin typeface="Cambria Math" panose="02040503050406030204" pitchFamily="18" charset="0"/>
+                            </a:rPr>
+                          </m:ctrlPr>
+                        </m:radPr>
+                        <m:deg/>
+                        <m:e>
+                          <m:sSup>
+                            <m:sSupPr>
+                              <m:ctrlPr>
+                                <a:rPr lang="de-DE" i="1" smtClean="0">
+                                  <a:latin typeface="Cambria Math" panose="02040503050406030204" pitchFamily="18" charset="0"/>
+                                </a:rPr>
+                              </m:ctrlPr>
+                            </m:sSupPr>
+                            <m:e>
+                              <m:r>
+                                <a:rPr lang="en-US" b="0" i="1" smtClean="0">
+                                  <a:latin typeface="Cambria Math" panose="02040503050406030204" pitchFamily="18" charset="0"/>
+                                </a:rPr>
+                                <m:t>𝑎</m:t>
+                              </m:r>
+                            </m:e>
+                            <m:sup>
+                              <m:r>
+                                <a:rPr lang="en-US" b="0" i="1" smtClean="0">
+                                  <a:latin typeface="Cambria Math" panose="02040503050406030204" pitchFamily="18" charset="0"/>
+                                </a:rPr>
+                                <m:t>2</m:t>
+                              </m:r>
+                            </m:sup>
+                          </m:sSup>
+                          <m:r>
+                            <a:rPr lang="en-US" b="0" i="1" smtClean="0">
+                              <a:latin typeface="Cambria Math" panose="02040503050406030204" pitchFamily="18" charset="0"/>
+                            </a:rPr>
+                            <m:t>+</m:t>
+                          </m:r>
+                          <m:sSup>
+                            <m:sSupPr>
+                              <m:ctrlPr>
+                                <a:rPr lang="en-US" b="0" i="1" smtClean="0">
+                                  <a:latin typeface="Cambria Math" panose="02040503050406030204" pitchFamily="18" charset="0"/>
+                                </a:rPr>
+                              </m:ctrlPr>
+                            </m:sSupPr>
+                            <m:e>
+                              <m:r>
+                                <a:rPr lang="en-US" b="0" i="1" smtClean="0">
+                                  <a:latin typeface="Cambria Math" panose="02040503050406030204" pitchFamily="18" charset="0"/>
+                                </a:rPr>
+                                <m:t>𝑏</m:t>
+                              </m:r>
+                            </m:e>
+                            <m:sup>
+                              <m:r>
+                                <a:rPr lang="en-US" b="0" i="1" smtClean="0">
+                                  <a:latin typeface="Cambria Math" panose="02040503050406030204" pitchFamily="18" charset="0"/>
+                                </a:rPr>
+                                <m:t>2</m:t>
+                              </m:r>
+                            </m:sup>
+                          </m:sSup>
+                        </m:e>
+                      </m:rad>
+                    </m:oMath>
+                  </m:oMathPara>
+                </a14:m>
+                <a:endParaRPr lang="de-DE" dirty="0"/>
+              </a:p>
+            </p:txBody>
+          </p:sp>
+        </mc:Choice>
+        <mc:Fallback>
+          <p:sp>
+            <p:nvSpPr>
+              <p:cNvPr id="28" name="TextBox 27">
+                <a:extLst>
+                  <a:ext uri="{FF2B5EF4-FFF2-40B4-BE49-F238E27FC236}">
+                    <a16:creationId xmlns:a16="http://schemas.microsoft.com/office/drawing/2014/main" id="{136E209F-B4C8-4E9E-9AF1-4EDB2AC51B3F}"/>
+                  </a:ext>
+                </a:extLst>
+              </p:cNvPr>
+              <p:cNvSpPr txBox="1">
+                <a:spLocks noRot="1" noChangeAspect="1" noMove="1" noResize="1" noEditPoints="1" noAdjustHandles="1" noChangeArrowheads="1" noChangeShapeType="1" noTextEdit="1"/>
+              </p:cNvSpPr>
+              <p:nvPr/>
+            </p:nvSpPr>
+            <p:spPr>
+              <a:xfrm rot="1860000">
+                <a:off x="1099211" y="3372482"/>
+                <a:ext cx="1167243" cy="435440"/>
+              </a:xfrm>
+              <a:prstGeom prst="rect">
+                <a:avLst/>
+              </a:prstGeom>
+              <a:blipFill>
+                <a:blip r:embed="rId12"/>
+                <a:stretch>
+                  <a:fillRect/>
+                </a:stretch>
+              </a:blipFill>
+            </p:spPr>
+            <p:txBody>
+              <a:bodyPr/>
+              <a:lstStyle/>
+              <a:p>
+                <a:r>
+                  <a:rPr lang="de-DE">
+                    <a:noFill/>
+                  </a:rPr>
+                  <a:t> </a:t>
+                </a:r>
+              </a:p>
+            </p:txBody>
+          </p:sp>
+        </mc:Fallback>
+      </mc:AlternateContent>
     </p:spTree>
     <p:extLst>
       <p:ext uri="{BB962C8B-B14F-4D97-AF65-F5344CB8AC3E}">
@@ -6236,93 +8872,6 @@
 </file>
 
 <file path=ppt/slides/slide12.xml><?xml version="1.0" encoding="utf-8"?>
-<p:sld xmlns:a="http://schemas.openxmlformats.org/drawingml/2006/main" xmlns:r="http://schemas.openxmlformats.org/officeDocument/2006/relationships" xmlns:p="http://schemas.openxmlformats.org/presentationml/2006/main">
-  <p:cSld>
-    <p:spTree>
-      <p:nvGrpSpPr>
-        <p:cNvPr id="1" name=""/>
-        <p:cNvGrpSpPr/>
-        <p:nvPr/>
-      </p:nvGrpSpPr>
-      <p:grpSpPr>
-        <a:xfrm>
-          <a:off x="0" y="0"/>
-          <a:ext cx="0" cy="0"/>
-          <a:chOff x="0" y="0"/>
-          <a:chExt cx="0" cy="0"/>
-        </a:xfrm>
-      </p:grpSpPr>
-      <p:sp>
-        <p:nvSpPr>
-          <p:cNvPr id="2" name="Title 1">
-            <a:extLst>
-              <a:ext uri="{FF2B5EF4-FFF2-40B4-BE49-F238E27FC236}">
-                <a16:creationId xmlns:a16="http://schemas.microsoft.com/office/drawing/2014/main" id="{5B4199F9-3DD9-4E02-AEC5-0533753A5FED}"/>
-              </a:ext>
-            </a:extLst>
-          </p:cNvPr>
-          <p:cNvSpPr>
-            <a:spLocks noGrp="1"/>
-          </p:cNvSpPr>
-          <p:nvPr>
-            <p:ph type="title"/>
-          </p:nvPr>
-        </p:nvSpPr>
-        <p:spPr/>
-        <p:txBody>
-          <a:bodyPr/>
-          <a:lstStyle/>
-          <a:p>
-            <a:r>
-              <a:rPr lang="de-DE" dirty="0">
-                <a:solidFill>
-                  <a:srgbClr val="F2F5FA"/>
-                </a:solidFill>
-              </a:rPr>
-              <a:t>Induktion</a:t>
-            </a:r>
-          </a:p>
-        </p:txBody>
-      </p:sp>
-      <p:sp>
-        <p:nvSpPr>
-          <p:cNvPr id="3" name="Content Placeholder 2">
-            <a:extLst>
-              <a:ext uri="{FF2B5EF4-FFF2-40B4-BE49-F238E27FC236}">
-                <a16:creationId xmlns:a16="http://schemas.microsoft.com/office/drawing/2014/main" id="{3CAEE54A-741D-4374-B20B-25EB1C6A68A5}"/>
-              </a:ext>
-            </a:extLst>
-          </p:cNvPr>
-          <p:cNvSpPr>
-            <a:spLocks noGrp="1"/>
-          </p:cNvSpPr>
-          <p:nvPr>
-            <p:ph idx="1"/>
-          </p:nvPr>
-        </p:nvSpPr>
-        <p:spPr/>
-        <p:txBody>
-          <a:bodyPr/>
-          <a:lstStyle/>
-          <a:p>
-            <a:endParaRPr lang="de-DE" dirty="0"/>
-          </a:p>
-        </p:txBody>
-      </p:sp>
-    </p:spTree>
-    <p:extLst>
-      <p:ext uri="{BB962C8B-B14F-4D97-AF65-F5344CB8AC3E}">
-        <p14:creationId xmlns:p14="http://schemas.microsoft.com/office/powerpoint/2010/main" val="1101259169"/>
-      </p:ext>
-    </p:extLst>
-  </p:cSld>
-  <p:clrMapOvr>
-    <a:masterClrMapping/>
-  </p:clrMapOvr>
-</p:sld>
-</file>
-
-<file path=ppt/slides/slide13.xml><?xml version="1.0" encoding="utf-8"?>
 <p:sld xmlns:a="http://schemas.openxmlformats.org/drawingml/2006/main" xmlns:r="http://schemas.openxmlformats.org/officeDocument/2006/relationships" xmlns:p="http://schemas.openxmlformats.org/presentationml/2006/main">
   <p:cSld>
     <p:spTree>
@@ -6386,8 +8935,8 @@
         </p:nvSpPr>
         <p:spPr>
           <a:xfrm>
-            <a:off x="7340600" y="146050"/>
-            <a:ext cx="4762500" cy="1093788"/>
+            <a:off x="7015480" y="146050"/>
+            <a:ext cx="5087620" cy="1093788"/>
           </a:xfrm>
         </p:spPr>
         <p:txBody>
@@ -6421,7 +8970,7 @@
 </p:sld>
 </file>
 
-<file path=ppt/slides/slide14.xml><?xml version="1.0" encoding="utf-8"?>
+<file path=ppt/slides/slide13.xml><?xml version="1.0" encoding="utf-8"?>
 <p:sld xmlns:a="http://schemas.openxmlformats.org/drawingml/2006/main" xmlns:r="http://schemas.openxmlformats.org/officeDocument/2006/relationships" xmlns:p="http://schemas.openxmlformats.org/presentationml/2006/main">
   <p:cSld>
     <p:spTree>
@@ -6518,7 +9067,7 @@
 </p:sld>
 </file>
 
-<file path=ppt/slides/slide15.xml><?xml version="1.0" encoding="utf-8"?>
+<file path=ppt/slides/slide14.xml><?xml version="1.0" encoding="utf-8"?>
 <p:sld xmlns:a="http://schemas.openxmlformats.org/drawingml/2006/main" xmlns:r="http://schemas.openxmlformats.org/officeDocument/2006/relationships" xmlns:p="http://schemas.openxmlformats.org/presentationml/2006/main">
   <p:cSld>
     <p:spTree>
@@ -6601,7 +9150,7 @@
 </p:sld>
 </file>
 
-<file path=ppt/slides/slide16.xml><?xml version="1.0" encoding="utf-8"?>
+<file path=ppt/slides/slide15.xml><?xml version="1.0" encoding="utf-8"?>
 <p:sld xmlns:a="http://schemas.openxmlformats.org/drawingml/2006/main" xmlns:r="http://schemas.openxmlformats.org/officeDocument/2006/relationships" xmlns:p="http://schemas.openxmlformats.org/presentationml/2006/main">
   <p:cSld>
     <p:spTree>
@@ -6684,7 +9233,7 @@
 </p:sld>
 </file>
 
-<file path=ppt/slides/slide17.xml><?xml version="1.0" encoding="utf-8"?>
+<file path=ppt/slides/slide16.xml><?xml version="1.0" encoding="utf-8"?>
 <p:sld xmlns:a="http://schemas.openxmlformats.org/drawingml/2006/main" xmlns:r="http://schemas.openxmlformats.org/officeDocument/2006/relationships" xmlns:p="http://schemas.openxmlformats.org/presentationml/2006/main">
   <p:cSld>
     <p:spTree>
@@ -6767,7 +9316,7 @@
 </p:sld>
 </file>
 
-<file path=ppt/slides/slide18.xml><?xml version="1.0" encoding="utf-8"?>
+<file path=ppt/slides/slide17.xml><?xml version="1.0" encoding="utf-8"?>
 <p:sld xmlns:a="http://schemas.openxmlformats.org/drawingml/2006/main" xmlns:r="http://schemas.openxmlformats.org/officeDocument/2006/relationships" xmlns:p="http://schemas.openxmlformats.org/presentationml/2006/main">
   <p:cSld>
     <p:spTree>
@@ -6869,6 +9418,93 @@
     <p:extLst>
       <p:ext uri="{BB962C8B-B14F-4D97-AF65-F5344CB8AC3E}">
         <p14:creationId xmlns:p14="http://schemas.microsoft.com/office/powerpoint/2010/main" val="276796584"/>
+      </p:ext>
+    </p:extLst>
+  </p:cSld>
+  <p:clrMapOvr>
+    <a:masterClrMapping/>
+  </p:clrMapOvr>
+</p:sld>
+</file>
+
+<file path=ppt/slides/slide18.xml><?xml version="1.0" encoding="utf-8"?>
+<p:sld xmlns:a="http://schemas.openxmlformats.org/drawingml/2006/main" xmlns:r="http://schemas.openxmlformats.org/officeDocument/2006/relationships" xmlns:p="http://schemas.openxmlformats.org/presentationml/2006/main">
+  <p:cSld>
+    <p:spTree>
+      <p:nvGrpSpPr>
+        <p:cNvPr id="1" name=""/>
+        <p:cNvGrpSpPr/>
+        <p:nvPr/>
+      </p:nvGrpSpPr>
+      <p:grpSpPr>
+        <a:xfrm>
+          <a:off x="0" y="0"/>
+          <a:ext cx="0" cy="0"/>
+          <a:chOff x="0" y="0"/>
+          <a:chExt cx="0" cy="0"/>
+        </a:xfrm>
+      </p:grpSpPr>
+      <p:sp>
+        <p:nvSpPr>
+          <p:cNvPr id="2" name="Title 1">
+            <a:extLst>
+              <a:ext uri="{FF2B5EF4-FFF2-40B4-BE49-F238E27FC236}">
+                <a16:creationId xmlns:a16="http://schemas.microsoft.com/office/drawing/2014/main" id="{5B4199F9-3DD9-4E02-AEC5-0533753A5FED}"/>
+              </a:ext>
+            </a:extLst>
+          </p:cNvPr>
+          <p:cNvSpPr>
+            <a:spLocks noGrp="1"/>
+          </p:cNvSpPr>
+          <p:nvPr>
+            <p:ph type="title"/>
+          </p:nvPr>
+        </p:nvSpPr>
+        <p:spPr/>
+        <p:txBody>
+          <a:bodyPr/>
+          <a:lstStyle/>
+          <a:p>
+            <a:r>
+              <a:rPr lang="de-DE" dirty="0">
+                <a:solidFill>
+                  <a:srgbClr val="F2F5FA"/>
+                </a:solidFill>
+              </a:rPr>
+              <a:t>Induktion</a:t>
+            </a:r>
+          </a:p>
+        </p:txBody>
+      </p:sp>
+      <p:sp>
+        <p:nvSpPr>
+          <p:cNvPr id="3" name="Content Placeholder 2">
+            <a:extLst>
+              <a:ext uri="{FF2B5EF4-FFF2-40B4-BE49-F238E27FC236}">
+                <a16:creationId xmlns:a16="http://schemas.microsoft.com/office/drawing/2014/main" id="{3CAEE54A-741D-4374-B20B-25EB1C6A68A5}"/>
+              </a:ext>
+            </a:extLst>
+          </p:cNvPr>
+          <p:cNvSpPr>
+            <a:spLocks noGrp="1"/>
+          </p:cNvSpPr>
+          <p:nvPr>
+            <p:ph idx="1"/>
+          </p:nvPr>
+        </p:nvSpPr>
+        <p:spPr/>
+        <p:txBody>
+          <a:bodyPr/>
+          <a:lstStyle/>
+          <a:p>
+            <a:endParaRPr lang="de-DE" dirty="0"/>
+          </a:p>
+        </p:txBody>
+      </p:sp>
+    </p:spTree>
+    <p:extLst>
+      <p:ext uri="{BB962C8B-B14F-4D97-AF65-F5344CB8AC3E}">
+        <p14:creationId xmlns:p14="http://schemas.microsoft.com/office/powerpoint/2010/main" val="1101259169"/>
       </p:ext>
     </p:extLst>
   </p:cSld>
@@ -6923,8 +9559,8 @@
           </a:p>
         </p:txBody>
       </p:sp>
-      <mc:AlternateContent xmlns:mc="http://schemas.openxmlformats.org/markup-compatibility/2006">
-        <mc:Choice xmlns:a14="http://schemas.microsoft.com/office/drawing/2010/main" Requires="a14">
+      <mc:AlternateContent xmlns:mc="http://schemas.openxmlformats.org/markup-compatibility/2006" xmlns:a14="http://schemas.microsoft.com/office/drawing/2010/main">
+        <mc:Choice Requires="a14">
           <p:sp>
             <p:nvSpPr>
               <p:cNvPr id="3" name="Content Placeholder 2">
@@ -7732,7 +10368,7 @@
             </p:txBody>
           </p:sp>
         </mc:Choice>
-        <mc:Fallback>
+        <mc:Fallback xmlns="">
           <p:sp>
             <p:nvSpPr>
               <p:cNvPr id="3" name="Content Placeholder 2">
@@ -7772,147 +10408,6 @@
           </p:sp>
         </mc:Fallback>
       </mc:AlternateContent>
-      <p:pic>
-        <p:nvPicPr>
-          <p:cNvPr id="1026" name="Picture 2">
-            <a:extLst>
-              <a:ext uri="{FF2B5EF4-FFF2-40B4-BE49-F238E27FC236}">
-                <a16:creationId xmlns:a16="http://schemas.microsoft.com/office/drawing/2014/main" id="{447FE358-0C76-406C-82B9-49B75A574192}"/>
-              </a:ext>
-            </a:extLst>
-          </p:cNvPr>
-          <p:cNvPicPr>
-            <a:picLocks noChangeAspect="1" noChangeArrowheads="1"/>
-          </p:cNvPicPr>
-          <p:nvPr/>
-        </p:nvPicPr>
-        <p:blipFill>
-          <a:blip r:embed="rId4">
-            <a:extLst>
-              <a:ext uri="{28A0092B-C50C-407E-A947-70E740481C1C}">
-                <a14:useLocalDpi xmlns:a14="http://schemas.microsoft.com/office/drawing/2010/main" val="0"/>
-              </a:ext>
-            </a:extLst>
-          </a:blip>
-          <a:srcRect/>
-          <a:stretch>
-            <a:fillRect/>
-          </a:stretch>
-        </p:blipFill>
-        <p:spPr bwMode="auto">
-          <a:xfrm>
-            <a:off x="127000" y="0"/>
-            <a:ext cx="9525" cy="9525"/>
-          </a:xfrm>
-          <a:prstGeom prst="rect">
-            <a:avLst/>
-          </a:prstGeom>
-          <a:noFill/>
-          <a:extLst>
-            <a:ext uri="{909E8E84-426E-40DD-AFC4-6F175D3DCCD1}">
-              <a14:hiddenFill xmlns:a14="http://schemas.microsoft.com/office/drawing/2010/main">
-                <a:solidFill>
-                  <a:srgbClr val="FFFFFF"/>
-                </a:solidFill>
-              </a14:hiddenFill>
-            </a:ext>
-          </a:extLst>
-        </p:spPr>
-      </p:pic>
-      <p:pic>
-        <p:nvPicPr>
-          <p:cNvPr id="1030" name="Picture 6">
-            <a:extLst>
-              <a:ext uri="{FF2B5EF4-FFF2-40B4-BE49-F238E27FC236}">
-                <a16:creationId xmlns:a16="http://schemas.microsoft.com/office/drawing/2014/main" id="{F9A8DADE-F15B-47E3-B94E-AA7A54484599}"/>
-              </a:ext>
-            </a:extLst>
-          </p:cNvPr>
-          <p:cNvPicPr>
-            <a:picLocks noChangeAspect="1" noChangeArrowheads="1"/>
-          </p:cNvPicPr>
-          <p:nvPr/>
-        </p:nvPicPr>
-        <p:blipFill>
-          <a:blip r:embed="rId4">
-            <a:extLst>
-              <a:ext uri="{28A0092B-C50C-407E-A947-70E740481C1C}">
-                <a14:useLocalDpi xmlns:a14="http://schemas.microsoft.com/office/drawing/2010/main" val="0"/>
-              </a:ext>
-            </a:extLst>
-          </a:blip>
-          <a:srcRect/>
-          <a:stretch>
-            <a:fillRect/>
-          </a:stretch>
-        </p:blipFill>
-        <p:spPr bwMode="auto">
-          <a:xfrm>
-            <a:off x="127000" y="-411163"/>
-            <a:ext cx="9525" cy="9525"/>
-          </a:xfrm>
-          <a:prstGeom prst="rect">
-            <a:avLst/>
-          </a:prstGeom>
-          <a:noFill/>
-          <a:extLst>
-            <a:ext uri="{909E8E84-426E-40DD-AFC4-6F175D3DCCD1}">
-              <a14:hiddenFill xmlns:a14="http://schemas.microsoft.com/office/drawing/2010/main">
-                <a:solidFill>
-                  <a:srgbClr val="FFFFFF"/>
-                </a:solidFill>
-              </a14:hiddenFill>
-            </a:ext>
-          </a:extLst>
-        </p:spPr>
-      </p:pic>
-      <p:pic>
-        <p:nvPicPr>
-          <p:cNvPr id="1032" name="Picture 8">
-            <a:extLst>
-              <a:ext uri="{FF2B5EF4-FFF2-40B4-BE49-F238E27FC236}">
-                <a16:creationId xmlns:a16="http://schemas.microsoft.com/office/drawing/2014/main" id="{03BDB648-67F2-4876-B790-380EA82181D3}"/>
-              </a:ext>
-            </a:extLst>
-          </p:cNvPr>
-          <p:cNvPicPr>
-            <a:picLocks noChangeAspect="1" noChangeArrowheads="1"/>
-          </p:cNvPicPr>
-          <p:nvPr/>
-        </p:nvPicPr>
-        <p:blipFill>
-          <a:blip r:embed="rId4">
-            <a:extLst>
-              <a:ext uri="{28A0092B-C50C-407E-A947-70E740481C1C}">
-                <a14:useLocalDpi xmlns:a14="http://schemas.microsoft.com/office/drawing/2010/main" val="0"/>
-              </a:ext>
-            </a:extLst>
-          </a:blip>
-          <a:srcRect/>
-          <a:stretch>
-            <a:fillRect/>
-          </a:stretch>
-        </p:blipFill>
-        <p:spPr bwMode="auto">
-          <a:xfrm>
-            <a:off x="279400" y="-258763"/>
-            <a:ext cx="9525" cy="9525"/>
-          </a:xfrm>
-          <a:prstGeom prst="rect">
-            <a:avLst/>
-          </a:prstGeom>
-          <a:noFill/>
-          <a:extLst>
-            <a:ext uri="{909E8E84-426E-40DD-AFC4-6F175D3DCCD1}">
-              <a14:hiddenFill xmlns:a14="http://schemas.microsoft.com/office/drawing/2010/main">
-                <a:solidFill>
-                  <a:srgbClr val="FFFFFF"/>
-                </a:solidFill>
-              </a14:hiddenFill>
-            </a:ext>
-          </a:extLst>
-        </p:spPr>
-      </p:pic>
     </p:spTree>
     <p:extLst>
       <p:ext uri="{BB962C8B-B14F-4D97-AF65-F5344CB8AC3E}">
@@ -7971,8 +10466,8 @@
           </a:p>
         </p:txBody>
       </p:sp>
-      <mc:AlternateContent xmlns:mc="http://schemas.openxmlformats.org/markup-compatibility/2006" xmlns:a14="http://schemas.microsoft.com/office/drawing/2010/main">
-        <mc:Choice Requires="a14">
+      <mc:AlternateContent xmlns:mc="http://schemas.openxmlformats.org/markup-compatibility/2006">
+        <mc:Choice xmlns:a14="http://schemas.microsoft.com/office/drawing/2010/main" Requires="a14">
           <p:sp>
             <p:nvSpPr>
               <p:cNvPr id="3" name="Content Placeholder 2">
@@ -8009,7 +10504,7 @@
               <a:p>
                 <a:r>
                   <a:rPr lang="de-DE" dirty="0"/>
-                  <a:t>Beispiele:</a:t>
+                  <a:t>Beispiele für Formeln A und B:</a:t>
                 </a:r>
               </a:p>
               <a:p>
@@ -8026,7 +10521,7 @@
                         <a:rPr lang="en-US" b="0" i="1" smtClean="0">
                           <a:latin typeface="Cambria Math" panose="02040503050406030204" pitchFamily="18" charset="0"/>
                         </a:rPr>
-                        <m:t>𝑟</m:t>
+                        <m:t>𝐴</m:t>
                       </m:r>
                       <m:r>
                         <a:rPr lang="en-US" b="0" i="1" smtClean="0">
@@ -8038,7 +10533,7 @@
                         <a:rPr lang="en-US" b="0" i="1" smtClean="0">
                           <a:latin typeface="Cambria Math" panose="02040503050406030204" pitchFamily="18" charset="0"/>
                         </a:rPr>
-                        <m:t>𝑠</m:t>
+                        <m:t>𝐵</m:t>
                       </m:r>
                       <m:r>
                         <a:rPr lang="en-US" b="0" i="1" smtClean="0">
@@ -8078,7 +10573,7 @@
                           <a:latin typeface="Cambria Math" panose="02040503050406030204" pitchFamily="18" charset="0"/>
                           <a:ea typeface="Cambria Math" panose="02040503050406030204" pitchFamily="18" charset="0"/>
                         </a:rPr>
-                        <m:t>𝑠</m:t>
+                        <m:t>𝐵</m:t>
                       </m:r>
                       <m:r>
                         <a:rPr lang="en-US" b="0" i="1" smtClean="0">
@@ -8092,7 +10587,7 @@
                           <a:latin typeface="Cambria Math" panose="02040503050406030204" pitchFamily="18" charset="0"/>
                           <a:ea typeface="Cambria Math" panose="02040503050406030204" pitchFamily="18" charset="0"/>
                         </a:rPr>
-                        <m:t>𝑟</m:t>
+                        <m:t>𝐴</m:t>
                       </m:r>
                     </m:oMath>
                   </m:oMathPara>
@@ -8134,7 +10629,7 @@
                           <a:latin typeface="Cambria Math" panose="02040503050406030204" pitchFamily="18" charset="0"/>
                           <a:ea typeface="Cambria Math" panose="02040503050406030204" pitchFamily="18" charset="0"/>
                         </a:rPr>
-                        <m:t>r</m:t>
+                        <m:t>A</m:t>
                       </m:r>
                       <m:r>
                         <a:rPr lang="en-US" b="0" i="1" smtClean="0">
@@ -8148,7 +10643,7 @@
                           <a:latin typeface="Cambria Math" panose="02040503050406030204" pitchFamily="18" charset="0"/>
                           <a:ea typeface="Cambria Math" panose="02040503050406030204" pitchFamily="18" charset="0"/>
                         </a:rPr>
-                        <m:t>𝑠</m:t>
+                        <m:t>𝐵</m:t>
                       </m:r>
                       <m:r>
                         <a:rPr lang="en-US" b="0" i="1" smtClean="0">
@@ -8189,7 +10684,7 @@
                           <a:latin typeface="Cambria Math" panose="02040503050406030204" pitchFamily="18" charset="0"/>
                           <a:ea typeface="Cambria Math" panose="02040503050406030204" pitchFamily="18" charset="0"/>
                         </a:rPr>
-                        <m:t>𝑟</m:t>
+                        <m:t>𝐴</m:t>
                       </m:r>
                       <m:r>
                         <a:rPr lang="en-US" b="0" i="1" smtClean="0">
@@ -8203,17 +10698,143 @@
                           <a:latin typeface="Cambria Math" panose="02040503050406030204" pitchFamily="18" charset="0"/>
                           <a:ea typeface="Cambria Math" panose="02040503050406030204" pitchFamily="18" charset="0"/>
                         </a:rPr>
-                        <m:t>𝑠</m:t>
+                        <m:t>𝐵</m:t>
+                      </m:r>
+                    </m:oMath>
+                    <m:oMath xmlns:m="http://schemas.openxmlformats.org/officeDocument/2006/math">
+                      <m:r>
+                        <a:rPr lang="en-US" b="0" i="1" smtClean="0">
+                          <a:latin typeface="Cambria Math" panose="02040503050406030204" pitchFamily="18" charset="0"/>
+                          <a:ea typeface="Cambria Math" panose="02040503050406030204" pitchFamily="18" charset="0"/>
+                        </a:rPr>
+                        <m:t>𝐴</m:t>
+                      </m:r>
+                      <m:r>
+                        <a:rPr lang="en-US" b="0" i="1" smtClean="0">
+                          <a:latin typeface="Cambria Math" panose="02040503050406030204" pitchFamily="18" charset="0"/>
+                          <a:ea typeface="Cambria Math" panose="02040503050406030204" pitchFamily="18" charset="0"/>
+                        </a:rPr>
+                        <m:t>∨</m:t>
+                      </m:r>
+                      <m:d>
+                        <m:dPr>
+                          <m:ctrlPr>
+                            <a:rPr lang="en-US" b="0" i="1" smtClean="0">
+                              <a:latin typeface="Cambria Math" panose="02040503050406030204" pitchFamily="18" charset="0"/>
+                              <a:ea typeface="Cambria Math" panose="02040503050406030204" pitchFamily="18" charset="0"/>
+                            </a:rPr>
+                          </m:ctrlPr>
+                        </m:dPr>
+                        <m:e>
+                          <m:r>
+                            <a:rPr lang="en-US" b="0" i="1" smtClean="0">
+                              <a:latin typeface="Cambria Math" panose="02040503050406030204" pitchFamily="18" charset="0"/>
+                              <a:ea typeface="Cambria Math" panose="02040503050406030204" pitchFamily="18" charset="0"/>
+                            </a:rPr>
+                            <m:t>𝐵</m:t>
+                          </m:r>
+                          <m:r>
+                            <a:rPr lang="en-US" b="0" i="1" smtClean="0">
+                              <a:latin typeface="Cambria Math" panose="02040503050406030204" pitchFamily="18" charset="0"/>
+                              <a:ea typeface="Cambria Math" panose="02040503050406030204" pitchFamily="18" charset="0"/>
+                            </a:rPr>
+                            <m:t>∧</m:t>
+                          </m:r>
+                          <m:r>
+                            <a:rPr lang="en-US" b="0" i="1" smtClean="0">
+                              <a:latin typeface="Cambria Math" panose="02040503050406030204" pitchFamily="18" charset="0"/>
+                              <a:ea typeface="Cambria Math" panose="02040503050406030204" pitchFamily="18" charset="0"/>
+                            </a:rPr>
+                            <m:t>𝐶</m:t>
+                          </m:r>
+                        </m:e>
+                      </m:d>
+                      <m:r>
+                        <a:rPr lang="en-US" b="0" i="1" smtClean="0">
+                          <a:latin typeface="Cambria Math" panose="02040503050406030204" pitchFamily="18" charset="0"/>
+                          <a:ea typeface="Cambria Math" panose="02040503050406030204" pitchFamily="18" charset="0"/>
+                        </a:rPr>
+                        <m:t>≡</m:t>
+                      </m:r>
+                      <m:d>
+                        <m:dPr>
+                          <m:ctrlPr>
+                            <a:rPr lang="en-US" b="0" i="1" smtClean="0">
+                              <a:latin typeface="Cambria Math" panose="02040503050406030204" pitchFamily="18" charset="0"/>
+                              <a:ea typeface="Cambria Math" panose="02040503050406030204" pitchFamily="18" charset="0"/>
+                            </a:rPr>
+                          </m:ctrlPr>
+                        </m:dPr>
+                        <m:e>
+                          <m:r>
+                            <a:rPr lang="en-US" b="0" i="1" smtClean="0">
+                              <a:latin typeface="Cambria Math" panose="02040503050406030204" pitchFamily="18" charset="0"/>
+                              <a:ea typeface="Cambria Math" panose="02040503050406030204" pitchFamily="18" charset="0"/>
+                            </a:rPr>
+                            <m:t>𝐴</m:t>
+                          </m:r>
+                          <m:r>
+                            <a:rPr lang="en-US" b="0" i="1" smtClean="0">
+                              <a:latin typeface="Cambria Math" panose="02040503050406030204" pitchFamily="18" charset="0"/>
+                              <a:ea typeface="Cambria Math" panose="02040503050406030204" pitchFamily="18" charset="0"/>
+                            </a:rPr>
+                            <m:t>∨</m:t>
+                          </m:r>
+                          <m:r>
+                            <a:rPr lang="en-US" b="0" i="1" smtClean="0">
+                              <a:latin typeface="Cambria Math" panose="02040503050406030204" pitchFamily="18" charset="0"/>
+                              <a:ea typeface="Cambria Math" panose="02040503050406030204" pitchFamily="18" charset="0"/>
+                            </a:rPr>
+                            <m:t>𝐵</m:t>
+                          </m:r>
+                        </m:e>
+                      </m:d>
+                      <m:r>
+                        <a:rPr lang="en-US" b="0" i="1" smtClean="0">
+                          <a:latin typeface="Cambria Math" panose="02040503050406030204" pitchFamily="18" charset="0"/>
+                          <a:ea typeface="Cambria Math" panose="02040503050406030204" pitchFamily="18" charset="0"/>
+                        </a:rPr>
+                        <m:t>∧(</m:t>
+                      </m:r>
+                      <m:r>
+                        <a:rPr lang="en-US" b="0" i="1" smtClean="0">
+                          <a:latin typeface="Cambria Math" panose="02040503050406030204" pitchFamily="18" charset="0"/>
+                          <a:ea typeface="Cambria Math" panose="02040503050406030204" pitchFamily="18" charset="0"/>
+                        </a:rPr>
+                        <m:t>𝐴</m:t>
+                      </m:r>
+                      <m:r>
+                        <a:rPr lang="en-US" b="0" i="1" smtClean="0">
+                          <a:latin typeface="Cambria Math" panose="02040503050406030204" pitchFamily="18" charset="0"/>
+                          <a:ea typeface="Cambria Math" panose="02040503050406030204" pitchFamily="18" charset="0"/>
+                        </a:rPr>
+                        <m:t>∨</m:t>
+                      </m:r>
+                      <m:r>
+                        <a:rPr lang="en-US" b="0" i="1" smtClean="0">
+                          <a:latin typeface="Cambria Math" panose="02040503050406030204" pitchFamily="18" charset="0"/>
+                          <a:ea typeface="Cambria Math" panose="02040503050406030204" pitchFamily="18" charset="0"/>
+                        </a:rPr>
+                        <m:t>𝐶</m:t>
+                      </m:r>
+                      <m:r>
+                        <a:rPr lang="en-US" b="0" i="1" smtClean="0">
+                          <a:latin typeface="Cambria Math" panose="02040503050406030204" pitchFamily="18" charset="0"/>
+                          <a:ea typeface="Cambria Math" panose="02040503050406030204" pitchFamily="18" charset="0"/>
+                        </a:rPr>
+                        <m:t>)</m:t>
                       </m:r>
                     </m:oMath>
                   </m:oMathPara>
                 </a14:m>
-                <a:endParaRPr lang="de-DE" dirty="0"/>
+                <a:endParaRPr lang="en-US" b="0" dirty="0">
+                  <a:ea typeface="Cambria Math" panose="02040503050406030204" pitchFamily="18" charset="0"/>
+                </a:endParaRPr>
               </a:p>
             </p:txBody>
           </p:sp>
         </mc:Choice>
-        <mc:Fallback xmlns="">
+        <mc:Fallback>
           <p:sp>
             <p:nvSpPr>
               <p:cNvPr id="3" name="Content Placeholder 2">
@@ -8234,7 +10855,7 @@
               <a:blipFill>
                 <a:blip r:embed="rId2"/>
                 <a:stretch>
-                  <a:fillRect l="-1043" t="-2241"/>
+                  <a:fillRect l="-1043" t="-2381"/>
                 </a:stretch>
               </a:blipFill>
             </p:spPr>
@@ -8284,7 +10905,7 @@
           </a:stretch>
         </p:blipFill>
         <p:spPr>
-          <a:xfrm rot="1800000">
+          <a:xfrm rot="12600000">
             <a:off x="11277600" y="5943600"/>
             <a:ext cx="914400" cy="914400"/>
           </a:xfrm>
@@ -8440,8 +11061,8 @@
           </a:p>
         </p:txBody>
       </p:sp>
-      <mc:AlternateContent xmlns:mc="http://schemas.openxmlformats.org/markup-compatibility/2006">
-        <mc:Choice xmlns:a14="http://schemas.microsoft.com/office/drawing/2010/main" Requires="a14">
+      <mc:AlternateContent xmlns:mc="http://schemas.openxmlformats.org/markup-compatibility/2006" xmlns:a14="http://schemas.microsoft.com/office/drawing/2010/main">
+        <mc:Choice Requires="a14">
           <p:sp>
             <p:nvSpPr>
               <p:cNvPr id="3" name="Content Placeholder 2">
@@ -9190,7 +11811,7 @@
             </p:txBody>
           </p:sp>
         </mc:Choice>
-        <mc:Fallback>
+        <mc:Fallback xmlns="">
           <p:sp>
             <p:nvSpPr>
               <p:cNvPr id="3" name="Content Placeholder 2">
@@ -9392,7 +12013,7 @@
           <a:bodyPr/>
           <a:lstStyle/>
           <a:p>
-            <a:endParaRPr lang="de-DE"/>
+            <a:endParaRPr lang="de-DE" dirty="0"/>
           </a:p>
         </p:txBody>
       </p:sp>
